--- a/SPBE_Transformasi_Birokrasi.pptx
+++ b/SPBE_Transformasi_Birokrasi.pptx
@@ -3357,7 +3357,7 @@
                 <a:solidFill>
                   <a:srgbClr val="C8962E"/>
                 </a:solidFill>
-                <a:latin typeface="Arial"/>
+                <a:latin typeface="Calibri"/>
               </a:defRPr>
             </a:pPr>
             <a:r>
@@ -3397,11 +3397,11 @@
                 <a:solidFill>
                   <a:srgbClr val="FFFFFF"/>
                 </a:solidFill>
-                <a:latin typeface="Arial"/>
-              </a:defRPr>
-            </a:pPr>
-            <a:r>
-              <a:t>TRANSFORMASI BIROKRASI DIGITAL</a:t>
+                <a:latin typeface="Calibri"/>
+              </a:defRPr>
+            </a:pPr>
+            <a:r>
+              <a:t>INDONESIA</a:t>
             </a:r>
           </a:p>
         </p:txBody>
@@ -3437,11 +3437,11 @@
                 <a:solidFill>
                   <a:srgbClr val="FFFFFF"/>
                 </a:solidFill>
-                <a:latin typeface="Arial"/>
-              </a:defRPr>
-            </a:pPr>
-            <a:r>
-              <a:t>Penerapan SPBE</a:t>
+                <a:latin typeface="Calibri"/>
+              </a:defRPr>
+            </a:pPr>
+            <a:r>
+              <a:t>PENERAPAN SPBE</a:t>
             </a:r>
           </a:p>
         </p:txBody>
@@ -3477,11 +3477,11 @@
                 <a:solidFill>
                   <a:srgbClr val="C8962E"/>
                 </a:solidFill>
-                <a:latin typeface="Arial"/>
-              </a:defRPr>
-            </a:pPr>
-            <a:r>
-              <a:t>Perpres No. 95/2018 — Perpres No. 132/2022</a:t>
+                <a:latin typeface="Calibri"/>
+              </a:defRPr>
+            </a:pPr>
+            <a:r>
+              <a:t>Perpres No. 95/2018 &amp; Perpres No. 132/2022</a:t>
             </a:r>
           </a:p>
         </p:txBody>
@@ -3517,19 +3517,19 @@
                 <a:solidFill>
                   <a:srgbClr val="FFFFFF"/>
                 </a:solidFill>
-                <a:latin typeface="Arial"/>
-              </a:defRPr>
-            </a:pPr>
-            <a:r>
-              <a:t>Mewujudkan Birokrasi</a:t>
+                <a:latin typeface="Calibri"/>
+              </a:defRPr>
+            </a:pPr>
+            <a:r>
+              <a:t>Transformasi</a:t>
             </a:r>
             <a:br/>
             <a:r>
-              <a:t>Terintegrasi, Efisien,</a:t>
+              <a:t>Birokrasi Digital</a:t>
             </a:r>
             <a:br/>
             <a:r>
-              <a:t>Aman, dan Tepercaya</a:t>
+              <a:t>Terintegrasi</a:t>
             </a:r>
           </a:p>
         </p:txBody>
@@ -3612,11 +3612,11 @@
                 <a:solidFill>
                   <a:srgbClr val="E8EDF5"/>
                 </a:solidFill>
-                <a:latin typeface="Arial"/>
-              </a:defRPr>
-            </a:pPr>
-            <a:r>
-              <a:t>Kementerian/Lembaga/Pemda · 2025</a:t>
+                <a:latin typeface="Calibri"/>
+              </a:defRPr>
+            </a:pPr>
+            <a:r>
+              <a:t>SPBE · 2024</a:t>
             </a:r>
           </a:p>
         </p:txBody>
@@ -3652,11 +3652,11 @@
                 <a:solidFill>
                   <a:srgbClr val="64748B"/>
                 </a:solidFill>
-                <a:latin typeface="Arial"/>
-              </a:defRPr>
-            </a:pPr>
-            <a:r>
-              <a:t>Arsitektur &amp; Peta Rencana SPBE</a:t>
+                <a:latin typeface="Calibri"/>
+              </a:defRPr>
+            </a:pPr>
+            <a:r>
+              <a:t>Mewujudkan Birokrasi Efisien, Aman &amp; Tepercaya</a:t>
             </a:r>
           </a:p>
         </p:txBody>
@@ -3976,15 +3976,15 @@
                 <a:solidFill>
                   <a:srgbClr val="FFFFFF"/>
                 </a:solidFill>
-                <a:latin typeface="Arial"/>
-              </a:defRPr>
-            </a:pPr>
-            <a:r>
-              <a:t>6 LANGKAH</a:t>
+                <a:latin typeface="Calibri"/>
+              </a:defRPr>
+            </a:pPr>
+            <a:r>
+              <a:t>BAB 4</a:t>
             </a:r>
             <a:br/>
             <a:r>
-              <a:t>PENERAPAN SPBE</a:t>
+              <a:t>6 LANGKAH PENERAPAN SPBE</a:t>
             </a:r>
           </a:p>
         </p:txBody>
@@ -4020,11 +4020,11 @@
                 <a:solidFill>
                   <a:srgbClr val="C8962E"/>
                 </a:solidFill>
-                <a:latin typeface="Arial"/>
-              </a:defRPr>
-            </a:pPr>
-            <a:r>
-              <a:t>Fondasi → Perencanaan → Teknis → Konsolidasi → Keamanan → Evaluasi</a:t>
+                <a:latin typeface="Calibri"/>
+              </a:defRPr>
+            </a:pPr>
+            <a:r>
+              <a:t>Urutan Wajib — Hindari Pemborosan Anggaran TIK</a:t>
             </a:r>
           </a:p>
         </p:txBody>
@@ -4060,11 +4060,11 @@
                 <a:solidFill>
                   <a:srgbClr val="64748B"/>
                 </a:solidFill>
-                <a:latin typeface="Arial"/>
-              </a:defRPr>
-            </a:pPr>
-            <a:r>
-              <a:t>Urutan Wajib — Jangan Terjebak Pemborosan Anggaran</a:t>
+                <a:latin typeface="Calibri"/>
+              </a:defRPr>
+            </a:pPr>
+            <a:r>
+              <a:t>Langkah Demi Langkah Implementasi</a:t>
             </a:r>
           </a:p>
         </p:txBody>
@@ -4298,11 +4298,11 @@
                 <a:solidFill>
                   <a:srgbClr val="FFFFFF"/>
                 </a:solidFill>
-                <a:latin typeface="Arial Black"/>
-              </a:defRPr>
-            </a:pPr>
-            <a:r>
-              <a:t>Keenam Langkah Bersifat Sistematis — Setiap Tahap Wajib Dirunut Berurutan</a:t>
+                <a:latin typeface="Georgia"/>
+              </a:defRPr>
+            </a:pPr>
+            <a:r>
+              <a:t>Enam Langkah Berurutan Menjamin Implementasi SPBE yang Sukses</a:t>
             </a:r>
           </a:p>
         </p:txBody>
@@ -4338,11 +4338,11 @@
                 <a:solidFill>
                   <a:srgbClr val="64748B"/>
                 </a:solidFill>
-                <a:latin typeface="Arial"/>
-              </a:defRPr>
-            </a:pPr>
-            <a:r>
-              <a:t>Alur Penerapan SPBE</a:t>
+                <a:latin typeface="Calibri"/>
+              </a:defRPr>
+            </a:pPr>
+            <a:r>
+              <a:t>Tahapan Penerapan</a:t>
             </a:r>
           </a:p>
         </p:txBody>
@@ -4511,7 +4511,7 @@
                 <a:solidFill>
                   <a:srgbClr val="FFFFFF"/>
                 </a:solidFill>
-                <a:latin typeface="Arial"/>
+                <a:latin typeface="Calibri"/>
               </a:defRPr>
             </a:pPr>
             <a:r>
@@ -4551,7 +4551,7 @@
                 <a:solidFill>
                   <a:srgbClr val="2563EB"/>
                 </a:solidFill>
-                <a:latin typeface="Arial"/>
+                <a:latin typeface="Calibri"/>
               </a:defRPr>
             </a:pPr>
             <a:r>
@@ -4591,15 +4591,11 @@
                 <a:solidFill>
                   <a:srgbClr val="8899B0"/>
                 </a:solidFill>
-                <a:latin typeface="Arial"/>
-              </a:defRPr>
-            </a:pPr>
-            <a:r>
-              <a:t>SK Tim Koordinasi</a:t>
-            </a:r>
-            <a:br/>
-            <a:r>
-              <a:t>SPBE Instansi</a:t>
+                <a:latin typeface="Calibri"/>
+              </a:defRPr>
+            </a:pPr>
+            <a:r>
+              <a:t>SK Kepala Daerah</a:t>
             </a:r>
             <a:br/>
             <a:r>
@@ -4639,7 +4635,7 @@
                 <a:solidFill>
                   <a:srgbClr val="C8962E"/>
                 </a:solidFill>
-                <a:latin typeface="Arial"/>
+                <a:latin typeface="Calibri"/>
               </a:defRPr>
             </a:pPr>
             <a:r>
@@ -4812,7 +4808,7 @@
                 <a:solidFill>
                   <a:srgbClr val="FFFFFF"/>
                 </a:solidFill>
-                <a:latin typeface="Arial"/>
+                <a:latin typeface="Calibri"/>
               </a:defRPr>
             </a:pPr>
             <a:r>
@@ -4852,11 +4848,11 @@
                 <a:solidFill>
                   <a:srgbClr val="0B7C72"/>
                 </a:solidFill>
-                <a:latin typeface="Arial"/>
-              </a:defRPr>
-            </a:pPr>
-            <a:r>
-              <a:t>Arsitektur &amp; Peta</a:t>
+                <a:latin typeface="Calibri"/>
+              </a:defRPr>
+            </a:pPr>
+            <a:r>
+              <a:t>Arsitektur &amp; Roadmap</a:t>
             </a:r>
           </a:p>
         </p:txBody>
@@ -4892,19 +4888,15 @@
                 <a:solidFill>
                   <a:srgbClr val="8899B0"/>
                 </a:solidFill>
-                <a:latin typeface="Arial"/>
-              </a:defRPr>
-            </a:pPr>
-            <a:r>
-              <a:t>Pemetaan Proses</a:t>
+                <a:latin typeface="Calibri"/>
+              </a:defRPr>
+            </a:pPr>
+            <a:r>
+              <a:t>Proses Bisnis</a:t>
             </a:r>
             <a:br/>
             <a:r>
-              <a:t>Bisnis — Roadmap</a:t>
-            </a:r>
-            <a:br/>
-            <a:r>
-              <a:t>5 Tahun</a:t>
+              <a:t>Peta Rencana 5 Thn</a:t>
             </a:r>
           </a:p>
         </p:txBody>
@@ -4940,7 +4932,7 @@
                 <a:solidFill>
                   <a:srgbClr val="C8962E"/>
                 </a:solidFill>
-                <a:latin typeface="Arial"/>
+                <a:latin typeface="Calibri"/>
               </a:defRPr>
             </a:pPr>
             <a:r>
@@ -5113,7 +5105,7 @@
                 <a:solidFill>
                   <a:srgbClr val="FFFFFF"/>
                 </a:solidFill>
-                <a:latin typeface="Arial"/>
+                <a:latin typeface="Calibri"/>
               </a:defRPr>
             </a:pPr>
             <a:r>
@@ -5153,7 +5145,7 @@
                 <a:solidFill>
                   <a:srgbClr val="A0522D"/>
                 </a:solidFill>
-                <a:latin typeface="Arial"/>
+                <a:latin typeface="Calibri"/>
               </a:defRPr>
             </a:pPr>
             <a:r>
@@ -5193,15 +5185,11 @@
                 <a:solidFill>
                   <a:srgbClr val="8899B0"/>
                 </a:solidFill>
-                <a:latin typeface="Arial"/>
-              </a:defRPr>
-            </a:pPr>
-            <a:r>
-              <a:t>Migrasi ke PDN</a:t>
-            </a:r>
-            <a:br/>
-            <a:r>
-              <a:t>Hub SPLP</a:t>
+                <a:latin typeface="Calibri"/>
+              </a:defRPr>
+            </a:pPr>
+            <a:r>
+              <a:t>PDN / Cloud</a:t>
             </a:r>
             <a:br/>
             <a:r>
@@ -5241,7 +5229,7 @@
                 <a:solidFill>
                   <a:srgbClr val="C8962E"/>
                 </a:solidFill>
-                <a:latin typeface="Arial"/>
+                <a:latin typeface="Calibri"/>
               </a:defRPr>
             </a:pPr>
             <a:r>
@@ -5414,7 +5402,7 @@
                 <a:solidFill>
                   <a:srgbClr val="FFFFFF"/>
                 </a:solidFill>
-                <a:latin typeface="Arial"/>
+                <a:latin typeface="Calibri"/>
               </a:defRPr>
             </a:pPr>
             <a:r>
@@ -5454,7 +5442,7 @@
                 <a:solidFill>
                   <a:srgbClr val="1B3A6B"/>
                 </a:solidFill>
-                <a:latin typeface="Arial"/>
+                <a:latin typeface="Calibri"/>
               </a:defRPr>
             </a:pPr>
             <a:r>
@@ -5494,7 +5482,7 @@
                 <a:solidFill>
                   <a:srgbClr val="8899B0"/>
                 </a:solidFill>
-                <a:latin typeface="Arial"/>
+                <a:latin typeface="Calibri"/>
               </a:defRPr>
             </a:pPr>
             <a:r>
@@ -5502,11 +5490,7 @@
             </a:r>
             <a:br/>
             <a:r>
-              <a:t>Moratorium Duplikasi</a:t>
-            </a:r>
-            <a:br/>
-            <a:r>
-              <a:t>Super Apps</a:t>
+              <a:t>Super Apps Terpadu</a:t>
             </a:r>
           </a:p>
         </p:txBody>
@@ -5542,7 +5526,7 @@
                 <a:solidFill>
                   <a:srgbClr val="C8962E"/>
                 </a:solidFill>
-                <a:latin typeface="Arial"/>
+                <a:latin typeface="Calibri"/>
               </a:defRPr>
             </a:pPr>
             <a:r>
@@ -5715,7 +5699,7 @@
                 <a:solidFill>
                   <a:srgbClr val="FFFFFF"/>
                 </a:solidFill>
-                <a:latin typeface="Arial"/>
+                <a:latin typeface="Calibri"/>
               </a:defRPr>
             </a:pPr>
             <a:r>
@@ -5755,7 +5739,7 @@
                 <a:solidFill>
                   <a:srgbClr val="2563EB"/>
                 </a:solidFill>
-                <a:latin typeface="Arial"/>
+                <a:latin typeface="Calibri"/>
               </a:defRPr>
             </a:pPr>
             <a:r>
@@ -5795,19 +5779,15 @@
                 <a:solidFill>
                   <a:srgbClr val="8899B0"/>
                 </a:solidFill>
-                <a:latin typeface="Arial"/>
-              </a:defRPr>
-            </a:pPr>
-            <a:r>
-              <a:t>SMKI ISO 27001</a:t>
+                <a:latin typeface="Calibri"/>
+              </a:defRPr>
+            </a:pPr>
+            <a:r>
+              <a:t>ISO 27001</a:t>
             </a:r>
             <a:br/>
             <a:r>
-              <a:t>BSSN Assessment</a:t>
-            </a:r>
-            <a:br/>
-            <a:r>
-              <a:t>CSIRT Internal</a:t>
+              <a:t>BSSN &amp; CSIRT</a:t>
             </a:r>
           </a:p>
         </p:txBody>
@@ -5843,7 +5823,7 @@
                 <a:solidFill>
                   <a:srgbClr val="C8962E"/>
                 </a:solidFill>
-                <a:latin typeface="Arial"/>
+                <a:latin typeface="Calibri"/>
               </a:defRPr>
             </a:pPr>
             <a:r>
@@ -6016,7 +5996,7 @@
                 <a:solidFill>
                   <a:srgbClr val="FFFFFF"/>
                 </a:solidFill>
-                <a:latin typeface="Arial"/>
+                <a:latin typeface="Calibri"/>
               </a:defRPr>
             </a:pPr>
             <a:r>
@@ -6056,7 +6036,7 @@
                 <a:solidFill>
                   <a:srgbClr val="0B7C72"/>
                 </a:solidFill>
-                <a:latin typeface="Arial"/>
+                <a:latin typeface="Calibri"/>
               </a:defRPr>
             </a:pPr>
             <a:r>
@@ -6096,19 +6076,15 @@
                 <a:solidFill>
                   <a:srgbClr val="8899B0"/>
                 </a:solidFill>
-                <a:latin typeface="Arial"/>
-              </a:defRPr>
-            </a:pPr>
-            <a:r>
-              <a:t>Self-Assessment</a:t>
+                <a:latin typeface="Calibri"/>
+              </a:defRPr>
+            </a:pPr>
+            <a:r>
+              <a:t>Self Assessment</a:t>
             </a:r>
             <a:br/>
             <a:r>
               <a:t>Audit TIK</a:t>
-            </a:r>
-            <a:br/>
-            <a:r>
-              <a:t>Continuous Improvement</a:t>
             </a:r>
           </a:p>
         </p:txBody>
@@ -6187,11 +6163,11 @@
                 <a:solidFill>
                   <a:srgbClr val="64748B"/>
                 </a:solidFill>
-                <a:latin typeface="Arial"/>
-              </a:defRPr>
-            </a:pPr>
-            <a:r>
-              <a:t>Sumber: Perpres No. 95/2018, Perpres No. 132/2022, &amp; Pedoman SPBE Kemenpan-RB</a:t>
+                <a:latin typeface="Calibri"/>
+              </a:defRPr>
+            </a:pPr>
+            <a:r>
+              <a:t>Penerapan Sistem Pemerintahan Berbasis Elektronik (SPBE)</a:t>
             </a:r>
           </a:p>
         </p:txBody>
@@ -6227,7 +6203,7 @@
                 <a:solidFill>
                   <a:srgbClr val="64748B"/>
                 </a:solidFill>
-                <a:latin typeface="Arial"/>
+                <a:latin typeface="Calibri"/>
               </a:defRPr>
             </a:pPr>
             <a:r>
@@ -6422,11 +6398,11 @@
                 <a:solidFill>
                   <a:srgbClr val="FFFFFF"/>
                 </a:solidFill>
-                <a:latin typeface="Arial Black"/>
-              </a:defRPr>
-            </a:pPr>
-            <a:r>
-              <a:t>Fondasi, Perencanaan, dan Infrastruktur — Tiga Langkah Awal yang Menentukan Keberhasilan</a:t>
+                <a:latin typeface="Georgia"/>
+              </a:defRPr>
+            </a:pPr>
+            <a:r>
+              <a:t>Tiga Langkah Awal Menentukan Fondasi SPBE yang Kokoh</a:t>
             </a:r>
           </a:p>
         </p:txBody>
@@ -6462,11 +6438,11 @@
                 <a:solidFill>
                   <a:srgbClr val="64748B"/>
                 </a:solidFill>
-                <a:latin typeface="Arial"/>
-              </a:defRPr>
-            </a:pPr>
-            <a:r>
-              <a:t>Langkah 1–3: Fondasi &amp; Perencanaan</a:t>
+                <a:latin typeface="Calibri"/>
+              </a:defRPr>
+            </a:pPr>
+            <a:r>
+              <a:t>Langkah 1–3</a:t>
             </a:r>
           </a:p>
         </p:txBody>
@@ -6635,7 +6611,7 @@
                 <a:solidFill>
                   <a:srgbClr val="FFFFFF"/>
                 </a:solidFill>
-                <a:latin typeface="Arial"/>
+                <a:latin typeface="Calibri"/>
               </a:defRPr>
             </a:pPr>
             <a:r>
@@ -6675,7 +6651,7 @@
                 <a:solidFill>
                   <a:srgbClr val="2563EB"/>
                 </a:solidFill>
-                <a:latin typeface="Arial"/>
+                <a:latin typeface="Calibri"/>
               </a:defRPr>
             </a:pPr>
             <a:r>
@@ -6715,7 +6691,7 @@
                 <a:solidFill>
                   <a:srgbClr val="1A1A2E"/>
                 </a:solidFill>
-                <a:latin typeface="Arial"/>
+                <a:latin typeface="Calibri"/>
               </a:defRPr>
             </a:pPr>
             <a:r>
@@ -6755,7 +6731,7 @@
                 <a:solidFill>
                   <a:srgbClr val="1A1A2E"/>
                 </a:solidFill>
-                <a:latin typeface="Arial"/>
+                <a:latin typeface="Calibri"/>
               </a:defRPr>
             </a:pPr>
             <a:r>
@@ -6773,7 +6749,7 @@
         <p:spPr>
           <a:xfrm>
             <a:off x="685800" y="2624327"/>
-            <a:ext cx="3240938" cy="274320"/>
+            <a:ext cx="3240938" cy="338328"/>
           </a:xfrm>
           <a:prstGeom prst="rect">
             <a:avLst/>
@@ -6795,58 +6771,18 @@
                 <a:solidFill>
                   <a:srgbClr val="1A1A2E"/>
                 </a:solidFill>
-                <a:latin typeface="Arial"/>
-              </a:defRPr>
-            </a:pPr>
-            <a:r>
-              <a:t>• Unsur: Bappeda, Ortala, BPKAD, Diskominfo</a:t>
-            </a:r>
-          </a:p>
-        </p:txBody>
-      </p:sp>
-      <p:sp>
-        <p:nvSpPr>
-          <p:cNvPr id="15" name="TextBox 14"/>
-          <p:cNvSpPr txBox="1"/>
-          <p:nvPr/>
-        </p:nvSpPr>
-        <p:spPr>
-          <a:xfrm>
-            <a:off x="685800" y="2916935"/>
-            <a:ext cx="3240938" cy="274320"/>
-          </a:xfrm>
-          <a:prstGeom prst="rect">
-            <a:avLst/>
-          </a:prstGeom>
-          <a:noFill/>
-        </p:spPr>
-        <p:txBody>
-          <a:bodyPr wrap="square"/>
-          <a:lstStyle/>
-          <a:p>
-            <a:pPr algn="l">
-              <a:spcBef>
-                <a:spcPts val="0"/>
-              </a:spcBef>
-              <a:spcAft>
-                <a:spcPts val="0"/>
-              </a:spcAft>
-              <a:defRPr sz="900" b="0">
-                <a:solidFill>
-                  <a:srgbClr val="1A1A2E"/>
-                </a:solidFill>
-                <a:latin typeface="Arial"/>
-              </a:defRPr>
-            </a:pPr>
-            <a:r>
-              <a:t>• Bersifat lintas sektor</a:t>
-            </a:r>
-          </a:p>
-        </p:txBody>
-      </p:sp>
-      <p:sp>
-        <p:nvSpPr>
-          <p:cNvPr id="16" name="Rounded Rectangle 15"/>
+                <a:latin typeface="Calibri"/>
+              </a:defRPr>
+            </a:pPr>
+            <a:r>
+              <a:t>• Lintas sektor: Bappeda, Ortala, BPKAD, Diskominfo</a:t>
+            </a:r>
+          </a:p>
+        </p:txBody>
+      </p:sp>
+      <p:sp>
+        <p:nvSpPr>
+          <p:cNvPr id="15" name="Rounded Rectangle 14"/>
           <p:cNvSpPr/>
           <p:nvPr/>
         </p:nvSpPr>
@@ -6893,7 +6829,7 @@
       </p:sp>
       <p:sp>
         <p:nvSpPr>
-          <p:cNvPr id="17" name="Rectangle 16"/>
+          <p:cNvPr id="16" name="Rectangle 15"/>
           <p:cNvSpPr/>
           <p:nvPr/>
         </p:nvSpPr>
@@ -6936,7 +6872,7 @@
       </p:sp>
       <p:sp>
         <p:nvSpPr>
-          <p:cNvPr id="18" name="Oval 17"/>
+          <p:cNvPr id="17" name="Oval 16"/>
           <p:cNvSpPr/>
           <p:nvPr/>
         </p:nvSpPr>
@@ -6979,14 +6915,54 @@
       </p:sp>
       <p:sp>
         <p:nvSpPr>
+          <p:cNvPr id="18" name="TextBox 17"/>
+          <p:cNvSpPr txBox="1"/>
+          <p:nvPr/>
+        </p:nvSpPr>
+        <p:spPr>
+          <a:xfrm>
+            <a:off x="4552188" y="1247241"/>
+            <a:ext cx="230428" cy="230428"/>
+          </a:xfrm>
+          <a:prstGeom prst="rect">
+            <a:avLst/>
+          </a:prstGeom>
+          <a:noFill/>
+        </p:spPr>
+        <p:txBody>
+          <a:bodyPr wrap="square"/>
+          <a:lstStyle/>
+          <a:p>
+            <a:pPr algn="ctr">
+              <a:spcBef>
+                <a:spcPts val="0"/>
+              </a:spcBef>
+              <a:spcAft>
+                <a:spcPts val="0"/>
+              </a:spcAft>
+              <a:defRPr sz="1200" b="0">
+                <a:solidFill>
+                  <a:srgbClr val="FFFFFF"/>
+                </a:solidFill>
+                <a:latin typeface="Calibri"/>
+              </a:defRPr>
+            </a:pPr>
+            <a:r>
+              <a:t>🗺️</a:t>
+            </a:r>
+          </a:p>
+        </p:txBody>
+      </p:sp>
+      <p:sp>
+        <p:nvSpPr>
           <p:cNvPr id="19" name="TextBox 18"/>
           <p:cNvSpPr txBox="1"/>
           <p:nvPr/>
         </p:nvSpPr>
         <p:spPr>
           <a:xfrm>
-            <a:off x="4552188" y="1247241"/>
-            <a:ext cx="230428" cy="230428"/>
+            <a:off x="4475378" y="1691639"/>
+            <a:ext cx="3240938" cy="274320"/>
           </a:xfrm>
           <a:prstGeom prst="rect">
             <a:avLst/>
@@ -6997,22 +6973,22 @@
           <a:bodyPr wrap="square"/>
           <a:lstStyle/>
           <a:p>
-            <a:pPr algn="ctr">
+            <a:pPr algn="l">
               <a:spcBef>
                 <a:spcPts val="0"/>
               </a:spcBef>
               <a:spcAft>
                 <a:spcPts val="0"/>
               </a:spcAft>
-              <a:defRPr sz="1200" b="0">
-                <a:solidFill>
-                  <a:srgbClr val="FFFFFF"/>
-                </a:solidFill>
-                <a:latin typeface="Arial"/>
-              </a:defRPr>
-            </a:pPr>
-            <a:r>
-              <a:t>🗺️</a:t>
+              <a:defRPr sz="1300" b="1">
+                <a:solidFill>
+                  <a:srgbClr val="0B7C72"/>
+                </a:solidFill>
+                <a:latin typeface="Calibri"/>
+              </a:defRPr>
+            </a:pPr>
+            <a:r>
+              <a:t>2. Arsitektur &amp; Peta Rencana</a:t>
             </a:r>
           </a:p>
         </p:txBody>
@@ -7025,7 +7001,7 @@
         </p:nvSpPr>
         <p:spPr>
           <a:xfrm>
-            <a:off x="4475378" y="1691639"/>
+            <a:off x="4475378" y="2039112"/>
             <a:ext cx="3240938" cy="274320"/>
           </a:xfrm>
           <a:prstGeom prst="rect">
@@ -7044,15 +7020,15 @@
               <a:spcAft>
                 <a:spcPts val="0"/>
               </a:spcAft>
-              <a:defRPr sz="1300" b="1">
-                <a:solidFill>
-                  <a:srgbClr val="0B7C72"/>
-                </a:solidFill>
-                <a:latin typeface="Arial"/>
-              </a:defRPr>
-            </a:pPr>
-            <a:r>
-              <a:t>2. Arsitektur &amp; Peta Rencana</a:t>
+              <a:defRPr sz="900" b="0">
+                <a:solidFill>
+                  <a:srgbClr val="1A1A2E"/>
+                </a:solidFill>
+                <a:latin typeface="Calibri"/>
+              </a:defRPr>
+            </a:pPr>
+            <a:r>
+              <a:t>• Petakan Proses Bisnis dulu</a:t>
             </a:r>
           </a:p>
         </p:txBody>
@@ -7065,7 +7041,7 @@
         </p:nvSpPr>
         <p:spPr>
           <a:xfrm>
-            <a:off x="4475378" y="2039112"/>
+            <a:off x="4475378" y="2331720"/>
             <a:ext cx="3240938" cy="274320"/>
           </a:xfrm>
           <a:prstGeom prst="rect">
@@ -7088,11 +7064,11 @@
                 <a:solidFill>
                   <a:srgbClr val="1A1A2E"/>
                 </a:solidFill>
-                <a:latin typeface="Arial"/>
-              </a:defRPr>
-            </a:pPr>
-            <a:r>
-              <a:t>• Petakan proses bisnis DAHULU</a:t>
+                <a:latin typeface="Calibri"/>
+              </a:defRPr>
+            </a:pPr>
+            <a:r>
+              <a:t>• Gunakan Aplikasi Arsitektur SPBE Nasional</a:t>
             </a:r>
           </a:p>
         </p:txBody>
@@ -7105,7 +7081,7 @@
         </p:nvSpPr>
         <p:spPr>
           <a:xfrm>
-            <a:off x="4475378" y="2331720"/>
+            <a:off x="4475378" y="2624327"/>
             <a:ext cx="3240938" cy="274320"/>
           </a:xfrm>
           <a:prstGeom prst="rect">
@@ -7128,98 +7104,18 @@
                 <a:solidFill>
                   <a:srgbClr val="1A1A2E"/>
                 </a:solidFill>
-                <a:latin typeface="Arial"/>
-              </a:defRPr>
-            </a:pPr>
-            <a:r>
-              <a:t>• Gunakan aplikasi Arsitektur SPBE Nasional</a:t>
-            </a:r>
-          </a:p>
-        </p:txBody>
-      </p:sp>
-      <p:sp>
-        <p:nvSpPr>
-          <p:cNvPr id="23" name="TextBox 22"/>
-          <p:cNvSpPr txBox="1"/>
-          <p:nvPr/>
-        </p:nvSpPr>
-        <p:spPr>
-          <a:xfrm>
-            <a:off x="4475378" y="2624327"/>
-            <a:ext cx="3240938" cy="274320"/>
-          </a:xfrm>
-          <a:prstGeom prst="rect">
-            <a:avLst/>
-          </a:prstGeom>
-          <a:noFill/>
-        </p:spPr>
-        <p:txBody>
-          <a:bodyPr wrap="square"/>
-          <a:lstStyle/>
-          <a:p>
-            <a:pPr algn="l">
-              <a:spcBef>
-                <a:spcPts val="0"/>
-              </a:spcBef>
-              <a:spcAft>
-                <a:spcPts val="0"/>
-              </a:spcAft>
-              <a:defRPr sz="900" b="0">
-                <a:solidFill>
-                  <a:srgbClr val="1A1A2E"/>
-                </a:solidFill>
-                <a:latin typeface="Arial"/>
-              </a:defRPr>
-            </a:pPr>
-            <a:r>
-              <a:t>• Susun Peta Rencana 5 tahun</a:t>
-            </a:r>
-          </a:p>
-        </p:txBody>
-      </p:sp>
-      <p:sp>
-        <p:nvSpPr>
-          <p:cNvPr id="24" name="TextBox 23"/>
-          <p:cNvSpPr txBox="1"/>
-          <p:nvPr/>
-        </p:nvSpPr>
-        <p:spPr>
-          <a:xfrm>
-            <a:off x="4475378" y="2916935"/>
-            <a:ext cx="3240938" cy="274320"/>
-          </a:xfrm>
-          <a:prstGeom prst="rect">
-            <a:avLst/>
-          </a:prstGeom>
-          <a:noFill/>
-        </p:spPr>
-        <p:txBody>
-          <a:bodyPr wrap="square"/>
-          <a:lstStyle/>
-          <a:p>
-            <a:pPr algn="l">
-              <a:spcBef>
-                <a:spcPts val="0"/>
-              </a:spcBef>
-              <a:spcAft>
-                <a:spcPts val="0"/>
-              </a:spcAft>
-              <a:defRPr sz="900" b="0">
-                <a:solidFill>
-                  <a:srgbClr val="1A1A2E"/>
-                </a:solidFill>
-                <a:latin typeface="Arial"/>
-              </a:defRPr>
-            </a:pPr>
-            <a:r>
-              <a:t>• Selaras arah strategis nasional</a:t>
-            </a:r>
-          </a:p>
-        </p:txBody>
-      </p:sp>
-      <p:sp>
-        <p:nvSpPr>
-          <p:cNvPr id="25" name="Rounded Rectangle 24"/>
+                <a:latin typeface="Calibri"/>
+              </a:defRPr>
+            </a:pPr>
+            <a:r>
+              <a:t>• Peta Rencana 5 tahunan</a:t>
+            </a:r>
+          </a:p>
+        </p:txBody>
+      </p:sp>
+      <p:sp>
+        <p:nvSpPr>
+          <p:cNvPr id="23" name="Rounded Rectangle 22"/>
           <p:cNvSpPr/>
           <p:nvPr/>
         </p:nvSpPr>
@@ -7266,7 +7162,7 @@
       </p:sp>
       <p:sp>
         <p:nvSpPr>
-          <p:cNvPr id="26" name="Rectangle 25"/>
+          <p:cNvPr id="24" name="Rectangle 23"/>
           <p:cNvSpPr/>
           <p:nvPr/>
         </p:nvSpPr>
@@ -7309,7 +7205,7 @@
       </p:sp>
       <p:sp>
         <p:nvSpPr>
-          <p:cNvPr id="27" name="Oval 26"/>
+          <p:cNvPr id="25" name="Oval 24"/>
           <p:cNvSpPr/>
           <p:nvPr/>
         </p:nvSpPr>
@@ -7352,14 +7248,94 @@
       </p:sp>
       <p:sp>
         <p:nvSpPr>
+          <p:cNvPr id="26" name="TextBox 25"/>
+          <p:cNvSpPr txBox="1"/>
+          <p:nvPr/>
+        </p:nvSpPr>
+        <p:spPr>
+          <a:xfrm>
+            <a:off x="8341766" y="1247241"/>
+            <a:ext cx="230428" cy="230428"/>
+          </a:xfrm>
+          <a:prstGeom prst="rect">
+            <a:avLst/>
+          </a:prstGeom>
+          <a:noFill/>
+        </p:spPr>
+        <p:txBody>
+          <a:bodyPr wrap="square"/>
+          <a:lstStyle/>
+          <a:p>
+            <a:pPr algn="ctr">
+              <a:spcBef>
+                <a:spcPts val="0"/>
+              </a:spcBef>
+              <a:spcAft>
+                <a:spcPts val="0"/>
+              </a:spcAft>
+              <a:defRPr sz="1200" b="0">
+                <a:solidFill>
+                  <a:srgbClr val="FFFFFF"/>
+                </a:solidFill>
+                <a:latin typeface="Calibri"/>
+              </a:defRPr>
+            </a:pPr>
+            <a:r>
+              <a:t>🖥️</a:t>
+            </a:r>
+          </a:p>
+        </p:txBody>
+      </p:sp>
+      <p:sp>
+        <p:nvSpPr>
+          <p:cNvPr id="27" name="TextBox 26"/>
+          <p:cNvSpPr txBox="1"/>
+          <p:nvPr/>
+        </p:nvSpPr>
+        <p:spPr>
+          <a:xfrm>
+            <a:off x="8264956" y="1691639"/>
+            <a:ext cx="3240938" cy="274320"/>
+          </a:xfrm>
+          <a:prstGeom prst="rect">
+            <a:avLst/>
+          </a:prstGeom>
+          <a:noFill/>
+        </p:spPr>
+        <p:txBody>
+          <a:bodyPr wrap="square"/>
+          <a:lstStyle/>
+          <a:p>
+            <a:pPr algn="l">
+              <a:spcBef>
+                <a:spcPts val="0"/>
+              </a:spcBef>
+              <a:spcAft>
+                <a:spcPts val="0"/>
+              </a:spcAft>
+              <a:defRPr sz="1300" b="1">
+                <a:solidFill>
+                  <a:srgbClr val="A0522D"/>
+                </a:solidFill>
+                <a:latin typeface="Calibri"/>
+              </a:defRPr>
+            </a:pPr>
+            <a:r>
+              <a:t>3. Infrastruktur &amp; Integrasi</a:t>
+            </a:r>
+          </a:p>
+        </p:txBody>
+      </p:sp>
+      <p:sp>
+        <p:nvSpPr>
           <p:cNvPr id="28" name="TextBox 27"/>
           <p:cNvSpPr txBox="1"/>
           <p:nvPr/>
         </p:nvSpPr>
         <p:spPr>
           <a:xfrm>
-            <a:off x="8341766" y="1247241"/>
-            <a:ext cx="230428" cy="230428"/>
+            <a:off x="8264956" y="2039112"/>
+            <a:ext cx="3240938" cy="274320"/>
           </a:xfrm>
           <a:prstGeom prst="rect">
             <a:avLst/>
@@ -7370,22 +7346,22 @@
           <a:bodyPr wrap="square"/>
           <a:lstStyle/>
           <a:p>
-            <a:pPr algn="ctr">
+            <a:pPr algn="l">
               <a:spcBef>
                 <a:spcPts val="0"/>
               </a:spcBef>
               <a:spcAft>
                 <a:spcPts val="0"/>
               </a:spcAft>
-              <a:defRPr sz="1200" b="0">
-                <a:solidFill>
-                  <a:srgbClr val="FFFFFF"/>
-                </a:solidFill>
-                <a:latin typeface="Arial"/>
-              </a:defRPr>
-            </a:pPr>
-            <a:r>
-              <a:t>🔗</a:t>
+              <a:defRPr sz="900" b="0">
+                <a:solidFill>
+                  <a:srgbClr val="1A1A2E"/>
+                </a:solidFill>
+                <a:latin typeface="Calibri"/>
+              </a:defRPr>
+            </a:pPr>
+            <a:r>
+              <a:t>• Migrasi ke Pusat Data Nasional (PDN)</a:t>
             </a:r>
           </a:p>
         </p:txBody>
@@ -7398,7 +7374,7 @@
         </p:nvSpPr>
         <p:spPr>
           <a:xfrm>
-            <a:off x="8264956" y="1691639"/>
+            <a:off x="8264956" y="2331720"/>
             <a:ext cx="3240938" cy="274320"/>
           </a:xfrm>
           <a:prstGeom prst="rect">
@@ -7417,15 +7393,15 @@
               <a:spcAft>
                 <a:spcPts val="0"/>
               </a:spcAft>
-              <a:defRPr sz="1300" b="1">
-                <a:solidFill>
-                  <a:srgbClr val="A0522D"/>
-                </a:solidFill>
-                <a:latin typeface="Arial"/>
-              </a:defRPr>
-            </a:pPr>
-            <a:r>
-              <a:t>3. Infrastruktur &amp; Integrasi Data</a:t>
+              <a:defRPr sz="900" b="0">
+                <a:solidFill>
+                  <a:srgbClr val="1A1A2E"/>
+                </a:solidFill>
+                <a:latin typeface="Calibri"/>
+              </a:defRPr>
+            </a:pPr>
+            <a:r>
+              <a:t>• Cloud tersertifikasi</a:t>
             </a:r>
           </a:p>
         </p:txBody>
@@ -7438,7 +7414,7 @@
         </p:nvSpPr>
         <p:spPr>
           <a:xfrm>
-            <a:off x="8264956" y="2039112"/>
+            <a:off x="8264956" y="2624327"/>
             <a:ext cx="3240938" cy="274320"/>
           </a:xfrm>
           <a:prstGeom prst="rect">
@@ -7461,138 +7437,18 @@
                 <a:solidFill>
                   <a:srgbClr val="1A1A2E"/>
                 </a:solidFill>
-                <a:latin typeface="Arial"/>
-              </a:defRPr>
-            </a:pPr>
-            <a:r>
-              <a:t>• Batasi pembangunan data center mandiri</a:t>
-            </a:r>
-          </a:p>
-        </p:txBody>
-      </p:sp>
-      <p:sp>
-        <p:nvSpPr>
-          <p:cNvPr id="31" name="TextBox 30"/>
-          <p:cNvSpPr txBox="1"/>
-          <p:nvPr/>
-        </p:nvSpPr>
-        <p:spPr>
-          <a:xfrm>
-            <a:off x="8264956" y="2331720"/>
-            <a:ext cx="3240938" cy="274320"/>
-          </a:xfrm>
-          <a:prstGeom prst="rect">
-            <a:avLst/>
-          </a:prstGeom>
-          <a:noFill/>
-        </p:spPr>
-        <p:txBody>
-          <a:bodyPr wrap="square"/>
-          <a:lstStyle/>
-          <a:p>
-            <a:pPr algn="l">
-              <a:spcBef>
-                <a:spcPts val="0"/>
-              </a:spcBef>
-              <a:spcAft>
-                <a:spcPts val="0"/>
-              </a:spcAft>
-              <a:defRPr sz="900" b="0">
-                <a:solidFill>
-                  <a:srgbClr val="1A1A2E"/>
-                </a:solidFill>
-                <a:latin typeface="Arial"/>
-              </a:defRPr>
-            </a:pPr>
-            <a:r>
-              <a:t>• Migrasi ke PDN / cloud tersertifikasi</a:t>
-            </a:r>
-          </a:p>
-        </p:txBody>
-      </p:sp>
-      <p:sp>
-        <p:nvSpPr>
-          <p:cNvPr id="32" name="TextBox 31"/>
-          <p:cNvSpPr txBox="1"/>
-          <p:nvPr/>
-        </p:nvSpPr>
-        <p:spPr>
-          <a:xfrm>
-            <a:off x="8264956" y="2624327"/>
-            <a:ext cx="3240938" cy="274320"/>
-          </a:xfrm>
-          <a:prstGeom prst="rect">
-            <a:avLst/>
-          </a:prstGeom>
-          <a:noFill/>
-        </p:spPr>
-        <p:txBody>
-          <a:bodyPr wrap="square"/>
-          <a:lstStyle/>
-          <a:p>
-            <a:pPr algn="l">
-              <a:spcBef>
-                <a:spcPts val="0"/>
-              </a:spcBef>
-              <a:spcAft>
-                <a:spcPts val="0"/>
-              </a:spcAft>
-              <a:defRPr sz="900" b="0">
-                <a:solidFill>
-                  <a:srgbClr val="1A1A2E"/>
-                </a:solidFill>
-                <a:latin typeface="Arial"/>
-              </a:defRPr>
-            </a:pPr>
-            <a:r>
-              <a:t>• Implementasi Hub SPLP</a:t>
-            </a:r>
-          </a:p>
-        </p:txBody>
-      </p:sp>
-      <p:sp>
-        <p:nvSpPr>
-          <p:cNvPr id="33" name="TextBox 32"/>
-          <p:cNvSpPr txBox="1"/>
-          <p:nvPr/>
-        </p:nvSpPr>
-        <p:spPr>
-          <a:xfrm>
-            <a:off x="8264956" y="2916935"/>
-            <a:ext cx="3240938" cy="274320"/>
-          </a:xfrm>
-          <a:prstGeom prst="rect">
-            <a:avLst/>
-          </a:prstGeom>
-          <a:noFill/>
-        </p:spPr>
-        <p:txBody>
-          <a:bodyPr wrap="square"/>
-          <a:lstStyle/>
-          <a:p>
-            <a:pPr algn="l">
-              <a:spcBef>
-                <a:spcPts val="0"/>
-              </a:spcBef>
-              <a:spcAft>
-                <a:spcPts val="0"/>
-              </a:spcAft>
-              <a:defRPr sz="900" b="0">
-                <a:solidFill>
-                  <a:srgbClr val="1A1A2E"/>
-                </a:solidFill>
-                <a:latin typeface="Arial"/>
-              </a:defRPr>
-            </a:pPr>
-            <a:r>
-              <a:t>• Prinsip Satu Data Indonesia</a:t>
-            </a:r>
-          </a:p>
-        </p:txBody>
-      </p:sp>
-      <p:sp>
-        <p:nvSpPr>
-          <p:cNvPr id="34" name="Rectangle 33"/>
+                <a:latin typeface="Calibri"/>
+              </a:defRPr>
+            </a:pPr>
+            <a:r>
+              <a:t>• Hub SPLP &amp; Satu Data Indonesia</a:t>
+            </a:r>
+          </a:p>
+        </p:txBody>
+      </p:sp>
+      <p:sp>
+        <p:nvSpPr>
+          <p:cNvPr id="31" name="Rectangle 30"/>
           <p:cNvSpPr/>
           <p:nvPr/>
         </p:nvSpPr>
@@ -7635,7 +7491,7 @@
       </p:sp>
       <p:sp>
         <p:nvSpPr>
-          <p:cNvPr id="35" name="TextBox 34"/>
+          <p:cNvPr id="32" name="TextBox 31"/>
           <p:cNvSpPr txBox="1"/>
           <p:nvPr/>
         </p:nvSpPr>
@@ -7664,18 +7520,18 @@
                 <a:solidFill>
                   <a:srgbClr val="64748B"/>
                 </a:solidFill>
-                <a:latin typeface="Arial"/>
-              </a:defRPr>
-            </a:pPr>
-            <a:r>
-              <a:t>Sumber: Perpres No. 95/2018, Perpres No. 132/2022, &amp; Pedoman SPBE Kemenpan-RB</a:t>
-            </a:r>
-          </a:p>
-        </p:txBody>
-      </p:sp>
-      <p:sp>
-        <p:nvSpPr>
-          <p:cNvPr id="36" name="TextBox 35"/>
+                <a:latin typeface="Calibri"/>
+              </a:defRPr>
+            </a:pPr>
+            <a:r>
+              <a:t>Penerapan Sistem Pemerintahan Berbasis Elektronik (SPBE)</a:t>
+            </a:r>
+          </a:p>
+        </p:txBody>
+      </p:sp>
+      <p:sp>
+        <p:nvSpPr>
+          <p:cNvPr id="33" name="TextBox 32"/>
           <p:cNvSpPr txBox="1"/>
           <p:nvPr/>
         </p:nvSpPr>
@@ -7704,7 +7560,7 @@
                 <a:solidFill>
                   <a:srgbClr val="64748B"/>
                 </a:solidFill>
-                <a:latin typeface="Arial"/>
+                <a:latin typeface="Calibri"/>
               </a:defRPr>
             </a:pPr>
             <a:r>
@@ -7899,11 +7755,11 @@
                 <a:solidFill>
                   <a:srgbClr val="FFFFFF"/>
                 </a:solidFill>
-                <a:latin typeface="Arial Black"/>
-              </a:defRPr>
-            </a:pPr>
-            <a:r>
-              <a:t>Konsolidasi, Keamanan, dan Evaluasi Berkelanjutan — Kunci Keberlanjutan Transformasi</a:t>
+                <a:latin typeface="Georgia"/>
+              </a:defRPr>
+            </a:pPr>
+            <a:r>
+              <a:t>Tiga Langkah Akhir Memastikan Keberlanjutan &amp; Keamanan SPBE</a:t>
             </a:r>
           </a:p>
         </p:txBody>
@@ -7939,11 +7795,11 @@
                 <a:solidFill>
                   <a:srgbClr val="64748B"/>
                 </a:solidFill>
-                <a:latin typeface="Arial"/>
-              </a:defRPr>
-            </a:pPr>
-            <a:r>
-              <a:t>Langkah 4–6: Eksekusi &amp; Evaluasi</a:t>
+                <a:latin typeface="Calibri"/>
+              </a:defRPr>
+            </a:pPr>
+            <a:r>
+              <a:t>Langkah 4–6</a:t>
             </a:r>
           </a:p>
         </p:txBody>
@@ -8112,7 +7968,7 @@
                 <a:solidFill>
                   <a:srgbClr val="FFFFFF"/>
                 </a:solidFill>
-                <a:latin typeface="Arial"/>
+                <a:latin typeface="Calibri"/>
               </a:defRPr>
             </a:pPr>
             <a:r>
@@ -8152,7 +8008,7 @@
                 <a:solidFill>
                   <a:srgbClr val="2563EB"/>
                 </a:solidFill>
-                <a:latin typeface="Arial"/>
+                <a:latin typeface="Calibri"/>
               </a:defRPr>
             </a:pPr>
             <a:r>
@@ -8192,11 +8048,11 @@
                 <a:solidFill>
                   <a:srgbClr val="1A1A2E"/>
                 </a:solidFill>
-                <a:latin typeface="Arial"/>
-              </a:defRPr>
-            </a:pPr>
-            <a:r>
-              <a:t>• Audit seluruh aplikasi yang ada</a:t>
+                <a:latin typeface="Calibri"/>
+              </a:defRPr>
+            </a:pPr>
+            <a:r>
+              <a:t>• Audit seluruh aplikasi existing</a:t>
             </a:r>
           </a:p>
         </p:txBody>
@@ -8232,11 +8088,11 @@
                 <a:solidFill>
                   <a:srgbClr val="1A1A2E"/>
                 </a:solidFill>
-                <a:latin typeface="Arial"/>
-              </a:defRPr>
-            </a:pPr>
-            <a:r>
-              <a:t>• Moratorium aplikasi baru duplikatif</a:t>
+                <a:latin typeface="Calibri"/>
+              </a:defRPr>
+            </a:pPr>
+            <a:r>
+              <a:t>• Moratorium aplikasi duplikatif</a:t>
             </a:r>
           </a:p>
         </p:txBody>
@@ -8272,58 +8128,18 @@
                 <a:solidFill>
                   <a:srgbClr val="1A1A2E"/>
                 </a:solidFill>
-                <a:latin typeface="Arial"/>
-              </a:defRPr>
-            </a:pPr>
-            <a:r>
-              <a:t>• Gabung ke satu platform terpadu</a:t>
-            </a:r>
-          </a:p>
-        </p:txBody>
-      </p:sp>
-      <p:sp>
-        <p:nvSpPr>
-          <p:cNvPr id="15" name="TextBox 14"/>
-          <p:cNvSpPr txBox="1"/>
-          <p:nvPr/>
-        </p:nvSpPr>
-        <p:spPr>
-          <a:xfrm>
-            <a:off x="685800" y="2916935"/>
-            <a:ext cx="3240938" cy="274320"/>
-          </a:xfrm>
-          <a:prstGeom prst="rect">
-            <a:avLst/>
-          </a:prstGeom>
-          <a:noFill/>
-        </p:spPr>
-        <p:txBody>
-          <a:bodyPr wrap="square"/>
-          <a:lstStyle/>
-          <a:p>
-            <a:pPr algn="l">
-              <a:spcBef>
-                <a:spcPts val="0"/>
-              </a:spcBef>
-              <a:spcAft>
-                <a:spcPts val="0"/>
-              </a:spcAft>
-              <a:defRPr sz="900" b="0">
-                <a:solidFill>
-                  <a:srgbClr val="1A1A2E"/>
-                </a:solidFill>
-                <a:latin typeface="Arial"/>
-              </a:defRPr>
-            </a:pPr>
-            <a:r>
-              <a:t>• Super Apps layanan publik &amp; administrasi</a:t>
-            </a:r>
-          </a:p>
-        </p:txBody>
-      </p:sp>
-      <p:sp>
-        <p:nvSpPr>
-          <p:cNvPr id="16" name="Rounded Rectangle 15"/>
+                <a:latin typeface="Calibri"/>
+              </a:defRPr>
+            </a:pPr>
+            <a:r>
+              <a:t>• Gabung ke Super Apps terpadu</a:t>
+            </a:r>
+          </a:p>
+        </p:txBody>
+      </p:sp>
+      <p:sp>
+        <p:nvSpPr>
+          <p:cNvPr id="15" name="Rounded Rectangle 14"/>
           <p:cNvSpPr/>
           <p:nvPr/>
         </p:nvSpPr>
@@ -8370,7 +8186,7 @@
       </p:sp>
       <p:sp>
         <p:nvSpPr>
-          <p:cNvPr id="17" name="Rectangle 16"/>
+          <p:cNvPr id="16" name="Rectangle 15"/>
           <p:cNvSpPr/>
           <p:nvPr/>
         </p:nvSpPr>
@@ -8413,7 +8229,7 @@
       </p:sp>
       <p:sp>
         <p:nvSpPr>
-          <p:cNvPr id="18" name="Oval 17"/>
+          <p:cNvPr id="17" name="Oval 16"/>
           <p:cNvSpPr/>
           <p:nvPr/>
         </p:nvSpPr>
@@ -8456,14 +8272,54 @@
       </p:sp>
       <p:sp>
         <p:nvSpPr>
+          <p:cNvPr id="18" name="TextBox 17"/>
+          <p:cNvSpPr txBox="1"/>
+          <p:nvPr/>
+        </p:nvSpPr>
+        <p:spPr>
+          <a:xfrm>
+            <a:off x="4552188" y="1247241"/>
+            <a:ext cx="230428" cy="230428"/>
+          </a:xfrm>
+          <a:prstGeom prst="rect">
+            <a:avLst/>
+          </a:prstGeom>
+          <a:noFill/>
+        </p:spPr>
+        <p:txBody>
+          <a:bodyPr wrap="square"/>
+          <a:lstStyle/>
+          <a:p>
+            <a:pPr algn="ctr">
+              <a:spcBef>
+                <a:spcPts val="0"/>
+              </a:spcBef>
+              <a:spcAft>
+                <a:spcPts val="0"/>
+              </a:spcAft>
+              <a:defRPr sz="1200" b="0">
+                <a:solidFill>
+                  <a:srgbClr val="FFFFFF"/>
+                </a:solidFill>
+                <a:latin typeface="Calibri"/>
+              </a:defRPr>
+            </a:pPr>
+            <a:r>
+              <a:t>🔒</a:t>
+            </a:r>
+          </a:p>
+        </p:txBody>
+      </p:sp>
+      <p:sp>
+        <p:nvSpPr>
           <p:cNvPr id="19" name="TextBox 18"/>
           <p:cNvSpPr txBox="1"/>
           <p:nvPr/>
         </p:nvSpPr>
         <p:spPr>
           <a:xfrm>
-            <a:off x="4552188" y="1247241"/>
-            <a:ext cx="230428" cy="230428"/>
+            <a:off x="4475378" y="1691639"/>
+            <a:ext cx="3240938" cy="274320"/>
           </a:xfrm>
           <a:prstGeom prst="rect">
             <a:avLst/>
@@ -8474,22 +8330,22 @@
           <a:bodyPr wrap="square"/>
           <a:lstStyle/>
           <a:p>
-            <a:pPr algn="ctr">
+            <a:pPr algn="l">
               <a:spcBef>
                 <a:spcPts val="0"/>
               </a:spcBef>
               <a:spcAft>
                 <a:spcPts val="0"/>
               </a:spcAft>
-              <a:defRPr sz="1200" b="0">
-                <a:solidFill>
-                  <a:srgbClr val="FFFFFF"/>
-                </a:solidFill>
-                <a:latin typeface="Arial"/>
-              </a:defRPr>
-            </a:pPr>
-            <a:r>
-              <a:t>🔐</a:t>
+              <a:defRPr sz="1300" b="1">
+                <a:solidFill>
+                  <a:srgbClr val="0B7C72"/>
+                </a:solidFill>
+                <a:latin typeface="Calibri"/>
+              </a:defRPr>
+            </a:pPr>
+            <a:r>
+              <a:t>5. Keamanan Informasi</a:t>
             </a:r>
           </a:p>
         </p:txBody>
@@ -8502,7 +8358,7 @@
         </p:nvSpPr>
         <p:spPr>
           <a:xfrm>
-            <a:off x="4475378" y="1691639"/>
+            <a:off x="4475378" y="2039112"/>
             <a:ext cx="3240938" cy="274320"/>
           </a:xfrm>
           <a:prstGeom prst="rect">
@@ -8521,15 +8377,15 @@
               <a:spcAft>
                 <a:spcPts val="0"/>
               </a:spcAft>
-              <a:defRPr sz="1300" b="1">
-                <a:solidFill>
-                  <a:srgbClr val="0B7C72"/>
-                </a:solidFill>
-                <a:latin typeface="Arial"/>
-              </a:defRPr>
-            </a:pPr>
-            <a:r>
-              <a:t>5. Keamanan Informasi</a:t>
+              <a:defRPr sz="900" b="0">
+                <a:solidFill>
+                  <a:srgbClr val="1A1A2E"/>
+                </a:solidFill>
+                <a:latin typeface="Calibri"/>
+              </a:defRPr>
+            </a:pPr>
+            <a:r>
+              <a:t>• SMKI berbasis ISO 27001</a:t>
             </a:r>
           </a:p>
         </p:txBody>
@@ -8542,7 +8398,7 @@
         </p:nvSpPr>
         <p:spPr>
           <a:xfrm>
-            <a:off x="4475378" y="2039112"/>
+            <a:off x="4475378" y="2331720"/>
             <a:ext cx="3240938" cy="274320"/>
           </a:xfrm>
           <a:prstGeom prst="rect">
@@ -8565,11 +8421,11 @@
                 <a:solidFill>
                   <a:srgbClr val="1A1A2E"/>
                 </a:solidFill>
-                <a:latin typeface="Arial"/>
-              </a:defRPr>
-            </a:pPr>
-            <a:r>
-              <a:t>• SMKI berbasis ISO 27001 bertahap</a:t>
+                <a:latin typeface="Calibri"/>
+              </a:defRPr>
+            </a:pPr>
+            <a:r>
+              <a:t>• BSSN: Vulnerability Assessment</a:t>
             </a:r>
           </a:p>
         </p:txBody>
@@ -8582,7 +8438,7 @@
         </p:nvSpPr>
         <p:spPr>
           <a:xfrm>
-            <a:off x="4475378" y="2331720"/>
+            <a:off x="4475378" y="2624327"/>
             <a:ext cx="3240938" cy="274320"/>
           </a:xfrm>
           <a:prstGeom prst="rect">
@@ -8605,87 +8461,7 @@
                 <a:solidFill>
                   <a:srgbClr val="1A1A2E"/>
                 </a:solidFill>
-                <a:latin typeface="Arial"/>
-              </a:defRPr>
-            </a:pPr>
-            <a:r>
-              <a:t>• Kolaborasi dengan BSSN</a:t>
-            </a:r>
-          </a:p>
-        </p:txBody>
-      </p:sp>
-      <p:sp>
-        <p:nvSpPr>
-          <p:cNvPr id="23" name="TextBox 22"/>
-          <p:cNvSpPr txBox="1"/>
-          <p:nvPr/>
-        </p:nvSpPr>
-        <p:spPr>
-          <a:xfrm>
-            <a:off x="4475378" y="2624327"/>
-            <a:ext cx="3240938" cy="274320"/>
-          </a:xfrm>
-          <a:prstGeom prst="rect">
-            <a:avLst/>
-          </a:prstGeom>
-          <a:noFill/>
-        </p:spPr>
-        <p:txBody>
-          <a:bodyPr wrap="square"/>
-          <a:lstStyle/>
-          <a:p>
-            <a:pPr algn="l">
-              <a:spcBef>
-                <a:spcPts val="0"/>
-              </a:spcBef>
-              <a:spcAft>
-                <a:spcPts val="0"/>
-              </a:spcAft>
-              <a:defRPr sz="900" b="0">
-                <a:solidFill>
-                  <a:srgbClr val="1A1A2E"/>
-                </a:solidFill>
-                <a:latin typeface="Arial"/>
-              </a:defRPr>
-            </a:pPr>
-            <a:r>
-              <a:t>• Vulnerability Assessment berkala</a:t>
-            </a:r>
-          </a:p>
-        </p:txBody>
-      </p:sp>
-      <p:sp>
-        <p:nvSpPr>
-          <p:cNvPr id="24" name="TextBox 23"/>
-          <p:cNvSpPr txBox="1"/>
-          <p:nvPr/>
-        </p:nvSpPr>
-        <p:spPr>
-          <a:xfrm>
-            <a:off x="4475378" y="2916935"/>
-            <a:ext cx="3240938" cy="274320"/>
-          </a:xfrm>
-          <a:prstGeom prst="rect">
-            <a:avLst/>
-          </a:prstGeom>
-          <a:noFill/>
-        </p:spPr>
-        <p:txBody>
-          <a:bodyPr wrap="square"/>
-          <a:lstStyle/>
-          <a:p>
-            <a:pPr algn="l">
-              <a:spcBef>
-                <a:spcPts val="0"/>
-              </a:spcBef>
-              <a:spcAft>
-                <a:spcPts val="0"/>
-              </a:spcAft>
-              <a:defRPr sz="900" b="0">
-                <a:solidFill>
-                  <a:srgbClr val="1A1A2E"/>
-                </a:solidFill>
-                <a:latin typeface="Arial"/>
+                <a:latin typeface="Calibri"/>
               </a:defRPr>
             </a:pPr>
             <a:r>
@@ -8696,7 +8472,7 @@
       </p:sp>
       <p:sp>
         <p:nvSpPr>
-          <p:cNvPr id="25" name="Rounded Rectangle 24"/>
+          <p:cNvPr id="23" name="Rounded Rectangle 22"/>
           <p:cNvSpPr/>
           <p:nvPr/>
         </p:nvSpPr>
@@ -8743,7 +8519,7 @@
       </p:sp>
       <p:sp>
         <p:nvSpPr>
-          <p:cNvPr id="26" name="Rectangle 25"/>
+          <p:cNvPr id="24" name="Rectangle 23"/>
           <p:cNvSpPr/>
           <p:nvPr/>
         </p:nvSpPr>
@@ -8786,7 +8562,7 @@
       </p:sp>
       <p:sp>
         <p:nvSpPr>
-          <p:cNvPr id="27" name="Oval 26"/>
+          <p:cNvPr id="25" name="Oval 24"/>
           <p:cNvSpPr/>
           <p:nvPr/>
         </p:nvSpPr>
@@ -8829,14 +8605,94 @@
       </p:sp>
       <p:sp>
         <p:nvSpPr>
+          <p:cNvPr id="26" name="TextBox 25"/>
+          <p:cNvSpPr txBox="1"/>
+          <p:nvPr/>
+        </p:nvSpPr>
+        <p:spPr>
+          <a:xfrm>
+            <a:off x="8341766" y="1247241"/>
+            <a:ext cx="230428" cy="230428"/>
+          </a:xfrm>
+          <a:prstGeom prst="rect">
+            <a:avLst/>
+          </a:prstGeom>
+          <a:noFill/>
+        </p:spPr>
+        <p:txBody>
+          <a:bodyPr wrap="square"/>
+          <a:lstStyle/>
+          <a:p>
+            <a:pPr algn="ctr">
+              <a:spcBef>
+                <a:spcPts val="0"/>
+              </a:spcBef>
+              <a:spcAft>
+                <a:spcPts val="0"/>
+              </a:spcAft>
+              <a:defRPr sz="1200" b="0">
+                <a:solidFill>
+                  <a:srgbClr val="FFFFFF"/>
+                </a:solidFill>
+                <a:latin typeface="Calibri"/>
+              </a:defRPr>
+            </a:pPr>
+            <a:r>
+              <a:t>📊</a:t>
+            </a:r>
+          </a:p>
+        </p:txBody>
+      </p:sp>
+      <p:sp>
+        <p:nvSpPr>
+          <p:cNvPr id="27" name="TextBox 26"/>
+          <p:cNvSpPr txBox="1"/>
+          <p:nvPr/>
+        </p:nvSpPr>
+        <p:spPr>
+          <a:xfrm>
+            <a:off x="8264956" y="1691639"/>
+            <a:ext cx="3240938" cy="274320"/>
+          </a:xfrm>
+          <a:prstGeom prst="rect">
+            <a:avLst/>
+          </a:prstGeom>
+          <a:noFill/>
+        </p:spPr>
+        <p:txBody>
+          <a:bodyPr wrap="square"/>
+          <a:lstStyle/>
+          <a:p>
+            <a:pPr algn="l">
+              <a:spcBef>
+                <a:spcPts val="0"/>
+              </a:spcBef>
+              <a:spcAft>
+                <a:spcPts val="0"/>
+              </a:spcAft>
+              <a:defRPr sz="1300" b="1">
+                <a:solidFill>
+                  <a:srgbClr val="A0522D"/>
+                </a:solidFill>
+                <a:latin typeface="Calibri"/>
+              </a:defRPr>
+            </a:pPr>
+            <a:r>
+              <a:t>6. Evaluasi &amp; Audit</a:t>
+            </a:r>
+          </a:p>
+        </p:txBody>
+      </p:sp>
+      <p:sp>
+        <p:nvSpPr>
           <p:cNvPr id="28" name="TextBox 27"/>
           <p:cNvSpPr txBox="1"/>
           <p:nvPr/>
         </p:nvSpPr>
         <p:spPr>
           <a:xfrm>
-            <a:off x="8341766" y="1247241"/>
-            <a:ext cx="230428" cy="230428"/>
+            <a:off x="8264956" y="2039112"/>
+            <a:ext cx="3240938" cy="274320"/>
           </a:xfrm>
           <a:prstGeom prst="rect">
             <a:avLst/>
@@ -8847,22 +8703,22 @@
           <a:bodyPr wrap="square"/>
           <a:lstStyle/>
           <a:p>
-            <a:pPr algn="ctr">
+            <a:pPr algn="l">
               <a:spcBef>
                 <a:spcPts val="0"/>
               </a:spcBef>
               <a:spcAft>
                 <a:spcPts val="0"/>
               </a:spcAft>
-              <a:defRPr sz="1200" b="0">
-                <a:solidFill>
-                  <a:srgbClr val="FFFFFF"/>
-                </a:solidFill>
-                <a:latin typeface="Arial"/>
-              </a:defRPr>
-            </a:pPr>
-            <a:r>
-              <a:t>📊</a:t>
+              <a:defRPr sz="900" b="0">
+                <a:solidFill>
+                  <a:srgbClr val="1A1A2E"/>
+                </a:solidFill>
+                <a:latin typeface="Calibri"/>
+              </a:defRPr>
+            </a:pPr>
+            <a:r>
+              <a:t>• Self-assessment berkala</a:t>
             </a:r>
           </a:p>
         </p:txBody>
@@ -8875,7 +8731,7 @@
         </p:nvSpPr>
         <p:spPr>
           <a:xfrm>
-            <a:off x="8264956" y="1691639"/>
+            <a:off x="8264956" y="2331720"/>
             <a:ext cx="3240938" cy="274320"/>
           </a:xfrm>
           <a:prstGeom prst="rect">
@@ -8894,15 +8750,15 @@
               <a:spcAft>
                 <a:spcPts val="0"/>
               </a:spcAft>
-              <a:defRPr sz="1300" b="1">
-                <a:solidFill>
-                  <a:srgbClr val="A0522D"/>
-                </a:solidFill>
-                <a:latin typeface="Arial"/>
-              </a:defRPr>
-            </a:pPr>
-            <a:r>
-              <a:t>6. Evaluasi &amp; Audit</a:t>
+              <a:defRPr sz="900" b="0">
+                <a:solidFill>
+                  <a:srgbClr val="1A1A2E"/>
+                </a:solidFill>
+                <a:latin typeface="Calibri"/>
+              </a:defRPr>
+            </a:pPr>
+            <a:r>
+              <a:t>• Penilaian formal Kemenpan-RB</a:t>
             </a:r>
           </a:p>
         </p:txBody>
@@ -8915,7 +8771,7 @@
         </p:nvSpPr>
         <p:spPr>
           <a:xfrm>
-            <a:off x="8264956" y="2039112"/>
+            <a:off x="8264956" y="2624327"/>
             <a:ext cx="3240938" cy="274320"/>
           </a:xfrm>
           <a:prstGeom prst="rect">
@@ -8938,138 +8794,18 @@
                 <a:solidFill>
                   <a:srgbClr val="1A1A2E"/>
                 </a:solidFill>
-                <a:latin typeface="Arial"/>
-              </a:defRPr>
-            </a:pPr>
-            <a:r>
-              <a:t>• Self-assessment berkala</a:t>
-            </a:r>
-          </a:p>
-        </p:txBody>
-      </p:sp>
-      <p:sp>
-        <p:nvSpPr>
-          <p:cNvPr id="31" name="TextBox 30"/>
-          <p:cNvSpPr txBox="1"/>
-          <p:nvPr/>
-        </p:nvSpPr>
-        <p:spPr>
-          <a:xfrm>
-            <a:off x="8264956" y="2331720"/>
-            <a:ext cx="3240938" cy="274320"/>
-          </a:xfrm>
-          <a:prstGeom prst="rect">
-            <a:avLst/>
-          </a:prstGeom>
-          <a:noFill/>
-        </p:spPr>
-        <p:txBody>
-          <a:bodyPr wrap="square"/>
-          <a:lstStyle/>
-          <a:p>
-            <a:pPr algn="l">
-              <a:spcBef>
-                <a:spcPts val="0"/>
-              </a:spcBef>
-              <a:spcAft>
-                <a:spcPts val="0"/>
-              </a:spcAft>
-              <a:defRPr sz="900" b="0">
-                <a:solidFill>
-                  <a:srgbClr val="1A1A2E"/>
-                </a:solidFill>
-                <a:latin typeface="Arial"/>
-              </a:defRPr>
-            </a:pPr>
-            <a:r>
-              <a:t>• Penilaian formal Kemenpan-RB</a:t>
-            </a:r>
-          </a:p>
-        </p:txBody>
-      </p:sp>
-      <p:sp>
-        <p:nvSpPr>
-          <p:cNvPr id="32" name="TextBox 31"/>
-          <p:cNvSpPr txBox="1"/>
-          <p:nvPr/>
-        </p:nvSpPr>
-        <p:spPr>
-          <a:xfrm>
-            <a:off x="8264956" y="2624327"/>
-            <a:ext cx="3240938" cy="274320"/>
-          </a:xfrm>
-          <a:prstGeom prst="rect">
-            <a:avLst/>
-          </a:prstGeom>
-          <a:noFill/>
-        </p:spPr>
-        <p:txBody>
-          <a:bodyPr wrap="square"/>
-          <a:lstStyle/>
-          <a:p>
-            <a:pPr algn="l">
-              <a:spcBef>
-                <a:spcPts val="0"/>
-              </a:spcBef>
-              <a:spcAft>
-                <a:spcPts val="0"/>
-              </a:spcAft>
-              <a:defRPr sz="900" b="0">
-                <a:solidFill>
-                  <a:srgbClr val="1A1A2E"/>
-                </a:solidFill>
-                <a:latin typeface="Arial"/>
-              </a:defRPr>
-            </a:pPr>
-            <a:r>
-              <a:t>• Audit TIK infrastruktur &amp; aplikasi</a:t>
-            </a:r>
-          </a:p>
-        </p:txBody>
-      </p:sp>
-      <p:sp>
-        <p:nvSpPr>
-          <p:cNvPr id="33" name="TextBox 32"/>
-          <p:cNvSpPr txBox="1"/>
-          <p:nvPr/>
-        </p:nvSpPr>
-        <p:spPr>
-          <a:xfrm>
-            <a:off x="8264956" y="2916935"/>
-            <a:ext cx="3240938" cy="274320"/>
-          </a:xfrm>
-          <a:prstGeom prst="rect">
-            <a:avLst/>
-          </a:prstGeom>
-          <a:noFill/>
-        </p:spPr>
-        <p:txBody>
-          <a:bodyPr wrap="square"/>
-          <a:lstStyle/>
-          <a:p>
-            <a:pPr algn="l">
-              <a:spcBef>
-                <a:spcPts val="0"/>
-              </a:spcBef>
-              <a:spcAft>
-                <a:spcPts val="0"/>
-              </a:spcAft>
-              <a:defRPr sz="900" b="0">
-                <a:solidFill>
-                  <a:srgbClr val="1A1A2E"/>
-                </a:solidFill>
-                <a:latin typeface="Arial"/>
-              </a:defRPr>
-            </a:pPr>
-            <a:r>
-              <a:t>• Continuous improvement</a:t>
-            </a:r>
-          </a:p>
-        </p:txBody>
-      </p:sp>
-      <p:sp>
-        <p:nvSpPr>
-          <p:cNvPr id="34" name="Rectangle 33"/>
+                <a:latin typeface="Calibri"/>
+              </a:defRPr>
+            </a:pPr>
+            <a:r>
+              <a:t>• Audit TIK menyeluruh</a:t>
+            </a:r>
+          </a:p>
+        </p:txBody>
+      </p:sp>
+      <p:sp>
+        <p:nvSpPr>
+          <p:cNvPr id="31" name="Rectangle 30"/>
           <p:cNvSpPr/>
           <p:nvPr/>
         </p:nvSpPr>
@@ -9112,7 +8848,7 @@
       </p:sp>
       <p:sp>
         <p:nvSpPr>
-          <p:cNvPr id="35" name="TextBox 34"/>
+          <p:cNvPr id="32" name="TextBox 31"/>
           <p:cNvSpPr txBox="1"/>
           <p:nvPr/>
         </p:nvSpPr>
@@ -9141,18 +8877,18 @@
                 <a:solidFill>
                   <a:srgbClr val="64748B"/>
                 </a:solidFill>
-                <a:latin typeface="Arial"/>
-              </a:defRPr>
-            </a:pPr>
-            <a:r>
-              <a:t>Sumber: Perpres No. 95/2018, Perpres No. 132/2022, &amp; Pedoman SPBE Kemenpan-RB</a:t>
-            </a:r>
-          </a:p>
-        </p:txBody>
-      </p:sp>
-      <p:sp>
-        <p:nvSpPr>
-          <p:cNvPr id="36" name="TextBox 35"/>
+                <a:latin typeface="Calibri"/>
+              </a:defRPr>
+            </a:pPr>
+            <a:r>
+              <a:t>Penerapan Sistem Pemerintahan Berbasis Elektronik (SPBE)</a:t>
+            </a:r>
+          </a:p>
+        </p:txBody>
+      </p:sp>
+      <p:sp>
+        <p:nvSpPr>
+          <p:cNvPr id="33" name="TextBox 32"/>
           <p:cNvSpPr txBox="1"/>
           <p:nvPr/>
         </p:nvSpPr>
@@ -9181,7 +8917,7 @@
                 <a:solidFill>
                   <a:srgbClr val="64748B"/>
                 </a:solidFill>
-                <a:latin typeface="Arial"/>
+                <a:latin typeface="Calibri"/>
               </a:defRPr>
             </a:pPr>
             <a:r>
@@ -9462,15 +9198,15 @@
                 <a:solidFill>
                   <a:srgbClr val="FFFFFF"/>
                 </a:solidFill>
-                <a:latin typeface="Arial"/>
-              </a:defRPr>
-            </a:pPr>
-            <a:r>
-              <a:t>PRINSIP UTAMA</a:t>
+                <a:latin typeface="Calibri"/>
+              </a:defRPr>
+            </a:pPr>
+            <a:r>
+              <a:t>BAB 5</a:t>
             </a:r>
             <a:br/>
             <a:r>
-              <a:t>SPBE</a:t>
+              <a:t>PRINSIP UTAMA &amp; KESIMPULAN</a:t>
             </a:r>
           </a:p>
         </p:txBody>
@@ -9506,11 +9242,11 @@
                 <a:solidFill>
                   <a:srgbClr val="C8962E"/>
                 </a:solidFill>
-                <a:latin typeface="Arial"/>
-              </a:defRPr>
-            </a:pPr>
-            <a:r>
-              <a:t>Interoperabilitas — sistem saling berbicara, bukan aplikasi baru</a:t>
+                <a:latin typeface="Calibri"/>
+              </a:defRPr>
+            </a:pPr>
+            <a:r>
+              <a:t>Interoperabilitas — Bukan Membuat Aplikasi Baru untuk Setiap Masalah</a:t>
             </a:r>
           </a:p>
         </p:txBody>
@@ -9546,11 +9282,11 @@
                 <a:solidFill>
                   <a:srgbClr val="64748B"/>
                 </a:solidFill>
-                <a:latin typeface="Arial"/>
-              </a:defRPr>
-            </a:pPr>
-            <a:r>
-              <a:t>Paradigma Modern</a:t>
+                <a:latin typeface="Calibri"/>
+              </a:defRPr>
+            </a:pPr>
+            <a:r>
+              <a:t>Paradigma SPBE Modern</a:t>
             </a:r>
           </a:p>
         </p:txBody>
@@ -9784,11 +9520,11 @@
                 <a:solidFill>
                   <a:srgbClr val="FFFFFF"/>
                 </a:solidFill>
-                <a:latin typeface="Arial Black"/>
-              </a:defRPr>
-            </a:pPr>
-            <a:r>
-              <a:t>Jebakan Terbesar: Menganggap Digitalisasi Berarti Membuat Aplikasi Baru untuk Setiap Masalah</a:t>
+                <a:latin typeface="Georgia"/>
+              </a:defRPr>
+            </a:pPr>
+            <a:r>
+              <a:t>Paradigma SPBE Modern Berfokus pada Interoperabilitas, Bukan Jumlah Aplikasi</a:t>
             </a:r>
           </a:p>
         </p:txBody>
@@ -9824,11 +9560,11 @@
                 <a:solidFill>
                   <a:srgbClr val="64748B"/>
                 </a:solidFill>
-                <a:latin typeface="Arial"/>
-              </a:defRPr>
-            </a:pPr>
-            <a:r>
-              <a:t>Paradigma Lama vs SPBE Modern</a:t>
+                <a:latin typeface="Calibri"/>
+              </a:defRPr>
+            </a:pPr>
+            <a:r>
+              <a:t>Prinsip Utama</a:t>
             </a:r>
           </a:p>
         </p:txBody>
@@ -9925,14 +9661,97 @@
       </p:sp>
       <p:sp>
         <p:nvSpPr>
-          <p:cNvPr id="9" name="TextBox 8"/>
+          <p:cNvPr id="9" name="Oval 8"/>
+          <p:cNvSpPr/>
+          <p:nvPr/>
+        </p:nvSpPr>
+        <p:spPr>
+          <a:xfrm>
+            <a:off x="685800" y="1188719"/>
+            <a:ext cx="384048" cy="384048"/>
+          </a:xfrm>
+          <a:prstGeom prst="ellipse">
+            <a:avLst/>
+          </a:prstGeom>
+          <a:solidFill>
+            <a:srgbClr val="DC2626"/>
+          </a:solidFill>
+          <a:ln>
+            <a:noFill/>
+          </a:ln>
+        </p:spPr>
+        <p:style>
+          <a:lnRef idx="1">
+            <a:schemeClr val="accent1"/>
+          </a:lnRef>
+          <a:fillRef idx="3">
+            <a:schemeClr val="accent1"/>
+          </a:fillRef>
+          <a:effectRef idx="2">
+            <a:schemeClr val="accent1"/>
+          </a:effectRef>
+          <a:fontRef idx="minor">
+            <a:schemeClr val="lt1"/>
+          </a:fontRef>
+        </p:style>
+        <p:txBody>
+          <a:bodyPr rtlCol="0" anchor="ctr"/>
+          <a:lstStyle/>
+          <a:p>
+            <a:pPr algn="ctr"/>
+          </a:p>
+        </p:txBody>
+      </p:sp>
+      <p:sp>
+        <p:nvSpPr>
+          <p:cNvPr id="10" name="TextBox 9"/>
           <p:cNvSpPr txBox="1"/>
           <p:nvPr/>
         </p:nvSpPr>
         <p:spPr>
           <a:xfrm>
-            <a:off x="731520" y="1188719"/>
-            <a:ext cx="5090007" cy="274320"/>
+            <a:off x="762609" y="1247241"/>
+            <a:ext cx="230428" cy="230428"/>
+          </a:xfrm>
+          <a:prstGeom prst="rect">
+            <a:avLst/>
+          </a:prstGeom>
+          <a:noFill/>
+        </p:spPr>
+        <p:txBody>
+          <a:bodyPr wrap="square"/>
+          <a:lstStyle/>
+          <a:p>
+            <a:pPr algn="ctr">
+              <a:spcBef>
+                <a:spcPts val="0"/>
+              </a:spcBef>
+              <a:spcAft>
+                <a:spcPts val="0"/>
+              </a:spcAft>
+              <a:defRPr sz="1200" b="0">
+                <a:solidFill>
+                  <a:srgbClr val="FFFFFF"/>
+                </a:solidFill>
+                <a:latin typeface="Calibri"/>
+              </a:defRPr>
+            </a:pPr>
+            <a:r>
+              <a:t>⚠️</a:t>
+            </a:r>
+          </a:p>
+        </p:txBody>
+      </p:sp>
+      <p:sp>
+        <p:nvSpPr>
+          <p:cNvPr id="11" name="TextBox 10"/>
+          <p:cNvSpPr txBox="1"/>
+          <p:nvPr/>
+        </p:nvSpPr>
+        <p:spPr>
+          <a:xfrm>
+            <a:off x="685800" y="1691639"/>
+            <a:ext cx="5135727" cy="274320"/>
           </a:xfrm>
           <a:prstGeom prst="rect">
             <a:avLst/>
@@ -9950,29 +9769,29 @@
               <a:spcAft>
                 <a:spcPts val="0"/>
               </a:spcAft>
-              <a:defRPr sz="1400" b="1">
+              <a:defRPr sz="1300" b="1">
                 <a:solidFill>
                   <a:srgbClr val="DC2626"/>
                 </a:solidFill>
-                <a:latin typeface="Arial"/>
-              </a:defRPr>
-            </a:pPr>
-            <a:r>
-              <a:t>PARADIGMA LAMA</a:t>
-            </a:r>
-          </a:p>
-        </p:txBody>
-      </p:sp>
-      <p:sp>
-        <p:nvSpPr>
-          <p:cNvPr id="10" name="TextBox 9"/>
+                <a:latin typeface="Calibri"/>
+              </a:defRPr>
+            </a:pPr>
+            <a:r>
+              <a:t>Jebakan Terbesar</a:t>
+            </a:r>
+          </a:p>
+        </p:txBody>
+      </p:sp>
+      <p:sp>
+        <p:nvSpPr>
+          <p:cNvPr id="12" name="TextBox 11"/>
           <p:cNvSpPr txBox="1"/>
           <p:nvPr/>
         </p:nvSpPr>
         <p:spPr>
           <a:xfrm>
-            <a:off x="731520" y="1481328"/>
-            <a:ext cx="5090007" cy="228600"/>
+            <a:off x="685800" y="2039112"/>
+            <a:ext cx="5135727" cy="274320"/>
           </a:xfrm>
           <a:prstGeom prst="rect">
             <a:avLst/>
@@ -9990,29 +9809,29 @@
               <a:spcAft>
                 <a:spcPts val="0"/>
               </a:spcAft>
-              <a:defRPr sz="1100" b="0">
+              <a:defRPr sz="900" b="0">
                 <a:solidFill>
                   <a:srgbClr val="1A1A2E"/>
                 </a:solidFill>
-                <a:latin typeface="Arial"/>
-              </a:defRPr>
-            </a:pPr>
-            <a:r>
-              <a:t>• </a:t>
-            </a:r>
-          </a:p>
-        </p:txBody>
-      </p:sp>
-      <p:sp>
-        <p:nvSpPr>
-          <p:cNvPr id="11" name="TextBox 10"/>
+                <a:latin typeface="Calibri"/>
+              </a:defRPr>
+            </a:pPr>
+            <a:r>
+              <a:t>• Anggap digitalisasi = buat aplikasi baru</a:t>
+            </a:r>
+          </a:p>
+        </p:txBody>
+      </p:sp>
+      <p:sp>
+        <p:nvSpPr>
+          <p:cNvPr id="13" name="TextBox 12"/>
           <p:cNvSpPr txBox="1"/>
           <p:nvPr/>
         </p:nvSpPr>
         <p:spPr>
           <a:xfrm>
-            <a:off x="731520" y="1719072"/>
-            <a:ext cx="5090007" cy="228600"/>
+            <a:off x="685800" y="2331720"/>
+            <a:ext cx="5135727" cy="274320"/>
           </a:xfrm>
           <a:prstGeom prst="rect">
             <a:avLst/>
@@ -10030,29 +9849,29 @@
               <a:spcAft>
                 <a:spcPts val="0"/>
               </a:spcAft>
-              <a:defRPr sz="1100" b="0">
+              <a:defRPr sz="900" b="0">
                 <a:solidFill>
                   <a:srgbClr val="1A1A2E"/>
                 </a:solidFill>
-                <a:latin typeface="Arial"/>
-              </a:defRPr>
-            </a:pPr>
-            <a:r>
-              <a:t>• Setiap masalah → aplikasi baru</a:t>
-            </a:r>
-          </a:p>
-        </p:txBody>
-      </p:sp>
-      <p:sp>
-        <p:nvSpPr>
-          <p:cNvPr id="12" name="TextBox 11"/>
+                <a:latin typeface="Calibri"/>
+              </a:defRPr>
+            </a:pPr>
+            <a:r>
+              <a:t>• Puluhan aplikasi terpisah-pisah</a:t>
+            </a:r>
+          </a:p>
+        </p:txBody>
+      </p:sp>
+      <p:sp>
+        <p:nvSpPr>
+          <p:cNvPr id="14" name="TextBox 13"/>
           <p:cNvSpPr txBox="1"/>
           <p:nvPr/>
         </p:nvSpPr>
         <p:spPr>
           <a:xfrm>
-            <a:off x="731520" y="1956815"/>
-            <a:ext cx="5090007" cy="228600"/>
+            <a:off x="685800" y="2624327"/>
+            <a:ext cx="5135727" cy="274320"/>
           </a:xfrm>
           <a:prstGeom prst="rect">
             <a:avLst/>
@@ -10070,29 +9889,29 @@
               <a:spcAft>
                 <a:spcPts val="0"/>
               </a:spcAft>
-              <a:defRPr sz="1100" b="0">
+              <a:defRPr sz="900" b="0">
                 <a:solidFill>
                   <a:srgbClr val="1A1A2E"/>
                 </a:solidFill>
-                <a:latin typeface="Arial"/>
-              </a:defRPr>
-            </a:pPr>
-            <a:r>
-              <a:t>• Masyarakat unduh puluhan aplikasi</a:t>
-            </a:r>
-          </a:p>
-        </p:txBody>
-      </p:sp>
-      <p:sp>
-        <p:nvSpPr>
-          <p:cNvPr id="13" name="TextBox 12"/>
+                <a:latin typeface="Calibri"/>
+              </a:defRPr>
+            </a:pPr>
+            <a:r>
+              <a:t>• Pemborosan anggaran TIK</a:t>
+            </a:r>
+          </a:p>
+        </p:txBody>
+      </p:sp>
+      <p:sp>
+        <p:nvSpPr>
+          <p:cNvPr id="15" name="TextBox 14"/>
           <p:cNvSpPr txBox="1"/>
           <p:nvPr/>
         </p:nvSpPr>
         <p:spPr>
           <a:xfrm>
-            <a:off x="731520" y="2194559"/>
-            <a:ext cx="5090007" cy="228600"/>
+            <a:off x="685800" y="2916935"/>
+            <a:ext cx="5135727" cy="274320"/>
           </a:xfrm>
           <a:prstGeom prst="rect">
             <a:avLst/>
@@ -10110,142 +9929,22 @@
               <a:spcAft>
                 <a:spcPts val="0"/>
               </a:spcAft>
-              <a:defRPr sz="1100" b="0">
+              <a:defRPr sz="900" b="0">
                 <a:solidFill>
                   <a:srgbClr val="1A1A2E"/>
                 </a:solidFill>
-                <a:latin typeface="Arial"/>
-              </a:defRPr>
-            </a:pPr>
-            <a:r>
-              <a:t>• Data tersekat di masing-masing sistem</a:t>
-            </a:r>
-          </a:p>
-        </p:txBody>
-      </p:sp>
-      <p:sp>
-        <p:nvSpPr>
-          <p:cNvPr id="14" name="TextBox 13"/>
-          <p:cNvSpPr txBox="1"/>
-          <p:nvPr/>
-        </p:nvSpPr>
-        <p:spPr>
-          <a:xfrm>
-            <a:off x="731520" y="2432303"/>
-            <a:ext cx="5090007" cy="228600"/>
-          </a:xfrm>
-          <a:prstGeom prst="rect">
-            <a:avLst/>
-          </a:prstGeom>
-          <a:noFill/>
-        </p:spPr>
-        <p:txBody>
-          <a:bodyPr wrap="square"/>
-          <a:lstStyle/>
-          <a:p>
-            <a:pPr algn="l">
-              <a:spcBef>
-                <a:spcPts val="0"/>
-              </a:spcBef>
-              <a:spcAft>
-                <a:spcPts val="0"/>
-              </a:spcAft>
-              <a:defRPr sz="1100" b="0">
-                <a:solidFill>
-                  <a:srgbClr val="1A1A2E"/>
-                </a:solidFill>
-                <a:latin typeface="Arial"/>
-              </a:defRPr>
-            </a:pPr>
-            <a:r>
-              <a:t>• Tidak ada standar keamanan terpadu</a:t>
-            </a:r>
-          </a:p>
-        </p:txBody>
-      </p:sp>
-      <p:sp>
-        <p:nvSpPr>
-          <p:cNvPr id="15" name="TextBox 14"/>
-          <p:cNvSpPr txBox="1"/>
-          <p:nvPr/>
-        </p:nvSpPr>
-        <p:spPr>
-          <a:xfrm>
-            <a:off x="731520" y="2670047"/>
-            <a:ext cx="5090007" cy="228600"/>
-          </a:xfrm>
-          <a:prstGeom prst="rect">
-            <a:avLst/>
-          </a:prstGeom>
-          <a:noFill/>
-        </p:spPr>
-        <p:txBody>
-          <a:bodyPr wrap="square"/>
-          <a:lstStyle/>
-          <a:p>
-            <a:pPr algn="l">
-              <a:spcBef>
-                <a:spcPts val="0"/>
-              </a:spcBef>
-              <a:spcAft>
-                <a:spcPts val="0"/>
-              </a:spcAft>
-              <a:defRPr sz="1100" b="0">
-                <a:solidFill>
-                  <a:srgbClr val="1A1A2E"/>
-                </a:solidFill>
-                <a:latin typeface="Arial"/>
-              </a:defRPr>
-            </a:pPr>
-            <a:r>
-              <a:t>• Anggaran membengkak — tumpang tindih</a:t>
-            </a:r>
-          </a:p>
-        </p:txBody>
-      </p:sp>
-      <p:sp>
-        <p:nvSpPr>
-          <p:cNvPr id="16" name="TextBox 15"/>
-          <p:cNvSpPr txBox="1"/>
-          <p:nvPr/>
-        </p:nvSpPr>
-        <p:spPr>
-          <a:xfrm>
-            <a:off x="731520" y="2907791"/>
-            <a:ext cx="5090007" cy="228600"/>
-          </a:xfrm>
-          <a:prstGeom prst="rect">
-            <a:avLst/>
-          </a:prstGeom>
-          <a:noFill/>
-        </p:spPr>
-        <p:txBody>
-          <a:bodyPr wrap="square"/>
-          <a:lstStyle/>
-          <a:p>
-            <a:pPr algn="l">
-              <a:spcBef>
-                <a:spcPts val="0"/>
-              </a:spcBef>
-              <a:spcAft>
-                <a:spcPts val="0"/>
-              </a:spcAft>
-              <a:defRPr sz="1100" b="0">
-                <a:solidFill>
-                  <a:srgbClr val="1A1A2E"/>
-                </a:solidFill>
-                <a:latin typeface="Arial"/>
-              </a:defRPr>
-            </a:pPr>
-            <a:r>
-              <a:t>• Ego sektoral digital menguat</a:t>
-            </a:r>
-          </a:p>
-        </p:txBody>
-      </p:sp>
-      <p:sp>
-        <p:nvSpPr>
-          <p:cNvPr id="17" name="Rounded Rectangle 16"/>
+                <a:latin typeface="Calibri"/>
+              </a:defRPr>
+            </a:pPr>
+            <a:r>
+              <a:t>• Masyarakat bingung dengan banyak platform</a:t>
+            </a:r>
+          </a:p>
+        </p:txBody>
+      </p:sp>
+      <p:sp>
+        <p:nvSpPr>
+          <p:cNvPr id="16" name="Rounded Rectangle 15"/>
           <p:cNvSpPr/>
           <p:nvPr/>
         </p:nvSpPr>
@@ -10292,7 +9991,7 @@
       </p:sp>
       <p:sp>
         <p:nvSpPr>
-          <p:cNvPr id="18" name="Rectangle 17"/>
+          <p:cNvPr id="17" name="Rectangle 16"/>
           <p:cNvSpPr/>
           <p:nvPr/>
         </p:nvSpPr>
@@ -10335,14 +10034,97 @@
       </p:sp>
       <p:sp>
         <p:nvSpPr>
+          <p:cNvPr id="18" name="Oval 17"/>
+          <p:cNvSpPr/>
+          <p:nvPr/>
+        </p:nvSpPr>
+        <p:spPr>
+          <a:xfrm>
+            <a:off x="6370167" y="1188719"/>
+            <a:ext cx="384048" cy="384048"/>
+          </a:xfrm>
+          <a:prstGeom prst="ellipse">
+            <a:avLst/>
+          </a:prstGeom>
+          <a:solidFill>
+            <a:srgbClr val="0B7C72"/>
+          </a:solidFill>
+          <a:ln>
+            <a:noFill/>
+          </a:ln>
+        </p:spPr>
+        <p:style>
+          <a:lnRef idx="1">
+            <a:schemeClr val="accent1"/>
+          </a:lnRef>
+          <a:fillRef idx="3">
+            <a:schemeClr val="accent1"/>
+          </a:fillRef>
+          <a:effectRef idx="2">
+            <a:schemeClr val="accent1"/>
+          </a:effectRef>
+          <a:fontRef idx="minor">
+            <a:schemeClr val="lt1"/>
+          </a:fontRef>
+        </p:style>
+        <p:txBody>
+          <a:bodyPr rtlCol="0" anchor="ctr"/>
+          <a:lstStyle/>
+          <a:p>
+            <a:pPr algn="ctr"/>
+          </a:p>
+        </p:txBody>
+      </p:sp>
+      <p:sp>
+        <p:nvSpPr>
           <p:cNvPr id="19" name="TextBox 18"/>
           <p:cNvSpPr txBox="1"/>
           <p:nvPr/>
         </p:nvSpPr>
         <p:spPr>
           <a:xfrm>
-            <a:off x="6415887" y="1188719"/>
-            <a:ext cx="5090007" cy="274320"/>
+            <a:off x="6446977" y="1247241"/>
+            <a:ext cx="230428" cy="230428"/>
+          </a:xfrm>
+          <a:prstGeom prst="rect">
+            <a:avLst/>
+          </a:prstGeom>
+          <a:noFill/>
+        </p:spPr>
+        <p:txBody>
+          <a:bodyPr wrap="square"/>
+          <a:lstStyle/>
+          <a:p>
+            <a:pPr algn="ctr">
+              <a:spcBef>
+                <a:spcPts val="0"/>
+              </a:spcBef>
+              <a:spcAft>
+                <a:spcPts val="0"/>
+              </a:spcAft>
+              <a:defRPr sz="1200" b="0">
+                <a:solidFill>
+                  <a:srgbClr val="FFFFFF"/>
+                </a:solidFill>
+                <a:latin typeface="Calibri"/>
+              </a:defRPr>
+            </a:pPr>
+            <a:r>
+              <a:t>💡</a:t>
+            </a:r>
+          </a:p>
+        </p:txBody>
+      </p:sp>
+      <p:sp>
+        <p:nvSpPr>
+          <p:cNvPr id="20" name="TextBox 19"/>
+          <p:cNvSpPr txBox="1"/>
+          <p:nvPr/>
+        </p:nvSpPr>
+        <p:spPr>
+          <a:xfrm>
+            <a:off x="6370167" y="1691639"/>
+            <a:ext cx="5135727" cy="274320"/>
           </a:xfrm>
           <a:prstGeom prst="rect">
             <a:avLst/>
@@ -10360,29 +10142,29 @@
               <a:spcAft>
                 <a:spcPts val="0"/>
               </a:spcAft>
-              <a:defRPr sz="1400" b="1">
+              <a:defRPr sz="1300" b="1">
                 <a:solidFill>
                   <a:srgbClr val="0B7C72"/>
                 </a:solidFill>
-                <a:latin typeface="Arial"/>
-              </a:defRPr>
-            </a:pPr>
-            <a:r>
-              <a:t>PARADIGMA SPBE MODERN</a:t>
-            </a:r>
-          </a:p>
-        </p:txBody>
-      </p:sp>
-      <p:sp>
-        <p:nvSpPr>
-          <p:cNvPr id="20" name="TextBox 19"/>
+                <a:latin typeface="Calibri"/>
+              </a:defRPr>
+            </a:pPr>
+            <a:r>
+              <a:t>Paradigma Modern</a:t>
+            </a:r>
+          </a:p>
+        </p:txBody>
+      </p:sp>
+      <p:sp>
+        <p:nvSpPr>
+          <p:cNvPr id="21" name="TextBox 20"/>
           <p:cNvSpPr txBox="1"/>
           <p:nvPr/>
         </p:nvSpPr>
         <p:spPr>
           <a:xfrm>
-            <a:off x="6415887" y="1481328"/>
-            <a:ext cx="5090007" cy="228600"/>
+            <a:off x="6370167" y="2039112"/>
+            <a:ext cx="5135727" cy="274320"/>
           </a:xfrm>
           <a:prstGeom prst="rect">
             <a:avLst/>
@@ -10400,29 +10182,29 @@
               <a:spcAft>
                 <a:spcPts val="0"/>
               </a:spcAft>
-              <a:defRPr sz="1100" b="0">
+              <a:defRPr sz="900" b="0">
                 <a:solidFill>
                   <a:srgbClr val="1A1A2E"/>
                 </a:solidFill>
-                <a:latin typeface="Arial"/>
-              </a:defRPr>
-            </a:pPr>
-            <a:r>
-              <a:t>• </a:t>
-            </a:r>
-          </a:p>
-        </p:txBody>
-      </p:sp>
-      <p:sp>
-        <p:nvSpPr>
-          <p:cNvPr id="21" name="TextBox 20"/>
+                <a:latin typeface="Calibri"/>
+              </a:defRPr>
+            </a:pPr>
+            <a:r>
+              <a:t>• Sistem saling berbicara &amp; bertukar data</a:t>
+            </a:r>
+          </a:p>
+        </p:txBody>
+      </p:sp>
+      <p:sp>
+        <p:nvSpPr>
+          <p:cNvPr id="22" name="TextBox 21"/>
           <p:cNvSpPr txBox="1"/>
           <p:nvPr/>
         </p:nvSpPr>
         <p:spPr>
           <a:xfrm>
-            <a:off x="6415887" y="1719072"/>
-            <a:ext cx="5090007" cy="228600"/>
+            <a:off x="6370167" y="2331720"/>
+            <a:ext cx="5135727" cy="274320"/>
           </a:xfrm>
           <a:prstGeom prst="rect">
             <a:avLst/>
@@ -10440,29 +10222,29 @@
               <a:spcAft>
                 <a:spcPts val="0"/>
               </a:spcAft>
-              <a:defRPr sz="1100" b="0">
+              <a:defRPr sz="900" b="0">
                 <a:solidFill>
                   <a:srgbClr val="1A1A2E"/>
                 </a:solidFill>
-                <a:latin typeface="Arial"/>
-              </a:defRPr>
-            </a:pPr>
-            <a:r>
-              <a:t>• Fokus pada interoperabilitas</a:t>
-            </a:r>
-          </a:p>
-        </p:txBody>
-      </p:sp>
-      <p:sp>
-        <p:nvSpPr>
-          <p:cNvPr id="22" name="TextBox 21"/>
+                <a:latin typeface="Calibri"/>
+              </a:defRPr>
+            </a:pPr>
+            <a:r>
+              <a:t>• Satu platform layanan terpadu</a:t>
+            </a:r>
+          </a:p>
+        </p:txBody>
+      </p:sp>
+      <p:sp>
+        <p:nvSpPr>
+          <p:cNvPr id="23" name="TextBox 22"/>
           <p:cNvSpPr txBox="1"/>
           <p:nvPr/>
         </p:nvSpPr>
         <p:spPr>
           <a:xfrm>
-            <a:off x="6415887" y="1956815"/>
-            <a:ext cx="5090007" cy="228600"/>
+            <a:off x="6370167" y="2624327"/>
+            <a:ext cx="5135727" cy="274320"/>
           </a:xfrm>
           <a:prstGeom prst="rect">
             <a:avLst/>
@@ -10480,29 +10262,29 @@
               <a:spcAft>
                 <a:spcPts val="0"/>
               </a:spcAft>
-              <a:defRPr sz="1100" b="0">
+              <a:defRPr sz="900" b="0">
                 <a:solidFill>
                   <a:srgbClr val="1A1A2E"/>
                 </a:solidFill>
-                <a:latin typeface="Arial"/>
-              </a:defRPr>
-            </a:pPr>
-            <a:r>
-              <a:t>• Sistem yang ada saling berbicara</a:t>
-            </a:r>
-          </a:p>
-        </p:txBody>
-      </p:sp>
-      <p:sp>
-        <p:nvSpPr>
-          <p:cNvPr id="23" name="TextBox 22"/>
+                <a:latin typeface="Calibri"/>
+              </a:defRPr>
+            </a:pPr>
+            <a:r>
+              <a:t>• Efisien, transparan, tepercaya</a:t>
+            </a:r>
+          </a:p>
+        </p:txBody>
+      </p:sp>
+      <p:sp>
+        <p:nvSpPr>
+          <p:cNvPr id="24" name="TextBox 23"/>
           <p:cNvSpPr txBox="1"/>
           <p:nvPr/>
         </p:nvSpPr>
         <p:spPr>
           <a:xfrm>
-            <a:off x="6415887" y="2194559"/>
-            <a:ext cx="5090007" cy="228600"/>
+            <a:off x="6370167" y="2916935"/>
+            <a:ext cx="5135727" cy="274320"/>
           </a:xfrm>
           <a:prstGeom prst="rect">
             <a:avLst/>
@@ -10520,142 +10302,22 @@
               <a:spcAft>
                 <a:spcPts val="0"/>
               </a:spcAft>
-              <a:defRPr sz="1100" b="0">
+              <a:defRPr sz="900" b="0">
                 <a:solidFill>
                   <a:srgbClr val="1A1A2E"/>
                 </a:solidFill>
-                <a:latin typeface="Arial"/>
-              </a:defRPr>
-            </a:pPr>
-            <a:r>
-              <a:t>• Bertukar data via Hub SPLP</a:t>
-            </a:r>
-          </a:p>
-        </p:txBody>
-      </p:sp>
-      <p:sp>
-        <p:nvSpPr>
-          <p:cNvPr id="24" name="TextBox 23"/>
-          <p:cNvSpPr txBox="1"/>
-          <p:nvPr/>
-        </p:nvSpPr>
-        <p:spPr>
-          <a:xfrm>
-            <a:off x="6415887" y="2432303"/>
-            <a:ext cx="5090007" cy="228600"/>
-          </a:xfrm>
-          <a:prstGeom prst="rect">
-            <a:avLst/>
-          </a:prstGeom>
-          <a:noFill/>
-        </p:spPr>
-        <p:txBody>
-          <a:bodyPr wrap="square"/>
-          <a:lstStyle/>
-          <a:p>
-            <a:pPr algn="l">
-              <a:spcBef>
-                <a:spcPts val="0"/>
-              </a:spcBef>
-              <a:spcAft>
-                <a:spcPts val="0"/>
-              </a:spcAft>
-              <a:defRPr sz="1100" b="0">
-                <a:solidFill>
-                  <a:srgbClr val="1A1A2E"/>
-                </a:solidFill>
-                <a:latin typeface="Arial"/>
-              </a:defRPr>
-            </a:pPr>
-            <a:r>
-              <a:t>• Satu pintu layanan — masyarakat cukup 1 aplikasi</a:t>
-            </a:r>
-          </a:p>
-        </p:txBody>
-      </p:sp>
-      <p:sp>
-        <p:nvSpPr>
-          <p:cNvPr id="25" name="TextBox 24"/>
-          <p:cNvSpPr txBox="1"/>
-          <p:nvPr/>
-        </p:nvSpPr>
-        <p:spPr>
-          <a:xfrm>
-            <a:off x="6415887" y="2670047"/>
-            <a:ext cx="5090007" cy="228600"/>
-          </a:xfrm>
-          <a:prstGeom prst="rect">
-            <a:avLst/>
-          </a:prstGeom>
-          <a:noFill/>
-        </p:spPr>
-        <p:txBody>
-          <a:bodyPr wrap="square"/>
-          <a:lstStyle/>
-          <a:p>
-            <a:pPr algn="l">
-              <a:spcBef>
-                <a:spcPts val="0"/>
-              </a:spcBef>
-              <a:spcAft>
-                <a:spcPts val="0"/>
-              </a:spcAft>
-              <a:defRPr sz="1100" b="0">
-                <a:solidFill>
-                  <a:srgbClr val="1A1A2E"/>
-                </a:solidFill>
-                <a:latin typeface="Arial"/>
-              </a:defRPr>
-            </a:pPr>
-            <a:r>
-              <a:t>• Efisien, aman, dan tepercaya</a:t>
-            </a:r>
-          </a:p>
-        </p:txBody>
-      </p:sp>
-      <p:sp>
-        <p:nvSpPr>
-          <p:cNvPr id="26" name="TextBox 25"/>
-          <p:cNvSpPr txBox="1"/>
-          <p:nvPr/>
-        </p:nvSpPr>
-        <p:spPr>
-          <a:xfrm>
-            <a:off x="6415887" y="2907791"/>
-            <a:ext cx="5090007" cy="228600"/>
-          </a:xfrm>
-          <a:prstGeom prst="rect">
-            <a:avLst/>
-          </a:prstGeom>
-          <a:noFill/>
-        </p:spPr>
-        <p:txBody>
-          <a:bodyPr wrap="square"/>
-          <a:lstStyle/>
-          <a:p>
-            <a:pPr algn="l">
-              <a:spcBef>
-                <a:spcPts val="0"/>
-              </a:spcBef>
-              <a:spcAft>
-                <a:spcPts val="0"/>
-              </a:spcAft>
-              <a:defRPr sz="1100" b="0">
-                <a:solidFill>
-                  <a:srgbClr val="1A1A2E"/>
-                </a:solidFill>
-                <a:latin typeface="Arial"/>
-              </a:defRPr>
-            </a:pPr>
-            <a:r>
-              <a:t>• Kolaborasi antar instansi</a:t>
-            </a:r>
-          </a:p>
-        </p:txBody>
-      </p:sp>
-      <p:sp>
-        <p:nvSpPr>
-          <p:cNvPr id="27" name="Rectangle 26"/>
+                <a:latin typeface="Calibri"/>
+              </a:defRPr>
+            </a:pPr>
+            <a:r>
+              <a:t>• Masyarakat cukup satu aplikasi</a:t>
+            </a:r>
+          </a:p>
+        </p:txBody>
+      </p:sp>
+      <p:sp>
+        <p:nvSpPr>
+          <p:cNvPr id="25" name="Rectangle 24"/>
           <p:cNvSpPr/>
           <p:nvPr/>
         </p:nvSpPr>
@@ -10698,7 +10360,7 @@
       </p:sp>
       <p:sp>
         <p:nvSpPr>
-          <p:cNvPr id="28" name="TextBox 27"/>
+          <p:cNvPr id="26" name="TextBox 25"/>
           <p:cNvSpPr txBox="1"/>
           <p:nvPr/>
         </p:nvSpPr>
@@ -10727,18 +10389,18 @@
                 <a:solidFill>
                   <a:srgbClr val="64748B"/>
                 </a:solidFill>
-                <a:latin typeface="Arial"/>
-              </a:defRPr>
-            </a:pPr>
-            <a:r>
-              <a:t>Sumber: Perpres No. 95/2018, Perpres No. 132/2022, &amp; Pedoman SPBE Kemenpan-RB</a:t>
-            </a:r>
-          </a:p>
-        </p:txBody>
-      </p:sp>
-      <p:sp>
-        <p:nvSpPr>
-          <p:cNvPr id="29" name="TextBox 28"/>
+                <a:latin typeface="Calibri"/>
+              </a:defRPr>
+            </a:pPr>
+            <a:r>
+              <a:t>Penerapan Sistem Pemerintahan Berbasis Elektronik (SPBE)</a:t>
+            </a:r>
+          </a:p>
+        </p:txBody>
+      </p:sp>
+      <p:sp>
+        <p:nvSpPr>
+          <p:cNvPr id="27" name="TextBox 26"/>
           <p:cNvSpPr txBox="1"/>
           <p:nvPr/>
         </p:nvSpPr>
@@ -10767,7 +10429,7 @@
                 <a:solidFill>
                   <a:srgbClr val="64748B"/>
                 </a:solidFill>
-                <a:latin typeface="Arial"/>
+                <a:latin typeface="Calibri"/>
               </a:defRPr>
             </a:pPr>
             <a:r>
@@ -11005,7 +10667,7 @@
                 <a:solidFill>
                   <a:srgbClr val="C8962E"/>
                 </a:solidFill>
-                <a:latin typeface="Arial"/>
+                <a:latin typeface="Calibri"/>
               </a:defRPr>
             </a:pPr>
             <a:r>
@@ -11045,7 +10707,7 @@
                 <a:solidFill>
                   <a:srgbClr val="FFFFFF"/>
                 </a:solidFill>
-                <a:latin typeface="Arial"/>
+                <a:latin typeface="Calibri"/>
               </a:defRPr>
             </a:pPr>
             <a:r>
@@ -11085,15 +10747,15 @@
                 <a:solidFill>
                   <a:srgbClr val="E8EDF5"/>
                 </a:solidFill>
-                <a:latin typeface="Arial"/>
-              </a:defRPr>
-            </a:pPr>
-            <a:r>
-              <a:t>Mewujudkan Birokrasi Terintegrasi, Efisien, Aman, dan Tepercaya</a:t>
+                <a:latin typeface="Calibri"/>
+              </a:defRPr>
+            </a:pPr>
+            <a:r>
+              <a:t>Bersama Mewujudkan Birokrasi Digital</a:t>
             </a:r>
             <a:br/>
             <a:r>
-              <a:t>Melalui Transformasi SPBE</a:t>
+              <a:t>Terintegrasi, Efisien, Aman, dan Tepercaya</a:t>
             </a:r>
           </a:p>
         </p:txBody>
@@ -11129,7 +10791,7 @@
                 <a:solidFill>
                   <a:srgbClr val="64748B"/>
                 </a:solidFill>
-                <a:latin typeface="Arial"/>
+                <a:latin typeface="Calibri"/>
               </a:defRPr>
             </a:pPr>
             <a:r>
@@ -11367,11 +11029,11 @@
                 <a:solidFill>
                   <a:srgbClr val="FFFFFF"/>
                 </a:solidFill>
-                <a:latin typeface="Arial Black"/>
-              </a:defRPr>
-            </a:pPr>
-            <a:r>
-              <a:t>5 Pokok Bahasan Memandu Transformasi SPBE Instansi</a:t>
+                <a:latin typeface="Georgia"/>
+              </a:defRPr>
+            </a:pPr>
+            <a:r>
+              <a:t>Empat Pilar Utama Menuju Transformasi Digital Pemerintahan</a:t>
             </a:r>
           </a:p>
         </p:txBody>
@@ -11407,11 +11069,11 @@
                 <a:solidFill>
                   <a:srgbClr val="64748B"/>
                 </a:solidFill>
-                <a:latin typeface="Arial"/>
-              </a:defRPr>
-            </a:pPr>
-            <a:r>
-              <a:t>Daftar Isi</a:t>
+                <a:latin typeface="Calibri"/>
+              </a:defRPr>
+            </a:pPr>
+            <a:r>
+              <a:t>Penerapan SPBE</a:t>
             </a:r>
           </a:p>
         </p:txBody>
@@ -11507,7 +11169,7 @@
                 <a:solidFill>
                   <a:srgbClr val="FFFFFF"/>
                 </a:solidFill>
-                <a:latin typeface="Arial"/>
+                <a:latin typeface="Calibri"/>
               </a:defRPr>
             </a:pPr>
             <a:r>
@@ -11547,11 +11209,11 @@
                 <a:solidFill>
                   <a:srgbClr val="1A1A2E"/>
                 </a:solidFill>
-                <a:latin typeface="Arial"/>
-              </a:defRPr>
-            </a:pPr>
-            <a:r>
-              <a:t>Konsep Dasar &amp; Landasan Hukum SPBE</a:t>
+                <a:latin typeface="Calibri"/>
+              </a:defRPr>
+            </a:pPr>
+            <a:r>
+              <a:t>Transformasi SPBE</a:t>
             </a:r>
           </a:p>
         </p:txBody>
@@ -11647,7 +11309,7 @@
                 <a:solidFill>
                   <a:srgbClr val="FFFFFF"/>
                 </a:solidFill>
-                <a:latin typeface="Arial"/>
+                <a:latin typeface="Calibri"/>
               </a:defRPr>
             </a:pPr>
             <a:r>
@@ -11687,11 +11349,11 @@
                 <a:solidFill>
                   <a:srgbClr val="1A1A2E"/>
                 </a:solidFill>
-                <a:latin typeface="Arial"/>
-              </a:defRPr>
-            </a:pPr>
-            <a:r>
-              <a:t>Kerangka Arsitektur SPBE</a:t>
+                <a:latin typeface="Calibri"/>
+              </a:defRPr>
+            </a:pPr>
+            <a:r>
+              <a:t>Arsitektur &amp; Kerangka Kerja</a:t>
             </a:r>
           </a:p>
         </p:txBody>
@@ -11787,7 +11449,7 @@
                 <a:solidFill>
                   <a:srgbClr val="FFFFFF"/>
                 </a:solidFill>
-                <a:latin typeface="Arial"/>
+                <a:latin typeface="Calibri"/>
               </a:defRPr>
             </a:pPr>
             <a:r>
@@ -11827,11 +11489,11 @@
                 <a:solidFill>
                   <a:srgbClr val="1A1A2E"/>
                 </a:solidFill>
-                <a:latin typeface="Arial"/>
-              </a:defRPr>
-            </a:pPr>
-            <a:r>
-              <a:t>4 Domain Evaluasi Tingkat Kematangan</a:t>
+                <a:latin typeface="Calibri"/>
+              </a:defRPr>
+            </a:pPr>
+            <a:r>
+              <a:t>4 Domain Utama Evaluasi SPBE</a:t>
             </a:r>
           </a:p>
         </p:txBody>
@@ -11927,7 +11589,7 @@
                 <a:solidFill>
                   <a:srgbClr val="FFFFFF"/>
                 </a:solidFill>
-                <a:latin typeface="Arial"/>
+                <a:latin typeface="Calibri"/>
               </a:defRPr>
             </a:pPr>
             <a:r>
@@ -11967,7 +11629,7 @@
                 <a:solidFill>
                   <a:srgbClr val="1A1A2E"/>
                 </a:solidFill>
-                <a:latin typeface="Arial"/>
+                <a:latin typeface="Calibri"/>
               </a:defRPr>
             </a:pPr>
             <a:r>
@@ -12067,7 +11729,7 @@
                 <a:solidFill>
                   <a:srgbClr val="FFFFFF"/>
                 </a:solidFill>
-                <a:latin typeface="Arial"/>
+                <a:latin typeface="Calibri"/>
               </a:defRPr>
             </a:pPr>
             <a:r>
@@ -12107,11 +11769,11 @@
                 <a:solidFill>
                   <a:srgbClr val="1A1A2E"/>
                 </a:solidFill>
-                <a:latin typeface="Arial"/>
-              </a:defRPr>
-            </a:pPr>
-            <a:r>
-              <a:t>Prinsip Interoperabilitas</a:t>
+                <a:latin typeface="Calibri"/>
+              </a:defRPr>
+            </a:pPr>
+            <a:r>
+              <a:t>Prinsip Utama &amp; Kesimpulan</a:t>
             </a:r>
           </a:p>
         </p:txBody>
@@ -12190,11 +11852,11 @@
                 <a:solidFill>
                   <a:srgbClr val="64748B"/>
                 </a:solidFill>
-                <a:latin typeface="Arial"/>
-              </a:defRPr>
-            </a:pPr>
-            <a:r>
-              <a:t>Sumber: Perpres No. 95/2018, Perpres No. 132/2022, &amp; Pedoman SPBE Kemenpan-RB</a:t>
+                <a:latin typeface="Calibri"/>
+              </a:defRPr>
+            </a:pPr>
+            <a:r>
+              <a:t>Penerapan Sistem Pemerintahan Berbasis Elektronik (SPBE)</a:t>
             </a:r>
           </a:p>
         </p:txBody>
@@ -12230,7 +11892,7 @@
                 <a:solidFill>
                   <a:srgbClr val="64748B"/>
                 </a:solidFill>
-                <a:latin typeface="Arial"/>
+                <a:latin typeface="Calibri"/>
               </a:defRPr>
             </a:pPr>
             <a:r>
@@ -12511,15 +12173,15 @@
                 <a:solidFill>
                   <a:srgbClr val="FFFFFF"/>
                 </a:solidFill>
-                <a:latin typeface="Arial"/>
-              </a:defRPr>
-            </a:pPr>
-            <a:r>
-              <a:t>KONSEP DASAR</a:t>
+                <a:latin typeface="Calibri"/>
+              </a:defRPr>
+            </a:pPr>
+            <a:r>
+              <a:t>BAB 1</a:t>
             </a:r>
             <a:br/>
             <a:r>
-              <a:t>SPBE</a:t>
+              <a:t>TRANSFORMASI SPBE</a:t>
             </a:r>
           </a:p>
         </p:txBody>
@@ -12555,11 +12217,11 @@
                 <a:solidFill>
                   <a:srgbClr val="C8962E"/>
                 </a:solidFill>
-                <a:latin typeface="Arial"/>
-              </a:defRPr>
-            </a:pPr>
-            <a:r>
-              <a:t>Transformasi menyeluruh, bukan sekadar digitalisasi</a:t>
+                <a:latin typeface="Calibri"/>
+              </a:defRPr>
+            </a:pPr>
+            <a:r>
+              <a:t>Digitalisasi Bukan Sekadar Aplikasi — Reformasi Birokrasi Total</a:t>
             </a:r>
           </a:p>
         </p:txBody>
@@ -12595,11 +12257,11 @@
                 <a:solidFill>
                   <a:srgbClr val="64748B"/>
                 </a:solidFill>
-                <a:latin typeface="Arial"/>
-              </a:defRPr>
-            </a:pPr>
-            <a:r>
-              <a:t>Paradigma Baru Birokrasi Pemerintahan</a:t>
+                <a:latin typeface="Calibri"/>
+              </a:defRPr>
+            </a:pPr>
+            <a:r>
+              <a:t>Perpres No. 95/2018 &amp; Perpres No. 132/2022</a:t>
             </a:r>
           </a:p>
         </p:txBody>
@@ -12833,11 +12495,11 @@
                 <a:solidFill>
                   <a:srgbClr val="FFFFFF"/>
                 </a:solidFill>
-                <a:latin typeface="Arial Black"/>
-              </a:defRPr>
-            </a:pPr>
-            <a:r>
-              <a:t>SPBE adalah Transformasi Birokrasi, Bukan Sekadar Memindahkan Kertas ke Aplikasi</a:t>
+                <a:latin typeface="Georgia"/>
+              </a:defRPr>
+            </a:pPr>
+            <a:r>
+              <a:t>SPBE Bukan Sekadar Digitalisasi — Ini Transformasi Birokrasi Total</a:t>
             </a:r>
           </a:p>
         </p:txBody>
@@ -12873,11 +12535,11 @@
                 <a:solidFill>
                   <a:srgbClr val="64748B"/>
                 </a:solidFill>
-                <a:latin typeface="Arial"/>
-              </a:defRPr>
-            </a:pPr>
-            <a:r>
-              <a:t>Definisi &amp; Landasan Hukum</a:t>
+                <a:latin typeface="Calibri"/>
+              </a:defRPr>
+            </a:pPr>
+            <a:r>
+              <a:t>Perpres No. 95/2018</a:t>
             </a:r>
           </a:p>
         </p:txBody>
@@ -12891,7 +12553,7 @@
         <p:spPr>
           <a:xfrm>
             <a:off x="548640" y="1051560"/>
-            <a:ext cx="5410047" cy="2537460"/>
+            <a:ext cx="3515258" cy="5349240"/>
           </a:xfrm>
           <a:prstGeom prst="roundRect">
             <a:avLst>
@@ -12938,7 +12600,7 @@
         <p:spPr>
           <a:xfrm>
             <a:off x="548640" y="1051560"/>
-            <a:ext cx="45720" cy="2537460"/>
+            <a:ext cx="45720" cy="5349240"/>
           </a:xfrm>
           <a:prstGeom prst="rect">
             <a:avLst/>
@@ -13046,7 +12708,7 @@
                 <a:solidFill>
                   <a:srgbClr val="FFFFFF"/>
                 </a:solidFill>
-                <a:latin typeface="Arial"/>
+                <a:latin typeface="Calibri"/>
               </a:defRPr>
             </a:pPr>
             <a:r>
@@ -13064,7 +12726,7 @@
         <p:spPr>
           <a:xfrm>
             <a:off x="685800" y="1691639"/>
-            <a:ext cx="5135727" cy="274320"/>
+            <a:ext cx="3240938" cy="274320"/>
           </a:xfrm>
           <a:prstGeom prst="rect">
             <a:avLst/>
@@ -13086,11 +12748,11 @@
                 <a:solidFill>
                   <a:srgbClr val="2563EB"/>
                 </a:solidFill>
-                <a:latin typeface="Arial"/>
-              </a:defRPr>
-            </a:pPr>
-            <a:r>
-              <a:t>Amanat Perpres No. 95/2018</a:t>
+                <a:latin typeface="Calibri"/>
+              </a:defRPr>
+            </a:pPr>
+            <a:r>
+              <a:t>Apa Itu SPBE?</a:t>
             </a:r>
           </a:p>
         </p:txBody>
@@ -13104,7 +12766,7 @@
         <p:spPr>
           <a:xfrm>
             <a:off x="685800" y="2039112"/>
-            <a:ext cx="5135727" cy="274320"/>
+            <a:ext cx="3240938" cy="338328"/>
           </a:xfrm>
           <a:prstGeom prst="rect">
             <a:avLst/>
@@ -13126,11 +12788,11 @@
                 <a:solidFill>
                   <a:srgbClr val="1A1A2E"/>
                 </a:solidFill>
-                <a:latin typeface="Arial"/>
-              </a:defRPr>
-            </a:pPr>
-            <a:r>
-              <a:t>• SPBE adalah penyelenggaraan pemerintahan yang memanfaatkan TIK</a:t>
+                <a:latin typeface="Calibri"/>
+              </a:defRPr>
+            </a:pPr>
+            <a:r>
+              <a:t>• Penyelenggaraan pemerintahan berbasis elektronik</a:t>
             </a:r>
           </a:p>
         </p:txBody>
@@ -13143,8 +12805,8 @@
         </p:nvSpPr>
         <p:spPr>
           <a:xfrm>
-            <a:off x="685800" y="2331720"/>
-            <a:ext cx="5135727" cy="274320"/>
+            <a:off x="685800" y="2395728"/>
+            <a:ext cx="3240938" cy="274320"/>
           </a:xfrm>
           <a:prstGeom prst="rect">
             <a:avLst/>
@@ -13166,11 +12828,11 @@
                 <a:solidFill>
                   <a:srgbClr val="1A1A2E"/>
                 </a:solidFill>
-                <a:latin typeface="Arial"/>
-              </a:defRPr>
-            </a:pPr>
-            <a:r>
-              <a:t>• Memberi layanan kepada instansi, ASN, pelaku bisnis, dan masyarakat</a:t>
+                <a:latin typeface="Calibri"/>
+              </a:defRPr>
+            </a:pPr>
+            <a:r>
+              <a:t>• Menciptakan birokrasi terintegrasi</a:t>
             </a:r>
           </a:p>
         </p:txBody>
@@ -13183,8 +12845,8 @@
         </p:nvSpPr>
         <p:spPr>
           <a:xfrm>
-            <a:off x="685800" y="2624327"/>
-            <a:ext cx="5135727" cy="274320"/>
+            <a:off x="685800" y="2688336"/>
+            <a:ext cx="3240938" cy="274320"/>
           </a:xfrm>
           <a:prstGeom prst="rect">
             <a:avLst/>
@@ -13206,11 +12868,11 @@
                 <a:solidFill>
                   <a:srgbClr val="1A1A2E"/>
                 </a:solidFill>
-                <a:latin typeface="Arial"/>
-              </a:defRPr>
-            </a:pPr>
-            <a:r>
-              <a:t>• Menjadi dasar bagi seluruh transformasi digital pemerintahan</a:t>
+                <a:latin typeface="Calibri"/>
+              </a:defRPr>
+            </a:pPr>
+            <a:r>
+              <a:t>• Efisien, aman, dan tepercaya</a:t>
             </a:r>
           </a:p>
         </p:txBody>
@@ -13223,8 +12885,8 @@
         </p:nvSpPr>
         <p:spPr>
           <a:xfrm>
-            <a:off x="6233007" y="1051560"/>
-            <a:ext cx="5410047" cy="2537460"/>
+            <a:off x="4338218" y="1051560"/>
+            <a:ext cx="3515258" cy="5349240"/>
           </a:xfrm>
           <a:prstGeom prst="roundRect">
             <a:avLst>
@@ -13270,8 +12932,8 @@
         </p:nvSpPr>
         <p:spPr>
           <a:xfrm>
-            <a:off x="6233007" y="1051560"/>
-            <a:ext cx="45720" cy="2537460"/>
+            <a:off x="4338218" y="1051560"/>
+            <a:ext cx="45720" cy="5349240"/>
           </a:xfrm>
           <a:prstGeom prst="rect">
             <a:avLst/>
@@ -13313,7 +12975,7 @@
         </p:nvSpPr>
         <p:spPr>
           <a:xfrm>
-            <a:off x="6370167" y="1188719"/>
+            <a:off x="4475378" y="1188719"/>
             <a:ext cx="384048" cy="384048"/>
           </a:xfrm>
           <a:prstGeom prst="ellipse">
@@ -13356,7 +13018,7 @@
         </p:nvSpPr>
         <p:spPr>
           <a:xfrm>
-            <a:off x="6446977" y="1247241"/>
+            <a:off x="4552188" y="1247241"/>
             <a:ext cx="230428" cy="230428"/>
           </a:xfrm>
           <a:prstGeom prst="rect">
@@ -13379,7 +13041,7 @@
                 <a:solidFill>
                   <a:srgbClr val="FFFFFF"/>
                 </a:solidFill>
-                <a:latin typeface="Arial"/>
+                <a:latin typeface="Calibri"/>
               </a:defRPr>
             </a:pPr>
             <a:r>
@@ -13396,8 +13058,8 @@
         </p:nvSpPr>
         <p:spPr>
           <a:xfrm>
-            <a:off x="6370167" y="1691639"/>
-            <a:ext cx="5135727" cy="274320"/>
+            <a:off x="4475378" y="1691639"/>
+            <a:ext cx="3240938" cy="274320"/>
           </a:xfrm>
           <a:prstGeom prst="rect">
             <a:avLst/>
@@ -13419,11 +13081,11 @@
                 <a:solidFill>
                   <a:srgbClr val="0B7C72"/>
                 </a:solidFill>
-                <a:latin typeface="Arial"/>
-              </a:defRPr>
-            </a:pPr>
-            <a:r>
-              <a:t>Penyempurnaan Perpres No. 132/2022</a:t>
+                <a:latin typeface="Calibri"/>
+              </a:defRPr>
+            </a:pPr>
+            <a:r>
+              <a:t>Dasar Hukum</a:t>
             </a:r>
           </a:p>
         </p:txBody>
@@ -13436,8 +13098,8 @@
         </p:nvSpPr>
         <p:spPr>
           <a:xfrm>
-            <a:off x="6370167" y="2039112"/>
-            <a:ext cx="5135727" cy="274320"/>
+            <a:off x="4475378" y="2039112"/>
+            <a:ext cx="3240938" cy="274320"/>
           </a:xfrm>
           <a:prstGeom prst="rect">
             <a:avLst/>
@@ -13459,11 +13121,11 @@
                 <a:solidFill>
                   <a:srgbClr val="1A1A2E"/>
                 </a:solidFill>
-                <a:latin typeface="Arial"/>
-              </a:defRPr>
-            </a:pPr>
-            <a:r>
-              <a:t>• Memperkuat arsitektur SPBE nasional yang terpadu</a:t>
+                <a:latin typeface="Calibri"/>
+              </a:defRPr>
+            </a:pPr>
+            <a:r>
+              <a:t>• Perpres No. 95 Tahun 2018</a:t>
             </a:r>
           </a:p>
         </p:txBody>
@@ -13476,8 +13138,8 @@
         </p:nvSpPr>
         <p:spPr>
           <a:xfrm>
-            <a:off x="6370167" y="2331720"/>
-            <a:ext cx="5135727" cy="274320"/>
+            <a:off x="4475378" y="2331720"/>
+            <a:ext cx="3240938" cy="274320"/>
           </a:xfrm>
           <a:prstGeom prst="rect">
             <a:avLst/>
@@ -13499,11 +13161,11 @@
                 <a:solidFill>
                   <a:srgbClr val="1A1A2E"/>
                 </a:solidFill>
-                <a:latin typeface="Arial"/>
-              </a:defRPr>
-            </a:pPr>
-            <a:r>
-              <a:t>• Menekankan interoperabilitas dan keamanan informasi</a:t>
+                <a:latin typeface="Calibri"/>
+              </a:defRPr>
+            </a:pPr>
+            <a:r>
+              <a:t>• Perpres No. 132 Tahun 2022</a:t>
             </a:r>
           </a:p>
         </p:txBody>
@@ -13516,8 +13178,8 @@
         </p:nvSpPr>
         <p:spPr>
           <a:xfrm>
-            <a:off x="6370167" y="2624327"/>
-            <a:ext cx="5135727" cy="274320"/>
+            <a:off x="4475378" y="2624327"/>
+            <a:ext cx="3240938" cy="274320"/>
           </a:xfrm>
           <a:prstGeom prst="rect">
             <a:avLst/>
@@ -13539,11 +13201,11 @@
                 <a:solidFill>
                   <a:srgbClr val="1A1A2E"/>
                 </a:solidFill>
-                <a:latin typeface="Arial"/>
-              </a:defRPr>
-            </a:pPr>
-            <a:r>
-              <a:t>• Mendorong konsolidasi infrastruktur ke Pusat Data Nasional</a:t>
+                <a:latin typeface="Calibri"/>
+              </a:defRPr>
+            </a:pPr>
+            <a:r>
+              <a:t>• Pedoman nasional SPBE</a:t>
             </a:r>
           </a:p>
         </p:txBody>
@@ -13556,8 +13218,8 @@
         </p:nvSpPr>
         <p:spPr>
           <a:xfrm>
-            <a:off x="548640" y="3863339"/>
-            <a:ext cx="5410047" cy="2537460"/>
+            <a:off x="8127796" y="1051560"/>
+            <a:ext cx="3515258" cy="5349240"/>
           </a:xfrm>
           <a:prstGeom prst="roundRect">
             <a:avLst>
@@ -13603,8 +13265,8 @@
         </p:nvSpPr>
         <p:spPr>
           <a:xfrm>
-            <a:off x="548640" y="3863339"/>
-            <a:ext cx="45720" cy="2537460"/>
+            <a:off x="8127796" y="1051560"/>
+            <a:ext cx="45720" cy="5349240"/>
           </a:xfrm>
           <a:prstGeom prst="rect">
             <a:avLst/>
@@ -13646,7 +13308,7 @@
         </p:nvSpPr>
         <p:spPr>
           <a:xfrm>
-            <a:off x="685800" y="4000500"/>
+            <a:off x="8264956" y="1188719"/>
             <a:ext cx="384048" cy="384048"/>
           </a:xfrm>
           <a:prstGeom prst="ellipse">
@@ -13689,7 +13351,7 @@
         </p:nvSpPr>
         <p:spPr>
           <a:xfrm>
-            <a:off x="762609" y="4059021"/>
+            <a:off x="8341766" y="1247241"/>
             <a:ext cx="230428" cy="230428"/>
           </a:xfrm>
           <a:prstGeom prst="rect">
@@ -13712,11 +13374,11 @@
                 <a:solidFill>
                   <a:srgbClr val="FFFFFF"/>
                 </a:solidFill>
-                <a:latin typeface="Arial"/>
-              </a:defRPr>
-            </a:pPr>
-            <a:r>
-              <a:t>🔄</a:t>
+                <a:latin typeface="Calibri"/>
+              </a:defRPr>
+            </a:pPr>
+            <a:r>
+              <a:t>🎯</a:t>
             </a:r>
           </a:p>
         </p:txBody>
@@ -13729,8 +13391,8 @@
         </p:nvSpPr>
         <p:spPr>
           <a:xfrm>
-            <a:off x="685800" y="4503420"/>
-            <a:ext cx="5135727" cy="274320"/>
+            <a:off x="8264956" y="1691639"/>
+            <a:ext cx="3240938" cy="274320"/>
           </a:xfrm>
           <a:prstGeom prst="rect">
             <a:avLst/>
@@ -13752,11 +13414,11 @@
                 <a:solidFill>
                   <a:srgbClr val="A0522D"/>
                 </a:solidFill>
-                <a:latin typeface="Arial"/>
-              </a:defRPr>
-            </a:pPr>
-            <a:r>
-              <a:t>Transformasi Menyeluruh</a:t>
+                <a:latin typeface="Calibri"/>
+              </a:defRPr>
+            </a:pPr>
+            <a:r>
+              <a:t>Tujuan</a:t>
             </a:r>
           </a:p>
         </p:txBody>
@@ -13769,8 +13431,8 @@
         </p:nvSpPr>
         <p:spPr>
           <a:xfrm>
-            <a:off x="685800" y="4850892"/>
-            <a:ext cx="5135727" cy="274320"/>
+            <a:off x="8264956" y="2039112"/>
+            <a:ext cx="3240938" cy="274320"/>
           </a:xfrm>
           <a:prstGeom prst="rect">
             <a:avLst/>
@@ -13792,11 +13454,11 @@
                 <a:solidFill>
                   <a:srgbClr val="1A1A2E"/>
                 </a:solidFill>
-                <a:latin typeface="Arial"/>
-              </a:defRPr>
-            </a:pPr>
-            <a:r>
-              <a:t>• Bukan sekadar digitalisasi proses manual</a:t>
+                <a:latin typeface="Calibri"/>
+              </a:defRPr>
+            </a:pPr>
+            <a:r>
+              <a:t>• Menghilangkan ego sektoral digital</a:t>
             </a:r>
           </a:p>
         </p:txBody>
@@ -13809,8 +13471,8 @@
         </p:nvSpPr>
         <p:spPr>
           <a:xfrm>
-            <a:off x="685800" y="5143500"/>
-            <a:ext cx="5135727" cy="274320"/>
+            <a:off x="8264956" y="2331720"/>
+            <a:ext cx="3240938" cy="274320"/>
           </a:xfrm>
           <a:prstGeom prst="rect">
             <a:avLst/>
@@ -13832,11 +13494,11 @@
                 <a:solidFill>
                   <a:srgbClr val="1A1A2E"/>
                 </a:solidFill>
-                <a:latin typeface="Arial"/>
-              </a:defRPr>
-            </a:pPr>
-            <a:r>
-              <a:t>• Mencakup aspek proses bisnis, data, aplikasi, infrastruktur</a:t>
+                <a:latin typeface="Calibri"/>
+              </a:defRPr>
+            </a:pPr>
+            <a:r>
+              <a:t>• Layanan publik &amp; administrasi prima</a:t>
             </a:r>
           </a:p>
         </p:txBody>
@@ -13849,8 +13511,8 @@
         </p:nvSpPr>
         <p:spPr>
           <a:xfrm>
-            <a:off x="685800" y="5436108"/>
-            <a:ext cx="5135727" cy="274320"/>
+            <a:off x="8264956" y="2624327"/>
+            <a:ext cx="3240938" cy="274320"/>
           </a:xfrm>
           <a:prstGeom prst="rect">
             <a:avLst/>
@@ -13872,351 +13534,18 @@
                 <a:solidFill>
                   <a:srgbClr val="1A1A2E"/>
                 </a:solidFill>
-                <a:latin typeface="Arial"/>
-              </a:defRPr>
-            </a:pPr>
-            <a:r>
-              <a:t>• Menciptakan birokrasi yang terintegrasi, efisien, aman, tepercaya</a:t>
-            </a:r>
-          </a:p>
-        </p:txBody>
-      </p:sp>
-      <p:sp>
-        <p:nvSpPr>
-          <p:cNvPr id="31" name="Rounded Rectangle 30"/>
-          <p:cNvSpPr/>
-          <p:nvPr/>
-        </p:nvSpPr>
-        <p:spPr>
-          <a:xfrm>
-            <a:off x="6233007" y="3863339"/>
-            <a:ext cx="5410047" cy="2537460"/>
-          </a:xfrm>
-          <a:prstGeom prst="roundRect">
-            <a:avLst>
-              <a:gd name="adj" fmla="val 4000"/>
-            </a:avLst>
-          </a:prstGeom>
-          <a:solidFill>
-            <a:srgbClr val="FFFFFF"/>
-          </a:solidFill>
-          <a:ln w="6350">
-            <a:solidFill>
-              <a:srgbClr val="E8EDF5"/>
-            </a:solidFill>
-          </a:ln>
-        </p:spPr>
-        <p:style>
-          <a:lnRef idx="1">
-            <a:schemeClr val="accent1"/>
-          </a:lnRef>
-          <a:fillRef idx="3">
-            <a:schemeClr val="accent1"/>
-          </a:fillRef>
-          <a:effectRef idx="2">
-            <a:schemeClr val="accent1"/>
-          </a:effectRef>
-          <a:fontRef idx="minor">
-            <a:schemeClr val="lt1"/>
-          </a:fontRef>
-        </p:style>
-        <p:txBody>
-          <a:bodyPr rtlCol="0" anchor="ctr"/>
-          <a:lstStyle/>
-          <a:p>
-            <a:pPr algn="ctr"/>
-          </a:p>
-        </p:txBody>
-      </p:sp>
-      <p:sp>
-        <p:nvSpPr>
-          <p:cNvPr id="32" name="Rectangle 31"/>
-          <p:cNvSpPr/>
-          <p:nvPr/>
-        </p:nvSpPr>
-        <p:spPr>
-          <a:xfrm>
-            <a:off x="6233007" y="3863339"/>
-            <a:ext cx="45720" cy="2537460"/>
-          </a:xfrm>
-          <a:prstGeom prst="rect">
-            <a:avLst/>
-          </a:prstGeom>
-          <a:solidFill>
-            <a:srgbClr val="1B3A6B"/>
-          </a:solidFill>
-          <a:ln>
-            <a:noFill/>
-          </a:ln>
-        </p:spPr>
-        <p:style>
-          <a:lnRef idx="1">
-            <a:schemeClr val="accent1"/>
-          </a:lnRef>
-          <a:fillRef idx="3">
-            <a:schemeClr val="accent1"/>
-          </a:fillRef>
-          <a:effectRef idx="2">
-            <a:schemeClr val="accent1"/>
-          </a:effectRef>
-          <a:fontRef idx="minor">
-            <a:schemeClr val="lt1"/>
-          </a:fontRef>
-        </p:style>
-        <p:txBody>
-          <a:bodyPr rtlCol="0" anchor="ctr"/>
-          <a:lstStyle/>
-          <a:p>
-            <a:pPr algn="ctr"/>
-          </a:p>
-        </p:txBody>
-      </p:sp>
-      <p:sp>
-        <p:nvSpPr>
-          <p:cNvPr id="33" name="Oval 32"/>
-          <p:cNvSpPr/>
-          <p:nvPr/>
-        </p:nvSpPr>
-        <p:spPr>
-          <a:xfrm>
-            <a:off x="6370167" y="4000500"/>
-            <a:ext cx="384048" cy="384048"/>
-          </a:xfrm>
-          <a:prstGeom prst="ellipse">
-            <a:avLst/>
-          </a:prstGeom>
-          <a:solidFill>
-            <a:srgbClr val="1B3A6B"/>
-          </a:solidFill>
-          <a:ln>
-            <a:noFill/>
-          </a:ln>
-        </p:spPr>
-        <p:style>
-          <a:lnRef idx="1">
-            <a:schemeClr val="accent1"/>
-          </a:lnRef>
-          <a:fillRef idx="3">
-            <a:schemeClr val="accent1"/>
-          </a:fillRef>
-          <a:effectRef idx="2">
-            <a:schemeClr val="accent1"/>
-          </a:effectRef>
-          <a:fontRef idx="minor">
-            <a:schemeClr val="lt1"/>
-          </a:fontRef>
-        </p:style>
-        <p:txBody>
-          <a:bodyPr rtlCol="0" anchor="ctr"/>
-          <a:lstStyle/>
-          <a:p>
-            <a:pPr algn="ctr"/>
-          </a:p>
-        </p:txBody>
-      </p:sp>
-      <p:sp>
-        <p:nvSpPr>
-          <p:cNvPr id="34" name="TextBox 33"/>
-          <p:cNvSpPr txBox="1"/>
-          <p:nvPr/>
-        </p:nvSpPr>
-        <p:spPr>
-          <a:xfrm>
-            <a:off x="6446977" y="4059021"/>
-            <a:ext cx="230428" cy="230428"/>
-          </a:xfrm>
-          <a:prstGeom prst="rect">
-            <a:avLst/>
-          </a:prstGeom>
-          <a:noFill/>
-        </p:spPr>
-        <p:txBody>
-          <a:bodyPr wrap="square"/>
-          <a:lstStyle/>
-          <a:p>
-            <a:pPr algn="ctr">
-              <a:spcBef>
-                <a:spcPts val="0"/>
-              </a:spcBef>
-              <a:spcAft>
-                <a:spcPts val="0"/>
-              </a:spcAft>
-              <a:defRPr sz="1200" b="0">
-                <a:solidFill>
-                  <a:srgbClr val="FFFFFF"/>
-                </a:solidFill>
-                <a:latin typeface="Arial"/>
-              </a:defRPr>
-            </a:pPr>
-            <a:r>
-              <a:t>🚫</a:t>
-            </a:r>
-          </a:p>
-        </p:txBody>
-      </p:sp>
-      <p:sp>
-        <p:nvSpPr>
-          <p:cNvPr id="35" name="TextBox 34"/>
-          <p:cNvSpPr txBox="1"/>
-          <p:nvPr/>
-        </p:nvSpPr>
-        <p:spPr>
-          <a:xfrm>
-            <a:off x="6370167" y="4503420"/>
-            <a:ext cx="5135727" cy="274320"/>
-          </a:xfrm>
-          <a:prstGeom prst="rect">
-            <a:avLst/>
-          </a:prstGeom>
-          <a:noFill/>
-        </p:spPr>
-        <p:txBody>
-          <a:bodyPr wrap="square"/>
-          <a:lstStyle/>
-          <a:p>
-            <a:pPr algn="l">
-              <a:spcBef>
-                <a:spcPts val="0"/>
-              </a:spcBef>
-              <a:spcAft>
-                <a:spcPts val="0"/>
-              </a:spcAft>
-              <a:defRPr sz="1300" b="1">
-                <a:solidFill>
-                  <a:srgbClr val="1B3A6B"/>
-                </a:solidFill>
-                <a:latin typeface="Arial"/>
-              </a:defRPr>
-            </a:pPr>
-            <a:r>
-              <a:t>Antisipasi Ego Sektoral Digital</a:t>
-            </a:r>
-          </a:p>
-        </p:txBody>
-      </p:sp>
-      <p:sp>
-        <p:nvSpPr>
-          <p:cNvPr id="36" name="TextBox 35"/>
-          <p:cNvSpPr txBox="1"/>
-          <p:nvPr/>
-        </p:nvSpPr>
-        <p:spPr>
-          <a:xfrm>
-            <a:off x="6370167" y="4850892"/>
-            <a:ext cx="5135727" cy="274320"/>
-          </a:xfrm>
-          <a:prstGeom prst="rect">
-            <a:avLst/>
-          </a:prstGeom>
-          <a:noFill/>
-        </p:spPr>
-        <p:txBody>
-          <a:bodyPr wrap="square"/>
-          <a:lstStyle/>
-          <a:p>
-            <a:pPr algn="l">
-              <a:spcBef>
-                <a:spcPts val="0"/>
-              </a:spcBef>
-              <a:spcAft>
-                <a:spcPts val="0"/>
-              </a:spcAft>
-              <a:defRPr sz="900" b="0">
-                <a:solidFill>
-                  <a:srgbClr val="1A1A2E"/>
-                </a:solidFill>
-                <a:latin typeface="Arial"/>
-              </a:defRPr>
-            </a:pPr>
-            <a:r>
-              <a:t>• Digitalisasi harus bersandar pada kerangka kerja terpadu</a:t>
-            </a:r>
-          </a:p>
-        </p:txBody>
-      </p:sp>
-      <p:sp>
-        <p:nvSpPr>
-          <p:cNvPr id="37" name="TextBox 36"/>
-          <p:cNvSpPr txBox="1"/>
-          <p:nvPr/>
-        </p:nvSpPr>
-        <p:spPr>
-          <a:xfrm>
-            <a:off x="6370167" y="5143500"/>
-            <a:ext cx="5135727" cy="274320"/>
-          </a:xfrm>
-          <a:prstGeom prst="rect">
-            <a:avLst/>
-          </a:prstGeom>
-          <a:noFill/>
-        </p:spPr>
-        <p:txBody>
-          <a:bodyPr wrap="square"/>
-          <a:lstStyle/>
-          <a:p>
-            <a:pPr algn="l">
-              <a:spcBef>
-                <a:spcPts val="0"/>
-              </a:spcBef>
-              <a:spcAft>
-                <a:spcPts val="0"/>
-              </a:spcAft>
-              <a:defRPr sz="900" b="0">
-                <a:solidFill>
-                  <a:srgbClr val="1A1A2E"/>
-                </a:solidFill>
-                <a:latin typeface="Arial"/>
-              </a:defRPr>
-            </a:pPr>
-            <a:r>
-              <a:t>• Setiap instansi terikat dalam arsitektur SPBE nasional</a:t>
-            </a:r>
-          </a:p>
-        </p:txBody>
-      </p:sp>
-      <p:sp>
-        <p:nvSpPr>
-          <p:cNvPr id="38" name="TextBox 37"/>
-          <p:cNvSpPr txBox="1"/>
-          <p:nvPr/>
-        </p:nvSpPr>
-        <p:spPr>
-          <a:xfrm>
-            <a:off x="6370167" y="5436108"/>
-            <a:ext cx="5135727" cy="274320"/>
-          </a:xfrm>
-          <a:prstGeom prst="rect">
-            <a:avLst/>
-          </a:prstGeom>
-          <a:noFill/>
-        </p:spPr>
-        <p:txBody>
-          <a:bodyPr wrap="square"/>
-          <a:lstStyle/>
-          <a:p>
-            <a:pPr algn="l">
-              <a:spcBef>
-                <a:spcPts val="0"/>
-              </a:spcBef>
-              <a:spcAft>
-                <a:spcPts val="0"/>
-              </a:spcAft>
-              <a:defRPr sz="900" b="0">
-                <a:solidFill>
-                  <a:srgbClr val="1A1A2E"/>
-                </a:solidFill>
-                <a:latin typeface="Arial"/>
-              </a:defRPr>
-            </a:pPr>
-            <a:r>
-              <a:t>• Menghindari pembuatan aplikasi sektoral yang tumpang tindih</a:t>
-            </a:r>
-          </a:p>
-        </p:txBody>
-      </p:sp>
-      <p:sp>
-        <p:nvSpPr>
-          <p:cNvPr id="39" name="Rectangle 38"/>
+                <a:latin typeface="Calibri"/>
+              </a:defRPr>
+            </a:pPr>
+            <a:r>
+              <a:t>• Birokrasi modern &amp; transparan</a:t>
+            </a:r>
+          </a:p>
+        </p:txBody>
+      </p:sp>
+      <p:sp>
+        <p:nvSpPr>
+          <p:cNvPr id="31" name="Rectangle 30"/>
           <p:cNvSpPr/>
           <p:nvPr/>
         </p:nvSpPr>
@@ -14259,7 +13588,7 @@
       </p:sp>
       <p:sp>
         <p:nvSpPr>
-          <p:cNvPr id="40" name="TextBox 39"/>
+          <p:cNvPr id="32" name="TextBox 31"/>
           <p:cNvSpPr txBox="1"/>
           <p:nvPr/>
         </p:nvSpPr>
@@ -14288,18 +13617,18 @@
                 <a:solidFill>
                   <a:srgbClr val="64748B"/>
                 </a:solidFill>
-                <a:latin typeface="Arial"/>
-              </a:defRPr>
-            </a:pPr>
-            <a:r>
-              <a:t>Sumber: Perpres No. 95/2018, Perpres No. 132/2022, &amp; Pedoman SPBE Kemenpan-RB</a:t>
-            </a:r>
-          </a:p>
-        </p:txBody>
-      </p:sp>
-      <p:sp>
-        <p:nvSpPr>
-          <p:cNvPr id="41" name="TextBox 40"/>
+                <a:latin typeface="Calibri"/>
+              </a:defRPr>
+            </a:pPr>
+            <a:r>
+              <a:t>Penerapan Sistem Pemerintahan Berbasis Elektronik (SPBE)</a:t>
+            </a:r>
+          </a:p>
+        </p:txBody>
+      </p:sp>
+      <p:sp>
+        <p:nvSpPr>
+          <p:cNvPr id="33" name="TextBox 32"/>
           <p:cNvSpPr txBox="1"/>
           <p:nvPr/>
         </p:nvSpPr>
@@ -14328,7 +13657,7 @@
                 <a:solidFill>
                   <a:srgbClr val="64748B"/>
                 </a:solidFill>
-                <a:latin typeface="Arial"/>
+                <a:latin typeface="Calibri"/>
               </a:defRPr>
             </a:pPr>
             <a:r>
@@ -14523,11 +13852,11 @@
                 <a:solidFill>
                   <a:srgbClr val="FFFFFF"/>
                 </a:solidFill>
-                <a:latin typeface="Arial Black"/>
-              </a:defRPr>
-            </a:pPr>
-            <a:r>
-              <a:t>SPBE Bukan Digitalisasi — Ini Transformasi Sistemik Birokrasi</a:t>
+                <a:latin typeface="Georgia"/>
+              </a:defRPr>
+            </a:pPr>
+            <a:r>
+              <a:t>Digitalisasi Pemerintahan Harus Bersandar pada Kerangka Kerja Terpadu</a:t>
             </a:r>
           </a:p>
         </p:txBody>
@@ -14563,11 +13892,11 @@
                 <a:solidFill>
                   <a:srgbClr val="64748B"/>
                 </a:solidFill>
-                <a:latin typeface="Arial"/>
-              </a:defRPr>
-            </a:pPr>
-            <a:r>
-              <a:t>Perbedaan Mendasar</a:t>
+                <a:latin typeface="Calibri"/>
+              </a:defRPr>
+            </a:pPr>
+            <a:r>
+              <a:t>Prinsip Dasar SPBE</a:t>
             </a:r>
           </a:p>
         </p:txBody>
@@ -14634,7 +13963,7 @@
             <a:avLst/>
           </a:prstGeom>
           <a:solidFill>
-            <a:srgbClr val="DC2626"/>
+            <a:srgbClr val="2563EB"/>
           </a:solidFill>
           <a:ln>
             <a:noFill/>
@@ -14664,14 +13993,97 @@
       </p:sp>
       <p:sp>
         <p:nvSpPr>
-          <p:cNvPr id="9" name="TextBox 8"/>
+          <p:cNvPr id="9" name="Oval 8"/>
+          <p:cNvSpPr/>
+          <p:nvPr/>
+        </p:nvSpPr>
+        <p:spPr>
+          <a:xfrm>
+            <a:off x="685800" y="1188719"/>
+            <a:ext cx="384048" cy="384048"/>
+          </a:xfrm>
+          <a:prstGeom prst="ellipse">
+            <a:avLst/>
+          </a:prstGeom>
+          <a:solidFill>
+            <a:srgbClr val="2563EB"/>
+          </a:solidFill>
+          <a:ln>
+            <a:noFill/>
+          </a:ln>
+        </p:spPr>
+        <p:style>
+          <a:lnRef idx="1">
+            <a:schemeClr val="accent1"/>
+          </a:lnRef>
+          <a:fillRef idx="3">
+            <a:schemeClr val="accent1"/>
+          </a:fillRef>
+          <a:effectRef idx="2">
+            <a:schemeClr val="accent1"/>
+          </a:effectRef>
+          <a:fontRef idx="minor">
+            <a:schemeClr val="lt1"/>
+          </a:fontRef>
+        </p:style>
+        <p:txBody>
+          <a:bodyPr rtlCol="0" anchor="ctr"/>
+          <a:lstStyle/>
+          <a:p>
+            <a:pPr algn="ctr"/>
+          </a:p>
+        </p:txBody>
+      </p:sp>
+      <p:sp>
+        <p:nvSpPr>
+          <p:cNvPr id="10" name="TextBox 9"/>
           <p:cNvSpPr txBox="1"/>
           <p:nvPr/>
         </p:nvSpPr>
         <p:spPr>
           <a:xfrm>
-            <a:off x="731520" y="1188719"/>
-            <a:ext cx="5090007" cy="274320"/>
+            <a:off x="762609" y="1247241"/>
+            <a:ext cx="230428" cy="230428"/>
+          </a:xfrm>
+          <a:prstGeom prst="rect">
+            <a:avLst/>
+          </a:prstGeom>
+          <a:noFill/>
+        </p:spPr>
+        <p:txBody>
+          <a:bodyPr wrap="square"/>
+          <a:lstStyle/>
+          <a:p>
+            <a:pPr algn="ctr">
+              <a:spcBef>
+                <a:spcPts val="0"/>
+              </a:spcBef>
+              <a:spcAft>
+                <a:spcPts val="0"/>
+              </a:spcAft>
+              <a:defRPr sz="1200" b="0">
+                <a:solidFill>
+                  <a:srgbClr val="FFFFFF"/>
+                </a:solidFill>
+                <a:latin typeface="Calibri"/>
+              </a:defRPr>
+            </a:pPr>
+            <a:r>
+              <a:t>🚫</a:t>
+            </a:r>
+          </a:p>
+        </p:txBody>
+      </p:sp>
+      <p:sp>
+        <p:nvSpPr>
+          <p:cNvPr id="11" name="TextBox 10"/>
+          <p:cNvSpPr txBox="1"/>
+          <p:nvPr/>
+        </p:nvSpPr>
+        <p:spPr>
+          <a:xfrm>
+            <a:off x="685800" y="1691639"/>
+            <a:ext cx="5135727" cy="274320"/>
           </a:xfrm>
           <a:prstGeom prst="rect">
             <a:avLst/>
@@ -14689,29 +14101,29 @@
               <a:spcAft>
                 <a:spcPts val="0"/>
               </a:spcAft>
-              <a:defRPr sz="1400" b="1">
-                <a:solidFill>
-                  <a:srgbClr val="DC2626"/>
-                </a:solidFill>
-                <a:latin typeface="Arial"/>
-              </a:defRPr>
-            </a:pPr>
-            <a:r>
-              <a:t>DIGITALISASI SEMATA</a:t>
-            </a:r>
-          </a:p>
-        </p:txBody>
-      </p:sp>
-      <p:sp>
-        <p:nvSpPr>
-          <p:cNvPr id="10" name="TextBox 9"/>
+              <a:defRPr sz="1300" b="1">
+                <a:solidFill>
+                  <a:srgbClr val="2563EB"/>
+                </a:solidFill>
+                <a:latin typeface="Calibri"/>
+              </a:defRPr>
+            </a:pPr>
+            <a:r>
+              <a:t>Hindari Ego Sektoral Digital</a:t>
+            </a:r>
+          </a:p>
+        </p:txBody>
+      </p:sp>
+      <p:sp>
+        <p:nvSpPr>
+          <p:cNvPr id="12" name="TextBox 11"/>
           <p:cNvSpPr txBox="1"/>
           <p:nvPr/>
         </p:nvSpPr>
         <p:spPr>
           <a:xfrm>
-            <a:off x="731520" y="1481328"/>
-            <a:ext cx="5090007" cy="228600"/>
+            <a:off x="685800" y="2039112"/>
+            <a:ext cx="5135727" cy="274320"/>
           </a:xfrm>
           <a:prstGeom prst="rect">
             <a:avLst/>
@@ -14729,29 +14141,29 @@
               <a:spcAft>
                 <a:spcPts val="0"/>
               </a:spcAft>
-              <a:defRPr sz="1100" b="0">
+              <a:defRPr sz="900" b="0">
                 <a:solidFill>
                   <a:srgbClr val="1A1A2E"/>
                 </a:solidFill>
-                <a:latin typeface="Arial"/>
-              </a:defRPr>
-            </a:pPr>
-            <a:r>
-              <a:t>• </a:t>
-            </a:r>
-          </a:p>
-        </p:txBody>
-      </p:sp>
-      <p:sp>
-        <p:nvSpPr>
-          <p:cNvPr id="11" name="TextBox 10"/>
+                <a:latin typeface="Calibri"/>
+              </a:defRPr>
+            </a:pPr>
+            <a:r>
+              <a:t>• Jangan buat aplikasi sendiri-sendiri</a:t>
+            </a:r>
+          </a:p>
+        </p:txBody>
+      </p:sp>
+      <p:sp>
+        <p:nvSpPr>
+          <p:cNvPr id="13" name="TextBox 12"/>
           <p:cNvSpPr txBox="1"/>
           <p:nvPr/>
         </p:nvSpPr>
         <p:spPr>
           <a:xfrm>
-            <a:off x="731520" y="1719072"/>
-            <a:ext cx="5090007" cy="228600"/>
+            <a:off x="685800" y="2331720"/>
+            <a:ext cx="5135727" cy="274320"/>
           </a:xfrm>
           <a:prstGeom prst="rect">
             <a:avLst/>
@@ -14769,29 +14181,29 @@
               <a:spcAft>
                 <a:spcPts val="0"/>
               </a:spcAft>
-              <a:defRPr sz="1100" b="0">
+              <a:defRPr sz="900" b="0">
                 <a:solidFill>
                   <a:srgbClr val="1A1A2E"/>
                 </a:solidFill>
-                <a:latin typeface="Arial"/>
-              </a:defRPr>
-            </a:pPr>
-            <a:r>
-              <a:t>• Memindahkan kertas ke aplikasi</a:t>
-            </a:r>
-          </a:p>
-        </p:txBody>
-      </p:sp>
-      <p:sp>
-        <p:nvSpPr>
-          <p:cNvPr id="12" name="TextBox 11"/>
+                <a:latin typeface="Calibri"/>
+              </a:defRPr>
+            </a:pPr>
+            <a:r>
+              <a:t>• Setiap sistem harus terintegrasi</a:t>
+            </a:r>
+          </a:p>
+        </p:txBody>
+      </p:sp>
+      <p:sp>
+        <p:nvSpPr>
+          <p:cNvPr id="14" name="TextBox 13"/>
           <p:cNvSpPr txBox="1"/>
           <p:nvPr/>
         </p:nvSpPr>
         <p:spPr>
           <a:xfrm>
-            <a:off x="731520" y="1956815"/>
-            <a:ext cx="5090007" cy="228600"/>
+            <a:off x="685800" y="2624327"/>
+            <a:ext cx="5135727" cy="274320"/>
           </a:xfrm>
           <a:prstGeom prst="rect">
             <a:avLst/>
@@ -14809,182 +14221,22 @@
               <a:spcAft>
                 <a:spcPts val="0"/>
               </a:spcAft>
-              <a:defRPr sz="1100" b="0">
+              <a:defRPr sz="900" b="0">
                 <a:solidFill>
                   <a:srgbClr val="1A1A2E"/>
                 </a:solidFill>
-                <a:latin typeface="Arial"/>
-              </a:defRPr>
-            </a:pPr>
-            <a:r>
-              <a:t>• Membuat aplikasi baru untuk setiap masalah</a:t>
-            </a:r>
-          </a:p>
-        </p:txBody>
-      </p:sp>
-      <p:sp>
-        <p:nvSpPr>
-          <p:cNvPr id="13" name="TextBox 12"/>
-          <p:cNvSpPr txBox="1"/>
-          <p:nvPr/>
-        </p:nvSpPr>
-        <p:spPr>
-          <a:xfrm>
-            <a:off x="731520" y="2194559"/>
-            <a:ext cx="5090007" cy="228600"/>
-          </a:xfrm>
-          <a:prstGeom prst="rect">
-            <a:avLst/>
-          </a:prstGeom>
-          <a:noFill/>
-        </p:spPr>
-        <p:txBody>
-          <a:bodyPr wrap="square"/>
-          <a:lstStyle/>
-          <a:p>
-            <a:pPr algn="l">
-              <a:spcBef>
-                <a:spcPts val="0"/>
-              </a:spcBef>
-              <a:spcAft>
-                <a:spcPts val="0"/>
-              </a:spcAft>
-              <a:defRPr sz="1100" b="0">
-                <a:solidFill>
-                  <a:srgbClr val="1A1A2E"/>
-                </a:solidFill>
-                <a:latin typeface="Arial"/>
-              </a:defRPr>
-            </a:pPr>
-            <a:r>
-              <a:t>• Berfokus pada teknologi, bukan proses</a:t>
-            </a:r>
-          </a:p>
-        </p:txBody>
-      </p:sp>
-      <p:sp>
-        <p:nvSpPr>
-          <p:cNvPr id="14" name="TextBox 13"/>
-          <p:cNvSpPr txBox="1"/>
-          <p:nvPr/>
-        </p:nvSpPr>
-        <p:spPr>
-          <a:xfrm>
-            <a:off x="731520" y="2432303"/>
-            <a:ext cx="5090007" cy="228600"/>
-          </a:xfrm>
-          <a:prstGeom prst="rect">
-            <a:avLst/>
-          </a:prstGeom>
-          <a:noFill/>
-        </p:spPr>
-        <p:txBody>
-          <a:bodyPr wrap="square"/>
-          <a:lstStyle/>
-          <a:p>
-            <a:pPr algn="l">
-              <a:spcBef>
-                <a:spcPts val="0"/>
-              </a:spcBef>
-              <a:spcAft>
-                <a:spcPts val="0"/>
-              </a:spcAft>
-              <a:defRPr sz="1100" b="0">
-                <a:solidFill>
-                  <a:srgbClr val="1A1A2E"/>
-                </a:solidFill>
-                <a:latin typeface="Arial"/>
-              </a:defRPr>
-            </a:pPr>
-            <a:r>
-              <a:t>• Rentan menciptakan ego sektoral digital</a:t>
-            </a:r>
-          </a:p>
-        </p:txBody>
-      </p:sp>
-      <p:sp>
-        <p:nvSpPr>
-          <p:cNvPr id="15" name="TextBox 14"/>
-          <p:cNvSpPr txBox="1"/>
-          <p:nvPr/>
-        </p:nvSpPr>
-        <p:spPr>
-          <a:xfrm>
-            <a:off x="731520" y="2670047"/>
-            <a:ext cx="5090007" cy="228600"/>
-          </a:xfrm>
-          <a:prstGeom prst="rect">
-            <a:avLst/>
-          </a:prstGeom>
-          <a:noFill/>
-        </p:spPr>
-        <p:txBody>
-          <a:bodyPr wrap="square"/>
-          <a:lstStyle/>
-          <a:p>
-            <a:pPr algn="l">
-              <a:spcBef>
-                <a:spcPts val="0"/>
-              </a:spcBef>
-              <a:spcAft>
-                <a:spcPts val="0"/>
-              </a:spcAft>
-              <a:defRPr sz="1100" b="0">
-                <a:solidFill>
-                  <a:srgbClr val="1A1A2E"/>
-                </a:solidFill>
-                <a:latin typeface="Arial"/>
-              </a:defRPr>
-            </a:pPr>
-            <a:r>
-              <a:t>• Aplikasi tumpang tindih &amp; tidak terintegrasi</a:t>
-            </a:r>
-          </a:p>
-        </p:txBody>
-      </p:sp>
-      <p:sp>
-        <p:nvSpPr>
-          <p:cNvPr id="16" name="TextBox 15"/>
-          <p:cNvSpPr txBox="1"/>
-          <p:nvPr/>
-        </p:nvSpPr>
-        <p:spPr>
-          <a:xfrm>
-            <a:off x="731520" y="2907791"/>
-            <a:ext cx="5090007" cy="228600"/>
-          </a:xfrm>
-          <a:prstGeom prst="rect">
-            <a:avLst/>
-          </a:prstGeom>
-          <a:noFill/>
-        </p:spPr>
-        <p:txBody>
-          <a:bodyPr wrap="square"/>
-          <a:lstStyle/>
-          <a:p>
-            <a:pPr algn="l">
-              <a:spcBef>
-                <a:spcPts val="0"/>
-              </a:spcBef>
-              <a:spcAft>
-                <a:spcPts val="0"/>
-              </a:spcAft>
-              <a:defRPr sz="1100" b="0">
-                <a:solidFill>
-                  <a:srgbClr val="1A1A2E"/>
-                </a:solidFill>
-                <a:latin typeface="Arial"/>
-              </a:defRPr>
-            </a:pPr>
-            <a:r>
-              <a:t>• Pemborosan anggaran TIK yang signifikan</a:t>
-            </a:r>
-          </a:p>
-        </p:txBody>
-      </p:sp>
-      <p:sp>
-        <p:nvSpPr>
-          <p:cNvPr id="17" name="Rounded Rectangle 16"/>
+                <a:latin typeface="Calibri"/>
+              </a:defRPr>
+            </a:pPr>
+            <a:r>
+              <a:t>• Satu data, satu platform</a:t>
+            </a:r>
+          </a:p>
+        </p:txBody>
+      </p:sp>
+      <p:sp>
+        <p:nvSpPr>
+          <p:cNvPr id="15" name="Rounded Rectangle 14"/>
           <p:cNvSpPr/>
           <p:nvPr/>
         </p:nvSpPr>
@@ -15031,7 +14283,7 @@
       </p:sp>
       <p:sp>
         <p:nvSpPr>
-          <p:cNvPr id="18" name="Rectangle 17"/>
+          <p:cNvPr id="16" name="Rectangle 15"/>
           <p:cNvSpPr/>
           <p:nvPr/>
         </p:nvSpPr>
@@ -15074,14 +14326,97 @@
       </p:sp>
       <p:sp>
         <p:nvSpPr>
+          <p:cNvPr id="17" name="Oval 16"/>
+          <p:cNvSpPr/>
+          <p:nvPr/>
+        </p:nvSpPr>
+        <p:spPr>
+          <a:xfrm>
+            <a:off x="6370167" y="1188719"/>
+            <a:ext cx="384048" cy="384048"/>
+          </a:xfrm>
+          <a:prstGeom prst="ellipse">
+            <a:avLst/>
+          </a:prstGeom>
+          <a:solidFill>
+            <a:srgbClr val="0B7C72"/>
+          </a:solidFill>
+          <a:ln>
+            <a:noFill/>
+          </a:ln>
+        </p:spPr>
+        <p:style>
+          <a:lnRef idx="1">
+            <a:schemeClr val="accent1"/>
+          </a:lnRef>
+          <a:fillRef idx="3">
+            <a:schemeClr val="accent1"/>
+          </a:fillRef>
+          <a:effectRef idx="2">
+            <a:schemeClr val="accent1"/>
+          </a:effectRef>
+          <a:fontRef idx="minor">
+            <a:schemeClr val="lt1"/>
+          </a:fontRef>
+        </p:style>
+        <p:txBody>
+          <a:bodyPr rtlCol="0" anchor="ctr"/>
+          <a:lstStyle/>
+          <a:p>
+            <a:pPr algn="ctr"/>
+          </a:p>
+        </p:txBody>
+      </p:sp>
+      <p:sp>
+        <p:nvSpPr>
+          <p:cNvPr id="18" name="TextBox 17"/>
+          <p:cNvSpPr txBox="1"/>
+          <p:nvPr/>
+        </p:nvSpPr>
+        <p:spPr>
+          <a:xfrm>
+            <a:off x="6446977" y="1247241"/>
+            <a:ext cx="230428" cy="230428"/>
+          </a:xfrm>
+          <a:prstGeom prst="rect">
+            <a:avLst/>
+          </a:prstGeom>
+          <a:noFill/>
+        </p:spPr>
+        <p:txBody>
+          <a:bodyPr wrap="square"/>
+          <a:lstStyle/>
+          <a:p>
+            <a:pPr algn="ctr">
+              <a:spcBef>
+                <a:spcPts val="0"/>
+              </a:spcBef>
+              <a:spcAft>
+                <a:spcPts val="0"/>
+              </a:spcAft>
+              <a:defRPr sz="1200" b="0">
+                <a:solidFill>
+                  <a:srgbClr val="FFFFFF"/>
+                </a:solidFill>
+                <a:latin typeface="Calibri"/>
+              </a:defRPr>
+            </a:pPr>
+            <a:r>
+              <a:t>🔗</a:t>
+            </a:r>
+          </a:p>
+        </p:txBody>
+      </p:sp>
+      <p:sp>
+        <p:nvSpPr>
           <p:cNvPr id="19" name="TextBox 18"/>
           <p:cNvSpPr txBox="1"/>
           <p:nvPr/>
         </p:nvSpPr>
         <p:spPr>
           <a:xfrm>
-            <a:off x="6415887" y="1188719"/>
-            <a:ext cx="5090007" cy="274320"/>
+            <a:off x="6370167" y="1691639"/>
+            <a:ext cx="5135727" cy="274320"/>
           </a:xfrm>
           <a:prstGeom prst="rect">
             <a:avLst/>
@@ -15099,15 +14434,15 @@
               <a:spcAft>
                 <a:spcPts val="0"/>
               </a:spcAft>
-              <a:defRPr sz="1400" b="1">
+              <a:defRPr sz="1300" b="1">
                 <a:solidFill>
                   <a:srgbClr val="0B7C72"/>
                 </a:solidFill>
-                <a:latin typeface="Arial"/>
-              </a:defRPr>
-            </a:pPr>
-            <a:r>
-              <a:t>TRANSFORMASI SPBE</a:t>
+                <a:latin typeface="Calibri"/>
+              </a:defRPr>
+            </a:pPr>
+            <a:r>
+              <a:t>Interoperabilitas adalah Kunci</a:t>
             </a:r>
           </a:p>
         </p:txBody>
@@ -15120,8 +14455,8 @@
         </p:nvSpPr>
         <p:spPr>
           <a:xfrm>
-            <a:off x="6415887" y="1481328"/>
-            <a:ext cx="5090007" cy="228600"/>
+            <a:off x="6370167" y="2039112"/>
+            <a:ext cx="5135727" cy="274320"/>
           </a:xfrm>
           <a:prstGeom prst="rect">
             <a:avLst/>
@@ -15139,15 +14474,15 @@
               <a:spcAft>
                 <a:spcPts val="0"/>
               </a:spcAft>
-              <a:defRPr sz="1100" b="0">
+              <a:defRPr sz="900" b="0">
                 <a:solidFill>
                   <a:srgbClr val="1A1A2E"/>
                 </a:solidFill>
-                <a:latin typeface="Arial"/>
-              </a:defRPr>
-            </a:pPr>
-            <a:r>
-              <a:t>• </a:t>
+                <a:latin typeface="Calibri"/>
+              </a:defRPr>
+            </a:pPr>
+            <a:r>
+              <a:t>• Sistem saling terhubung &amp; bertukar data</a:t>
             </a:r>
           </a:p>
         </p:txBody>
@@ -15160,8 +14495,8 @@
         </p:nvSpPr>
         <p:spPr>
           <a:xfrm>
-            <a:off x="6415887" y="1719072"/>
-            <a:ext cx="5090007" cy="228600"/>
+            <a:off x="6370167" y="2331720"/>
+            <a:ext cx="5135727" cy="274320"/>
           </a:xfrm>
           <a:prstGeom prst="rect">
             <a:avLst/>
@@ -15179,15 +14514,15 @@
               <a:spcAft>
                 <a:spcPts val="0"/>
               </a:spcAft>
-              <a:defRPr sz="1100" b="0">
+              <a:defRPr sz="900" b="0">
                 <a:solidFill>
                   <a:srgbClr val="1A1A2E"/>
                 </a:solidFill>
-                <a:latin typeface="Arial"/>
-              </a:defRPr>
-            </a:pPr>
-            <a:r>
-              <a:t>• Menata ulang proses bisnis secara menyeluruh</a:t>
+                <a:latin typeface="Calibri"/>
+              </a:defRPr>
+            </a:pPr>
+            <a:r>
+              <a:t>• Masyarakat tidak perlu banyak aplikasi</a:t>
             </a:r>
           </a:p>
         </p:txBody>
@@ -15200,8 +14535,8 @@
         </p:nvSpPr>
         <p:spPr>
           <a:xfrm>
-            <a:off x="6415887" y="1956815"/>
-            <a:ext cx="5090007" cy="228600"/>
+            <a:off x="6370167" y="2624327"/>
+            <a:ext cx="5135727" cy="274320"/>
           </a:xfrm>
           <a:prstGeom prst="rect">
             <a:avLst/>
@@ -15219,182 +14554,22 @@
               <a:spcAft>
                 <a:spcPts val="0"/>
               </a:spcAft>
-              <a:defRPr sz="1100" b="0">
+              <a:defRPr sz="900" b="0">
                 <a:solidFill>
                   <a:srgbClr val="1A1A2E"/>
                 </a:solidFill>
-                <a:latin typeface="Arial"/>
-              </a:defRPr>
-            </a:pPr>
-            <a:r>
-              <a:t>• Interoperabilitas antar sistem yang sudah ada</a:t>
-            </a:r>
-          </a:p>
-        </p:txBody>
-      </p:sp>
-      <p:sp>
-        <p:nvSpPr>
-          <p:cNvPr id="23" name="TextBox 22"/>
-          <p:cNvSpPr txBox="1"/>
-          <p:nvPr/>
-        </p:nvSpPr>
-        <p:spPr>
-          <a:xfrm>
-            <a:off x="6415887" y="2194559"/>
-            <a:ext cx="5090007" cy="228600"/>
-          </a:xfrm>
-          <a:prstGeom prst="rect">
-            <a:avLst/>
-          </a:prstGeom>
-          <a:noFill/>
-        </p:spPr>
-        <p:txBody>
-          <a:bodyPr wrap="square"/>
-          <a:lstStyle/>
-          <a:p>
-            <a:pPr algn="l">
-              <a:spcBef>
-                <a:spcPts val="0"/>
-              </a:spcBef>
-              <a:spcAft>
-                <a:spcPts val="0"/>
-              </a:spcAft>
-              <a:defRPr sz="1100" b="0">
-                <a:solidFill>
-                  <a:srgbClr val="1A1A2E"/>
-                </a:solidFill>
-                <a:latin typeface="Arial"/>
-              </a:defRPr>
-            </a:pPr>
-            <a:r>
-              <a:t>• Berfokus pada layanan terpadu (user-centric)</a:t>
-            </a:r>
-          </a:p>
-        </p:txBody>
-      </p:sp>
-      <p:sp>
-        <p:nvSpPr>
-          <p:cNvPr id="24" name="TextBox 23"/>
-          <p:cNvSpPr txBox="1"/>
-          <p:nvPr/>
-        </p:nvSpPr>
-        <p:spPr>
-          <a:xfrm>
-            <a:off x="6415887" y="2432303"/>
-            <a:ext cx="5090007" cy="228600"/>
-          </a:xfrm>
-          <a:prstGeom prst="rect">
-            <a:avLst/>
-          </a:prstGeom>
-          <a:noFill/>
-        </p:spPr>
-        <p:txBody>
-          <a:bodyPr wrap="square"/>
-          <a:lstStyle/>
-          <a:p>
-            <a:pPr algn="l">
-              <a:spcBef>
-                <a:spcPts val="0"/>
-              </a:spcBef>
-              <a:spcAft>
-                <a:spcPts val="0"/>
-              </a:spcAft>
-              <a:defRPr sz="1100" b="0">
-                <a:solidFill>
-                  <a:srgbClr val="1A1A2E"/>
-                </a:solidFill>
-                <a:latin typeface="Arial"/>
-              </a:defRPr>
-            </a:pPr>
-            <a:r>
-              <a:t>• Satu platform terintegasi — efisien &amp; aman</a:t>
-            </a:r>
-          </a:p>
-        </p:txBody>
-      </p:sp>
-      <p:sp>
-        <p:nvSpPr>
-          <p:cNvPr id="25" name="TextBox 24"/>
-          <p:cNvSpPr txBox="1"/>
-          <p:nvPr/>
-        </p:nvSpPr>
-        <p:spPr>
-          <a:xfrm>
-            <a:off x="6415887" y="2670047"/>
-            <a:ext cx="5090007" cy="228600"/>
-          </a:xfrm>
-          <a:prstGeom prst="rect">
-            <a:avLst/>
-          </a:prstGeom>
-          <a:noFill/>
-        </p:spPr>
-        <p:txBody>
-          <a:bodyPr wrap="square"/>
-          <a:lstStyle/>
-          <a:p>
-            <a:pPr algn="l">
-              <a:spcBef>
-                <a:spcPts val="0"/>
-              </a:spcBef>
-              <a:spcAft>
-                <a:spcPts val="0"/>
-              </a:spcAft>
-              <a:defRPr sz="1100" b="0">
-                <a:solidFill>
-                  <a:srgbClr val="1A1A2E"/>
-                </a:solidFill>
-                <a:latin typeface="Arial"/>
-              </a:defRPr>
-            </a:pPr>
-            <a:r>
-              <a:t>• Data berbagi pakai antar instansi</a:t>
-            </a:r>
-          </a:p>
-        </p:txBody>
-      </p:sp>
-      <p:sp>
-        <p:nvSpPr>
-          <p:cNvPr id="26" name="TextBox 25"/>
-          <p:cNvSpPr txBox="1"/>
-          <p:nvPr/>
-        </p:nvSpPr>
-        <p:spPr>
-          <a:xfrm>
-            <a:off x="6415887" y="2907791"/>
-            <a:ext cx="5090007" cy="228600"/>
-          </a:xfrm>
-          <a:prstGeom prst="rect">
-            <a:avLst/>
-          </a:prstGeom>
-          <a:noFill/>
-        </p:spPr>
-        <p:txBody>
-          <a:bodyPr wrap="square"/>
-          <a:lstStyle/>
-          <a:p>
-            <a:pPr algn="l">
-              <a:spcBef>
-                <a:spcPts val="0"/>
-              </a:spcBef>
-              <a:spcAft>
-                <a:spcPts val="0"/>
-              </a:spcAft>
-              <a:defRPr sz="1100" b="0">
-                <a:solidFill>
-                  <a:srgbClr val="1A1A2E"/>
-                </a:solidFill>
-                <a:latin typeface="Arial"/>
-              </a:defRPr>
-            </a:pPr>
-            <a:r>
-              <a:t>• Efektivitas &amp; efisiensi anggaran nasional</a:t>
-            </a:r>
-          </a:p>
-        </p:txBody>
-      </p:sp>
-      <p:sp>
-        <p:nvSpPr>
-          <p:cNvPr id="27" name="Rectangle 26"/>
+                <a:latin typeface="Calibri"/>
+              </a:defRPr>
+            </a:pPr>
+            <a:r>
+              <a:t>• Layanan terpadu dalam satu pintu</a:t>
+            </a:r>
+          </a:p>
+        </p:txBody>
+      </p:sp>
+      <p:sp>
+        <p:nvSpPr>
+          <p:cNvPr id="23" name="Rectangle 22"/>
           <p:cNvSpPr/>
           <p:nvPr/>
         </p:nvSpPr>
@@ -15437,7 +14612,7 @@
       </p:sp>
       <p:sp>
         <p:nvSpPr>
-          <p:cNvPr id="28" name="TextBox 27"/>
+          <p:cNvPr id="24" name="TextBox 23"/>
           <p:cNvSpPr txBox="1"/>
           <p:nvPr/>
         </p:nvSpPr>
@@ -15466,18 +14641,18 @@
                 <a:solidFill>
                   <a:srgbClr val="64748B"/>
                 </a:solidFill>
-                <a:latin typeface="Arial"/>
-              </a:defRPr>
-            </a:pPr>
-            <a:r>
-              <a:t>Sumber: Perpres No. 95/2018, Perpres No. 132/2022, &amp; Pedoman SPBE Kemenpan-RB</a:t>
-            </a:r>
-          </a:p>
-        </p:txBody>
-      </p:sp>
-      <p:sp>
-        <p:nvSpPr>
-          <p:cNvPr id="29" name="TextBox 28"/>
+                <a:latin typeface="Calibri"/>
+              </a:defRPr>
+            </a:pPr>
+            <a:r>
+              <a:t>Penerapan Sistem Pemerintahan Berbasis Elektronik (SPBE)</a:t>
+            </a:r>
+          </a:p>
+        </p:txBody>
+      </p:sp>
+      <p:sp>
+        <p:nvSpPr>
+          <p:cNvPr id="25" name="TextBox 24"/>
           <p:cNvSpPr txBox="1"/>
           <p:nvPr/>
         </p:nvSpPr>
@@ -15506,7 +14681,7 @@
                 <a:solidFill>
                   <a:srgbClr val="64748B"/>
                 </a:solidFill>
-                <a:latin typeface="Arial"/>
+                <a:latin typeface="Calibri"/>
               </a:defRPr>
             </a:pPr>
             <a:r>
@@ -15787,15 +14962,15 @@
                 <a:solidFill>
                   <a:srgbClr val="FFFFFF"/>
                 </a:solidFill>
-                <a:latin typeface="Arial"/>
-              </a:defRPr>
-            </a:pPr>
-            <a:r>
-              <a:t>KERANGKA</a:t>
+                <a:latin typeface="Calibri"/>
+              </a:defRPr>
+            </a:pPr>
+            <a:r>
+              <a:t>BAB 2</a:t>
             </a:r>
             <a:br/>
             <a:r>
-              <a:t>ARSITEKTUR SPBE</a:t>
+              <a:t>ARSITEKTUR &amp; KERANGKA KERJA SPBE</a:t>
             </a:r>
           </a:p>
         </p:txBody>
@@ -15831,11 +15006,11 @@
                 <a:solidFill>
                   <a:srgbClr val="C8962E"/>
                 </a:solidFill>
-                <a:latin typeface="Arial"/>
-              </a:defRPr>
-            </a:pPr>
-            <a:r>
-              <a:t>Tata Kelola &amp; Manajemen sebagai fondasi yang mengikat</a:t>
+                <a:latin typeface="Calibri"/>
+              </a:defRPr>
+            </a:pPr>
+            <a:r>
+              <a:t>Proses Bisnis, Data, Aplikasi, Infrastruktur, dan Keamanan Saling Menopang</a:t>
             </a:r>
           </a:p>
         </p:txBody>
@@ -15871,11 +15046,11 @@
                 <a:solidFill>
                   <a:srgbClr val="64748B"/>
                 </a:solidFill>
-                <a:latin typeface="Arial"/>
-              </a:defRPr>
-            </a:pPr>
-            <a:r>
-              <a:t>8 Komponen Terintegrasi</a:t>
+                <a:latin typeface="Calibri"/>
+              </a:defRPr>
+            </a:pPr>
+            <a:r>
+              <a:t>Tata Kelola &amp; Manajemen sebagai Pondasi</a:t>
             </a:r>
           </a:p>
         </p:txBody>
@@ -16109,11 +15284,11 @@
                 <a:solidFill>
                   <a:srgbClr val="FFFFFF"/>
                 </a:solidFill>
-                <a:latin typeface="Arial Black"/>
-              </a:defRPr>
-            </a:pPr>
-            <a:r>
-              <a:t>Tata Kelola dan Manajemen Menjadi Pondasi yang Mengikat Seluruh Komponen Arsitektur</a:t>
+                <a:latin typeface="Georgia"/>
+              </a:defRPr>
+            </a:pPr>
+            <a:r>
+              <a:t>Tata Kelola &amp; Manajemen Mengikat Seluruh Komponen Arsitektur SPBE</a:t>
             </a:r>
           </a:p>
         </p:txBody>
@@ -16149,11 +15324,11 @@
                 <a:solidFill>
                   <a:srgbClr val="64748B"/>
                 </a:solidFill>
-                <a:latin typeface="Arial"/>
-              </a:defRPr>
-            </a:pPr>
-            <a:r>
-              <a:t>Arsitektur SPBE Instansi</a:t>
+                <a:latin typeface="Calibri"/>
+              </a:defRPr>
+            </a:pPr>
+            <a:r>
+              <a:t>Kerangka Arsitektur SPBE</a:t>
             </a:r>
           </a:p>
         </p:txBody>
@@ -16167,7 +15342,7 @@
         <p:spPr>
           <a:xfrm>
             <a:off x="548640" y="1051560"/>
-            <a:ext cx="2567863" cy="2537460"/>
+            <a:ext cx="3515258" cy="2537460"/>
           </a:xfrm>
           <a:prstGeom prst="roundRect">
             <a:avLst>
@@ -16322,11 +15497,11 @@
                 <a:solidFill>
                   <a:srgbClr val="FFFFFF"/>
                 </a:solidFill>
-                <a:latin typeface="Arial"/>
-              </a:defRPr>
-            </a:pPr>
-            <a:r>
-              <a:t>🏛️</a:t>
+                <a:latin typeface="Calibri"/>
+              </a:defRPr>
+            </a:pPr>
+            <a:r>
+              <a:t>📋</a:t>
             </a:r>
           </a:p>
         </p:txBody>
@@ -16340,7 +15515,7 @@
         <p:spPr>
           <a:xfrm>
             <a:off x="685800" y="1691639"/>
-            <a:ext cx="2293543" cy="274320"/>
+            <a:ext cx="3240938" cy="274320"/>
           </a:xfrm>
           <a:prstGeom prst="rect">
             <a:avLst/>
@@ -16362,11 +15537,11 @@
                 <a:solidFill>
                   <a:srgbClr val="2563EB"/>
                 </a:solidFill>
-                <a:latin typeface="Arial"/>
-              </a:defRPr>
-            </a:pPr>
-            <a:r>
-              <a:t>Tata Kelola</a:t>
+                <a:latin typeface="Calibri"/>
+              </a:defRPr>
+            </a:pPr>
+            <a:r>
+              <a:t>Proses Bisnis</a:t>
             </a:r>
           </a:p>
         </p:txBody>
@@ -16380,7 +15555,7 @@
         <p:spPr>
           <a:xfrm>
             <a:off x="685800" y="2039112"/>
-            <a:ext cx="2293543" cy="274320"/>
+            <a:ext cx="3240938" cy="274320"/>
           </a:xfrm>
           <a:prstGeom prst="rect">
             <a:avLst/>
@@ -16402,11 +15577,11 @@
                 <a:solidFill>
                   <a:srgbClr val="1A1A2E"/>
                 </a:solidFill>
-                <a:latin typeface="Arial"/>
-              </a:defRPr>
-            </a:pPr>
-            <a:r>
-              <a:t>• Kebijakan &amp; regulasi internal</a:t>
+                <a:latin typeface="Calibri"/>
+              </a:defRPr>
+            </a:pPr>
+            <a:r>
+              <a:t>• Petakan proses bisnis dulu</a:t>
             </a:r>
           </a:p>
         </p:txBody>
@@ -16420,7 +15595,7 @@
         <p:spPr>
           <a:xfrm>
             <a:off x="685800" y="2331720"/>
-            <a:ext cx="2293543" cy="274320"/>
+            <a:ext cx="3240938" cy="274320"/>
           </a:xfrm>
           <a:prstGeom prst="rect">
             <a:avLst/>
@@ -16442,11 +15617,11 @@
                 <a:solidFill>
                   <a:srgbClr val="1A1A2E"/>
                 </a:solidFill>
-                <a:latin typeface="Arial"/>
-              </a:defRPr>
-            </a:pPr>
-            <a:r>
-              <a:t>• Perencanaan strategis TIK</a:t>
+                <a:latin typeface="Calibri"/>
+              </a:defRPr>
+            </a:pPr>
+            <a:r>
+              <a:t>• Sebelum menyentuh teknologi</a:t>
             </a:r>
           </a:p>
         </p:txBody>
@@ -16460,7 +15635,7 @@
         <p:spPr>
           <a:xfrm>
             <a:off x="685800" y="2624327"/>
-            <a:ext cx="2293543" cy="274320"/>
+            <a:ext cx="3240938" cy="274320"/>
           </a:xfrm>
           <a:prstGeom prst="rect">
             <a:avLst/>
@@ -16482,11 +15657,11 @@
                 <a:solidFill>
                   <a:srgbClr val="1A1A2E"/>
                 </a:solidFill>
-                <a:latin typeface="Arial"/>
-              </a:defRPr>
-            </a:pPr>
-            <a:r>
-              <a:t>• Struktur organisasi &amp; kewenangan</a:t>
+                <a:latin typeface="Calibri"/>
+              </a:defRPr>
+            </a:pPr>
+            <a:r>
+              <a:t>• Gunakan aplikasi Arsitektur SPBE Nasional</a:t>
             </a:r>
           </a:p>
         </p:txBody>
@@ -16499,8 +15674,8 @@
         </p:nvSpPr>
         <p:spPr>
           <a:xfrm>
-            <a:off x="3390823" y="1051560"/>
-            <a:ext cx="2567863" cy="2537460"/>
+            <a:off x="4338218" y="1051560"/>
+            <a:ext cx="3515258" cy="2537460"/>
           </a:xfrm>
           <a:prstGeom prst="roundRect">
             <a:avLst>
@@ -16546,7 +15721,7 @@
         </p:nvSpPr>
         <p:spPr>
           <a:xfrm>
-            <a:off x="3390823" y="1051560"/>
+            <a:off x="4338218" y="1051560"/>
             <a:ext cx="45720" cy="2537460"/>
           </a:xfrm>
           <a:prstGeom prst="rect">
@@ -16589,7 +15764,7 @@
         </p:nvSpPr>
         <p:spPr>
           <a:xfrm>
-            <a:off x="3527983" y="1188719"/>
+            <a:off x="4475378" y="1188719"/>
             <a:ext cx="384048" cy="384048"/>
           </a:xfrm>
           <a:prstGeom prst="ellipse">
@@ -16632,7 +15807,7 @@
         </p:nvSpPr>
         <p:spPr>
           <a:xfrm>
-            <a:off x="3604793" y="1247241"/>
+            <a:off x="4552188" y="1247241"/>
             <a:ext cx="230428" cy="230428"/>
           </a:xfrm>
           <a:prstGeom prst="rect">
@@ -16655,11 +15830,11 @@
                 <a:solidFill>
                   <a:srgbClr val="FFFFFF"/>
                 </a:solidFill>
-                <a:latin typeface="Arial"/>
-              </a:defRPr>
-            </a:pPr>
-            <a:r>
-              <a:t>📋</a:t>
+                <a:latin typeface="Calibri"/>
+              </a:defRPr>
+            </a:pPr>
+            <a:r>
+              <a:t>💾</a:t>
             </a:r>
           </a:p>
         </p:txBody>
@@ -16672,8 +15847,8 @@
         </p:nvSpPr>
         <p:spPr>
           <a:xfrm>
-            <a:off x="3527983" y="1691639"/>
-            <a:ext cx="2293543" cy="274320"/>
+            <a:off x="4475378" y="1691639"/>
+            <a:ext cx="3240938" cy="274320"/>
           </a:xfrm>
           <a:prstGeom prst="rect">
             <a:avLst/>
@@ -16695,11 +15870,11 @@
                 <a:solidFill>
                   <a:srgbClr val="0B7C72"/>
                 </a:solidFill>
-                <a:latin typeface="Arial"/>
-              </a:defRPr>
-            </a:pPr>
-            <a:r>
-              <a:t>Manajemen</a:t>
+                <a:latin typeface="Calibri"/>
+              </a:defRPr>
+            </a:pPr>
+            <a:r>
+              <a:t>Data &amp; Informasi</a:t>
             </a:r>
           </a:p>
         </p:txBody>
@@ -16712,8 +15887,8 @@
         </p:nvSpPr>
         <p:spPr>
           <a:xfrm>
-            <a:off x="3527983" y="2039112"/>
-            <a:ext cx="2293543" cy="274320"/>
+            <a:off x="4475378" y="2039112"/>
+            <a:ext cx="3240938" cy="274320"/>
           </a:xfrm>
           <a:prstGeom prst="rect">
             <a:avLst/>
@@ -16735,11 +15910,11 @@
                 <a:solidFill>
                   <a:srgbClr val="1A1A2E"/>
                 </a:solidFill>
-                <a:latin typeface="Arial"/>
-              </a:defRPr>
-            </a:pPr>
-            <a:r>
-              <a:t>• Pengelolaan risiko &amp; keamanan</a:t>
+                <a:latin typeface="Calibri"/>
+              </a:defRPr>
+            </a:pPr>
+            <a:r>
+              <a:t>• Prinsip Satu Data Indonesia</a:t>
             </a:r>
           </a:p>
         </p:txBody>
@@ -16752,8 +15927,8 @@
         </p:nvSpPr>
         <p:spPr>
           <a:xfrm>
-            <a:off x="3527983" y="2331720"/>
-            <a:ext cx="2293543" cy="274320"/>
+            <a:off x="4475378" y="2331720"/>
+            <a:ext cx="3240938" cy="274320"/>
           </a:xfrm>
           <a:prstGeom prst="rect">
             <a:avLst/>
@@ -16775,11 +15950,11 @@
                 <a:solidFill>
                   <a:srgbClr val="1A1A2E"/>
                 </a:solidFill>
-                <a:latin typeface="Arial"/>
-              </a:defRPr>
-            </a:pPr>
-            <a:r>
-              <a:t>• SDM &amp; aset TIK</a:t>
+                <a:latin typeface="Calibri"/>
+              </a:defRPr>
+            </a:pPr>
+            <a:r>
+              <a:t>• Data terstandarisasi</a:t>
             </a:r>
           </a:p>
         </p:txBody>
@@ -16792,8 +15967,8 @@
         </p:nvSpPr>
         <p:spPr>
           <a:xfrm>
-            <a:off x="3527983" y="2624327"/>
-            <a:ext cx="2293543" cy="274320"/>
+            <a:off x="4475378" y="2624327"/>
+            <a:ext cx="3240938" cy="274320"/>
           </a:xfrm>
           <a:prstGeom prst="rect">
             <a:avLst/>
@@ -16815,11 +15990,11 @@
                 <a:solidFill>
                   <a:srgbClr val="1A1A2E"/>
                 </a:solidFill>
-                <a:latin typeface="Arial"/>
-              </a:defRPr>
-            </a:pPr>
-            <a:r>
-              <a:t>• Satu Data Indonesia</a:t>
+                <a:latin typeface="Calibri"/>
+              </a:defRPr>
+            </a:pPr>
+            <a:r>
+              <a:t>• Berbagi pakai data antar instansi</a:t>
             </a:r>
           </a:p>
         </p:txBody>
@@ -16832,8 +16007,8 @@
         </p:nvSpPr>
         <p:spPr>
           <a:xfrm>
-            <a:off x="6233007" y="1051560"/>
-            <a:ext cx="2567863" cy="2537460"/>
+            <a:off x="8127796" y="1051560"/>
+            <a:ext cx="3515258" cy="2537460"/>
           </a:xfrm>
           <a:prstGeom prst="roundRect">
             <a:avLst>
@@ -16879,7 +16054,7 @@
         </p:nvSpPr>
         <p:spPr>
           <a:xfrm>
-            <a:off x="6233007" y="1051560"/>
+            <a:off x="8127796" y="1051560"/>
             <a:ext cx="45720" cy="2537460"/>
           </a:xfrm>
           <a:prstGeom prst="rect">
@@ -16922,7 +16097,7 @@
         </p:nvSpPr>
         <p:spPr>
           <a:xfrm>
-            <a:off x="6370167" y="1188719"/>
+            <a:off x="8264956" y="1188719"/>
             <a:ext cx="384048" cy="384048"/>
           </a:xfrm>
           <a:prstGeom prst="ellipse">
@@ -16965,7 +16140,7 @@
         </p:nvSpPr>
         <p:spPr>
           <a:xfrm>
-            <a:off x="6446977" y="1247241"/>
+            <a:off x="8341766" y="1247241"/>
             <a:ext cx="230428" cy="230428"/>
           </a:xfrm>
           <a:prstGeom prst="rect">
@@ -16988,11 +16163,11 @@
                 <a:solidFill>
                   <a:srgbClr val="FFFFFF"/>
                 </a:solidFill>
-                <a:latin typeface="Arial"/>
-              </a:defRPr>
-            </a:pPr>
-            <a:r>
-              <a:t>⚙️</a:t>
+                <a:latin typeface="Calibri"/>
+              </a:defRPr>
+            </a:pPr>
+            <a:r>
+              <a:t>📱</a:t>
             </a:r>
           </a:p>
         </p:txBody>
@@ -17005,8 +16180,8 @@
         </p:nvSpPr>
         <p:spPr>
           <a:xfrm>
-            <a:off x="6370167" y="1691639"/>
-            <a:ext cx="2293543" cy="274320"/>
+            <a:off x="8264956" y="1691639"/>
+            <a:ext cx="3240938" cy="274320"/>
           </a:xfrm>
           <a:prstGeom prst="rect">
             <a:avLst/>
@@ -17028,11 +16203,11 @@
                 <a:solidFill>
                   <a:srgbClr val="A0522D"/>
                 </a:solidFill>
-                <a:latin typeface="Arial"/>
-              </a:defRPr>
-            </a:pPr>
-            <a:r>
-              <a:t>Proses Bisnis</a:t>
+                <a:latin typeface="Calibri"/>
+              </a:defRPr>
+            </a:pPr>
+            <a:r>
+              <a:t>Aplikasi</a:t>
             </a:r>
           </a:p>
         </p:txBody>
@@ -17045,8 +16220,8 @@
         </p:nvSpPr>
         <p:spPr>
           <a:xfrm>
-            <a:off x="6370167" y="2039112"/>
-            <a:ext cx="2293543" cy="274320"/>
+            <a:off x="8264956" y="2039112"/>
+            <a:ext cx="3240938" cy="274320"/>
           </a:xfrm>
           <a:prstGeom prst="rect">
             <a:avLst/>
@@ -17068,11 +16243,11 @@
                 <a:solidFill>
                   <a:srgbClr val="1A1A2E"/>
                 </a:solidFill>
-                <a:latin typeface="Arial"/>
-              </a:defRPr>
-            </a:pPr>
-            <a:r>
-              <a:t>• Pemetaan proses bisnis instansi</a:t>
+                <a:latin typeface="Calibri"/>
+              </a:defRPr>
+            </a:pPr>
+            <a:r>
+              <a:t>• Konsolidasi aplikasi sektoral</a:t>
             </a:r>
           </a:p>
         </p:txBody>
@@ -17085,8 +16260,8 @@
         </p:nvSpPr>
         <p:spPr>
           <a:xfrm>
-            <a:off x="6370167" y="2331720"/>
-            <a:ext cx="2293543" cy="274320"/>
+            <a:off x="8264956" y="2331720"/>
+            <a:ext cx="3240938" cy="274320"/>
           </a:xfrm>
           <a:prstGeom prst="rect">
             <a:avLst/>
@@ -17108,11 +16283,11 @@
                 <a:solidFill>
                   <a:srgbClr val="1A1A2E"/>
                 </a:solidFill>
-                <a:latin typeface="Arial"/>
-              </a:defRPr>
-            </a:pPr>
-            <a:r>
-              <a:t>• Standard operating procedure</a:t>
+                <a:latin typeface="Calibri"/>
+              </a:defRPr>
+            </a:pPr>
+            <a:r>
+              <a:t>• Super apps terpadu</a:t>
             </a:r>
           </a:p>
         </p:txBody>
@@ -17125,8 +16300,8 @@
         </p:nvSpPr>
         <p:spPr>
           <a:xfrm>
-            <a:off x="6370167" y="2624327"/>
-            <a:ext cx="2293543" cy="338328"/>
+            <a:off x="8264956" y="2624327"/>
+            <a:ext cx="3240938" cy="274320"/>
           </a:xfrm>
           <a:prstGeom prst="rect">
             <a:avLst/>
@@ -17148,11 +16323,11 @@
                 <a:solidFill>
                   <a:srgbClr val="1A1A2E"/>
                 </a:solidFill>
-                <a:latin typeface="Arial"/>
-              </a:defRPr>
-            </a:pPr>
-            <a:r>
-              <a:t>• Prioritas sebelum menyentuh teknologi</a:t>
+                <a:latin typeface="Calibri"/>
+              </a:defRPr>
+            </a:pPr>
+            <a:r>
+              <a:t>• Moratorium aplikasi duplikatif</a:t>
             </a:r>
           </a:p>
         </p:txBody>
@@ -17165,8 +16340,8 @@
         </p:nvSpPr>
         <p:spPr>
           <a:xfrm>
-            <a:off x="9075191" y="1051560"/>
-            <a:ext cx="2567863" cy="2537460"/>
+            <a:off x="548640" y="3863339"/>
+            <a:ext cx="3515258" cy="2537460"/>
           </a:xfrm>
           <a:prstGeom prst="roundRect">
             <a:avLst>
@@ -17212,7 +16387,7 @@
         </p:nvSpPr>
         <p:spPr>
           <a:xfrm>
-            <a:off x="9075191" y="1051560"/>
+            <a:off x="548640" y="3863339"/>
             <a:ext cx="45720" cy="2537460"/>
           </a:xfrm>
           <a:prstGeom prst="rect">
@@ -17255,7 +16430,7 @@
         </p:nvSpPr>
         <p:spPr>
           <a:xfrm>
-            <a:off x="9212351" y="1188719"/>
+            <a:off x="685800" y="4000500"/>
             <a:ext cx="384048" cy="384048"/>
           </a:xfrm>
           <a:prstGeom prst="ellipse">
@@ -17298,7 +16473,7 @@
         </p:nvSpPr>
         <p:spPr>
           <a:xfrm>
-            <a:off x="9289161" y="1247241"/>
+            <a:off x="762609" y="4059021"/>
             <a:ext cx="230428" cy="230428"/>
           </a:xfrm>
           <a:prstGeom prst="rect">
@@ -17321,11 +16496,11 @@
                 <a:solidFill>
                   <a:srgbClr val="FFFFFF"/>
                 </a:solidFill>
-                <a:latin typeface="Arial"/>
-              </a:defRPr>
-            </a:pPr>
-            <a:r>
-              <a:t>📊</a:t>
+                <a:latin typeface="Calibri"/>
+              </a:defRPr>
+            </a:pPr>
+            <a:r>
+              <a:t>🖧</a:t>
             </a:r>
           </a:p>
         </p:txBody>
@@ -17338,8 +16513,8 @@
         </p:nvSpPr>
         <p:spPr>
           <a:xfrm>
-            <a:off x="9212351" y="1691639"/>
-            <a:ext cx="2293543" cy="274320"/>
+            <a:off x="685800" y="4503420"/>
+            <a:ext cx="3240938" cy="274320"/>
           </a:xfrm>
           <a:prstGeom prst="rect">
             <a:avLst/>
@@ -17361,11 +16536,11 @@
                 <a:solidFill>
                   <a:srgbClr val="1B3A6B"/>
                 </a:solidFill>
-                <a:latin typeface="Arial"/>
-              </a:defRPr>
-            </a:pPr>
-            <a:r>
-              <a:t>Data</a:t>
+                <a:latin typeface="Calibri"/>
+              </a:defRPr>
+            </a:pPr>
+            <a:r>
+              <a:t>Infrastruktur</a:t>
             </a:r>
           </a:p>
         </p:txBody>
@@ -17378,8 +16553,8 @@
         </p:nvSpPr>
         <p:spPr>
           <a:xfrm>
-            <a:off x="9212351" y="2039112"/>
-            <a:ext cx="2293543" cy="274320"/>
+            <a:off x="685800" y="4850892"/>
+            <a:ext cx="3240938" cy="274320"/>
           </a:xfrm>
           <a:prstGeom prst="rect">
             <a:avLst/>
@@ -17401,11 +16576,11 @@
                 <a:solidFill>
                   <a:srgbClr val="1A1A2E"/>
                 </a:solidFill>
-                <a:latin typeface="Arial"/>
-              </a:defRPr>
-            </a:pPr>
-            <a:r>
-              <a:t>• Prinsip Satu Data Indonesia</a:t>
+                <a:latin typeface="Calibri"/>
+              </a:defRPr>
+            </a:pPr>
+            <a:r>
+              <a:t>• Pusat Data Nasional (PDN)</a:t>
             </a:r>
           </a:p>
         </p:txBody>
@@ -17418,8 +16593,8 @@
         </p:nvSpPr>
         <p:spPr>
           <a:xfrm>
-            <a:off x="9212351" y="2331720"/>
-            <a:ext cx="2293543" cy="274320"/>
+            <a:off x="685800" y="5143500"/>
+            <a:ext cx="3240938" cy="274320"/>
           </a:xfrm>
           <a:prstGeom prst="rect">
             <a:avLst/>
@@ -17441,11 +16616,11 @@
                 <a:solidFill>
                   <a:srgbClr val="1A1A2E"/>
                 </a:solidFill>
-                <a:latin typeface="Arial"/>
-              </a:defRPr>
-            </a:pPr>
-            <a:r>
-              <a:t>• Interoperabilitas data</a:t>
+                <a:latin typeface="Calibri"/>
+              </a:defRPr>
+            </a:pPr>
+            <a:r>
+              <a:t>• Cloud tersertifikasi</a:t>
             </a:r>
           </a:p>
         </p:txBody>
@@ -17458,8 +16633,8 @@
         </p:nvSpPr>
         <p:spPr>
           <a:xfrm>
-            <a:off x="9212351" y="2624327"/>
-            <a:ext cx="2293543" cy="274320"/>
+            <a:off x="685800" y="5436108"/>
+            <a:ext cx="3240938" cy="274320"/>
           </a:xfrm>
           <a:prstGeom prst="rect">
             <a:avLst/>
@@ -17481,11 +16656,11 @@
                 <a:solidFill>
                   <a:srgbClr val="1A1A2E"/>
                 </a:solidFill>
-                <a:latin typeface="Arial"/>
-              </a:defRPr>
-            </a:pPr>
-            <a:r>
-              <a:t>• Standar metadata &amp; klasifikasi</a:t>
+                <a:latin typeface="Calibri"/>
+              </a:defRPr>
+            </a:pPr>
+            <a:r>
+              <a:t>• Hub SPLP untuk berbagi pakai</a:t>
             </a:r>
           </a:p>
         </p:txBody>
@@ -17498,8 +16673,8 @@
         </p:nvSpPr>
         <p:spPr>
           <a:xfrm>
-            <a:off x="548640" y="3863339"/>
-            <a:ext cx="2567863" cy="2537460"/>
+            <a:off x="4338218" y="3863339"/>
+            <a:ext cx="3515258" cy="2537460"/>
           </a:xfrm>
           <a:prstGeom prst="roundRect">
             <a:avLst>
@@ -17545,7 +16720,7 @@
         </p:nvSpPr>
         <p:spPr>
           <a:xfrm>
-            <a:off x="548640" y="3863339"/>
+            <a:off x="4338218" y="3863339"/>
             <a:ext cx="45720" cy="2537460"/>
           </a:xfrm>
           <a:prstGeom prst="rect">
@@ -17588,7 +16763,7 @@
         </p:nvSpPr>
         <p:spPr>
           <a:xfrm>
-            <a:off x="685800" y="4000500"/>
+            <a:off x="4475378" y="4000500"/>
             <a:ext cx="384048" cy="384048"/>
           </a:xfrm>
           <a:prstGeom prst="ellipse">
@@ -17631,7 +16806,7 @@
         </p:nvSpPr>
         <p:spPr>
           <a:xfrm>
-            <a:off x="762609" y="4059021"/>
+            <a:off x="4552188" y="4059021"/>
             <a:ext cx="230428" cy="230428"/>
           </a:xfrm>
           <a:prstGeom prst="rect">
@@ -17654,11 +16829,11 @@
                 <a:solidFill>
                   <a:srgbClr val="FFFFFF"/>
                 </a:solidFill>
-                <a:latin typeface="Arial"/>
-              </a:defRPr>
-            </a:pPr>
-            <a:r>
-              <a:t>💻</a:t>
+                <a:latin typeface="Calibri"/>
+              </a:defRPr>
+            </a:pPr>
+            <a:r>
+              <a:t>🔒</a:t>
             </a:r>
           </a:p>
         </p:txBody>
@@ -17671,8 +16846,8 @@
         </p:nvSpPr>
         <p:spPr>
           <a:xfrm>
-            <a:off x="685800" y="4503420"/>
-            <a:ext cx="2293543" cy="274320"/>
+            <a:off x="4475378" y="4503420"/>
+            <a:ext cx="3240938" cy="274320"/>
           </a:xfrm>
           <a:prstGeom prst="rect">
             <a:avLst/>
@@ -17694,11 +16869,11 @@
                 <a:solidFill>
                   <a:srgbClr val="2563EB"/>
                 </a:solidFill>
-                <a:latin typeface="Arial"/>
-              </a:defRPr>
-            </a:pPr>
-            <a:r>
-              <a:t>Aplikasi</a:t>
+                <a:latin typeface="Calibri"/>
+              </a:defRPr>
+            </a:pPr>
+            <a:r>
+              <a:t>Keamanan</a:t>
             </a:r>
           </a:p>
         </p:txBody>
@@ -17711,8 +16886,8 @@
         </p:nvSpPr>
         <p:spPr>
           <a:xfrm>
-            <a:off x="685800" y="4850892"/>
-            <a:ext cx="2293543" cy="274320"/>
+            <a:off x="4475378" y="4850892"/>
+            <a:ext cx="3240938" cy="274320"/>
           </a:xfrm>
           <a:prstGeom prst="rect">
             <a:avLst/>
@@ -17734,11 +16909,11 @@
                 <a:solidFill>
                   <a:srgbClr val="1A1A2E"/>
                 </a:solidFill>
-                <a:latin typeface="Arial"/>
-              </a:defRPr>
-            </a:pPr>
-            <a:r>
-              <a:t>• Konsolidasi platform terpadu</a:t>
+                <a:latin typeface="Calibri"/>
+              </a:defRPr>
+            </a:pPr>
+            <a:r>
+              <a:t>• SMKI berbasis ISO 27001</a:t>
             </a:r>
           </a:p>
         </p:txBody>
@@ -17751,8 +16926,8 @@
         </p:nvSpPr>
         <p:spPr>
           <a:xfrm>
-            <a:off x="685800" y="5143500"/>
-            <a:ext cx="2293543" cy="274320"/>
+            <a:off x="4475378" y="5143500"/>
+            <a:ext cx="3240938" cy="274320"/>
           </a:xfrm>
           <a:prstGeom prst="rect">
             <a:avLst/>
@@ -17774,11 +16949,11 @@
                 <a:solidFill>
                   <a:srgbClr val="1A1A2E"/>
                 </a:solidFill>
-                <a:latin typeface="Arial"/>
-              </a:defRPr>
-            </a:pPr>
-            <a:r>
-              <a:t>• Moratorium aplikasi duplikatif</a:t>
+                <a:latin typeface="Calibri"/>
+              </a:defRPr>
+            </a:pPr>
+            <a:r>
+              <a:t>• Kolaborasi BSSN</a:t>
             </a:r>
           </a:p>
         </p:txBody>
@@ -17791,8 +16966,8 @@
         </p:nvSpPr>
         <p:spPr>
           <a:xfrm>
-            <a:off x="685800" y="5436108"/>
-            <a:ext cx="2293543" cy="274320"/>
+            <a:off x="4475378" y="5436108"/>
+            <a:ext cx="3240938" cy="274320"/>
           </a:xfrm>
           <a:prstGeom prst="rect">
             <a:avLst/>
@@ -17814,11 +16989,11 @@
                 <a:solidFill>
                   <a:srgbClr val="1A1A2E"/>
                 </a:solidFill>
-                <a:latin typeface="Arial"/>
-              </a:defRPr>
-            </a:pPr>
-            <a:r>
-              <a:t>• Super Apps layanan digital</a:t>
+                <a:latin typeface="Calibri"/>
+              </a:defRPr>
+            </a:pPr>
+            <a:r>
+              <a:t>• CSIRT internal</a:t>
             </a:r>
           </a:p>
         </p:txBody>
@@ -17831,8 +17006,8 @@
         </p:nvSpPr>
         <p:spPr>
           <a:xfrm>
-            <a:off x="3390823" y="3863339"/>
-            <a:ext cx="2567863" cy="2537460"/>
+            <a:off x="8127796" y="3863339"/>
+            <a:ext cx="3515258" cy="2537460"/>
           </a:xfrm>
           <a:prstGeom prst="roundRect">
             <a:avLst>
@@ -17878,7 +17053,7 @@
         </p:nvSpPr>
         <p:spPr>
           <a:xfrm>
-            <a:off x="3390823" y="3863339"/>
+            <a:off x="8127796" y="3863339"/>
             <a:ext cx="45720" cy="2537460"/>
           </a:xfrm>
           <a:prstGeom prst="rect">
@@ -17921,7 +17096,7 @@
         </p:nvSpPr>
         <p:spPr>
           <a:xfrm>
-            <a:off x="3527983" y="4000500"/>
+            <a:off x="8264956" y="4000500"/>
             <a:ext cx="384048" cy="384048"/>
           </a:xfrm>
           <a:prstGeom prst="ellipse">
@@ -17964,7 +17139,7 @@
         </p:nvSpPr>
         <p:spPr>
           <a:xfrm>
-            <a:off x="3604793" y="4059021"/>
+            <a:off x="8341766" y="4059021"/>
             <a:ext cx="230428" cy="230428"/>
           </a:xfrm>
           <a:prstGeom prst="rect">
@@ -17987,11 +17162,11 @@
                 <a:solidFill>
                   <a:srgbClr val="FFFFFF"/>
                 </a:solidFill>
-                <a:latin typeface="Arial"/>
-              </a:defRPr>
-            </a:pPr>
-            <a:r>
-              <a:t>🌐</a:t>
+                <a:latin typeface="Calibri"/>
+              </a:defRPr>
+            </a:pPr>
+            <a:r>
+              <a:t>🤝</a:t>
             </a:r>
           </a:p>
         </p:txBody>
@@ -18004,8 +17179,8 @@
         </p:nvSpPr>
         <p:spPr>
           <a:xfrm>
-            <a:off x="3527983" y="4503420"/>
-            <a:ext cx="2293543" cy="274320"/>
+            <a:off x="8264956" y="4503420"/>
+            <a:ext cx="3240938" cy="274320"/>
           </a:xfrm>
           <a:prstGeom prst="rect">
             <a:avLst/>
@@ -18027,11 +17202,11 @@
                 <a:solidFill>
                   <a:srgbClr val="0B7C72"/>
                 </a:solidFill>
-                <a:latin typeface="Arial"/>
-              </a:defRPr>
-            </a:pPr>
-            <a:r>
-              <a:t>Infrastruktur</a:t>
+                <a:latin typeface="Calibri"/>
+              </a:defRPr>
+            </a:pPr>
+            <a:r>
+              <a:t>Layanan SPBE</a:t>
             </a:r>
           </a:p>
         </p:txBody>
@@ -18044,8 +17219,8 @@
         </p:nvSpPr>
         <p:spPr>
           <a:xfrm>
-            <a:off x="3527983" y="4850892"/>
-            <a:ext cx="2293543" cy="274320"/>
+            <a:off x="8264956" y="4850892"/>
+            <a:ext cx="3240938" cy="274320"/>
           </a:xfrm>
           <a:prstGeom prst="rect">
             <a:avLst/>
@@ -18067,11 +17242,11 @@
                 <a:solidFill>
                   <a:srgbClr val="1A1A2E"/>
                 </a:solidFill>
-                <a:latin typeface="Arial"/>
-              </a:defRPr>
-            </a:pPr>
-            <a:r>
-              <a:t>• Pusat Data Nasional (PDN)</a:t>
+                <a:latin typeface="Calibri"/>
+              </a:defRPr>
+            </a:pPr>
+            <a:r>
+              <a:t>• Layanan publik prima</a:t>
             </a:r>
           </a:p>
         </p:txBody>
@@ -18084,8 +17259,8 @@
         </p:nvSpPr>
         <p:spPr>
           <a:xfrm>
-            <a:off x="3527983" y="5143500"/>
-            <a:ext cx="2293543" cy="274320"/>
+            <a:off x="8264956" y="5143500"/>
+            <a:ext cx="3240938" cy="274320"/>
           </a:xfrm>
           <a:prstGeom prst="rect">
             <a:avLst/>
@@ -18107,11 +17282,11 @@
                 <a:solidFill>
                   <a:srgbClr val="1A1A2E"/>
                 </a:solidFill>
-                <a:latin typeface="Arial"/>
-              </a:defRPr>
-            </a:pPr>
-            <a:r>
-              <a:t>• Cloud tersertifikasi</a:t>
+                <a:latin typeface="Calibri"/>
+              </a:defRPr>
+            </a:pPr>
+            <a:r>
+              <a:t>• Layanan administrasi internal</a:t>
             </a:r>
           </a:p>
         </p:txBody>
@@ -18124,8 +17299,8 @@
         </p:nvSpPr>
         <p:spPr>
           <a:xfrm>
-            <a:off x="3527983" y="5436108"/>
-            <a:ext cx="2293543" cy="274320"/>
+            <a:off x="8264956" y="5436108"/>
+            <a:ext cx="3240938" cy="274320"/>
           </a:xfrm>
           <a:prstGeom prst="rect">
             <a:avLst/>
@@ -18147,684 +17322,18 @@
                 <a:solidFill>
                   <a:srgbClr val="1A1A2E"/>
                 </a:solidFill>
-                <a:latin typeface="Arial"/>
-              </a:defRPr>
-            </a:pPr>
-            <a:r>
-              <a:t>• Hub SPLP — sistem berbagi pakai</a:t>
-            </a:r>
-          </a:p>
-        </p:txBody>
-      </p:sp>
-      <p:sp>
-        <p:nvSpPr>
-          <p:cNvPr id="55" name="Rounded Rectangle 54"/>
-          <p:cNvSpPr/>
-          <p:nvPr/>
-        </p:nvSpPr>
-        <p:spPr>
-          <a:xfrm>
-            <a:off x="6233007" y="3863339"/>
-            <a:ext cx="2567863" cy="2537460"/>
-          </a:xfrm>
-          <a:prstGeom prst="roundRect">
-            <a:avLst>
-              <a:gd name="adj" fmla="val 4000"/>
-            </a:avLst>
-          </a:prstGeom>
-          <a:solidFill>
-            <a:srgbClr val="FFFFFF"/>
-          </a:solidFill>
-          <a:ln w="6350">
-            <a:solidFill>
-              <a:srgbClr val="E8EDF5"/>
-            </a:solidFill>
-          </a:ln>
-        </p:spPr>
-        <p:style>
-          <a:lnRef idx="1">
-            <a:schemeClr val="accent1"/>
-          </a:lnRef>
-          <a:fillRef idx="3">
-            <a:schemeClr val="accent1"/>
-          </a:fillRef>
-          <a:effectRef idx="2">
-            <a:schemeClr val="accent1"/>
-          </a:effectRef>
-          <a:fontRef idx="minor">
-            <a:schemeClr val="lt1"/>
-          </a:fontRef>
-        </p:style>
-        <p:txBody>
-          <a:bodyPr rtlCol="0" anchor="ctr"/>
-          <a:lstStyle/>
-          <a:p>
-            <a:pPr algn="ctr"/>
-          </a:p>
-        </p:txBody>
-      </p:sp>
-      <p:sp>
-        <p:nvSpPr>
-          <p:cNvPr id="56" name="Rectangle 55"/>
-          <p:cNvSpPr/>
-          <p:nvPr/>
-        </p:nvSpPr>
-        <p:spPr>
-          <a:xfrm>
-            <a:off x="6233007" y="3863339"/>
-            <a:ext cx="45720" cy="2537460"/>
-          </a:xfrm>
-          <a:prstGeom prst="rect">
-            <a:avLst/>
-          </a:prstGeom>
-          <a:solidFill>
-            <a:srgbClr val="A0522D"/>
-          </a:solidFill>
-          <a:ln>
-            <a:noFill/>
-          </a:ln>
-        </p:spPr>
-        <p:style>
-          <a:lnRef idx="1">
-            <a:schemeClr val="accent1"/>
-          </a:lnRef>
-          <a:fillRef idx="3">
-            <a:schemeClr val="accent1"/>
-          </a:fillRef>
-          <a:effectRef idx="2">
-            <a:schemeClr val="accent1"/>
-          </a:effectRef>
-          <a:fontRef idx="minor">
-            <a:schemeClr val="lt1"/>
-          </a:fontRef>
-        </p:style>
-        <p:txBody>
-          <a:bodyPr rtlCol="0" anchor="ctr"/>
-          <a:lstStyle/>
-          <a:p>
-            <a:pPr algn="ctr"/>
-          </a:p>
-        </p:txBody>
-      </p:sp>
-      <p:sp>
-        <p:nvSpPr>
-          <p:cNvPr id="57" name="Oval 56"/>
-          <p:cNvSpPr/>
-          <p:nvPr/>
-        </p:nvSpPr>
-        <p:spPr>
-          <a:xfrm>
-            <a:off x="6370167" y="4000500"/>
-            <a:ext cx="384048" cy="384048"/>
-          </a:xfrm>
-          <a:prstGeom prst="ellipse">
-            <a:avLst/>
-          </a:prstGeom>
-          <a:solidFill>
-            <a:srgbClr val="A0522D"/>
-          </a:solidFill>
-          <a:ln>
-            <a:noFill/>
-          </a:ln>
-        </p:spPr>
-        <p:style>
-          <a:lnRef idx="1">
-            <a:schemeClr val="accent1"/>
-          </a:lnRef>
-          <a:fillRef idx="3">
-            <a:schemeClr val="accent1"/>
-          </a:fillRef>
-          <a:effectRef idx="2">
-            <a:schemeClr val="accent1"/>
-          </a:effectRef>
-          <a:fontRef idx="minor">
-            <a:schemeClr val="lt1"/>
-          </a:fontRef>
-        </p:style>
-        <p:txBody>
-          <a:bodyPr rtlCol="0" anchor="ctr"/>
-          <a:lstStyle/>
-          <a:p>
-            <a:pPr algn="ctr"/>
-          </a:p>
-        </p:txBody>
-      </p:sp>
-      <p:sp>
-        <p:nvSpPr>
-          <p:cNvPr id="58" name="TextBox 57"/>
-          <p:cNvSpPr txBox="1"/>
-          <p:nvPr/>
-        </p:nvSpPr>
-        <p:spPr>
-          <a:xfrm>
-            <a:off x="6446977" y="4059021"/>
-            <a:ext cx="230428" cy="230428"/>
-          </a:xfrm>
-          <a:prstGeom prst="rect">
-            <a:avLst/>
-          </a:prstGeom>
-          <a:noFill/>
-        </p:spPr>
-        <p:txBody>
-          <a:bodyPr wrap="square"/>
-          <a:lstStyle/>
-          <a:p>
-            <a:pPr algn="ctr">
-              <a:spcBef>
-                <a:spcPts val="0"/>
-              </a:spcBef>
-              <a:spcAft>
-                <a:spcPts val="0"/>
-              </a:spcAft>
-              <a:defRPr sz="1200" b="0">
-                <a:solidFill>
-                  <a:srgbClr val="FFFFFF"/>
-                </a:solidFill>
-                <a:latin typeface="Arial"/>
-              </a:defRPr>
-            </a:pPr>
-            <a:r>
-              <a:t>🔒</a:t>
-            </a:r>
-          </a:p>
-        </p:txBody>
-      </p:sp>
-      <p:sp>
-        <p:nvSpPr>
-          <p:cNvPr id="59" name="TextBox 58"/>
-          <p:cNvSpPr txBox="1"/>
-          <p:nvPr/>
-        </p:nvSpPr>
-        <p:spPr>
-          <a:xfrm>
-            <a:off x="6370167" y="4503420"/>
-            <a:ext cx="2293543" cy="274320"/>
-          </a:xfrm>
-          <a:prstGeom prst="rect">
-            <a:avLst/>
-          </a:prstGeom>
-          <a:noFill/>
-        </p:spPr>
-        <p:txBody>
-          <a:bodyPr wrap="square"/>
-          <a:lstStyle/>
-          <a:p>
-            <a:pPr algn="l">
-              <a:spcBef>
-                <a:spcPts val="0"/>
-              </a:spcBef>
-              <a:spcAft>
-                <a:spcPts val="0"/>
-              </a:spcAft>
-              <a:defRPr sz="1300" b="1">
-                <a:solidFill>
-                  <a:srgbClr val="A0522D"/>
-                </a:solidFill>
-                <a:latin typeface="Arial"/>
-              </a:defRPr>
-            </a:pPr>
-            <a:r>
-              <a:t>Keamanan</a:t>
-            </a:r>
-          </a:p>
-        </p:txBody>
-      </p:sp>
-      <p:sp>
-        <p:nvSpPr>
-          <p:cNvPr id="60" name="TextBox 59"/>
-          <p:cNvSpPr txBox="1"/>
-          <p:nvPr/>
-        </p:nvSpPr>
-        <p:spPr>
-          <a:xfrm>
-            <a:off x="6370167" y="4850892"/>
-            <a:ext cx="2293543" cy="274320"/>
-          </a:xfrm>
-          <a:prstGeom prst="rect">
-            <a:avLst/>
-          </a:prstGeom>
-          <a:noFill/>
-        </p:spPr>
-        <p:txBody>
-          <a:bodyPr wrap="square"/>
-          <a:lstStyle/>
-          <a:p>
-            <a:pPr algn="l">
-              <a:spcBef>
-                <a:spcPts val="0"/>
-              </a:spcBef>
-              <a:spcAft>
-                <a:spcPts val="0"/>
-              </a:spcAft>
-              <a:defRPr sz="900" b="0">
-                <a:solidFill>
-                  <a:srgbClr val="1A1A2E"/>
-                </a:solidFill>
-                <a:latin typeface="Arial"/>
-              </a:defRPr>
-            </a:pPr>
-            <a:r>
-              <a:t>• SMKI berbasis ISO 27001</a:t>
-            </a:r>
-          </a:p>
-        </p:txBody>
-      </p:sp>
-      <p:sp>
-        <p:nvSpPr>
-          <p:cNvPr id="61" name="TextBox 60"/>
-          <p:cNvSpPr txBox="1"/>
-          <p:nvPr/>
-        </p:nvSpPr>
-        <p:spPr>
-          <a:xfrm>
-            <a:off x="6370167" y="5143500"/>
-            <a:ext cx="2293543" cy="274320"/>
-          </a:xfrm>
-          <a:prstGeom prst="rect">
-            <a:avLst/>
-          </a:prstGeom>
-          <a:noFill/>
-        </p:spPr>
-        <p:txBody>
-          <a:bodyPr wrap="square"/>
-          <a:lstStyle/>
-          <a:p>
-            <a:pPr algn="l">
-              <a:spcBef>
-                <a:spcPts val="0"/>
-              </a:spcBef>
-              <a:spcAft>
-                <a:spcPts val="0"/>
-              </a:spcAft>
-              <a:defRPr sz="900" b="0">
-                <a:solidFill>
-                  <a:srgbClr val="1A1A2E"/>
-                </a:solidFill>
-                <a:latin typeface="Arial"/>
-              </a:defRPr>
-            </a:pPr>
-            <a:r>
-              <a:t>• BSSN — vulnerability assessment</a:t>
-            </a:r>
-          </a:p>
-        </p:txBody>
-      </p:sp>
-      <p:sp>
-        <p:nvSpPr>
-          <p:cNvPr id="62" name="TextBox 61"/>
-          <p:cNvSpPr txBox="1"/>
-          <p:nvPr/>
-        </p:nvSpPr>
-        <p:spPr>
-          <a:xfrm>
-            <a:off x="6370167" y="5436108"/>
-            <a:ext cx="2293543" cy="274320"/>
-          </a:xfrm>
-          <a:prstGeom prst="rect">
-            <a:avLst/>
-          </a:prstGeom>
-          <a:noFill/>
-        </p:spPr>
-        <p:txBody>
-          <a:bodyPr wrap="square"/>
-          <a:lstStyle/>
-          <a:p>
-            <a:pPr algn="l">
-              <a:spcBef>
-                <a:spcPts val="0"/>
-              </a:spcBef>
-              <a:spcAft>
-                <a:spcPts val="0"/>
-              </a:spcAft>
-              <a:defRPr sz="900" b="0">
-                <a:solidFill>
-                  <a:srgbClr val="1A1A2E"/>
-                </a:solidFill>
-                <a:latin typeface="Arial"/>
-              </a:defRPr>
-            </a:pPr>
-            <a:r>
-              <a:t>• CSIRT internal</a:t>
-            </a:r>
-          </a:p>
-        </p:txBody>
-      </p:sp>
-      <p:sp>
-        <p:nvSpPr>
-          <p:cNvPr id="63" name="Rounded Rectangle 62"/>
-          <p:cNvSpPr/>
-          <p:nvPr/>
-        </p:nvSpPr>
-        <p:spPr>
-          <a:xfrm>
-            <a:off x="9075191" y="3863339"/>
-            <a:ext cx="2567863" cy="2537460"/>
-          </a:xfrm>
-          <a:prstGeom prst="roundRect">
-            <a:avLst>
-              <a:gd name="adj" fmla="val 4000"/>
-            </a:avLst>
-          </a:prstGeom>
-          <a:solidFill>
-            <a:srgbClr val="FFFFFF"/>
-          </a:solidFill>
-          <a:ln w="6350">
-            <a:solidFill>
-              <a:srgbClr val="E8EDF5"/>
-            </a:solidFill>
-          </a:ln>
-        </p:spPr>
-        <p:style>
-          <a:lnRef idx="1">
-            <a:schemeClr val="accent1"/>
-          </a:lnRef>
-          <a:fillRef idx="3">
-            <a:schemeClr val="accent1"/>
-          </a:fillRef>
-          <a:effectRef idx="2">
-            <a:schemeClr val="accent1"/>
-          </a:effectRef>
-          <a:fontRef idx="minor">
-            <a:schemeClr val="lt1"/>
-          </a:fontRef>
-        </p:style>
-        <p:txBody>
-          <a:bodyPr rtlCol="0" anchor="ctr"/>
-          <a:lstStyle/>
-          <a:p>
-            <a:pPr algn="ctr"/>
-          </a:p>
-        </p:txBody>
-      </p:sp>
-      <p:sp>
-        <p:nvSpPr>
-          <p:cNvPr id="64" name="Rectangle 63"/>
-          <p:cNvSpPr/>
-          <p:nvPr/>
-        </p:nvSpPr>
-        <p:spPr>
-          <a:xfrm>
-            <a:off x="9075191" y="3863339"/>
-            <a:ext cx="45720" cy="2537460"/>
-          </a:xfrm>
-          <a:prstGeom prst="rect">
-            <a:avLst/>
-          </a:prstGeom>
-          <a:solidFill>
-            <a:srgbClr val="1B3A6B"/>
-          </a:solidFill>
-          <a:ln>
-            <a:noFill/>
-          </a:ln>
-        </p:spPr>
-        <p:style>
-          <a:lnRef idx="1">
-            <a:schemeClr val="accent1"/>
-          </a:lnRef>
-          <a:fillRef idx="3">
-            <a:schemeClr val="accent1"/>
-          </a:fillRef>
-          <a:effectRef idx="2">
-            <a:schemeClr val="accent1"/>
-          </a:effectRef>
-          <a:fontRef idx="minor">
-            <a:schemeClr val="lt1"/>
-          </a:fontRef>
-        </p:style>
-        <p:txBody>
-          <a:bodyPr rtlCol="0" anchor="ctr"/>
-          <a:lstStyle/>
-          <a:p>
-            <a:pPr algn="ctr"/>
-          </a:p>
-        </p:txBody>
-      </p:sp>
-      <p:sp>
-        <p:nvSpPr>
-          <p:cNvPr id="65" name="Oval 64"/>
-          <p:cNvSpPr/>
-          <p:nvPr/>
-        </p:nvSpPr>
-        <p:spPr>
-          <a:xfrm>
-            <a:off x="9212351" y="4000500"/>
-            <a:ext cx="384048" cy="384048"/>
-          </a:xfrm>
-          <a:prstGeom prst="ellipse">
-            <a:avLst/>
-          </a:prstGeom>
-          <a:solidFill>
-            <a:srgbClr val="1B3A6B"/>
-          </a:solidFill>
-          <a:ln>
-            <a:noFill/>
-          </a:ln>
-        </p:spPr>
-        <p:style>
-          <a:lnRef idx="1">
-            <a:schemeClr val="accent1"/>
-          </a:lnRef>
-          <a:fillRef idx="3">
-            <a:schemeClr val="accent1"/>
-          </a:fillRef>
-          <a:effectRef idx="2">
-            <a:schemeClr val="accent1"/>
-          </a:effectRef>
-          <a:fontRef idx="minor">
-            <a:schemeClr val="lt1"/>
-          </a:fontRef>
-        </p:style>
-        <p:txBody>
-          <a:bodyPr rtlCol="0" anchor="ctr"/>
-          <a:lstStyle/>
-          <a:p>
-            <a:pPr algn="ctr"/>
-          </a:p>
-        </p:txBody>
-      </p:sp>
-      <p:sp>
-        <p:nvSpPr>
-          <p:cNvPr id="66" name="TextBox 65"/>
-          <p:cNvSpPr txBox="1"/>
-          <p:nvPr/>
-        </p:nvSpPr>
-        <p:spPr>
-          <a:xfrm>
-            <a:off x="9289161" y="4059021"/>
-            <a:ext cx="230428" cy="230428"/>
-          </a:xfrm>
-          <a:prstGeom prst="rect">
-            <a:avLst/>
-          </a:prstGeom>
-          <a:noFill/>
-        </p:spPr>
-        <p:txBody>
-          <a:bodyPr wrap="square"/>
-          <a:lstStyle/>
-          <a:p>
-            <a:pPr algn="ctr">
-              <a:spcBef>
-                <a:spcPts val="0"/>
-              </a:spcBef>
-              <a:spcAft>
-                <a:spcPts val="0"/>
-              </a:spcAft>
-              <a:defRPr sz="1200" b="0">
-                <a:solidFill>
-                  <a:srgbClr val="FFFFFF"/>
-                </a:solidFill>
-                <a:latin typeface="Arial"/>
-              </a:defRPr>
-            </a:pPr>
-            <a:r>
-              <a:t>🤝</a:t>
-            </a:r>
-          </a:p>
-        </p:txBody>
-      </p:sp>
-      <p:sp>
-        <p:nvSpPr>
-          <p:cNvPr id="67" name="TextBox 66"/>
-          <p:cNvSpPr txBox="1"/>
-          <p:nvPr/>
-        </p:nvSpPr>
-        <p:spPr>
-          <a:xfrm>
-            <a:off x="9212351" y="4503420"/>
-            <a:ext cx="2293543" cy="274320"/>
-          </a:xfrm>
-          <a:prstGeom prst="rect">
-            <a:avLst/>
-          </a:prstGeom>
-          <a:noFill/>
-        </p:spPr>
-        <p:txBody>
-          <a:bodyPr wrap="square"/>
-          <a:lstStyle/>
-          <a:p>
-            <a:pPr algn="l">
-              <a:spcBef>
-                <a:spcPts val="0"/>
-              </a:spcBef>
-              <a:spcAft>
-                <a:spcPts val="0"/>
-              </a:spcAft>
-              <a:defRPr sz="1300" b="1">
-                <a:solidFill>
-                  <a:srgbClr val="1B3A6B"/>
-                </a:solidFill>
-                <a:latin typeface="Arial"/>
-              </a:defRPr>
-            </a:pPr>
-            <a:r>
-              <a:t>Layanan SPBE</a:t>
-            </a:r>
-          </a:p>
-        </p:txBody>
-      </p:sp>
-      <p:sp>
-        <p:nvSpPr>
-          <p:cNvPr id="68" name="TextBox 67"/>
-          <p:cNvSpPr txBox="1"/>
-          <p:nvPr/>
-        </p:nvSpPr>
-        <p:spPr>
-          <a:xfrm>
-            <a:off x="9212351" y="4850892"/>
-            <a:ext cx="2293543" cy="274320"/>
-          </a:xfrm>
-          <a:prstGeom prst="rect">
-            <a:avLst/>
-          </a:prstGeom>
-          <a:noFill/>
-        </p:spPr>
-        <p:txBody>
-          <a:bodyPr wrap="square"/>
-          <a:lstStyle/>
-          <a:p>
-            <a:pPr algn="l">
-              <a:spcBef>
-                <a:spcPts val="0"/>
-              </a:spcBef>
-              <a:spcAft>
-                <a:spcPts val="0"/>
-              </a:spcAft>
-              <a:defRPr sz="900" b="0">
-                <a:solidFill>
-                  <a:srgbClr val="1A1A2E"/>
-                </a:solidFill>
-                <a:latin typeface="Arial"/>
-              </a:defRPr>
-            </a:pPr>
-            <a:r>
-              <a:t>• Layanan publik prima</a:t>
-            </a:r>
-          </a:p>
-        </p:txBody>
-      </p:sp>
-      <p:sp>
-        <p:nvSpPr>
-          <p:cNvPr id="69" name="TextBox 68"/>
-          <p:cNvSpPr txBox="1"/>
-          <p:nvPr/>
-        </p:nvSpPr>
-        <p:spPr>
-          <a:xfrm>
-            <a:off x="9212351" y="5143500"/>
-            <a:ext cx="2293543" cy="274320"/>
-          </a:xfrm>
-          <a:prstGeom prst="rect">
-            <a:avLst/>
-          </a:prstGeom>
-          <a:noFill/>
-        </p:spPr>
-        <p:txBody>
-          <a:bodyPr wrap="square"/>
-          <a:lstStyle/>
-          <a:p>
-            <a:pPr algn="l">
-              <a:spcBef>
-                <a:spcPts val="0"/>
-              </a:spcBef>
-              <a:spcAft>
-                <a:spcPts val="0"/>
-              </a:spcAft>
-              <a:defRPr sz="900" b="0">
-                <a:solidFill>
-                  <a:srgbClr val="1A1A2E"/>
-                </a:solidFill>
-                <a:latin typeface="Arial"/>
-              </a:defRPr>
-            </a:pPr>
-            <a:r>
-              <a:t>• Layanan administrasi internal</a:t>
-            </a:r>
-          </a:p>
-        </p:txBody>
-      </p:sp>
-      <p:sp>
-        <p:nvSpPr>
-          <p:cNvPr id="70" name="TextBox 69"/>
-          <p:cNvSpPr txBox="1"/>
-          <p:nvPr/>
-        </p:nvSpPr>
-        <p:spPr>
-          <a:xfrm>
-            <a:off x="9212351" y="5436108"/>
-            <a:ext cx="2293543" cy="274320"/>
-          </a:xfrm>
-          <a:prstGeom prst="rect">
-            <a:avLst/>
-          </a:prstGeom>
-          <a:noFill/>
-        </p:spPr>
-        <p:txBody>
-          <a:bodyPr wrap="square"/>
-          <a:lstStyle/>
-          <a:p>
-            <a:pPr algn="l">
-              <a:spcBef>
-                <a:spcPts val="0"/>
-              </a:spcBef>
-              <a:spcAft>
-                <a:spcPts val="0"/>
-              </a:spcAft>
-              <a:defRPr sz="900" b="0">
-                <a:solidFill>
-                  <a:srgbClr val="1A1A2E"/>
-                </a:solidFill>
-                <a:latin typeface="Arial"/>
-              </a:defRPr>
-            </a:pPr>
-            <a:r>
-              <a:t>• Terintegrasi penuh — satu pintu</a:t>
-            </a:r>
-          </a:p>
-        </p:txBody>
-      </p:sp>
-      <p:sp>
-        <p:nvSpPr>
-          <p:cNvPr id="71" name="Rectangle 70"/>
+                <a:latin typeface="Calibri"/>
+              </a:defRPr>
+            </a:pPr>
+            <a:r>
+              <a:t>• Terintegrasi &amp; tepercaya</a:t>
+            </a:r>
+          </a:p>
+        </p:txBody>
+      </p:sp>
+      <p:sp>
+        <p:nvSpPr>
+          <p:cNvPr id="55" name="Rectangle 54"/>
           <p:cNvSpPr/>
           <p:nvPr/>
         </p:nvSpPr>
@@ -18867,7 +17376,7 @@
       </p:sp>
       <p:sp>
         <p:nvSpPr>
-          <p:cNvPr id="72" name="TextBox 71"/>
+          <p:cNvPr id="56" name="TextBox 55"/>
           <p:cNvSpPr txBox="1"/>
           <p:nvPr/>
         </p:nvSpPr>
@@ -18896,18 +17405,18 @@
                 <a:solidFill>
                   <a:srgbClr val="64748B"/>
                 </a:solidFill>
-                <a:latin typeface="Arial"/>
-              </a:defRPr>
-            </a:pPr>
-            <a:r>
-              <a:t>Sumber: Perpres No. 95/2018, Perpres No. 132/2022, &amp; Pedoman SPBE Kemenpan-RB</a:t>
-            </a:r>
-          </a:p>
-        </p:txBody>
-      </p:sp>
-      <p:sp>
-        <p:nvSpPr>
-          <p:cNvPr id="73" name="TextBox 72"/>
+                <a:latin typeface="Calibri"/>
+              </a:defRPr>
+            </a:pPr>
+            <a:r>
+              <a:t>Penerapan Sistem Pemerintahan Berbasis Elektronik (SPBE)</a:t>
+            </a:r>
+          </a:p>
+        </p:txBody>
+      </p:sp>
+      <p:sp>
+        <p:nvSpPr>
+          <p:cNvPr id="57" name="TextBox 56"/>
           <p:cNvSpPr txBox="1"/>
           <p:nvPr/>
         </p:nvSpPr>
@@ -18936,7 +17445,7 @@
                 <a:solidFill>
                   <a:srgbClr val="64748B"/>
                 </a:solidFill>
-                <a:latin typeface="Arial"/>
+                <a:latin typeface="Calibri"/>
               </a:defRPr>
             </a:pPr>
             <a:r>
@@ -19217,15 +17726,15 @@
                 <a:solidFill>
                   <a:srgbClr val="FFFFFF"/>
                 </a:solidFill>
-                <a:latin typeface="Arial"/>
-              </a:defRPr>
-            </a:pPr>
-            <a:r>
-              <a:t>4 DOMAIN</a:t>
+                <a:latin typeface="Calibri"/>
+              </a:defRPr>
+            </a:pPr>
+            <a:r>
+              <a:t>BAB 3</a:t>
             </a:r>
             <a:br/>
             <a:r>
-              <a:t>EVALUASI SPBE</a:t>
+              <a:t>4 DOMAIN UTAMA EVALUASI SPBE</a:t>
             </a:r>
           </a:p>
         </p:txBody>
@@ -19261,11 +17770,11 @@
                 <a:solidFill>
                   <a:srgbClr val="C8962E"/>
                 </a:solidFill>
-                <a:latin typeface="Arial"/>
-              </a:defRPr>
-            </a:pPr>
-            <a:r>
-              <a:t>Kebijakan → Tata Kelola → Manajemen → Layanan</a:t>
+                <a:latin typeface="Calibri"/>
+              </a:defRPr>
+            </a:pPr>
+            <a:r>
+              <a:t>Kebijakan, Tata Kelola, Manajemen, dan Layanan — Indikator Tingkat Kematangan</a:t>
             </a:r>
           </a:p>
         </p:txBody>
@@ -19301,11 +17810,11 @@
                 <a:solidFill>
                   <a:srgbClr val="64748B"/>
                 </a:solidFill>
-                <a:latin typeface="Arial"/>
-              </a:defRPr>
-            </a:pPr>
-            <a:r>
-              <a:t>Indikator Tingkat Kematangan (Maturity Index)</a:t>
+                <a:latin typeface="Calibri"/>
+              </a:defRPr>
+            </a:pPr>
+            <a:r>
+              <a:t>Maturity Index SPBE</a:t>
             </a:r>
           </a:p>
         </p:txBody>
@@ -19539,11 +18048,11 @@
                 <a:solidFill>
                   <a:srgbClr val="FFFFFF"/>
                 </a:solidFill>
-                <a:latin typeface="Arial Black"/>
-              </a:defRPr>
-            </a:pPr>
-            <a:r>
-              <a:t>Empat Domain Evaluasi Menentukan Tingkat Kematangan SPBE Instansi</a:t>
+                <a:latin typeface="Georgia"/>
+              </a:defRPr>
+            </a:pPr>
+            <a:r>
+              <a:t>Empat Domain Evaluasi Menentukan Tingkat Kematangan SPBE Instansi Anda</a:t>
             </a:r>
           </a:p>
         </p:txBody>
@@ -19579,7 +18088,7 @@
                 <a:solidFill>
                   <a:srgbClr val="64748B"/>
                 </a:solidFill>
-                <a:latin typeface="Arial"/>
+                <a:latin typeface="Calibri"/>
               </a:defRPr>
             </a:pPr>
             <a:r>
@@ -19622,7 +18131,7 @@
                           <a:solidFill>
                             <a:srgbClr val="FFFFFF"/>
                           </a:solidFill>
-                          <a:latin typeface="Arial"/>
+                          <a:latin typeface="Calibri"/>
                         </a:defRPr>
                       </a:pPr>
                       <a:r>
@@ -19646,7 +18155,7 @@
                           <a:solidFill>
                             <a:srgbClr val="FFFFFF"/>
                           </a:solidFill>
-                          <a:latin typeface="Arial"/>
+                          <a:latin typeface="Calibri"/>
                         </a:defRPr>
                       </a:pPr>
                       <a:r>
@@ -19670,7 +18179,7 @@
                           <a:solidFill>
                             <a:srgbClr val="FFFFFF"/>
                           </a:solidFill>
-                          <a:latin typeface="Arial"/>
+                          <a:latin typeface="Calibri"/>
                         </a:defRPr>
                       </a:pPr>
                       <a:r>
@@ -19696,7 +18205,7 @@
                           <a:solidFill>
                             <a:srgbClr val="1A1A2E"/>
                           </a:solidFill>
-                          <a:latin typeface="Arial"/>
+                          <a:latin typeface="Calibri"/>
                         </a:defRPr>
                       </a:pPr>
                       <a:r>
@@ -19720,11 +18229,11 @@
                           <a:solidFill>
                             <a:srgbClr val="1A1A2E"/>
                           </a:solidFill>
-                          <a:latin typeface="Arial"/>
+                          <a:latin typeface="Calibri"/>
                         </a:defRPr>
                       </a:pPr>
                       <a:r>
-                        <a:t>Regulasi, pedoman, dan SK formal internal instansi</a:t>
+                        <a:t>Regulasi, pedoman, dan SK formal di internal instansi</a:t>
                       </a:r>
                     </a:p>
                   </a:txBody>
@@ -19744,11 +18253,11 @@
                           <a:solidFill>
                             <a:srgbClr val="1A1A2E"/>
                           </a:solidFill>
-                          <a:latin typeface="Arial"/>
+                          <a:latin typeface="Calibri"/>
                         </a:defRPr>
                       </a:pPr>
                       <a:r>
-                        <a:t>Perbup/Perwali/Perka Tim Koordinasi &amp; Tata Kelola TIK</a:t>
+                        <a:t>Perbup/Perwali/Perka terkait Tim Koordinasi &amp; Tata Kelola TIK</a:t>
                       </a:r>
                     </a:p>
                   </a:txBody>
@@ -19770,7 +18279,7 @@
                           <a:solidFill>
                             <a:srgbClr val="1A1A2E"/>
                           </a:solidFill>
-                          <a:latin typeface="Arial"/>
+                          <a:latin typeface="Calibri"/>
                         </a:defRPr>
                       </a:pPr>
                       <a:r>
@@ -19794,11 +18303,11 @@
                           <a:solidFill>
                             <a:srgbClr val="1A1A2E"/>
                           </a:solidFill>
-                          <a:latin typeface="Arial"/>
+                          <a:latin typeface="Calibri"/>
                         </a:defRPr>
                       </a:pPr>
                       <a:r>
-                        <a:t>Perencanaan arsitektur, peta rencana, integrasi sistem</a:t>
+                        <a:t>Perencanaan arsitektur, peta rencana, dan integrasi sistem</a:t>
                       </a:r>
                     </a:p>
                   </a:txBody>
@@ -19818,11 +18327,11 @@
                           <a:solidFill>
                             <a:srgbClr val="1A1A2E"/>
                           </a:solidFill>
-                          <a:latin typeface="Arial"/>
+                          <a:latin typeface="Calibri"/>
                         </a:defRPr>
                       </a:pPr>
                       <a:r>
-                        <a:t>Dokumen Arsitektur SPBE &amp; Peta Rencana 5 tahun</a:t>
+                        <a:t>Dokumen Arsitektur SPBE &amp; Peta Rencana Instansi 5 tahun</a:t>
                       </a:r>
                     </a:p>
                   </a:txBody>
@@ -19844,7 +18353,7 @@
                           <a:solidFill>
                             <a:srgbClr val="1A1A2E"/>
                           </a:solidFill>
-                          <a:latin typeface="Arial"/>
+                          <a:latin typeface="Calibri"/>
                         </a:defRPr>
                       </a:pPr>
                       <a:r>
@@ -19868,11 +18377,11 @@
                           <a:solidFill>
                             <a:srgbClr val="1A1A2E"/>
                           </a:solidFill>
-                          <a:latin typeface="Arial"/>
+                          <a:latin typeface="Calibri"/>
                         </a:defRPr>
                       </a:pPr>
                       <a:r>
-                        <a:t>Pengelolaan risiko, data, keamanan, SDM, aset TIK</a:t>
+                        <a:t>Pengelolaan risiko, data, keamanan, SDM, dan aset TIK</a:t>
                       </a:r>
                     </a:p>
                   </a:txBody>
@@ -19892,7 +18401,7 @@
                           <a:solidFill>
                             <a:srgbClr val="1A1A2E"/>
                           </a:solidFill>
-                          <a:latin typeface="Arial"/>
+                          <a:latin typeface="Calibri"/>
                         </a:defRPr>
                       </a:pPr>
                       <a:r>
@@ -19918,7 +18427,7 @@
                           <a:solidFill>
                             <a:srgbClr val="1A1A2E"/>
                           </a:solidFill>
-                          <a:latin typeface="Arial"/>
+                          <a:latin typeface="Calibri"/>
                         </a:defRPr>
                       </a:pPr>
                       <a:r>
@@ -19942,7 +18451,7 @@
                           <a:solidFill>
                             <a:srgbClr val="1A1A2E"/>
                           </a:solidFill>
-                          <a:latin typeface="Arial"/>
+                          <a:latin typeface="Calibri"/>
                         </a:defRPr>
                       </a:pPr>
                       <a:r>
@@ -19966,11 +18475,11 @@
                           <a:solidFill>
                             <a:srgbClr val="1A1A2E"/>
                           </a:solidFill>
-                          <a:latin typeface="Arial"/>
+                          <a:latin typeface="Calibri"/>
                         </a:defRPr>
                       </a:pPr>
                       <a:r>
-                        <a:t>Aplikasi saling terintegrasi — bukan platform terpisah</a:t>
+                        <a:t>Aplikasi saling terintegrasi (bukan platform terpisah-pisah)</a:t>
                       </a:r>
                     </a:p>
                   </a:txBody>
@@ -20059,11 +18568,11 @@
                 <a:solidFill>
                   <a:srgbClr val="64748B"/>
                 </a:solidFill>
-                <a:latin typeface="Arial"/>
-              </a:defRPr>
-            </a:pPr>
-            <a:r>
-              <a:t>Sumber: Perpres No. 95/2018, Perpres No. 132/2022, &amp; Pedoman SPBE Kemenpan-RB</a:t>
+                <a:latin typeface="Calibri"/>
+              </a:defRPr>
+            </a:pPr>
+            <a:r>
+              <a:t>Penerapan Sistem Pemerintahan Berbasis Elektronik (SPBE)</a:t>
             </a:r>
           </a:p>
         </p:txBody>
@@ -20099,7 +18608,7 @@
                 <a:solidFill>
                   <a:srgbClr val="64748B"/>
                 </a:solidFill>
-                <a:latin typeface="Arial"/>
+                <a:latin typeface="Calibri"/>
               </a:defRPr>
             </a:pPr>
             <a:r>

--- a/SPBE_Transformasi_Birokrasi.pptx
+++ b/SPBE_Transformasi_Birokrasi.pptx
@@ -3357,7 +3357,7 @@
                 <a:solidFill>
                   <a:srgbClr val="C8962E"/>
                 </a:solidFill>
-                <a:latin typeface="Calibri"/>
+                <a:latin typeface="Arial"/>
               </a:defRPr>
             </a:pPr>
             <a:r>
@@ -3397,11 +3397,11 @@
                 <a:solidFill>
                   <a:srgbClr val="FFFFFF"/>
                 </a:solidFill>
-                <a:latin typeface="Calibri"/>
-              </a:defRPr>
-            </a:pPr>
-            <a:r>
-              <a:t>INDONESIA</a:t>
+                <a:latin typeface="Arial"/>
+              </a:defRPr>
+            </a:pPr>
+            <a:r>
+              <a:t>TRANSFORMASI BIROKRASI DIGITAL</a:t>
             </a:r>
           </a:p>
         </p:txBody>
@@ -3437,11 +3437,11 @@
                 <a:solidFill>
                   <a:srgbClr val="FFFFFF"/>
                 </a:solidFill>
-                <a:latin typeface="Calibri"/>
-              </a:defRPr>
-            </a:pPr>
-            <a:r>
-              <a:t>PENERAPAN SPBE</a:t>
+                <a:latin typeface="Arial"/>
+              </a:defRPr>
+            </a:pPr>
+            <a:r>
+              <a:t>Penerapan SPBE</a:t>
             </a:r>
           </a:p>
         </p:txBody>
@@ -3477,11 +3477,11 @@
                 <a:solidFill>
                   <a:srgbClr val="C8962E"/>
                 </a:solidFill>
-                <a:latin typeface="Calibri"/>
-              </a:defRPr>
-            </a:pPr>
-            <a:r>
-              <a:t>Perpres No. 95/2018 &amp; Perpres No. 132/2022</a:t>
+                <a:latin typeface="Arial"/>
+              </a:defRPr>
+            </a:pPr>
+            <a:r>
+              <a:t>Perpres No. 95/2018 — Perpres No. 132/2022</a:t>
             </a:r>
           </a:p>
         </p:txBody>
@@ -3517,19 +3517,19 @@
                 <a:solidFill>
                   <a:srgbClr val="FFFFFF"/>
                 </a:solidFill>
-                <a:latin typeface="Calibri"/>
-              </a:defRPr>
-            </a:pPr>
-            <a:r>
-              <a:t>Transformasi</a:t>
+                <a:latin typeface="Arial"/>
+              </a:defRPr>
+            </a:pPr>
+            <a:r>
+              <a:t>Mewujudkan Birokrasi</a:t>
             </a:r>
             <a:br/>
             <a:r>
-              <a:t>Birokrasi Digital</a:t>
+              <a:t>Terintegrasi, Efisien,</a:t>
             </a:r>
             <a:br/>
             <a:r>
-              <a:t>Terintegrasi</a:t>
+              <a:t>Aman, dan Tepercaya</a:t>
             </a:r>
           </a:p>
         </p:txBody>
@@ -3612,11 +3612,11 @@
                 <a:solidFill>
                   <a:srgbClr val="E8EDF5"/>
                 </a:solidFill>
-                <a:latin typeface="Calibri"/>
-              </a:defRPr>
-            </a:pPr>
-            <a:r>
-              <a:t>SPBE · 2024</a:t>
+                <a:latin typeface="Arial"/>
+              </a:defRPr>
+            </a:pPr>
+            <a:r>
+              <a:t>Kementerian/Lembaga/Pemda · 2025</a:t>
             </a:r>
           </a:p>
         </p:txBody>
@@ -3652,11 +3652,11 @@
                 <a:solidFill>
                   <a:srgbClr val="64748B"/>
                 </a:solidFill>
-                <a:latin typeface="Calibri"/>
-              </a:defRPr>
-            </a:pPr>
-            <a:r>
-              <a:t>Mewujudkan Birokrasi Efisien, Aman &amp; Tepercaya</a:t>
+                <a:latin typeface="Arial"/>
+              </a:defRPr>
+            </a:pPr>
+            <a:r>
+              <a:t>Arsitektur &amp; Peta Rencana SPBE</a:t>
             </a:r>
           </a:p>
         </p:txBody>
@@ -3976,15 +3976,15 @@
                 <a:solidFill>
                   <a:srgbClr val="FFFFFF"/>
                 </a:solidFill>
-                <a:latin typeface="Calibri"/>
-              </a:defRPr>
-            </a:pPr>
-            <a:r>
-              <a:t>BAB 4</a:t>
+                <a:latin typeface="Arial"/>
+              </a:defRPr>
+            </a:pPr>
+            <a:r>
+              <a:t>6 LANGKAH</a:t>
             </a:r>
             <a:br/>
             <a:r>
-              <a:t>6 LANGKAH PENERAPAN SPBE</a:t>
+              <a:t>PENERAPAN SPBE</a:t>
             </a:r>
           </a:p>
         </p:txBody>
@@ -4020,11 +4020,11 @@
                 <a:solidFill>
                   <a:srgbClr val="C8962E"/>
                 </a:solidFill>
-                <a:latin typeface="Calibri"/>
-              </a:defRPr>
-            </a:pPr>
-            <a:r>
-              <a:t>Urutan Wajib — Hindari Pemborosan Anggaran TIK</a:t>
+                <a:latin typeface="Arial"/>
+              </a:defRPr>
+            </a:pPr>
+            <a:r>
+              <a:t>Fondasi → Perencanaan → Teknis → Konsolidasi → Keamanan → Evaluasi</a:t>
             </a:r>
           </a:p>
         </p:txBody>
@@ -4060,11 +4060,11 @@
                 <a:solidFill>
                   <a:srgbClr val="64748B"/>
                 </a:solidFill>
-                <a:latin typeface="Calibri"/>
-              </a:defRPr>
-            </a:pPr>
-            <a:r>
-              <a:t>Langkah Demi Langkah Implementasi</a:t>
+                <a:latin typeface="Arial"/>
+              </a:defRPr>
+            </a:pPr>
+            <a:r>
+              <a:t>Urutan Wajib — Jangan Terjebak Pemborosan Anggaran</a:t>
             </a:r>
           </a:p>
         </p:txBody>
@@ -4298,11 +4298,11 @@
                 <a:solidFill>
                   <a:srgbClr val="FFFFFF"/>
                 </a:solidFill>
-                <a:latin typeface="Georgia"/>
-              </a:defRPr>
-            </a:pPr>
-            <a:r>
-              <a:t>Enam Langkah Berurutan Menjamin Implementasi SPBE yang Sukses</a:t>
+                <a:latin typeface="Arial Black"/>
+              </a:defRPr>
+            </a:pPr>
+            <a:r>
+              <a:t>Keenam Langkah Bersifat Sistematis — Setiap Tahap Wajib Dirunut Berurutan</a:t>
             </a:r>
           </a:p>
         </p:txBody>
@@ -4338,11 +4338,11 @@
                 <a:solidFill>
                   <a:srgbClr val="64748B"/>
                 </a:solidFill>
-                <a:latin typeface="Calibri"/>
-              </a:defRPr>
-            </a:pPr>
-            <a:r>
-              <a:t>Tahapan Penerapan</a:t>
+                <a:latin typeface="Arial"/>
+              </a:defRPr>
+            </a:pPr>
+            <a:r>
+              <a:t>Alur Penerapan SPBE</a:t>
             </a:r>
           </a:p>
         </p:txBody>
@@ -4511,7 +4511,7 @@
                 <a:solidFill>
                   <a:srgbClr val="FFFFFF"/>
                 </a:solidFill>
-                <a:latin typeface="Calibri"/>
+                <a:latin typeface="Arial"/>
               </a:defRPr>
             </a:pPr>
             <a:r>
@@ -4551,7 +4551,7 @@
                 <a:solidFill>
                   <a:srgbClr val="2563EB"/>
                 </a:solidFill>
-                <a:latin typeface="Calibri"/>
+                <a:latin typeface="Arial"/>
               </a:defRPr>
             </a:pPr>
             <a:r>
@@ -4591,11 +4591,15 @@
                 <a:solidFill>
                   <a:srgbClr val="8899B0"/>
                 </a:solidFill>
-                <a:latin typeface="Calibri"/>
-              </a:defRPr>
-            </a:pPr>
-            <a:r>
-              <a:t>SK Kepala Daerah</a:t>
+                <a:latin typeface="Arial"/>
+              </a:defRPr>
+            </a:pPr>
+            <a:r>
+              <a:t>SK Tim Koordinasi</a:t>
+            </a:r>
+            <a:br/>
+            <a:r>
+              <a:t>SPBE Instansi</a:t>
             </a:r>
             <a:br/>
             <a:r>
@@ -4635,7 +4639,7 @@
                 <a:solidFill>
                   <a:srgbClr val="C8962E"/>
                 </a:solidFill>
-                <a:latin typeface="Calibri"/>
+                <a:latin typeface="Arial"/>
               </a:defRPr>
             </a:pPr>
             <a:r>
@@ -4808,7 +4812,7 @@
                 <a:solidFill>
                   <a:srgbClr val="FFFFFF"/>
                 </a:solidFill>
-                <a:latin typeface="Calibri"/>
+                <a:latin typeface="Arial"/>
               </a:defRPr>
             </a:pPr>
             <a:r>
@@ -4848,11 +4852,11 @@
                 <a:solidFill>
                   <a:srgbClr val="0B7C72"/>
                 </a:solidFill>
-                <a:latin typeface="Calibri"/>
-              </a:defRPr>
-            </a:pPr>
-            <a:r>
-              <a:t>Arsitektur &amp; Roadmap</a:t>
+                <a:latin typeface="Arial"/>
+              </a:defRPr>
+            </a:pPr>
+            <a:r>
+              <a:t>Arsitektur &amp; Peta</a:t>
             </a:r>
           </a:p>
         </p:txBody>
@@ -4888,15 +4892,19 @@
                 <a:solidFill>
                   <a:srgbClr val="8899B0"/>
                 </a:solidFill>
-                <a:latin typeface="Calibri"/>
-              </a:defRPr>
-            </a:pPr>
-            <a:r>
-              <a:t>Proses Bisnis</a:t>
+                <a:latin typeface="Arial"/>
+              </a:defRPr>
+            </a:pPr>
+            <a:r>
+              <a:t>Pemetaan Proses</a:t>
             </a:r>
             <a:br/>
             <a:r>
-              <a:t>Peta Rencana 5 Thn</a:t>
+              <a:t>Bisnis — Roadmap</a:t>
+            </a:r>
+            <a:br/>
+            <a:r>
+              <a:t>5 Tahun</a:t>
             </a:r>
           </a:p>
         </p:txBody>
@@ -4932,7 +4940,7 @@
                 <a:solidFill>
                   <a:srgbClr val="C8962E"/>
                 </a:solidFill>
-                <a:latin typeface="Calibri"/>
+                <a:latin typeface="Arial"/>
               </a:defRPr>
             </a:pPr>
             <a:r>
@@ -5105,7 +5113,7 @@
                 <a:solidFill>
                   <a:srgbClr val="FFFFFF"/>
                 </a:solidFill>
-                <a:latin typeface="Calibri"/>
+                <a:latin typeface="Arial"/>
               </a:defRPr>
             </a:pPr>
             <a:r>
@@ -5145,7 +5153,7 @@
                 <a:solidFill>
                   <a:srgbClr val="A0522D"/>
                 </a:solidFill>
-                <a:latin typeface="Calibri"/>
+                <a:latin typeface="Arial"/>
               </a:defRPr>
             </a:pPr>
             <a:r>
@@ -5185,11 +5193,15 @@
                 <a:solidFill>
                   <a:srgbClr val="8899B0"/>
                 </a:solidFill>
-                <a:latin typeface="Calibri"/>
-              </a:defRPr>
-            </a:pPr>
-            <a:r>
-              <a:t>PDN / Cloud</a:t>
+                <a:latin typeface="Arial"/>
+              </a:defRPr>
+            </a:pPr>
+            <a:r>
+              <a:t>Migrasi ke PDN</a:t>
+            </a:r>
+            <a:br/>
+            <a:r>
+              <a:t>Hub SPLP</a:t>
             </a:r>
             <a:br/>
             <a:r>
@@ -5229,7 +5241,7 @@
                 <a:solidFill>
                   <a:srgbClr val="C8962E"/>
                 </a:solidFill>
-                <a:latin typeface="Calibri"/>
+                <a:latin typeface="Arial"/>
               </a:defRPr>
             </a:pPr>
             <a:r>
@@ -5402,7 +5414,7 @@
                 <a:solidFill>
                   <a:srgbClr val="FFFFFF"/>
                 </a:solidFill>
-                <a:latin typeface="Calibri"/>
+                <a:latin typeface="Arial"/>
               </a:defRPr>
             </a:pPr>
             <a:r>
@@ -5442,7 +5454,7 @@
                 <a:solidFill>
                   <a:srgbClr val="1B3A6B"/>
                 </a:solidFill>
-                <a:latin typeface="Calibri"/>
+                <a:latin typeface="Arial"/>
               </a:defRPr>
             </a:pPr>
             <a:r>
@@ -5482,7 +5494,7 @@
                 <a:solidFill>
                   <a:srgbClr val="8899B0"/>
                 </a:solidFill>
-                <a:latin typeface="Calibri"/>
+                <a:latin typeface="Arial"/>
               </a:defRPr>
             </a:pPr>
             <a:r>
@@ -5490,7 +5502,11 @@
             </a:r>
             <a:br/>
             <a:r>
-              <a:t>Super Apps Terpadu</a:t>
+              <a:t>Moratorium Duplikasi</a:t>
+            </a:r>
+            <a:br/>
+            <a:r>
+              <a:t>Super Apps</a:t>
             </a:r>
           </a:p>
         </p:txBody>
@@ -5526,7 +5542,7 @@
                 <a:solidFill>
                   <a:srgbClr val="C8962E"/>
                 </a:solidFill>
-                <a:latin typeface="Calibri"/>
+                <a:latin typeface="Arial"/>
               </a:defRPr>
             </a:pPr>
             <a:r>
@@ -5699,7 +5715,7 @@
                 <a:solidFill>
                   <a:srgbClr val="FFFFFF"/>
                 </a:solidFill>
-                <a:latin typeface="Calibri"/>
+                <a:latin typeface="Arial"/>
               </a:defRPr>
             </a:pPr>
             <a:r>
@@ -5739,7 +5755,7 @@
                 <a:solidFill>
                   <a:srgbClr val="2563EB"/>
                 </a:solidFill>
-                <a:latin typeface="Calibri"/>
+                <a:latin typeface="Arial"/>
               </a:defRPr>
             </a:pPr>
             <a:r>
@@ -5779,15 +5795,19 @@
                 <a:solidFill>
                   <a:srgbClr val="8899B0"/>
                 </a:solidFill>
-                <a:latin typeface="Calibri"/>
-              </a:defRPr>
-            </a:pPr>
-            <a:r>
-              <a:t>ISO 27001</a:t>
+                <a:latin typeface="Arial"/>
+              </a:defRPr>
+            </a:pPr>
+            <a:r>
+              <a:t>SMKI ISO 27001</a:t>
             </a:r>
             <a:br/>
             <a:r>
-              <a:t>BSSN &amp; CSIRT</a:t>
+              <a:t>BSSN Assessment</a:t>
+            </a:r>
+            <a:br/>
+            <a:r>
+              <a:t>CSIRT Internal</a:t>
             </a:r>
           </a:p>
         </p:txBody>
@@ -5823,7 +5843,7 @@
                 <a:solidFill>
                   <a:srgbClr val="C8962E"/>
                 </a:solidFill>
-                <a:latin typeface="Calibri"/>
+                <a:latin typeface="Arial"/>
               </a:defRPr>
             </a:pPr>
             <a:r>
@@ -5996,7 +6016,7 @@
                 <a:solidFill>
                   <a:srgbClr val="FFFFFF"/>
                 </a:solidFill>
-                <a:latin typeface="Calibri"/>
+                <a:latin typeface="Arial"/>
               </a:defRPr>
             </a:pPr>
             <a:r>
@@ -6036,7 +6056,7 @@
                 <a:solidFill>
                   <a:srgbClr val="0B7C72"/>
                 </a:solidFill>
-                <a:latin typeface="Calibri"/>
+                <a:latin typeface="Arial"/>
               </a:defRPr>
             </a:pPr>
             <a:r>
@@ -6076,15 +6096,19 @@
                 <a:solidFill>
                   <a:srgbClr val="8899B0"/>
                 </a:solidFill>
-                <a:latin typeface="Calibri"/>
-              </a:defRPr>
-            </a:pPr>
-            <a:r>
-              <a:t>Self Assessment</a:t>
+                <a:latin typeface="Arial"/>
+              </a:defRPr>
+            </a:pPr>
+            <a:r>
+              <a:t>Self-Assessment</a:t>
             </a:r>
             <a:br/>
             <a:r>
               <a:t>Audit TIK</a:t>
+            </a:r>
+            <a:br/>
+            <a:r>
+              <a:t>Continuous Improvement</a:t>
             </a:r>
           </a:p>
         </p:txBody>
@@ -6163,11 +6187,11 @@
                 <a:solidFill>
                   <a:srgbClr val="64748B"/>
                 </a:solidFill>
-                <a:latin typeface="Calibri"/>
-              </a:defRPr>
-            </a:pPr>
-            <a:r>
-              <a:t>Penerapan Sistem Pemerintahan Berbasis Elektronik (SPBE)</a:t>
+                <a:latin typeface="Arial"/>
+              </a:defRPr>
+            </a:pPr>
+            <a:r>
+              <a:t>Sumber: Perpres No. 95/2018, Perpres No. 132/2022, &amp; Pedoman SPBE Kemenpan-RB</a:t>
             </a:r>
           </a:p>
         </p:txBody>
@@ -6203,7 +6227,7 @@
                 <a:solidFill>
                   <a:srgbClr val="64748B"/>
                 </a:solidFill>
-                <a:latin typeface="Calibri"/>
+                <a:latin typeface="Arial"/>
               </a:defRPr>
             </a:pPr>
             <a:r>
@@ -6398,11 +6422,11 @@
                 <a:solidFill>
                   <a:srgbClr val="FFFFFF"/>
                 </a:solidFill>
-                <a:latin typeface="Georgia"/>
-              </a:defRPr>
-            </a:pPr>
-            <a:r>
-              <a:t>Tiga Langkah Awal Menentukan Fondasi SPBE yang Kokoh</a:t>
+                <a:latin typeface="Arial Black"/>
+              </a:defRPr>
+            </a:pPr>
+            <a:r>
+              <a:t>Fondasi, Perencanaan, dan Infrastruktur — Tiga Langkah Awal yang Menentukan Keberhasilan</a:t>
             </a:r>
           </a:p>
         </p:txBody>
@@ -6438,11 +6462,11 @@
                 <a:solidFill>
                   <a:srgbClr val="64748B"/>
                 </a:solidFill>
-                <a:latin typeface="Calibri"/>
-              </a:defRPr>
-            </a:pPr>
-            <a:r>
-              <a:t>Langkah 1–3</a:t>
+                <a:latin typeface="Arial"/>
+              </a:defRPr>
+            </a:pPr>
+            <a:r>
+              <a:t>Langkah 1–3: Fondasi &amp; Perencanaan</a:t>
             </a:r>
           </a:p>
         </p:txBody>
@@ -6611,7 +6635,7 @@
                 <a:solidFill>
                   <a:srgbClr val="FFFFFF"/>
                 </a:solidFill>
-                <a:latin typeface="Calibri"/>
+                <a:latin typeface="Arial"/>
               </a:defRPr>
             </a:pPr>
             <a:r>
@@ -6651,7 +6675,7 @@
                 <a:solidFill>
                   <a:srgbClr val="2563EB"/>
                 </a:solidFill>
-                <a:latin typeface="Calibri"/>
+                <a:latin typeface="Arial"/>
               </a:defRPr>
             </a:pPr>
             <a:r>
@@ -6691,7 +6715,7 @@
                 <a:solidFill>
                   <a:srgbClr val="1A1A2E"/>
                 </a:solidFill>
-                <a:latin typeface="Calibri"/>
+                <a:latin typeface="Arial"/>
               </a:defRPr>
             </a:pPr>
             <a:r>
@@ -6731,7 +6755,7 @@
                 <a:solidFill>
                   <a:srgbClr val="1A1A2E"/>
                 </a:solidFill>
-                <a:latin typeface="Calibri"/>
+                <a:latin typeface="Arial"/>
               </a:defRPr>
             </a:pPr>
             <a:r>
@@ -6749,7 +6773,7 @@
         <p:spPr>
           <a:xfrm>
             <a:off x="685800" y="2624327"/>
-            <a:ext cx="3240938" cy="338328"/>
+            <a:ext cx="3240938" cy="274320"/>
           </a:xfrm>
           <a:prstGeom prst="rect">
             <a:avLst/>
@@ -6771,18 +6795,58 @@
                 <a:solidFill>
                   <a:srgbClr val="1A1A2E"/>
                 </a:solidFill>
-                <a:latin typeface="Calibri"/>
-              </a:defRPr>
-            </a:pPr>
-            <a:r>
-              <a:t>• Lintas sektor: Bappeda, Ortala, BPKAD, Diskominfo</a:t>
-            </a:r>
-          </a:p>
-        </p:txBody>
-      </p:sp>
-      <p:sp>
-        <p:nvSpPr>
-          <p:cNvPr id="15" name="Rounded Rectangle 14"/>
+                <a:latin typeface="Arial"/>
+              </a:defRPr>
+            </a:pPr>
+            <a:r>
+              <a:t>• Unsur: Bappeda, Ortala, BPKAD, Diskominfo</a:t>
+            </a:r>
+          </a:p>
+        </p:txBody>
+      </p:sp>
+      <p:sp>
+        <p:nvSpPr>
+          <p:cNvPr id="15" name="TextBox 14"/>
+          <p:cNvSpPr txBox="1"/>
+          <p:nvPr/>
+        </p:nvSpPr>
+        <p:spPr>
+          <a:xfrm>
+            <a:off x="685800" y="2916935"/>
+            <a:ext cx="3240938" cy="274320"/>
+          </a:xfrm>
+          <a:prstGeom prst="rect">
+            <a:avLst/>
+          </a:prstGeom>
+          <a:noFill/>
+        </p:spPr>
+        <p:txBody>
+          <a:bodyPr wrap="square"/>
+          <a:lstStyle/>
+          <a:p>
+            <a:pPr algn="l">
+              <a:spcBef>
+                <a:spcPts val="0"/>
+              </a:spcBef>
+              <a:spcAft>
+                <a:spcPts val="0"/>
+              </a:spcAft>
+              <a:defRPr sz="900" b="0">
+                <a:solidFill>
+                  <a:srgbClr val="1A1A2E"/>
+                </a:solidFill>
+                <a:latin typeface="Arial"/>
+              </a:defRPr>
+            </a:pPr>
+            <a:r>
+              <a:t>• Bersifat lintas sektor</a:t>
+            </a:r>
+          </a:p>
+        </p:txBody>
+      </p:sp>
+      <p:sp>
+        <p:nvSpPr>
+          <p:cNvPr id="16" name="Rounded Rectangle 15"/>
           <p:cNvSpPr/>
           <p:nvPr/>
         </p:nvSpPr>
@@ -6829,7 +6893,7 @@
       </p:sp>
       <p:sp>
         <p:nvSpPr>
-          <p:cNvPr id="16" name="Rectangle 15"/>
+          <p:cNvPr id="17" name="Rectangle 16"/>
           <p:cNvSpPr/>
           <p:nvPr/>
         </p:nvSpPr>
@@ -6872,7 +6936,7 @@
       </p:sp>
       <p:sp>
         <p:nvSpPr>
-          <p:cNvPr id="17" name="Oval 16"/>
+          <p:cNvPr id="18" name="Oval 17"/>
           <p:cNvSpPr/>
           <p:nvPr/>
         </p:nvSpPr>
@@ -6915,7 +6979,7 @@
       </p:sp>
       <p:sp>
         <p:nvSpPr>
-          <p:cNvPr id="18" name="TextBox 17"/>
+          <p:cNvPr id="19" name="TextBox 18"/>
           <p:cNvSpPr txBox="1"/>
           <p:nvPr/>
         </p:nvSpPr>
@@ -6944,7 +7008,7 @@
                 <a:solidFill>
                   <a:srgbClr val="FFFFFF"/>
                 </a:solidFill>
-                <a:latin typeface="Calibri"/>
+                <a:latin typeface="Arial"/>
               </a:defRPr>
             </a:pPr>
             <a:r>
@@ -6955,7 +7019,7 @@
       </p:sp>
       <p:sp>
         <p:nvSpPr>
-          <p:cNvPr id="19" name="TextBox 18"/>
+          <p:cNvPr id="20" name="TextBox 19"/>
           <p:cNvSpPr txBox="1"/>
           <p:nvPr/>
         </p:nvSpPr>
@@ -6984,7 +7048,7 @@
                 <a:solidFill>
                   <a:srgbClr val="0B7C72"/>
                 </a:solidFill>
-                <a:latin typeface="Calibri"/>
+                <a:latin typeface="Arial"/>
               </a:defRPr>
             </a:pPr>
             <a:r>
@@ -6995,7 +7059,7 @@
       </p:sp>
       <p:sp>
         <p:nvSpPr>
-          <p:cNvPr id="20" name="TextBox 19"/>
+          <p:cNvPr id="21" name="TextBox 20"/>
           <p:cNvSpPr txBox="1"/>
           <p:nvPr/>
         </p:nvSpPr>
@@ -7024,18 +7088,18 @@
                 <a:solidFill>
                   <a:srgbClr val="1A1A2E"/>
                 </a:solidFill>
-                <a:latin typeface="Calibri"/>
-              </a:defRPr>
-            </a:pPr>
-            <a:r>
-              <a:t>• Petakan Proses Bisnis dulu</a:t>
-            </a:r>
-          </a:p>
-        </p:txBody>
-      </p:sp>
-      <p:sp>
-        <p:nvSpPr>
-          <p:cNvPr id="21" name="TextBox 20"/>
+                <a:latin typeface="Arial"/>
+              </a:defRPr>
+            </a:pPr>
+            <a:r>
+              <a:t>• Petakan proses bisnis DAHULU</a:t>
+            </a:r>
+          </a:p>
+        </p:txBody>
+      </p:sp>
+      <p:sp>
+        <p:nvSpPr>
+          <p:cNvPr id="22" name="TextBox 21"/>
           <p:cNvSpPr txBox="1"/>
           <p:nvPr/>
         </p:nvSpPr>
@@ -7064,18 +7128,18 @@
                 <a:solidFill>
                   <a:srgbClr val="1A1A2E"/>
                 </a:solidFill>
-                <a:latin typeface="Calibri"/>
-              </a:defRPr>
-            </a:pPr>
-            <a:r>
-              <a:t>• Gunakan Aplikasi Arsitektur SPBE Nasional</a:t>
-            </a:r>
-          </a:p>
-        </p:txBody>
-      </p:sp>
-      <p:sp>
-        <p:nvSpPr>
-          <p:cNvPr id="22" name="TextBox 21"/>
+                <a:latin typeface="Arial"/>
+              </a:defRPr>
+            </a:pPr>
+            <a:r>
+              <a:t>• Gunakan aplikasi Arsitektur SPBE Nasional</a:t>
+            </a:r>
+          </a:p>
+        </p:txBody>
+      </p:sp>
+      <p:sp>
+        <p:nvSpPr>
+          <p:cNvPr id="23" name="TextBox 22"/>
           <p:cNvSpPr txBox="1"/>
           <p:nvPr/>
         </p:nvSpPr>
@@ -7104,18 +7168,58 @@
                 <a:solidFill>
                   <a:srgbClr val="1A1A2E"/>
                 </a:solidFill>
-                <a:latin typeface="Calibri"/>
-              </a:defRPr>
-            </a:pPr>
-            <a:r>
-              <a:t>• Peta Rencana 5 tahunan</a:t>
-            </a:r>
-          </a:p>
-        </p:txBody>
-      </p:sp>
-      <p:sp>
-        <p:nvSpPr>
-          <p:cNvPr id="23" name="Rounded Rectangle 22"/>
+                <a:latin typeface="Arial"/>
+              </a:defRPr>
+            </a:pPr>
+            <a:r>
+              <a:t>• Susun Peta Rencana 5 tahun</a:t>
+            </a:r>
+          </a:p>
+        </p:txBody>
+      </p:sp>
+      <p:sp>
+        <p:nvSpPr>
+          <p:cNvPr id="24" name="TextBox 23"/>
+          <p:cNvSpPr txBox="1"/>
+          <p:nvPr/>
+        </p:nvSpPr>
+        <p:spPr>
+          <a:xfrm>
+            <a:off x="4475378" y="2916935"/>
+            <a:ext cx="3240938" cy="274320"/>
+          </a:xfrm>
+          <a:prstGeom prst="rect">
+            <a:avLst/>
+          </a:prstGeom>
+          <a:noFill/>
+        </p:spPr>
+        <p:txBody>
+          <a:bodyPr wrap="square"/>
+          <a:lstStyle/>
+          <a:p>
+            <a:pPr algn="l">
+              <a:spcBef>
+                <a:spcPts val="0"/>
+              </a:spcBef>
+              <a:spcAft>
+                <a:spcPts val="0"/>
+              </a:spcAft>
+              <a:defRPr sz="900" b="0">
+                <a:solidFill>
+                  <a:srgbClr val="1A1A2E"/>
+                </a:solidFill>
+                <a:latin typeface="Arial"/>
+              </a:defRPr>
+            </a:pPr>
+            <a:r>
+              <a:t>• Selaras arah strategis nasional</a:t>
+            </a:r>
+          </a:p>
+        </p:txBody>
+      </p:sp>
+      <p:sp>
+        <p:nvSpPr>
+          <p:cNvPr id="25" name="Rounded Rectangle 24"/>
           <p:cNvSpPr/>
           <p:nvPr/>
         </p:nvSpPr>
@@ -7162,7 +7266,7 @@
       </p:sp>
       <p:sp>
         <p:nvSpPr>
-          <p:cNvPr id="24" name="Rectangle 23"/>
+          <p:cNvPr id="26" name="Rectangle 25"/>
           <p:cNvSpPr/>
           <p:nvPr/>
         </p:nvSpPr>
@@ -7205,7 +7309,7 @@
       </p:sp>
       <p:sp>
         <p:nvSpPr>
-          <p:cNvPr id="25" name="Oval 24"/>
+          <p:cNvPr id="27" name="Oval 26"/>
           <p:cNvSpPr/>
           <p:nvPr/>
         </p:nvSpPr>
@@ -7248,7 +7352,7 @@
       </p:sp>
       <p:sp>
         <p:nvSpPr>
-          <p:cNvPr id="26" name="TextBox 25"/>
+          <p:cNvPr id="28" name="TextBox 27"/>
           <p:cNvSpPr txBox="1"/>
           <p:nvPr/>
         </p:nvSpPr>
@@ -7277,18 +7381,18 @@
                 <a:solidFill>
                   <a:srgbClr val="FFFFFF"/>
                 </a:solidFill>
-                <a:latin typeface="Calibri"/>
-              </a:defRPr>
-            </a:pPr>
-            <a:r>
-              <a:t>🖥️</a:t>
-            </a:r>
-          </a:p>
-        </p:txBody>
-      </p:sp>
-      <p:sp>
-        <p:nvSpPr>
-          <p:cNvPr id="27" name="TextBox 26"/>
+                <a:latin typeface="Arial"/>
+              </a:defRPr>
+            </a:pPr>
+            <a:r>
+              <a:t>🔗</a:t>
+            </a:r>
+          </a:p>
+        </p:txBody>
+      </p:sp>
+      <p:sp>
+        <p:nvSpPr>
+          <p:cNvPr id="29" name="TextBox 28"/>
           <p:cNvSpPr txBox="1"/>
           <p:nvPr/>
         </p:nvSpPr>
@@ -7317,18 +7421,18 @@
                 <a:solidFill>
                   <a:srgbClr val="A0522D"/>
                 </a:solidFill>
-                <a:latin typeface="Calibri"/>
-              </a:defRPr>
-            </a:pPr>
-            <a:r>
-              <a:t>3. Infrastruktur &amp; Integrasi</a:t>
-            </a:r>
-          </a:p>
-        </p:txBody>
-      </p:sp>
-      <p:sp>
-        <p:nvSpPr>
-          <p:cNvPr id="28" name="TextBox 27"/>
+                <a:latin typeface="Arial"/>
+              </a:defRPr>
+            </a:pPr>
+            <a:r>
+              <a:t>3. Infrastruktur &amp; Integrasi Data</a:t>
+            </a:r>
+          </a:p>
+        </p:txBody>
+      </p:sp>
+      <p:sp>
+        <p:nvSpPr>
+          <p:cNvPr id="30" name="TextBox 29"/>
           <p:cNvSpPr txBox="1"/>
           <p:nvPr/>
         </p:nvSpPr>
@@ -7357,18 +7461,18 @@
                 <a:solidFill>
                   <a:srgbClr val="1A1A2E"/>
                 </a:solidFill>
-                <a:latin typeface="Calibri"/>
-              </a:defRPr>
-            </a:pPr>
-            <a:r>
-              <a:t>• Migrasi ke Pusat Data Nasional (PDN)</a:t>
-            </a:r>
-          </a:p>
-        </p:txBody>
-      </p:sp>
-      <p:sp>
-        <p:nvSpPr>
-          <p:cNvPr id="29" name="TextBox 28"/>
+                <a:latin typeface="Arial"/>
+              </a:defRPr>
+            </a:pPr>
+            <a:r>
+              <a:t>• Batasi pembangunan data center mandiri</a:t>
+            </a:r>
+          </a:p>
+        </p:txBody>
+      </p:sp>
+      <p:sp>
+        <p:nvSpPr>
+          <p:cNvPr id="31" name="TextBox 30"/>
           <p:cNvSpPr txBox="1"/>
           <p:nvPr/>
         </p:nvSpPr>
@@ -7397,18 +7501,18 @@
                 <a:solidFill>
                   <a:srgbClr val="1A1A2E"/>
                 </a:solidFill>
-                <a:latin typeface="Calibri"/>
-              </a:defRPr>
-            </a:pPr>
-            <a:r>
-              <a:t>• Cloud tersertifikasi</a:t>
-            </a:r>
-          </a:p>
-        </p:txBody>
-      </p:sp>
-      <p:sp>
-        <p:nvSpPr>
-          <p:cNvPr id="30" name="TextBox 29"/>
+                <a:latin typeface="Arial"/>
+              </a:defRPr>
+            </a:pPr>
+            <a:r>
+              <a:t>• Migrasi ke PDN / cloud tersertifikasi</a:t>
+            </a:r>
+          </a:p>
+        </p:txBody>
+      </p:sp>
+      <p:sp>
+        <p:nvSpPr>
+          <p:cNvPr id="32" name="TextBox 31"/>
           <p:cNvSpPr txBox="1"/>
           <p:nvPr/>
         </p:nvSpPr>
@@ -7437,18 +7541,58 @@
                 <a:solidFill>
                   <a:srgbClr val="1A1A2E"/>
                 </a:solidFill>
-                <a:latin typeface="Calibri"/>
-              </a:defRPr>
-            </a:pPr>
-            <a:r>
-              <a:t>• Hub SPLP &amp; Satu Data Indonesia</a:t>
-            </a:r>
-          </a:p>
-        </p:txBody>
-      </p:sp>
-      <p:sp>
-        <p:nvSpPr>
-          <p:cNvPr id="31" name="Rectangle 30"/>
+                <a:latin typeface="Arial"/>
+              </a:defRPr>
+            </a:pPr>
+            <a:r>
+              <a:t>• Implementasi Hub SPLP</a:t>
+            </a:r>
+          </a:p>
+        </p:txBody>
+      </p:sp>
+      <p:sp>
+        <p:nvSpPr>
+          <p:cNvPr id="33" name="TextBox 32"/>
+          <p:cNvSpPr txBox="1"/>
+          <p:nvPr/>
+        </p:nvSpPr>
+        <p:spPr>
+          <a:xfrm>
+            <a:off x="8264956" y="2916935"/>
+            <a:ext cx="3240938" cy="274320"/>
+          </a:xfrm>
+          <a:prstGeom prst="rect">
+            <a:avLst/>
+          </a:prstGeom>
+          <a:noFill/>
+        </p:spPr>
+        <p:txBody>
+          <a:bodyPr wrap="square"/>
+          <a:lstStyle/>
+          <a:p>
+            <a:pPr algn="l">
+              <a:spcBef>
+                <a:spcPts val="0"/>
+              </a:spcBef>
+              <a:spcAft>
+                <a:spcPts val="0"/>
+              </a:spcAft>
+              <a:defRPr sz="900" b="0">
+                <a:solidFill>
+                  <a:srgbClr val="1A1A2E"/>
+                </a:solidFill>
+                <a:latin typeface="Arial"/>
+              </a:defRPr>
+            </a:pPr>
+            <a:r>
+              <a:t>• Prinsip Satu Data Indonesia</a:t>
+            </a:r>
+          </a:p>
+        </p:txBody>
+      </p:sp>
+      <p:sp>
+        <p:nvSpPr>
+          <p:cNvPr id="34" name="Rectangle 33"/>
           <p:cNvSpPr/>
           <p:nvPr/>
         </p:nvSpPr>
@@ -7491,7 +7635,7 @@
       </p:sp>
       <p:sp>
         <p:nvSpPr>
-          <p:cNvPr id="32" name="TextBox 31"/>
+          <p:cNvPr id="35" name="TextBox 34"/>
           <p:cNvSpPr txBox="1"/>
           <p:nvPr/>
         </p:nvSpPr>
@@ -7520,18 +7664,18 @@
                 <a:solidFill>
                   <a:srgbClr val="64748B"/>
                 </a:solidFill>
-                <a:latin typeface="Calibri"/>
-              </a:defRPr>
-            </a:pPr>
-            <a:r>
-              <a:t>Penerapan Sistem Pemerintahan Berbasis Elektronik (SPBE)</a:t>
-            </a:r>
-          </a:p>
-        </p:txBody>
-      </p:sp>
-      <p:sp>
-        <p:nvSpPr>
-          <p:cNvPr id="33" name="TextBox 32"/>
+                <a:latin typeface="Arial"/>
+              </a:defRPr>
+            </a:pPr>
+            <a:r>
+              <a:t>Sumber: Perpres No. 95/2018, Perpres No. 132/2022, &amp; Pedoman SPBE Kemenpan-RB</a:t>
+            </a:r>
+          </a:p>
+        </p:txBody>
+      </p:sp>
+      <p:sp>
+        <p:nvSpPr>
+          <p:cNvPr id="36" name="TextBox 35"/>
           <p:cNvSpPr txBox="1"/>
           <p:nvPr/>
         </p:nvSpPr>
@@ -7560,7 +7704,7 @@
                 <a:solidFill>
                   <a:srgbClr val="64748B"/>
                 </a:solidFill>
-                <a:latin typeface="Calibri"/>
+                <a:latin typeface="Arial"/>
               </a:defRPr>
             </a:pPr>
             <a:r>
@@ -7755,11 +7899,11 @@
                 <a:solidFill>
                   <a:srgbClr val="FFFFFF"/>
                 </a:solidFill>
-                <a:latin typeface="Georgia"/>
-              </a:defRPr>
-            </a:pPr>
-            <a:r>
-              <a:t>Tiga Langkah Akhir Memastikan Keberlanjutan &amp; Keamanan SPBE</a:t>
+                <a:latin typeface="Arial Black"/>
+              </a:defRPr>
+            </a:pPr>
+            <a:r>
+              <a:t>Konsolidasi, Keamanan, dan Evaluasi Berkelanjutan — Kunci Keberlanjutan Transformasi</a:t>
             </a:r>
           </a:p>
         </p:txBody>
@@ -7795,11 +7939,11 @@
                 <a:solidFill>
                   <a:srgbClr val="64748B"/>
                 </a:solidFill>
-                <a:latin typeface="Calibri"/>
-              </a:defRPr>
-            </a:pPr>
-            <a:r>
-              <a:t>Langkah 4–6</a:t>
+                <a:latin typeface="Arial"/>
+              </a:defRPr>
+            </a:pPr>
+            <a:r>
+              <a:t>Langkah 4–6: Eksekusi &amp; Evaluasi</a:t>
             </a:r>
           </a:p>
         </p:txBody>
@@ -7968,7 +8112,7 @@
                 <a:solidFill>
                   <a:srgbClr val="FFFFFF"/>
                 </a:solidFill>
-                <a:latin typeface="Calibri"/>
+                <a:latin typeface="Arial"/>
               </a:defRPr>
             </a:pPr>
             <a:r>
@@ -8008,7 +8152,7 @@
                 <a:solidFill>
                   <a:srgbClr val="2563EB"/>
                 </a:solidFill>
-                <a:latin typeface="Calibri"/>
+                <a:latin typeface="Arial"/>
               </a:defRPr>
             </a:pPr>
             <a:r>
@@ -8048,11 +8192,11 @@
                 <a:solidFill>
                   <a:srgbClr val="1A1A2E"/>
                 </a:solidFill>
-                <a:latin typeface="Calibri"/>
-              </a:defRPr>
-            </a:pPr>
-            <a:r>
-              <a:t>• Audit seluruh aplikasi existing</a:t>
+                <a:latin typeface="Arial"/>
+              </a:defRPr>
+            </a:pPr>
+            <a:r>
+              <a:t>• Audit seluruh aplikasi yang ada</a:t>
             </a:r>
           </a:p>
         </p:txBody>
@@ -8088,11 +8232,11 @@
                 <a:solidFill>
                   <a:srgbClr val="1A1A2E"/>
                 </a:solidFill>
-                <a:latin typeface="Calibri"/>
-              </a:defRPr>
-            </a:pPr>
-            <a:r>
-              <a:t>• Moratorium aplikasi duplikatif</a:t>
+                <a:latin typeface="Arial"/>
+              </a:defRPr>
+            </a:pPr>
+            <a:r>
+              <a:t>• Moratorium aplikasi baru duplikatif</a:t>
             </a:r>
           </a:p>
         </p:txBody>
@@ -8128,18 +8272,58 @@
                 <a:solidFill>
                   <a:srgbClr val="1A1A2E"/>
                 </a:solidFill>
-                <a:latin typeface="Calibri"/>
-              </a:defRPr>
-            </a:pPr>
-            <a:r>
-              <a:t>• Gabung ke Super Apps terpadu</a:t>
-            </a:r>
-          </a:p>
-        </p:txBody>
-      </p:sp>
-      <p:sp>
-        <p:nvSpPr>
-          <p:cNvPr id="15" name="Rounded Rectangle 14"/>
+                <a:latin typeface="Arial"/>
+              </a:defRPr>
+            </a:pPr>
+            <a:r>
+              <a:t>• Gabung ke satu platform terpadu</a:t>
+            </a:r>
+          </a:p>
+        </p:txBody>
+      </p:sp>
+      <p:sp>
+        <p:nvSpPr>
+          <p:cNvPr id="15" name="TextBox 14"/>
+          <p:cNvSpPr txBox="1"/>
+          <p:nvPr/>
+        </p:nvSpPr>
+        <p:spPr>
+          <a:xfrm>
+            <a:off x="685800" y="2916935"/>
+            <a:ext cx="3240938" cy="274320"/>
+          </a:xfrm>
+          <a:prstGeom prst="rect">
+            <a:avLst/>
+          </a:prstGeom>
+          <a:noFill/>
+        </p:spPr>
+        <p:txBody>
+          <a:bodyPr wrap="square"/>
+          <a:lstStyle/>
+          <a:p>
+            <a:pPr algn="l">
+              <a:spcBef>
+                <a:spcPts val="0"/>
+              </a:spcBef>
+              <a:spcAft>
+                <a:spcPts val="0"/>
+              </a:spcAft>
+              <a:defRPr sz="900" b="0">
+                <a:solidFill>
+                  <a:srgbClr val="1A1A2E"/>
+                </a:solidFill>
+                <a:latin typeface="Arial"/>
+              </a:defRPr>
+            </a:pPr>
+            <a:r>
+              <a:t>• Super Apps layanan publik &amp; administrasi</a:t>
+            </a:r>
+          </a:p>
+        </p:txBody>
+      </p:sp>
+      <p:sp>
+        <p:nvSpPr>
+          <p:cNvPr id="16" name="Rounded Rectangle 15"/>
           <p:cNvSpPr/>
           <p:nvPr/>
         </p:nvSpPr>
@@ -8186,7 +8370,7 @@
       </p:sp>
       <p:sp>
         <p:nvSpPr>
-          <p:cNvPr id="16" name="Rectangle 15"/>
+          <p:cNvPr id="17" name="Rectangle 16"/>
           <p:cNvSpPr/>
           <p:nvPr/>
         </p:nvSpPr>
@@ -8229,7 +8413,7 @@
       </p:sp>
       <p:sp>
         <p:nvSpPr>
-          <p:cNvPr id="17" name="Oval 16"/>
+          <p:cNvPr id="18" name="Oval 17"/>
           <p:cNvSpPr/>
           <p:nvPr/>
         </p:nvSpPr>
@@ -8272,7 +8456,7 @@
       </p:sp>
       <p:sp>
         <p:nvSpPr>
-          <p:cNvPr id="18" name="TextBox 17"/>
+          <p:cNvPr id="19" name="TextBox 18"/>
           <p:cNvSpPr txBox="1"/>
           <p:nvPr/>
         </p:nvSpPr>
@@ -8301,18 +8485,18 @@
                 <a:solidFill>
                   <a:srgbClr val="FFFFFF"/>
                 </a:solidFill>
-                <a:latin typeface="Calibri"/>
-              </a:defRPr>
-            </a:pPr>
-            <a:r>
-              <a:t>🔒</a:t>
-            </a:r>
-          </a:p>
-        </p:txBody>
-      </p:sp>
-      <p:sp>
-        <p:nvSpPr>
-          <p:cNvPr id="19" name="TextBox 18"/>
+                <a:latin typeface="Arial"/>
+              </a:defRPr>
+            </a:pPr>
+            <a:r>
+              <a:t>🔐</a:t>
+            </a:r>
+          </a:p>
+        </p:txBody>
+      </p:sp>
+      <p:sp>
+        <p:nvSpPr>
+          <p:cNvPr id="20" name="TextBox 19"/>
           <p:cNvSpPr txBox="1"/>
           <p:nvPr/>
         </p:nvSpPr>
@@ -8341,7 +8525,7 @@
                 <a:solidFill>
                   <a:srgbClr val="0B7C72"/>
                 </a:solidFill>
-                <a:latin typeface="Calibri"/>
+                <a:latin typeface="Arial"/>
               </a:defRPr>
             </a:pPr>
             <a:r>
@@ -8352,7 +8536,7 @@
       </p:sp>
       <p:sp>
         <p:nvSpPr>
-          <p:cNvPr id="20" name="TextBox 19"/>
+          <p:cNvPr id="21" name="TextBox 20"/>
           <p:cNvSpPr txBox="1"/>
           <p:nvPr/>
         </p:nvSpPr>
@@ -8381,18 +8565,18 @@
                 <a:solidFill>
                   <a:srgbClr val="1A1A2E"/>
                 </a:solidFill>
-                <a:latin typeface="Calibri"/>
-              </a:defRPr>
-            </a:pPr>
-            <a:r>
-              <a:t>• SMKI berbasis ISO 27001</a:t>
-            </a:r>
-          </a:p>
-        </p:txBody>
-      </p:sp>
-      <p:sp>
-        <p:nvSpPr>
-          <p:cNvPr id="21" name="TextBox 20"/>
+                <a:latin typeface="Arial"/>
+              </a:defRPr>
+            </a:pPr>
+            <a:r>
+              <a:t>• SMKI berbasis ISO 27001 bertahap</a:t>
+            </a:r>
+          </a:p>
+        </p:txBody>
+      </p:sp>
+      <p:sp>
+        <p:nvSpPr>
+          <p:cNvPr id="22" name="TextBox 21"/>
           <p:cNvSpPr txBox="1"/>
           <p:nvPr/>
         </p:nvSpPr>
@@ -8421,18 +8605,18 @@
                 <a:solidFill>
                   <a:srgbClr val="1A1A2E"/>
                 </a:solidFill>
-                <a:latin typeface="Calibri"/>
-              </a:defRPr>
-            </a:pPr>
-            <a:r>
-              <a:t>• BSSN: Vulnerability Assessment</a:t>
-            </a:r>
-          </a:p>
-        </p:txBody>
-      </p:sp>
-      <p:sp>
-        <p:nvSpPr>
-          <p:cNvPr id="22" name="TextBox 21"/>
+                <a:latin typeface="Arial"/>
+              </a:defRPr>
+            </a:pPr>
+            <a:r>
+              <a:t>• Kolaborasi dengan BSSN</a:t>
+            </a:r>
+          </a:p>
+        </p:txBody>
+      </p:sp>
+      <p:sp>
+        <p:nvSpPr>
+          <p:cNvPr id="23" name="TextBox 22"/>
           <p:cNvSpPr txBox="1"/>
           <p:nvPr/>
         </p:nvSpPr>
@@ -8461,7 +8645,47 @@
                 <a:solidFill>
                   <a:srgbClr val="1A1A2E"/>
                 </a:solidFill>
-                <a:latin typeface="Calibri"/>
+                <a:latin typeface="Arial"/>
+              </a:defRPr>
+            </a:pPr>
+            <a:r>
+              <a:t>• Vulnerability Assessment berkala</a:t>
+            </a:r>
+          </a:p>
+        </p:txBody>
+      </p:sp>
+      <p:sp>
+        <p:nvSpPr>
+          <p:cNvPr id="24" name="TextBox 23"/>
+          <p:cNvSpPr txBox="1"/>
+          <p:nvPr/>
+        </p:nvSpPr>
+        <p:spPr>
+          <a:xfrm>
+            <a:off x="4475378" y="2916935"/>
+            <a:ext cx="3240938" cy="274320"/>
+          </a:xfrm>
+          <a:prstGeom prst="rect">
+            <a:avLst/>
+          </a:prstGeom>
+          <a:noFill/>
+        </p:spPr>
+        <p:txBody>
+          <a:bodyPr wrap="square"/>
+          <a:lstStyle/>
+          <a:p>
+            <a:pPr algn="l">
+              <a:spcBef>
+                <a:spcPts val="0"/>
+              </a:spcBef>
+              <a:spcAft>
+                <a:spcPts val="0"/>
+              </a:spcAft>
+              <a:defRPr sz="900" b="0">
+                <a:solidFill>
+                  <a:srgbClr val="1A1A2E"/>
+                </a:solidFill>
+                <a:latin typeface="Arial"/>
               </a:defRPr>
             </a:pPr>
             <a:r>
@@ -8472,7 +8696,7 @@
       </p:sp>
       <p:sp>
         <p:nvSpPr>
-          <p:cNvPr id="23" name="Rounded Rectangle 22"/>
+          <p:cNvPr id="25" name="Rounded Rectangle 24"/>
           <p:cNvSpPr/>
           <p:nvPr/>
         </p:nvSpPr>
@@ -8519,7 +8743,7 @@
       </p:sp>
       <p:sp>
         <p:nvSpPr>
-          <p:cNvPr id="24" name="Rectangle 23"/>
+          <p:cNvPr id="26" name="Rectangle 25"/>
           <p:cNvSpPr/>
           <p:nvPr/>
         </p:nvSpPr>
@@ -8562,7 +8786,7 @@
       </p:sp>
       <p:sp>
         <p:nvSpPr>
-          <p:cNvPr id="25" name="Oval 24"/>
+          <p:cNvPr id="27" name="Oval 26"/>
           <p:cNvSpPr/>
           <p:nvPr/>
         </p:nvSpPr>
@@ -8605,7 +8829,7 @@
       </p:sp>
       <p:sp>
         <p:nvSpPr>
-          <p:cNvPr id="26" name="TextBox 25"/>
+          <p:cNvPr id="28" name="TextBox 27"/>
           <p:cNvSpPr txBox="1"/>
           <p:nvPr/>
         </p:nvSpPr>
@@ -8634,7 +8858,7 @@
                 <a:solidFill>
                   <a:srgbClr val="FFFFFF"/>
                 </a:solidFill>
-                <a:latin typeface="Calibri"/>
+                <a:latin typeface="Arial"/>
               </a:defRPr>
             </a:pPr>
             <a:r>
@@ -8645,7 +8869,7 @@
       </p:sp>
       <p:sp>
         <p:nvSpPr>
-          <p:cNvPr id="27" name="TextBox 26"/>
+          <p:cNvPr id="29" name="TextBox 28"/>
           <p:cNvSpPr txBox="1"/>
           <p:nvPr/>
         </p:nvSpPr>
@@ -8674,7 +8898,7 @@
                 <a:solidFill>
                   <a:srgbClr val="A0522D"/>
                 </a:solidFill>
-                <a:latin typeface="Calibri"/>
+                <a:latin typeface="Arial"/>
               </a:defRPr>
             </a:pPr>
             <a:r>
@@ -8685,7 +8909,7 @@
       </p:sp>
       <p:sp>
         <p:nvSpPr>
-          <p:cNvPr id="28" name="TextBox 27"/>
+          <p:cNvPr id="30" name="TextBox 29"/>
           <p:cNvSpPr txBox="1"/>
           <p:nvPr/>
         </p:nvSpPr>
@@ -8714,7 +8938,7 @@
                 <a:solidFill>
                   <a:srgbClr val="1A1A2E"/>
                 </a:solidFill>
-                <a:latin typeface="Calibri"/>
+                <a:latin typeface="Arial"/>
               </a:defRPr>
             </a:pPr>
             <a:r>
@@ -8725,7 +8949,7 @@
       </p:sp>
       <p:sp>
         <p:nvSpPr>
-          <p:cNvPr id="29" name="TextBox 28"/>
+          <p:cNvPr id="31" name="TextBox 30"/>
           <p:cNvSpPr txBox="1"/>
           <p:nvPr/>
         </p:nvSpPr>
@@ -8754,7 +8978,7 @@
                 <a:solidFill>
                   <a:srgbClr val="1A1A2E"/>
                 </a:solidFill>
-                <a:latin typeface="Calibri"/>
+                <a:latin typeface="Arial"/>
               </a:defRPr>
             </a:pPr>
             <a:r>
@@ -8765,7 +8989,7 @@
       </p:sp>
       <p:sp>
         <p:nvSpPr>
-          <p:cNvPr id="30" name="TextBox 29"/>
+          <p:cNvPr id="32" name="TextBox 31"/>
           <p:cNvSpPr txBox="1"/>
           <p:nvPr/>
         </p:nvSpPr>
@@ -8794,18 +9018,58 @@
                 <a:solidFill>
                   <a:srgbClr val="1A1A2E"/>
                 </a:solidFill>
-                <a:latin typeface="Calibri"/>
-              </a:defRPr>
-            </a:pPr>
-            <a:r>
-              <a:t>• Audit TIK menyeluruh</a:t>
-            </a:r>
-          </a:p>
-        </p:txBody>
-      </p:sp>
-      <p:sp>
-        <p:nvSpPr>
-          <p:cNvPr id="31" name="Rectangle 30"/>
+                <a:latin typeface="Arial"/>
+              </a:defRPr>
+            </a:pPr>
+            <a:r>
+              <a:t>• Audit TIK infrastruktur &amp; aplikasi</a:t>
+            </a:r>
+          </a:p>
+        </p:txBody>
+      </p:sp>
+      <p:sp>
+        <p:nvSpPr>
+          <p:cNvPr id="33" name="TextBox 32"/>
+          <p:cNvSpPr txBox="1"/>
+          <p:nvPr/>
+        </p:nvSpPr>
+        <p:spPr>
+          <a:xfrm>
+            <a:off x="8264956" y="2916935"/>
+            <a:ext cx="3240938" cy="274320"/>
+          </a:xfrm>
+          <a:prstGeom prst="rect">
+            <a:avLst/>
+          </a:prstGeom>
+          <a:noFill/>
+        </p:spPr>
+        <p:txBody>
+          <a:bodyPr wrap="square"/>
+          <a:lstStyle/>
+          <a:p>
+            <a:pPr algn="l">
+              <a:spcBef>
+                <a:spcPts val="0"/>
+              </a:spcBef>
+              <a:spcAft>
+                <a:spcPts val="0"/>
+              </a:spcAft>
+              <a:defRPr sz="900" b="0">
+                <a:solidFill>
+                  <a:srgbClr val="1A1A2E"/>
+                </a:solidFill>
+                <a:latin typeface="Arial"/>
+              </a:defRPr>
+            </a:pPr>
+            <a:r>
+              <a:t>• Continuous improvement</a:t>
+            </a:r>
+          </a:p>
+        </p:txBody>
+      </p:sp>
+      <p:sp>
+        <p:nvSpPr>
+          <p:cNvPr id="34" name="Rectangle 33"/>
           <p:cNvSpPr/>
           <p:nvPr/>
         </p:nvSpPr>
@@ -8848,7 +9112,7 @@
       </p:sp>
       <p:sp>
         <p:nvSpPr>
-          <p:cNvPr id="32" name="TextBox 31"/>
+          <p:cNvPr id="35" name="TextBox 34"/>
           <p:cNvSpPr txBox="1"/>
           <p:nvPr/>
         </p:nvSpPr>
@@ -8877,18 +9141,18 @@
                 <a:solidFill>
                   <a:srgbClr val="64748B"/>
                 </a:solidFill>
-                <a:latin typeface="Calibri"/>
-              </a:defRPr>
-            </a:pPr>
-            <a:r>
-              <a:t>Penerapan Sistem Pemerintahan Berbasis Elektronik (SPBE)</a:t>
-            </a:r>
-          </a:p>
-        </p:txBody>
-      </p:sp>
-      <p:sp>
-        <p:nvSpPr>
-          <p:cNvPr id="33" name="TextBox 32"/>
+                <a:latin typeface="Arial"/>
+              </a:defRPr>
+            </a:pPr>
+            <a:r>
+              <a:t>Sumber: Perpres No. 95/2018, Perpres No. 132/2022, &amp; Pedoman SPBE Kemenpan-RB</a:t>
+            </a:r>
+          </a:p>
+        </p:txBody>
+      </p:sp>
+      <p:sp>
+        <p:nvSpPr>
+          <p:cNvPr id="36" name="TextBox 35"/>
           <p:cNvSpPr txBox="1"/>
           <p:nvPr/>
         </p:nvSpPr>
@@ -8917,7 +9181,7 @@
                 <a:solidFill>
                   <a:srgbClr val="64748B"/>
                 </a:solidFill>
-                <a:latin typeface="Calibri"/>
+                <a:latin typeface="Arial"/>
               </a:defRPr>
             </a:pPr>
             <a:r>
@@ -9198,15 +9462,15 @@
                 <a:solidFill>
                   <a:srgbClr val="FFFFFF"/>
                 </a:solidFill>
-                <a:latin typeface="Calibri"/>
-              </a:defRPr>
-            </a:pPr>
-            <a:r>
-              <a:t>BAB 5</a:t>
+                <a:latin typeface="Arial"/>
+              </a:defRPr>
+            </a:pPr>
+            <a:r>
+              <a:t>PRINSIP UTAMA</a:t>
             </a:r>
             <a:br/>
             <a:r>
-              <a:t>PRINSIP UTAMA &amp; KESIMPULAN</a:t>
+              <a:t>SPBE</a:t>
             </a:r>
           </a:p>
         </p:txBody>
@@ -9242,11 +9506,11 @@
                 <a:solidFill>
                   <a:srgbClr val="C8962E"/>
                 </a:solidFill>
-                <a:latin typeface="Calibri"/>
-              </a:defRPr>
-            </a:pPr>
-            <a:r>
-              <a:t>Interoperabilitas — Bukan Membuat Aplikasi Baru untuk Setiap Masalah</a:t>
+                <a:latin typeface="Arial"/>
+              </a:defRPr>
+            </a:pPr>
+            <a:r>
+              <a:t>Interoperabilitas — sistem saling berbicara, bukan aplikasi baru</a:t>
             </a:r>
           </a:p>
         </p:txBody>
@@ -9282,11 +9546,11 @@
                 <a:solidFill>
                   <a:srgbClr val="64748B"/>
                 </a:solidFill>
-                <a:latin typeface="Calibri"/>
-              </a:defRPr>
-            </a:pPr>
-            <a:r>
-              <a:t>Paradigma SPBE Modern</a:t>
+                <a:latin typeface="Arial"/>
+              </a:defRPr>
+            </a:pPr>
+            <a:r>
+              <a:t>Paradigma Modern</a:t>
             </a:r>
           </a:p>
         </p:txBody>
@@ -9520,11 +9784,11 @@
                 <a:solidFill>
                   <a:srgbClr val="FFFFFF"/>
                 </a:solidFill>
-                <a:latin typeface="Georgia"/>
-              </a:defRPr>
-            </a:pPr>
-            <a:r>
-              <a:t>Paradigma SPBE Modern Berfokus pada Interoperabilitas, Bukan Jumlah Aplikasi</a:t>
+                <a:latin typeface="Arial Black"/>
+              </a:defRPr>
+            </a:pPr>
+            <a:r>
+              <a:t>Jebakan Terbesar: Menganggap Digitalisasi Berarti Membuat Aplikasi Baru untuk Setiap Masalah</a:t>
             </a:r>
           </a:p>
         </p:txBody>
@@ -9560,11 +9824,11 @@
                 <a:solidFill>
                   <a:srgbClr val="64748B"/>
                 </a:solidFill>
-                <a:latin typeface="Calibri"/>
-              </a:defRPr>
-            </a:pPr>
-            <a:r>
-              <a:t>Prinsip Utama</a:t>
+                <a:latin typeface="Arial"/>
+              </a:defRPr>
+            </a:pPr>
+            <a:r>
+              <a:t>Paradigma Lama vs SPBE Modern</a:t>
             </a:r>
           </a:p>
         </p:txBody>
@@ -9661,44 +9925,41 @@
       </p:sp>
       <p:sp>
         <p:nvSpPr>
-          <p:cNvPr id="9" name="Oval 8"/>
-          <p:cNvSpPr/>
-          <p:nvPr/>
-        </p:nvSpPr>
-        <p:spPr>
-          <a:xfrm>
-            <a:off x="685800" y="1188719"/>
-            <a:ext cx="384048" cy="384048"/>
-          </a:xfrm>
-          <a:prstGeom prst="ellipse">
-            <a:avLst/>
-          </a:prstGeom>
-          <a:solidFill>
-            <a:srgbClr val="DC2626"/>
-          </a:solidFill>
-          <a:ln>
-            <a:noFill/>
-          </a:ln>
-        </p:spPr>
-        <p:style>
-          <a:lnRef idx="1">
-            <a:schemeClr val="accent1"/>
-          </a:lnRef>
-          <a:fillRef idx="3">
-            <a:schemeClr val="accent1"/>
-          </a:fillRef>
-          <a:effectRef idx="2">
-            <a:schemeClr val="accent1"/>
-          </a:effectRef>
-          <a:fontRef idx="minor">
-            <a:schemeClr val="lt1"/>
-          </a:fontRef>
-        </p:style>
-        <p:txBody>
-          <a:bodyPr rtlCol="0" anchor="ctr"/>
-          <a:lstStyle/>
-          <a:p>
-            <a:pPr algn="ctr"/>
+          <p:cNvPr id="9" name="TextBox 8"/>
+          <p:cNvSpPr txBox="1"/>
+          <p:nvPr/>
+        </p:nvSpPr>
+        <p:spPr>
+          <a:xfrm>
+            <a:off x="731520" y="1188719"/>
+            <a:ext cx="5090007" cy="274320"/>
+          </a:xfrm>
+          <a:prstGeom prst="rect">
+            <a:avLst/>
+          </a:prstGeom>
+          <a:noFill/>
+        </p:spPr>
+        <p:txBody>
+          <a:bodyPr wrap="square"/>
+          <a:lstStyle/>
+          <a:p>
+            <a:pPr algn="l">
+              <a:spcBef>
+                <a:spcPts val="0"/>
+              </a:spcBef>
+              <a:spcAft>
+                <a:spcPts val="0"/>
+              </a:spcAft>
+              <a:defRPr sz="1400" b="1">
+                <a:solidFill>
+                  <a:srgbClr val="DC2626"/>
+                </a:solidFill>
+                <a:latin typeface="Arial"/>
+              </a:defRPr>
+            </a:pPr>
+            <a:r>
+              <a:t>PARADIGMA LAMA</a:t>
+            </a:r>
           </a:p>
         </p:txBody>
       </p:sp>
@@ -9710,34 +9971,34 @@
         </p:nvSpPr>
         <p:spPr>
           <a:xfrm>
-            <a:off x="762609" y="1247241"/>
-            <a:ext cx="230428" cy="230428"/>
-          </a:xfrm>
-          <a:prstGeom prst="rect">
-            <a:avLst/>
-          </a:prstGeom>
-          <a:noFill/>
-        </p:spPr>
-        <p:txBody>
-          <a:bodyPr wrap="square"/>
-          <a:lstStyle/>
-          <a:p>
-            <a:pPr algn="ctr">
-              <a:spcBef>
-                <a:spcPts val="0"/>
-              </a:spcBef>
-              <a:spcAft>
-                <a:spcPts val="0"/>
-              </a:spcAft>
-              <a:defRPr sz="1200" b="0">
-                <a:solidFill>
-                  <a:srgbClr val="FFFFFF"/>
-                </a:solidFill>
-                <a:latin typeface="Calibri"/>
-              </a:defRPr>
-            </a:pPr>
-            <a:r>
-              <a:t>⚠️</a:t>
+            <a:off x="731520" y="1481328"/>
+            <a:ext cx="5090007" cy="228600"/>
+          </a:xfrm>
+          <a:prstGeom prst="rect">
+            <a:avLst/>
+          </a:prstGeom>
+          <a:noFill/>
+        </p:spPr>
+        <p:txBody>
+          <a:bodyPr wrap="square"/>
+          <a:lstStyle/>
+          <a:p>
+            <a:pPr algn="l">
+              <a:spcBef>
+                <a:spcPts val="0"/>
+              </a:spcBef>
+              <a:spcAft>
+                <a:spcPts val="0"/>
+              </a:spcAft>
+              <a:defRPr sz="1100" b="0">
+                <a:solidFill>
+                  <a:srgbClr val="1A1A2E"/>
+                </a:solidFill>
+                <a:latin typeface="Arial"/>
+              </a:defRPr>
+            </a:pPr>
+            <a:r>
+              <a:t>• </a:t>
             </a:r>
           </a:p>
         </p:txBody>
@@ -9750,8 +10011,8 @@
         </p:nvSpPr>
         <p:spPr>
           <a:xfrm>
-            <a:off x="685800" y="1691639"/>
-            <a:ext cx="5135727" cy="274320"/>
+            <a:off x="731520" y="1719072"/>
+            <a:ext cx="5090007" cy="228600"/>
           </a:xfrm>
           <a:prstGeom prst="rect">
             <a:avLst/>
@@ -9769,15 +10030,15 @@
               <a:spcAft>
                 <a:spcPts val="0"/>
               </a:spcAft>
-              <a:defRPr sz="1300" b="1">
-                <a:solidFill>
-                  <a:srgbClr val="DC2626"/>
-                </a:solidFill>
-                <a:latin typeface="Calibri"/>
-              </a:defRPr>
-            </a:pPr>
-            <a:r>
-              <a:t>Jebakan Terbesar</a:t>
+              <a:defRPr sz="1100" b="0">
+                <a:solidFill>
+                  <a:srgbClr val="1A1A2E"/>
+                </a:solidFill>
+                <a:latin typeface="Arial"/>
+              </a:defRPr>
+            </a:pPr>
+            <a:r>
+              <a:t>• Setiap masalah → aplikasi baru</a:t>
             </a:r>
           </a:p>
         </p:txBody>
@@ -9790,8 +10051,8 @@
         </p:nvSpPr>
         <p:spPr>
           <a:xfrm>
-            <a:off x="685800" y="2039112"/>
-            <a:ext cx="5135727" cy="274320"/>
+            <a:off x="731520" y="1956815"/>
+            <a:ext cx="5090007" cy="228600"/>
           </a:xfrm>
           <a:prstGeom prst="rect">
             <a:avLst/>
@@ -9809,15 +10070,15 @@
               <a:spcAft>
                 <a:spcPts val="0"/>
               </a:spcAft>
-              <a:defRPr sz="900" b="0">
+              <a:defRPr sz="1100" b="0">
                 <a:solidFill>
                   <a:srgbClr val="1A1A2E"/>
                 </a:solidFill>
-                <a:latin typeface="Calibri"/>
-              </a:defRPr>
-            </a:pPr>
-            <a:r>
-              <a:t>• Anggap digitalisasi = buat aplikasi baru</a:t>
+                <a:latin typeface="Arial"/>
+              </a:defRPr>
+            </a:pPr>
+            <a:r>
+              <a:t>• Masyarakat unduh puluhan aplikasi</a:t>
             </a:r>
           </a:p>
         </p:txBody>
@@ -9830,8 +10091,8 @@
         </p:nvSpPr>
         <p:spPr>
           <a:xfrm>
-            <a:off x="685800" y="2331720"/>
-            <a:ext cx="5135727" cy="274320"/>
+            <a:off x="731520" y="2194559"/>
+            <a:ext cx="5090007" cy="228600"/>
           </a:xfrm>
           <a:prstGeom prst="rect">
             <a:avLst/>
@@ -9849,15 +10110,15 @@
               <a:spcAft>
                 <a:spcPts val="0"/>
               </a:spcAft>
-              <a:defRPr sz="900" b="0">
+              <a:defRPr sz="1100" b="0">
                 <a:solidFill>
                   <a:srgbClr val="1A1A2E"/>
                 </a:solidFill>
-                <a:latin typeface="Calibri"/>
-              </a:defRPr>
-            </a:pPr>
-            <a:r>
-              <a:t>• Puluhan aplikasi terpisah-pisah</a:t>
+                <a:latin typeface="Arial"/>
+              </a:defRPr>
+            </a:pPr>
+            <a:r>
+              <a:t>• Data tersekat di masing-masing sistem</a:t>
             </a:r>
           </a:p>
         </p:txBody>
@@ -9870,8 +10131,8 @@
         </p:nvSpPr>
         <p:spPr>
           <a:xfrm>
-            <a:off x="685800" y="2624327"/>
-            <a:ext cx="5135727" cy="274320"/>
+            <a:off x="731520" y="2432303"/>
+            <a:ext cx="5090007" cy="228600"/>
           </a:xfrm>
           <a:prstGeom prst="rect">
             <a:avLst/>
@@ -9889,15 +10150,15 @@
               <a:spcAft>
                 <a:spcPts val="0"/>
               </a:spcAft>
-              <a:defRPr sz="900" b="0">
+              <a:defRPr sz="1100" b="0">
                 <a:solidFill>
                   <a:srgbClr val="1A1A2E"/>
                 </a:solidFill>
-                <a:latin typeface="Calibri"/>
-              </a:defRPr>
-            </a:pPr>
-            <a:r>
-              <a:t>• Pemborosan anggaran TIK</a:t>
+                <a:latin typeface="Arial"/>
+              </a:defRPr>
+            </a:pPr>
+            <a:r>
+              <a:t>• Tidak ada standar keamanan terpadu</a:t>
             </a:r>
           </a:p>
         </p:txBody>
@@ -9910,8 +10171,8 @@
         </p:nvSpPr>
         <p:spPr>
           <a:xfrm>
-            <a:off x="685800" y="2916935"/>
-            <a:ext cx="5135727" cy="274320"/>
+            <a:off x="731520" y="2670047"/>
+            <a:ext cx="5090007" cy="228600"/>
           </a:xfrm>
           <a:prstGeom prst="rect">
             <a:avLst/>
@@ -9929,22 +10190,62 @@
               <a:spcAft>
                 <a:spcPts val="0"/>
               </a:spcAft>
-              <a:defRPr sz="900" b="0">
+              <a:defRPr sz="1100" b="0">
                 <a:solidFill>
                   <a:srgbClr val="1A1A2E"/>
                 </a:solidFill>
-                <a:latin typeface="Calibri"/>
-              </a:defRPr>
-            </a:pPr>
-            <a:r>
-              <a:t>• Masyarakat bingung dengan banyak platform</a:t>
-            </a:r>
-          </a:p>
-        </p:txBody>
-      </p:sp>
-      <p:sp>
-        <p:nvSpPr>
-          <p:cNvPr id="16" name="Rounded Rectangle 15"/>
+                <a:latin typeface="Arial"/>
+              </a:defRPr>
+            </a:pPr>
+            <a:r>
+              <a:t>• Anggaran membengkak — tumpang tindih</a:t>
+            </a:r>
+          </a:p>
+        </p:txBody>
+      </p:sp>
+      <p:sp>
+        <p:nvSpPr>
+          <p:cNvPr id="16" name="TextBox 15"/>
+          <p:cNvSpPr txBox="1"/>
+          <p:nvPr/>
+        </p:nvSpPr>
+        <p:spPr>
+          <a:xfrm>
+            <a:off x="731520" y="2907791"/>
+            <a:ext cx="5090007" cy="228600"/>
+          </a:xfrm>
+          <a:prstGeom prst="rect">
+            <a:avLst/>
+          </a:prstGeom>
+          <a:noFill/>
+        </p:spPr>
+        <p:txBody>
+          <a:bodyPr wrap="square"/>
+          <a:lstStyle/>
+          <a:p>
+            <a:pPr algn="l">
+              <a:spcBef>
+                <a:spcPts val="0"/>
+              </a:spcBef>
+              <a:spcAft>
+                <a:spcPts val="0"/>
+              </a:spcAft>
+              <a:defRPr sz="1100" b="0">
+                <a:solidFill>
+                  <a:srgbClr val="1A1A2E"/>
+                </a:solidFill>
+                <a:latin typeface="Arial"/>
+              </a:defRPr>
+            </a:pPr>
+            <a:r>
+              <a:t>• Ego sektoral digital menguat</a:t>
+            </a:r>
+          </a:p>
+        </p:txBody>
+      </p:sp>
+      <p:sp>
+        <p:nvSpPr>
+          <p:cNvPr id="17" name="Rounded Rectangle 16"/>
           <p:cNvSpPr/>
           <p:nvPr/>
         </p:nvSpPr>
@@ -9991,7 +10292,7 @@
       </p:sp>
       <p:sp>
         <p:nvSpPr>
-          <p:cNvPr id="17" name="Rectangle 16"/>
+          <p:cNvPr id="18" name="Rectangle 17"/>
           <p:cNvSpPr/>
           <p:nvPr/>
         </p:nvSpPr>
@@ -10034,83 +10335,40 @@
       </p:sp>
       <p:sp>
         <p:nvSpPr>
-          <p:cNvPr id="18" name="Oval 17"/>
-          <p:cNvSpPr/>
-          <p:nvPr/>
-        </p:nvSpPr>
-        <p:spPr>
-          <a:xfrm>
-            <a:off x="6370167" y="1188719"/>
-            <a:ext cx="384048" cy="384048"/>
-          </a:xfrm>
-          <a:prstGeom prst="ellipse">
-            <a:avLst/>
-          </a:prstGeom>
-          <a:solidFill>
-            <a:srgbClr val="0B7C72"/>
-          </a:solidFill>
-          <a:ln>
-            <a:noFill/>
-          </a:ln>
-        </p:spPr>
-        <p:style>
-          <a:lnRef idx="1">
-            <a:schemeClr val="accent1"/>
-          </a:lnRef>
-          <a:fillRef idx="3">
-            <a:schemeClr val="accent1"/>
-          </a:fillRef>
-          <a:effectRef idx="2">
-            <a:schemeClr val="accent1"/>
-          </a:effectRef>
-          <a:fontRef idx="minor">
-            <a:schemeClr val="lt1"/>
-          </a:fontRef>
-        </p:style>
-        <p:txBody>
-          <a:bodyPr rtlCol="0" anchor="ctr"/>
-          <a:lstStyle/>
-          <a:p>
-            <a:pPr algn="ctr"/>
-          </a:p>
-        </p:txBody>
-      </p:sp>
-      <p:sp>
-        <p:nvSpPr>
           <p:cNvPr id="19" name="TextBox 18"/>
           <p:cNvSpPr txBox="1"/>
           <p:nvPr/>
         </p:nvSpPr>
         <p:spPr>
           <a:xfrm>
-            <a:off x="6446977" y="1247241"/>
-            <a:ext cx="230428" cy="230428"/>
-          </a:xfrm>
-          <a:prstGeom prst="rect">
-            <a:avLst/>
-          </a:prstGeom>
-          <a:noFill/>
-        </p:spPr>
-        <p:txBody>
-          <a:bodyPr wrap="square"/>
-          <a:lstStyle/>
-          <a:p>
-            <a:pPr algn="ctr">
-              <a:spcBef>
-                <a:spcPts val="0"/>
-              </a:spcBef>
-              <a:spcAft>
-                <a:spcPts val="0"/>
-              </a:spcAft>
-              <a:defRPr sz="1200" b="0">
-                <a:solidFill>
-                  <a:srgbClr val="FFFFFF"/>
-                </a:solidFill>
-                <a:latin typeface="Calibri"/>
-              </a:defRPr>
-            </a:pPr>
-            <a:r>
-              <a:t>💡</a:t>
+            <a:off x="6415887" y="1188719"/>
+            <a:ext cx="5090007" cy="274320"/>
+          </a:xfrm>
+          <a:prstGeom prst="rect">
+            <a:avLst/>
+          </a:prstGeom>
+          <a:noFill/>
+        </p:spPr>
+        <p:txBody>
+          <a:bodyPr wrap="square"/>
+          <a:lstStyle/>
+          <a:p>
+            <a:pPr algn="l">
+              <a:spcBef>
+                <a:spcPts val="0"/>
+              </a:spcBef>
+              <a:spcAft>
+                <a:spcPts val="0"/>
+              </a:spcAft>
+              <a:defRPr sz="1400" b="1">
+                <a:solidFill>
+                  <a:srgbClr val="0B7C72"/>
+                </a:solidFill>
+                <a:latin typeface="Arial"/>
+              </a:defRPr>
+            </a:pPr>
+            <a:r>
+              <a:t>PARADIGMA SPBE MODERN</a:t>
             </a:r>
           </a:p>
         </p:txBody>
@@ -10123,8 +10381,8 @@
         </p:nvSpPr>
         <p:spPr>
           <a:xfrm>
-            <a:off x="6370167" y="1691639"/>
-            <a:ext cx="5135727" cy="274320"/>
+            <a:off x="6415887" y="1481328"/>
+            <a:ext cx="5090007" cy="228600"/>
           </a:xfrm>
           <a:prstGeom prst="rect">
             <a:avLst/>
@@ -10142,15 +10400,15 @@
               <a:spcAft>
                 <a:spcPts val="0"/>
               </a:spcAft>
-              <a:defRPr sz="1300" b="1">
-                <a:solidFill>
-                  <a:srgbClr val="0B7C72"/>
-                </a:solidFill>
-                <a:latin typeface="Calibri"/>
-              </a:defRPr>
-            </a:pPr>
-            <a:r>
-              <a:t>Paradigma Modern</a:t>
+              <a:defRPr sz="1100" b="0">
+                <a:solidFill>
+                  <a:srgbClr val="1A1A2E"/>
+                </a:solidFill>
+                <a:latin typeface="Arial"/>
+              </a:defRPr>
+            </a:pPr>
+            <a:r>
+              <a:t>• </a:t>
             </a:r>
           </a:p>
         </p:txBody>
@@ -10163,8 +10421,8 @@
         </p:nvSpPr>
         <p:spPr>
           <a:xfrm>
-            <a:off x="6370167" y="2039112"/>
-            <a:ext cx="5135727" cy="274320"/>
+            <a:off x="6415887" y="1719072"/>
+            <a:ext cx="5090007" cy="228600"/>
           </a:xfrm>
           <a:prstGeom prst="rect">
             <a:avLst/>
@@ -10182,15 +10440,15 @@
               <a:spcAft>
                 <a:spcPts val="0"/>
               </a:spcAft>
-              <a:defRPr sz="900" b="0">
+              <a:defRPr sz="1100" b="0">
                 <a:solidFill>
                   <a:srgbClr val="1A1A2E"/>
                 </a:solidFill>
-                <a:latin typeface="Calibri"/>
-              </a:defRPr>
-            </a:pPr>
-            <a:r>
-              <a:t>• Sistem saling berbicara &amp; bertukar data</a:t>
+                <a:latin typeface="Arial"/>
+              </a:defRPr>
+            </a:pPr>
+            <a:r>
+              <a:t>• Fokus pada interoperabilitas</a:t>
             </a:r>
           </a:p>
         </p:txBody>
@@ -10203,8 +10461,8 @@
         </p:nvSpPr>
         <p:spPr>
           <a:xfrm>
-            <a:off x="6370167" y="2331720"/>
-            <a:ext cx="5135727" cy="274320"/>
+            <a:off x="6415887" y="1956815"/>
+            <a:ext cx="5090007" cy="228600"/>
           </a:xfrm>
           <a:prstGeom prst="rect">
             <a:avLst/>
@@ -10222,15 +10480,15 @@
               <a:spcAft>
                 <a:spcPts val="0"/>
               </a:spcAft>
-              <a:defRPr sz="900" b="0">
+              <a:defRPr sz="1100" b="0">
                 <a:solidFill>
                   <a:srgbClr val="1A1A2E"/>
                 </a:solidFill>
-                <a:latin typeface="Calibri"/>
-              </a:defRPr>
-            </a:pPr>
-            <a:r>
-              <a:t>• Satu platform layanan terpadu</a:t>
+                <a:latin typeface="Arial"/>
+              </a:defRPr>
+            </a:pPr>
+            <a:r>
+              <a:t>• Sistem yang ada saling berbicara</a:t>
             </a:r>
           </a:p>
         </p:txBody>
@@ -10243,8 +10501,8 @@
         </p:nvSpPr>
         <p:spPr>
           <a:xfrm>
-            <a:off x="6370167" y="2624327"/>
-            <a:ext cx="5135727" cy="274320"/>
+            <a:off x="6415887" y="2194559"/>
+            <a:ext cx="5090007" cy="228600"/>
           </a:xfrm>
           <a:prstGeom prst="rect">
             <a:avLst/>
@@ -10262,15 +10520,15 @@
               <a:spcAft>
                 <a:spcPts val="0"/>
               </a:spcAft>
-              <a:defRPr sz="900" b="0">
+              <a:defRPr sz="1100" b="0">
                 <a:solidFill>
                   <a:srgbClr val="1A1A2E"/>
                 </a:solidFill>
-                <a:latin typeface="Calibri"/>
-              </a:defRPr>
-            </a:pPr>
-            <a:r>
-              <a:t>• Efisien, transparan, tepercaya</a:t>
+                <a:latin typeface="Arial"/>
+              </a:defRPr>
+            </a:pPr>
+            <a:r>
+              <a:t>• Bertukar data via Hub SPLP</a:t>
             </a:r>
           </a:p>
         </p:txBody>
@@ -10283,8 +10541,8 @@
         </p:nvSpPr>
         <p:spPr>
           <a:xfrm>
-            <a:off x="6370167" y="2916935"/>
-            <a:ext cx="5135727" cy="274320"/>
+            <a:off x="6415887" y="2432303"/>
+            <a:ext cx="5090007" cy="228600"/>
           </a:xfrm>
           <a:prstGeom prst="rect">
             <a:avLst/>
@@ -10302,22 +10560,102 @@
               <a:spcAft>
                 <a:spcPts val="0"/>
               </a:spcAft>
-              <a:defRPr sz="900" b="0">
+              <a:defRPr sz="1100" b="0">
                 <a:solidFill>
                   <a:srgbClr val="1A1A2E"/>
                 </a:solidFill>
-                <a:latin typeface="Calibri"/>
-              </a:defRPr>
-            </a:pPr>
-            <a:r>
-              <a:t>• Masyarakat cukup satu aplikasi</a:t>
-            </a:r>
-          </a:p>
-        </p:txBody>
-      </p:sp>
-      <p:sp>
-        <p:nvSpPr>
-          <p:cNvPr id="25" name="Rectangle 24"/>
+                <a:latin typeface="Arial"/>
+              </a:defRPr>
+            </a:pPr>
+            <a:r>
+              <a:t>• Satu pintu layanan — masyarakat cukup 1 aplikasi</a:t>
+            </a:r>
+          </a:p>
+        </p:txBody>
+      </p:sp>
+      <p:sp>
+        <p:nvSpPr>
+          <p:cNvPr id="25" name="TextBox 24"/>
+          <p:cNvSpPr txBox="1"/>
+          <p:nvPr/>
+        </p:nvSpPr>
+        <p:spPr>
+          <a:xfrm>
+            <a:off x="6415887" y="2670047"/>
+            <a:ext cx="5090007" cy="228600"/>
+          </a:xfrm>
+          <a:prstGeom prst="rect">
+            <a:avLst/>
+          </a:prstGeom>
+          <a:noFill/>
+        </p:spPr>
+        <p:txBody>
+          <a:bodyPr wrap="square"/>
+          <a:lstStyle/>
+          <a:p>
+            <a:pPr algn="l">
+              <a:spcBef>
+                <a:spcPts val="0"/>
+              </a:spcBef>
+              <a:spcAft>
+                <a:spcPts val="0"/>
+              </a:spcAft>
+              <a:defRPr sz="1100" b="0">
+                <a:solidFill>
+                  <a:srgbClr val="1A1A2E"/>
+                </a:solidFill>
+                <a:latin typeface="Arial"/>
+              </a:defRPr>
+            </a:pPr>
+            <a:r>
+              <a:t>• Efisien, aman, dan tepercaya</a:t>
+            </a:r>
+          </a:p>
+        </p:txBody>
+      </p:sp>
+      <p:sp>
+        <p:nvSpPr>
+          <p:cNvPr id="26" name="TextBox 25"/>
+          <p:cNvSpPr txBox="1"/>
+          <p:nvPr/>
+        </p:nvSpPr>
+        <p:spPr>
+          <a:xfrm>
+            <a:off x="6415887" y="2907791"/>
+            <a:ext cx="5090007" cy="228600"/>
+          </a:xfrm>
+          <a:prstGeom prst="rect">
+            <a:avLst/>
+          </a:prstGeom>
+          <a:noFill/>
+        </p:spPr>
+        <p:txBody>
+          <a:bodyPr wrap="square"/>
+          <a:lstStyle/>
+          <a:p>
+            <a:pPr algn="l">
+              <a:spcBef>
+                <a:spcPts val="0"/>
+              </a:spcBef>
+              <a:spcAft>
+                <a:spcPts val="0"/>
+              </a:spcAft>
+              <a:defRPr sz="1100" b="0">
+                <a:solidFill>
+                  <a:srgbClr val="1A1A2E"/>
+                </a:solidFill>
+                <a:latin typeface="Arial"/>
+              </a:defRPr>
+            </a:pPr>
+            <a:r>
+              <a:t>• Kolaborasi antar instansi</a:t>
+            </a:r>
+          </a:p>
+        </p:txBody>
+      </p:sp>
+      <p:sp>
+        <p:nvSpPr>
+          <p:cNvPr id="27" name="Rectangle 26"/>
           <p:cNvSpPr/>
           <p:nvPr/>
         </p:nvSpPr>
@@ -10360,7 +10698,7 @@
       </p:sp>
       <p:sp>
         <p:nvSpPr>
-          <p:cNvPr id="26" name="TextBox 25"/>
+          <p:cNvPr id="28" name="TextBox 27"/>
           <p:cNvSpPr txBox="1"/>
           <p:nvPr/>
         </p:nvSpPr>
@@ -10389,18 +10727,18 @@
                 <a:solidFill>
                   <a:srgbClr val="64748B"/>
                 </a:solidFill>
-                <a:latin typeface="Calibri"/>
-              </a:defRPr>
-            </a:pPr>
-            <a:r>
-              <a:t>Penerapan Sistem Pemerintahan Berbasis Elektronik (SPBE)</a:t>
-            </a:r>
-          </a:p>
-        </p:txBody>
-      </p:sp>
-      <p:sp>
-        <p:nvSpPr>
-          <p:cNvPr id="27" name="TextBox 26"/>
+                <a:latin typeface="Arial"/>
+              </a:defRPr>
+            </a:pPr>
+            <a:r>
+              <a:t>Sumber: Perpres No. 95/2018, Perpres No. 132/2022, &amp; Pedoman SPBE Kemenpan-RB</a:t>
+            </a:r>
+          </a:p>
+        </p:txBody>
+      </p:sp>
+      <p:sp>
+        <p:nvSpPr>
+          <p:cNvPr id="29" name="TextBox 28"/>
           <p:cNvSpPr txBox="1"/>
           <p:nvPr/>
         </p:nvSpPr>
@@ -10429,7 +10767,7 @@
                 <a:solidFill>
                   <a:srgbClr val="64748B"/>
                 </a:solidFill>
-                <a:latin typeface="Calibri"/>
+                <a:latin typeface="Arial"/>
               </a:defRPr>
             </a:pPr>
             <a:r>
@@ -10667,7 +11005,7 @@
                 <a:solidFill>
                   <a:srgbClr val="C8962E"/>
                 </a:solidFill>
-                <a:latin typeface="Calibri"/>
+                <a:latin typeface="Arial"/>
               </a:defRPr>
             </a:pPr>
             <a:r>
@@ -10707,7 +11045,7 @@
                 <a:solidFill>
                   <a:srgbClr val="FFFFFF"/>
                 </a:solidFill>
-                <a:latin typeface="Calibri"/>
+                <a:latin typeface="Arial"/>
               </a:defRPr>
             </a:pPr>
             <a:r>
@@ -10747,15 +11085,15 @@
                 <a:solidFill>
                   <a:srgbClr val="E8EDF5"/>
                 </a:solidFill>
-                <a:latin typeface="Calibri"/>
-              </a:defRPr>
-            </a:pPr>
-            <a:r>
-              <a:t>Bersama Mewujudkan Birokrasi Digital</a:t>
+                <a:latin typeface="Arial"/>
+              </a:defRPr>
+            </a:pPr>
+            <a:r>
+              <a:t>Mewujudkan Birokrasi Terintegrasi, Efisien, Aman, dan Tepercaya</a:t>
             </a:r>
             <a:br/>
             <a:r>
-              <a:t>Terintegrasi, Efisien, Aman, dan Tepercaya</a:t>
+              <a:t>Melalui Transformasi SPBE</a:t>
             </a:r>
           </a:p>
         </p:txBody>
@@ -10791,7 +11129,7 @@
                 <a:solidFill>
                   <a:srgbClr val="64748B"/>
                 </a:solidFill>
-                <a:latin typeface="Calibri"/>
+                <a:latin typeface="Arial"/>
               </a:defRPr>
             </a:pPr>
             <a:r>
@@ -11029,11 +11367,11 @@
                 <a:solidFill>
                   <a:srgbClr val="FFFFFF"/>
                 </a:solidFill>
-                <a:latin typeface="Georgia"/>
-              </a:defRPr>
-            </a:pPr>
-            <a:r>
-              <a:t>Empat Pilar Utama Menuju Transformasi Digital Pemerintahan</a:t>
+                <a:latin typeface="Arial Black"/>
+              </a:defRPr>
+            </a:pPr>
+            <a:r>
+              <a:t>5 Pokok Bahasan Memandu Transformasi SPBE Instansi</a:t>
             </a:r>
           </a:p>
         </p:txBody>
@@ -11069,11 +11407,11 @@
                 <a:solidFill>
                   <a:srgbClr val="64748B"/>
                 </a:solidFill>
-                <a:latin typeface="Calibri"/>
-              </a:defRPr>
-            </a:pPr>
-            <a:r>
-              <a:t>Penerapan SPBE</a:t>
+                <a:latin typeface="Arial"/>
+              </a:defRPr>
+            </a:pPr>
+            <a:r>
+              <a:t>Daftar Isi</a:t>
             </a:r>
           </a:p>
         </p:txBody>
@@ -11169,7 +11507,7 @@
                 <a:solidFill>
                   <a:srgbClr val="FFFFFF"/>
                 </a:solidFill>
-                <a:latin typeface="Calibri"/>
+                <a:latin typeface="Arial"/>
               </a:defRPr>
             </a:pPr>
             <a:r>
@@ -11209,11 +11547,11 @@
                 <a:solidFill>
                   <a:srgbClr val="1A1A2E"/>
                 </a:solidFill>
-                <a:latin typeface="Calibri"/>
-              </a:defRPr>
-            </a:pPr>
-            <a:r>
-              <a:t>Transformasi SPBE</a:t>
+                <a:latin typeface="Arial"/>
+              </a:defRPr>
+            </a:pPr>
+            <a:r>
+              <a:t>Konsep Dasar &amp; Landasan Hukum SPBE</a:t>
             </a:r>
           </a:p>
         </p:txBody>
@@ -11309,7 +11647,7 @@
                 <a:solidFill>
                   <a:srgbClr val="FFFFFF"/>
                 </a:solidFill>
-                <a:latin typeface="Calibri"/>
+                <a:latin typeface="Arial"/>
               </a:defRPr>
             </a:pPr>
             <a:r>
@@ -11349,11 +11687,11 @@
                 <a:solidFill>
                   <a:srgbClr val="1A1A2E"/>
                 </a:solidFill>
-                <a:latin typeface="Calibri"/>
-              </a:defRPr>
-            </a:pPr>
-            <a:r>
-              <a:t>Arsitektur &amp; Kerangka Kerja</a:t>
+                <a:latin typeface="Arial"/>
+              </a:defRPr>
+            </a:pPr>
+            <a:r>
+              <a:t>Kerangka Arsitektur SPBE</a:t>
             </a:r>
           </a:p>
         </p:txBody>
@@ -11449,7 +11787,7 @@
                 <a:solidFill>
                   <a:srgbClr val="FFFFFF"/>
                 </a:solidFill>
-                <a:latin typeface="Calibri"/>
+                <a:latin typeface="Arial"/>
               </a:defRPr>
             </a:pPr>
             <a:r>
@@ -11489,11 +11827,11 @@
                 <a:solidFill>
                   <a:srgbClr val="1A1A2E"/>
                 </a:solidFill>
-                <a:latin typeface="Calibri"/>
-              </a:defRPr>
-            </a:pPr>
-            <a:r>
-              <a:t>4 Domain Utama Evaluasi SPBE</a:t>
+                <a:latin typeface="Arial"/>
+              </a:defRPr>
+            </a:pPr>
+            <a:r>
+              <a:t>4 Domain Evaluasi Tingkat Kematangan</a:t>
             </a:r>
           </a:p>
         </p:txBody>
@@ -11589,7 +11927,7 @@
                 <a:solidFill>
                   <a:srgbClr val="FFFFFF"/>
                 </a:solidFill>
-                <a:latin typeface="Calibri"/>
+                <a:latin typeface="Arial"/>
               </a:defRPr>
             </a:pPr>
             <a:r>
@@ -11629,7 +11967,7 @@
                 <a:solidFill>
                   <a:srgbClr val="1A1A2E"/>
                 </a:solidFill>
-                <a:latin typeface="Calibri"/>
+                <a:latin typeface="Arial"/>
               </a:defRPr>
             </a:pPr>
             <a:r>
@@ -11729,7 +12067,7 @@
                 <a:solidFill>
                   <a:srgbClr val="FFFFFF"/>
                 </a:solidFill>
-                <a:latin typeface="Calibri"/>
+                <a:latin typeface="Arial"/>
               </a:defRPr>
             </a:pPr>
             <a:r>
@@ -11769,11 +12107,11 @@
                 <a:solidFill>
                   <a:srgbClr val="1A1A2E"/>
                 </a:solidFill>
-                <a:latin typeface="Calibri"/>
-              </a:defRPr>
-            </a:pPr>
-            <a:r>
-              <a:t>Prinsip Utama &amp; Kesimpulan</a:t>
+                <a:latin typeface="Arial"/>
+              </a:defRPr>
+            </a:pPr>
+            <a:r>
+              <a:t>Prinsip Interoperabilitas</a:t>
             </a:r>
           </a:p>
         </p:txBody>
@@ -11852,11 +12190,11 @@
                 <a:solidFill>
                   <a:srgbClr val="64748B"/>
                 </a:solidFill>
-                <a:latin typeface="Calibri"/>
-              </a:defRPr>
-            </a:pPr>
-            <a:r>
-              <a:t>Penerapan Sistem Pemerintahan Berbasis Elektronik (SPBE)</a:t>
+                <a:latin typeface="Arial"/>
+              </a:defRPr>
+            </a:pPr>
+            <a:r>
+              <a:t>Sumber: Perpres No. 95/2018, Perpres No. 132/2022, &amp; Pedoman SPBE Kemenpan-RB</a:t>
             </a:r>
           </a:p>
         </p:txBody>
@@ -11892,7 +12230,7 @@
                 <a:solidFill>
                   <a:srgbClr val="64748B"/>
                 </a:solidFill>
-                <a:latin typeface="Calibri"/>
+                <a:latin typeface="Arial"/>
               </a:defRPr>
             </a:pPr>
             <a:r>
@@ -12173,15 +12511,15 @@
                 <a:solidFill>
                   <a:srgbClr val="FFFFFF"/>
                 </a:solidFill>
-                <a:latin typeface="Calibri"/>
-              </a:defRPr>
-            </a:pPr>
-            <a:r>
-              <a:t>BAB 1</a:t>
+                <a:latin typeface="Arial"/>
+              </a:defRPr>
+            </a:pPr>
+            <a:r>
+              <a:t>KONSEP DASAR</a:t>
             </a:r>
             <a:br/>
             <a:r>
-              <a:t>TRANSFORMASI SPBE</a:t>
+              <a:t>SPBE</a:t>
             </a:r>
           </a:p>
         </p:txBody>
@@ -12217,11 +12555,11 @@
                 <a:solidFill>
                   <a:srgbClr val="C8962E"/>
                 </a:solidFill>
-                <a:latin typeface="Calibri"/>
-              </a:defRPr>
-            </a:pPr>
-            <a:r>
-              <a:t>Digitalisasi Bukan Sekadar Aplikasi — Reformasi Birokrasi Total</a:t>
+                <a:latin typeface="Arial"/>
+              </a:defRPr>
+            </a:pPr>
+            <a:r>
+              <a:t>Transformasi menyeluruh, bukan sekadar digitalisasi</a:t>
             </a:r>
           </a:p>
         </p:txBody>
@@ -12257,11 +12595,11 @@
                 <a:solidFill>
                   <a:srgbClr val="64748B"/>
                 </a:solidFill>
-                <a:latin typeface="Calibri"/>
-              </a:defRPr>
-            </a:pPr>
-            <a:r>
-              <a:t>Perpres No. 95/2018 &amp; Perpres No. 132/2022</a:t>
+                <a:latin typeface="Arial"/>
+              </a:defRPr>
+            </a:pPr>
+            <a:r>
+              <a:t>Paradigma Baru Birokrasi Pemerintahan</a:t>
             </a:r>
           </a:p>
         </p:txBody>
@@ -12495,11 +12833,11 @@
                 <a:solidFill>
                   <a:srgbClr val="FFFFFF"/>
                 </a:solidFill>
-                <a:latin typeface="Georgia"/>
-              </a:defRPr>
-            </a:pPr>
-            <a:r>
-              <a:t>SPBE Bukan Sekadar Digitalisasi — Ini Transformasi Birokrasi Total</a:t>
+                <a:latin typeface="Arial Black"/>
+              </a:defRPr>
+            </a:pPr>
+            <a:r>
+              <a:t>SPBE adalah Transformasi Birokrasi, Bukan Sekadar Memindahkan Kertas ke Aplikasi</a:t>
             </a:r>
           </a:p>
         </p:txBody>
@@ -12535,11 +12873,11 @@
                 <a:solidFill>
                   <a:srgbClr val="64748B"/>
                 </a:solidFill>
-                <a:latin typeface="Calibri"/>
-              </a:defRPr>
-            </a:pPr>
-            <a:r>
-              <a:t>Perpres No. 95/2018</a:t>
+                <a:latin typeface="Arial"/>
+              </a:defRPr>
+            </a:pPr>
+            <a:r>
+              <a:t>Definisi &amp; Landasan Hukum</a:t>
             </a:r>
           </a:p>
         </p:txBody>
@@ -12553,7 +12891,7 @@
         <p:spPr>
           <a:xfrm>
             <a:off x="548640" y="1051560"/>
-            <a:ext cx="3515258" cy="5349240"/>
+            <a:ext cx="5410047" cy="2537460"/>
           </a:xfrm>
           <a:prstGeom prst="roundRect">
             <a:avLst>
@@ -12600,7 +12938,7 @@
         <p:spPr>
           <a:xfrm>
             <a:off x="548640" y="1051560"/>
-            <a:ext cx="45720" cy="5349240"/>
+            <a:ext cx="45720" cy="2537460"/>
           </a:xfrm>
           <a:prstGeom prst="rect">
             <a:avLst/>
@@ -12708,7 +13046,7 @@
                 <a:solidFill>
                   <a:srgbClr val="FFFFFF"/>
                 </a:solidFill>
-                <a:latin typeface="Calibri"/>
+                <a:latin typeface="Arial"/>
               </a:defRPr>
             </a:pPr>
             <a:r>
@@ -12726,7 +13064,7 @@
         <p:spPr>
           <a:xfrm>
             <a:off x="685800" y="1691639"/>
-            <a:ext cx="3240938" cy="274320"/>
+            <a:ext cx="5135727" cy="274320"/>
           </a:xfrm>
           <a:prstGeom prst="rect">
             <a:avLst/>
@@ -12748,11 +13086,11 @@
                 <a:solidFill>
                   <a:srgbClr val="2563EB"/>
                 </a:solidFill>
-                <a:latin typeface="Calibri"/>
-              </a:defRPr>
-            </a:pPr>
-            <a:r>
-              <a:t>Apa Itu SPBE?</a:t>
+                <a:latin typeface="Arial"/>
+              </a:defRPr>
+            </a:pPr>
+            <a:r>
+              <a:t>Amanat Perpres No. 95/2018</a:t>
             </a:r>
           </a:p>
         </p:txBody>
@@ -12766,7 +13104,7 @@
         <p:spPr>
           <a:xfrm>
             <a:off x="685800" y="2039112"/>
-            <a:ext cx="3240938" cy="338328"/>
+            <a:ext cx="5135727" cy="274320"/>
           </a:xfrm>
           <a:prstGeom prst="rect">
             <a:avLst/>
@@ -12788,11 +13126,11 @@
                 <a:solidFill>
                   <a:srgbClr val="1A1A2E"/>
                 </a:solidFill>
-                <a:latin typeface="Calibri"/>
-              </a:defRPr>
-            </a:pPr>
-            <a:r>
-              <a:t>• Penyelenggaraan pemerintahan berbasis elektronik</a:t>
+                <a:latin typeface="Arial"/>
+              </a:defRPr>
+            </a:pPr>
+            <a:r>
+              <a:t>• SPBE adalah penyelenggaraan pemerintahan yang memanfaatkan TIK</a:t>
             </a:r>
           </a:p>
         </p:txBody>
@@ -12805,8 +13143,8 @@
         </p:nvSpPr>
         <p:spPr>
           <a:xfrm>
-            <a:off x="685800" y="2395728"/>
-            <a:ext cx="3240938" cy="274320"/>
+            <a:off x="685800" y="2331720"/>
+            <a:ext cx="5135727" cy="274320"/>
           </a:xfrm>
           <a:prstGeom prst="rect">
             <a:avLst/>
@@ -12828,11 +13166,11 @@
                 <a:solidFill>
                   <a:srgbClr val="1A1A2E"/>
                 </a:solidFill>
-                <a:latin typeface="Calibri"/>
-              </a:defRPr>
-            </a:pPr>
-            <a:r>
-              <a:t>• Menciptakan birokrasi terintegrasi</a:t>
+                <a:latin typeface="Arial"/>
+              </a:defRPr>
+            </a:pPr>
+            <a:r>
+              <a:t>• Memberi layanan kepada instansi, ASN, pelaku bisnis, dan masyarakat</a:t>
             </a:r>
           </a:p>
         </p:txBody>
@@ -12845,8 +13183,8 @@
         </p:nvSpPr>
         <p:spPr>
           <a:xfrm>
-            <a:off x="685800" y="2688336"/>
-            <a:ext cx="3240938" cy="274320"/>
+            <a:off x="685800" y="2624327"/>
+            <a:ext cx="5135727" cy="274320"/>
           </a:xfrm>
           <a:prstGeom prst="rect">
             <a:avLst/>
@@ -12868,11 +13206,11 @@
                 <a:solidFill>
                   <a:srgbClr val="1A1A2E"/>
                 </a:solidFill>
-                <a:latin typeface="Calibri"/>
-              </a:defRPr>
-            </a:pPr>
-            <a:r>
-              <a:t>• Efisien, aman, dan tepercaya</a:t>
+                <a:latin typeface="Arial"/>
+              </a:defRPr>
+            </a:pPr>
+            <a:r>
+              <a:t>• Menjadi dasar bagi seluruh transformasi digital pemerintahan</a:t>
             </a:r>
           </a:p>
         </p:txBody>
@@ -12885,8 +13223,8 @@
         </p:nvSpPr>
         <p:spPr>
           <a:xfrm>
-            <a:off x="4338218" y="1051560"/>
-            <a:ext cx="3515258" cy="5349240"/>
+            <a:off x="6233007" y="1051560"/>
+            <a:ext cx="5410047" cy="2537460"/>
           </a:xfrm>
           <a:prstGeom prst="roundRect">
             <a:avLst>
@@ -12932,8 +13270,8 @@
         </p:nvSpPr>
         <p:spPr>
           <a:xfrm>
-            <a:off x="4338218" y="1051560"/>
-            <a:ext cx="45720" cy="5349240"/>
+            <a:off x="6233007" y="1051560"/>
+            <a:ext cx="45720" cy="2537460"/>
           </a:xfrm>
           <a:prstGeom prst="rect">
             <a:avLst/>
@@ -12975,7 +13313,7 @@
         </p:nvSpPr>
         <p:spPr>
           <a:xfrm>
-            <a:off x="4475378" y="1188719"/>
+            <a:off x="6370167" y="1188719"/>
             <a:ext cx="384048" cy="384048"/>
           </a:xfrm>
           <a:prstGeom prst="ellipse">
@@ -13018,7 +13356,7 @@
         </p:nvSpPr>
         <p:spPr>
           <a:xfrm>
-            <a:off x="4552188" y="1247241"/>
+            <a:off x="6446977" y="1247241"/>
             <a:ext cx="230428" cy="230428"/>
           </a:xfrm>
           <a:prstGeom prst="rect">
@@ -13041,7 +13379,7 @@
                 <a:solidFill>
                   <a:srgbClr val="FFFFFF"/>
                 </a:solidFill>
-                <a:latin typeface="Calibri"/>
+                <a:latin typeface="Arial"/>
               </a:defRPr>
             </a:pPr>
             <a:r>
@@ -13058,8 +13396,8 @@
         </p:nvSpPr>
         <p:spPr>
           <a:xfrm>
-            <a:off x="4475378" y="1691639"/>
-            <a:ext cx="3240938" cy="274320"/>
+            <a:off x="6370167" y="1691639"/>
+            <a:ext cx="5135727" cy="274320"/>
           </a:xfrm>
           <a:prstGeom prst="rect">
             <a:avLst/>
@@ -13081,11 +13419,11 @@
                 <a:solidFill>
                   <a:srgbClr val="0B7C72"/>
                 </a:solidFill>
-                <a:latin typeface="Calibri"/>
-              </a:defRPr>
-            </a:pPr>
-            <a:r>
-              <a:t>Dasar Hukum</a:t>
+                <a:latin typeface="Arial"/>
+              </a:defRPr>
+            </a:pPr>
+            <a:r>
+              <a:t>Penyempurnaan Perpres No. 132/2022</a:t>
             </a:r>
           </a:p>
         </p:txBody>
@@ -13098,8 +13436,8 @@
         </p:nvSpPr>
         <p:spPr>
           <a:xfrm>
-            <a:off x="4475378" y="2039112"/>
-            <a:ext cx="3240938" cy="274320"/>
+            <a:off x="6370167" y="2039112"/>
+            <a:ext cx="5135727" cy="274320"/>
           </a:xfrm>
           <a:prstGeom prst="rect">
             <a:avLst/>
@@ -13121,11 +13459,11 @@
                 <a:solidFill>
                   <a:srgbClr val="1A1A2E"/>
                 </a:solidFill>
-                <a:latin typeface="Calibri"/>
-              </a:defRPr>
-            </a:pPr>
-            <a:r>
-              <a:t>• Perpres No. 95 Tahun 2018</a:t>
+                <a:latin typeface="Arial"/>
+              </a:defRPr>
+            </a:pPr>
+            <a:r>
+              <a:t>• Memperkuat arsitektur SPBE nasional yang terpadu</a:t>
             </a:r>
           </a:p>
         </p:txBody>
@@ -13138,8 +13476,8 @@
         </p:nvSpPr>
         <p:spPr>
           <a:xfrm>
-            <a:off x="4475378" y="2331720"/>
-            <a:ext cx="3240938" cy="274320"/>
+            <a:off x="6370167" y="2331720"/>
+            <a:ext cx="5135727" cy="274320"/>
           </a:xfrm>
           <a:prstGeom prst="rect">
             <a:avLst/>
@@ -13161,11 +13499,11 @@
                 <a:solidFill>
                   <a:srgbClr val="1A1A2E"/>
                 </a:solidFill>
-                <a:latin typeface="Calibri"/>
-              </a:defRPr>
-            </a:pPr>
-            <a:r>
-              <a:t>• Perpres No. 132 Tahun 2022</a:t>
+                <a:latin typeface="Arial"/>
+              </a:defRPr>
+            </a:pPr>
+            <a:r>
+              <a:t>• Menekankan interoperabilitas dan keamanan informasi</a:t>
             </a:r>
           </a:p>
         </p:txBody>
@@ -13178,8 +13516,8 @@
         </p:nvSpPr>
         <p:spPr>
           <a:xfrm>
-            <a:off x="4475378" y="2624327"/>
-            <a:ext cx="3240938" cy="274320"/>
+            <a:off x="6370167" y="2624327"/>
+            <a:ext cx="5135727" cy="274320"/>
           </a:xfrm>
           <a:prstGeom prst="rect">
             <a:avLst/>
@@ -13201,11 +13539,11 @@
                 <a:solidFill>
                   <a:srgbClr val="1A1A2E"/>
                 </a:solidFill>
-                <a:latin typeface="Calibri"/>
-              </a:defRPr>
-            </a:pPr>
-            <a:r>
-              <a:t>• Pedoman nasional SPBE</a:t>
+                <a:latin typeface="Arial"/>
+              </a:defRPr>
+            </a:pPr>
+            <a:r>
+              <a:t>• Mendorong konsolidasi infrastruktur ke Pusat Data Nasional</a:t>
             </a:r>
           </a:p>
         </p:txBody>
@@ -13218,8 +13556,8 @@
         </p:nvSpPr>
         <p:spPr>
           <a:xfrm>
-            <a:off x="8127796" y="1051560"/>
-            <a:ext cx="3515258" cy="5349240"/>
+            <a:off x="548640" y="3863339"/>
+            <a:ext cx="5410047" cy="2537460"/>
           </a:xfrm>
           <a:prstGeom prst="roundRect">
             <a:avLst>
@@ -13265,8 +13603,8 @@
         </p:nvSpPr>
         <p:spPr>
           <a:xfrm>
-            <a:off x="8127796" y="1051560"/>
-            <a:ext cx="45720" cy="5349240"/>
+            <a:off x="548640" y="3863339"/>
+            <a:ext cx="45720" cy="2537460"/>
           </a:xfrm>
           <a:prstGeom prst="rect">
             <a:avLst/>
@@ -13308,7 +13646,7 @@
         </p:nvSpPr>
         <p:spPr>
           <a:xfrm>
-            <a:off x="8264956" y="1188719"/>
+            <a:off x="685800" y="4000500"/>
             <a:ext cx="384048" cy="384048"/>
           </a:xfrm>
           <a:prstGeom prst="ellipse">
@@ -13351,7 +13689,7 @@
         </p:nvSpPr>
         <p:spPr>
           <a:xfrm>
-            <a:off x="8341766" y="1247241"/>
+            <a:off x="762609" y="4059021"/>
             <a:ext cx="230428" cy="230428"/>
           </a:xfrm>
           <a:prstGeom prst="rect">
@@ -13374,11 +13712,11 @@
                 <a:solidFill>
                   <a:srgbClr val="FFFFFF"/>
                 </a:solidFill>
-                <a:latin typeface="Calibri"/>
-              </a:defRPr>
-            </a:pPr>
-            <a:r>
-              <a:t>🎯</a:t>
+                <a:latin typeface="Arial"/>
+              </a:defRPr>
+            </a:pPr>
+            <a:r>
+              <a:t>🔄</a:t>
             </a:r>
           </a:p>
         </p:txBody>
@@ -13391,8 +13729,8 @@
         </p:nvSpPr>
         <p:spPr>
           <a:xfrm>
-            <a:off x="8264956" y="1691639"/>
-            <a:ext cx="3240938" cy="274320"/>
+            <a:off x="685800" y="4503420"/>
+            <a:ext cx="5135727" cy="274320"/>
           </a:xfrm>
           <a:prstGeom prst="rect">
             <a:avLst/>
@@ -13414,11 +13752,11 @@
                 <a:solidFill>
                   <a:srgbClr val="A0522D"/>
                 </a:solidFill>
-                <a:latin typeface="Calibri"/>
-              </a:defRPr>
-            </a:pPr>
-            <a:r>
-              <a:t>Tujuan</a:t>
+                <a:latin typeface="Arial"/>
+              </a:defRPr>
+            </a:pPr>
+            <a:r>
+              <a:t>Transformasi Menyeluruh</a:t>
             </a:r>
           </a:p>
         </p:txBody>
@@ -13431,8 +13769,8 @@
         </p:nvSpPr>
         <p:spPr>
           <a:xfrm>
-            <a:off x="8264956" y="2039112"/>
-            <a:ext cx="3240938" cy="274320"/>
+            <a:off x="685800" y="4850892"/>
+            <a:ext cx="5135727" cy="274320"/>
           </a:xfrm>
           <a:prstGeom prst="rect">
             <a:avLst/>
@@ -13454,11 +13792,11 @@
                 <a:solidFill>
                   <a:srgbClr val="1A1A2E"/>
                 </a:solidFill>
-                <a:latin typeface="Calibri"/>
-              </a:defRPr>
-            </a:pPr>
-            <a:r>
-              <a:t>• Menghilangkan ego sektoral digital</a:t>
+                <a:latin typeface="Arial"/>
+              </a:defRPr>
+            </a:pPr>
+            <a:r>
+              <a:t>• Bukan sekadar digitalisasi proses manual</a:t>
             </a:r>
           </a:p>
         </p:txBody>
@@ -13471,8 +13809,8 @@
         </p:nvSpPr>
         <p:spPr>
           <a:xfrm>
-            <a:off x="8264956" y="2331720"/>
-            <a:ext cx="3240938" cy="274320"/>
+            <a:off x="685800" y="5143500"/>
+            <a:ext cx="5135727" cy="274320"/>
           </a:xfrm>
           <a:prstGeom prst="rect">
             <a:avLst/>
@@ -13494,11 +13832,11 @@
                 <a:solidFill>
                   <a:srgbClr val="1A1A2E"/>
                 </a:solidFill>
-                <a:latin typeface="Calibri"/>
-              </a:defRPr>
-            </a:pPr>
-            <a:r>
-              <a:t>• Layanan publik &amp; administrasi prima</a:t>
+                <a:latin typeface="Arial"/>
+              </a:defRPr>
+            </a:pPr>
+            <a:r>
+              <a:t>• Mencakup aspek proses bisnis, data, aplikasi, infrastruktur</a:t>
             </a:r>
           </a:p>
         </p:txBody>
@@ -13511,8 +13849,8 @@
         </p:nvSpPr>
         <p:spPr>
           <a:xfrm>
-            <a:off x="8264956" y="2624327"/>
-            <a:ext cx="3240938" cy="274320"/>
+            <a:off x="685800" y="5436108"/>
+            <a:ext cx="5135727" cy="274320"/>
           </a:xfrm>
           <a:prstGeom prst="rect">
             <a:avLst/>
@@ -13534,18 +13872,351 @@
                 <a:solidFill>
                   <a:srgbClr val="1A1A2E"/>
                 </a:solidFill>
-                <a:latin typeface="Calibri"/>
-              </a:defRPr>
-            </a:pPr>
-            <a:r>
-              <a:t>• Birokrasi modern &amp; transparan</a:t>
-            </a:r>
-          </a:p>
-        </p:txBody>
-      </p:sp>
-      <p:sp>
-        <p:nvSpPr>
-          <p:cNvPr id="31" name="Rectangle 30"/>
+                <a:latin typeface="Arial"/>
+              </a:defRPr>
+            </a:pPr>
+            <a:r>
+              <a:t>• Menciptakan birokrasi yang terintegrasi, efisien, aman, tepercaya</a:t>
+            </a:r>
+          </a:p>
+        </p:txBody>
+      </p:sp>
+      <p:sp>
+        <p:nvSpPr>
+          <p:cNvPr id="31" name="Rounded Rectangle 30"/>
+          <p:cNvSpPr/>
+          <p:nvPr/>
+        </p:nvSpPr>
+        <p:spPr>
+          <a:xfrm>
+            <a:off x="6233007" y="3863339"/>
+            <a:ext cx="5410047" cy="2537460"/>
+          </a:xfrm>
+          <a:prstGeom prst="roundRect">
+            <a:avLst>
+              <a:gd name="adj" fmla="val 4000"/>
+            </a:avLst>
+          </a:prstGeom>
+          <a:solidFill>
+            <a:srgbClr val="FFFFFF"/>
+          </a:solidFill>
+          <a:ln w="6350">
+            <a:solidFill>
+              <a:srgbClr val="E8EDF5"/>
+            </a:solidFill>
+          </a:ln>
+        </p:spPr>
+        <p:style>
+          <a:lnRef idx="1">
+            <a:schemeClr val="accent1"/>
+          </a:lnRef>
+          <a:fillRef idx="3">
+            <a:schemeClr val="accent1"/>
+          </a:fillRef>
+          <a:effectRef idx="2">
+            <a:schemeClr val="accent1"/>
+          </a:effectRef>
+          <a:fontRef idx="minor">
+            <a:schemeClr val="lt1"/>
+          </a:fontRef>
+        </p:style>
+        <p:txBody>
+          <a:bodyPr rtlCol="0" anchor="ctr"/>
+          <a:lstStyle/>
+          <a:p>
+            <a:pPr algn="ctr"/>
+          </a:p>
+        </p:txBody>
+      </p:sp>
+      <p:sp>
+        <p:nvSpPr>
+          <p:cNvPr id="32" name="Rectangle 31"/>
+          <p:cNvSpPr/>
+          <p:nvPr/>
+        </p:nvSpPr>
+        <p:spPr>
+          <a:xfrm>
+            <a:off x="6233007" y="3863339"/>
+            <a:ext cx="45720" cy="2537460"/>
+          </a:xfrm>
+          <a:prstGeom prst="rect">
+            <a:avLst/>
+          </a:prstGeom>
+          <a:solidFill>
+            <a:srgbClr val="1B3A6B"/>
+          </a:solidFill>
+          <a:ln>
+            <a:noFill/>
+          </a:ln>
+        </p:spPr>
+        <p:style>
+          <a:lnRef idx="1">
+            <a:schemeClr val="accent1"/>
+          </a:lnRef>
+          <a:fillRef idx="3">
+            <a:schemeClr val="accent1"/>
+          </a:fillRef>
+          <a:effectRef idx="2">
+            <a:schemeClr val="accent1"/>
+          </a:effectRef>
+          <a:fontRef idx="minor">
+            <a:schemeClr val="lt1"/>
+          </a:fontRef>
+        </p:style>
+        <p:txBody>
+          <a:bodyPr rtlCol="0" anchor="ctr"/>
+          <a:lstStyle/>
+          <a:p>
+            <a:pPr algn="ctr"/>
+          </a:p>
+        </p:txBody>
+      </p:sp>
+      <p:sp>
+        <p:nvSpPr>
+          <p:cNvPr id="33" name="Oval 32"/>
+          <p:cNvSpPr/>
+          <p:nvPr/>
+        </p:nvSpPr>
+        <p:spPr>
+          <a:xfrm>
+            <a:off x="6370167" y="4000500"/>
+            <a:ext cx="384048" cy="384048"/>
+          </a:xfrm>
+          <a:prstGeom prst="ellipse">
+            <a:avLst/>
+          </a:prstGeom>
+          <a:solidFill>
+            <a:srgbClr val="1B3A6B"/>
+          </a:solidFill>
+          <a:ln>
+            <a:noFill/>
+          </a:ln>
+        </p:spPr>
+        <p:style>
+          <a:lnRef idx="1">
+            <a:schemeClr val="accent1"/>
+          </a:lnRef>
+          <a:fillRef idx="3">
+            <a:schemeClr val="accent1"/>
+          </a:fillRef>
+          <a:effectRef idx="2">
+            <a:schemeClr val="accent1"/>
+          </a:effectRef>
+          <a:fontRef idx="minor">
+            <a:schemeClr val="lt1"/>
+          </a:fontRef>
+        </p:style>
+        <p:txBody>
+          <a:bodyPr rtlCol="0" anchor="ctr"/>
+          <a:lstStyle/>
+          <a:p>
+            <a:pPr algn="ctr"/>
+          </a:p>
+        </p:txBody>
+      </p:sp>
+      <p:sp>
+        <p:nvSpPr>
+          <p:cNvPr id="34" name="TextBox 33"/>
+          <p:cNvSpPr txBox="1"/>
+          <p:nvPr/>
+        </p:nvSpPr>
+        <p:spPr>
+          <a:xfrm>
+            <a:off x="6446977" y="4059021"/>
+            <a:ext cx="230428" cy="230428"/>
+          </a:xfrm>
+          <a:prstGeom prst="rect">
+            <a:avLst/>
+          </a:prstGeom>
+          <a:noFill/>
+        </p:spPr>
+        <p:txBody>
+          <a:bodyPr wrap="square"/>
+          <a:lstStyle/>
+          <a:p>
+            <a:pPr algn="ctr">
+              <a:spcBef>
+                <a:spcPts val="0"/>
+              </a:spcBef>
+              <a:spcAft>
+                <a:spcPts val="0"/>
+              </a:spcAft>
+              <a:defRPr sz="1200" b="0">
+                <a:solidFill>
+                  <a:srgbClr val="FFFFFF"/>
+                </a:solidFill>
+                <a:latin typeface="Arial"/>
+              </a:defRPr>
+            </a:pPr>
+            <a:r>
+              <a:t>🚫</a:t>
+            </a:r>
+          </a:p>
+        </p:txBody>
+      </p:sp>
+      <p:sp>
+        <p:nvSpPr>
+          <p:cNvPr id="35" name="TextBox 34"/>
+          <p:cNvSpPr txBox="1"/>
+          <p:nvPr/>
+        </p:nvSpPr>
+        <p:spPr>
+          <a:xfrm>
+            <a:off x="6370167" y="4503420"/>
+            <a:ext cx="5135727" cy="274320"/>
+          </a:xfrm>
+          <a:prstGeom prst="rect">
+            <a:avLst/>
+          </a:prstGeom>
+          <a:noFill/>
+        </p:spPr>
+        <p:txBody>
+          <a:bodyPr wrap="square"/>
+          <a:lstStyle/>
+          <a:p>
+            <a:pPr algn="l">
+              <a:spcBef>
+                <a:spcPts val="0"/>
+              </a:spcBef>
+              <a:spcAft>
+                <a:spcPts val="0"/>
+              </a:spcAft>
+              <a:defRPr sz="1300" b="1">
+                <a:solidFill>
+                  <a:srgbClr val="1B3A6B"/>
+                </a:solidFill>
+                <a:latin typeface="Arial"/>
+              </a:defRPr>
+            </a:pPr>
+            <a:r>
+              <a:t>Antisipasi Ego Sektoral Digital</a:t>
+            </a:r>
+          </a:p>
+        </p:txBody>
+      </p:sp>
+      <p:sp>
+        <p:nvSpPr>
+          <p:cNvPr id="36" name="TextBox 35"/>
+          <p:cNvSpPr txBox="1"/>
+          <p:nvPr/>
+        </p:nvSpPr>
+        <p:spPr>
+          <a:xfrm>
+            <a:off x="6370167" y="4850892"/>
+            <a:ext cx="5135727" cy="274320"/>
+          </a:xfrm>
+          <a:prstGeom prst="rect">
+            <a:avLst/>
+          </a:prstGeom>
+          <a:noFill/>
+        </p:spPr>
+        <p:txBody>
+          <a:bodyPr wrap="square"/>
+          <a:lstStyle/>
+          <a:p>
+            <a:pPr algn="l">
+              <a:spcBef>
+                <a:spcPts val="0"/>
+              </a:spcBef>
+              <a:spcAft>
+                <a:spcPts val="0"/>
+              </a:spcAft>
+              <a:defRPr sz="900" b="0">
+                <a:solidFill>
+                  <a:srgbClr val="1A1A2E"/>
+                </a:solidFill>
+                <a:latin typeface="Arial"/>
+              </a:defRPr>
+            </a:pPr>
+            <a:r>
+              <a:t>• Digitalisasi harus bersandar pada kerangka kerja terpadu</a:t>
+            </a:r>
+          </a:p>
+        </p:txBody>
+      </p:sp>
+      <p:sp>
+        <p:nvSpPr>
+          <p:cNvPr id="37" name="TextBox 36"/>
+          <p:cNvSpPr txBox="1"/>
+          <p:nvPr/>
+        </p:nvSpPr>
+        <p:spPr>
+          <a:xfrm>
+            <a:off x="6370167" y="5143500"/>
+            <a:ext cx="5135727" cy="274320"/>
+          </a:xfrm>
+          <a:prstGeom prst="rect">
+            <a:avLst/>
+          </a:prstGeom>
+          <a:noFill/>
+        </p:spPr>
+        <p:txBody>
+          <a:bodyPr wrap="square"/>
+          <a:lstStyle/>
+          <a:p>
+            <a:pPr algn="l">
+              <a:spcBef>
+                <a:spcPts val="0"/>
+              </a:spcBef>
+              <a:spcAft>
+                <a:spcPts val="0"/>
+              </a:spcAft>
+              <a:defRPr sz="900" b="0">
+                <a:solidFill>
+                  <a:srgbClr val="1A1A2E"/>
+                </a:solidFill>
+                <a:latin typeface="Arial"/>
+              </a:defRPr>
+            </a:pPr>
+            <a:r>
+              <a:t>• Setiap instansi terikat dalam arsitektur SPBE nasional</a:t>
+            </a:r>
+          </a:p>
+        </p:txBody>
+      </p:sp>
+      <p:sp>
+        <p:nvSpPr>
+          <p:cNvPr id="38" name="TextBox 37"/>
+          <p:cNvSpPr txBox="1"/>
+          <p:nvPr/>
+        </p:nvSpPr>
+        <p:spPr>
+          <a:xfrm>
+            <a:off x="6370167" y="5436108"/>
+            <a:ext cx="5135727" cy="274320"/>
+          </a:xfrm>
+          <a:prstGeom prst="rect">
+            <a:avLst/>
+          </a:prstGeom>
+          <a:noFill/>
+        </p:spPr>
+        <p:txBody>
+          <a:bodyPr wrap="square"/>
+          <a:lstStyle/>
+          <a:p>
+            <a:pPr algn="l">
+              <a:spcBef>
+                <a:spcPts val="0"/>
+              </a:spcBef>
+              <a:spcAft>
+                <a:spcPts val="0"/>
+              </a:spcAft>
+              <a:defRPr sz="900" b="0">
+                <a:solidFill>
+                  <a:srgbClr val="1A1A2E"/>
+                </a:solidFill>
+                <a:latin typeface="Arial"/>
+              </a:defRPr>
+            </a:pPr>
+            <a:r>
+              <a:t>• Menghindari pembuatan aplikasi sektoral yang tumpang tindih</a:t>
+            </a:r>
+          </a:p>
+        </p:txBody>
+      </p:sp>
+      <p:sp>
+        <p:nvSpPr>
+          <p:cNvPr id="39" name="Rectangle 38"/>
           <p:cNvSpPr/>
           <p:nvPr/>
         </p:nvSpPr>
@@ -13588,7 +14259,7 @@
       </p:sp>
       <p:sp>
         <p:nvSpPr>
-          <p:cNvPr id="32" name="TextBox 31"/>
+          <p:cNvPr id="40" name="TextBox 39"/>
           <p:cNvSpPr txBox="1"/>
           <p:nvPr/>
         </p:nvSpPr>
@@ -13617,18 +14288,18 @@
                 <a:solidFill>
                   <a:srgbClr val="64748B"/>
                 </a:solidFill>
-                <a:latin typeface="Calibri"/>
-              </a:defRPr>
-            </a:pPr>
-            <a:r>
-              <a:t>Penerapan Sistem Pemerintahan Berbasis Elektronik (SPBE)</a:t>
-            </a:r>
-          </a:p>
-        </p:txBody>
-      </p:sp>
-      <p:sp>
-        <p:nvSpPr>
-          <p:cNvPr id="33" name="TextBox 32"/>
+                <a:latin typeface="Arial"/>
+              </a:defRPr>
+            </a:pPr>
+            <a:r>
+              <a:t>Sumber: Perpres No. 95/2018, Perpres No. 132/2022, &amp; Pedoman SPBE Kemenpan-RB</a:t>
+            </a:r>
+          </a:p>
+        </p:txBody>
+      </p:sp>
+      <p:sp>
+        <p:nvSpPr>
+          <p:cNvPr id="41" name="TextBox 40"/>
           <p:cNvSpPr txBox="1"/>
           <p:nvPr/>
         </p:nvSpPr>
@@ -13657,7 +14328,7 @@
                 <a:solidFill>
                   <a:srgbClr val="64748B"/>
                 </a:solidFill>
-                <a:latin typeface="Calibri"/>
+                <a:latin typeface="Arial"/>
               </a:defRPr>
             </a:pPr>
             <a:r>
@@ -13852,11 +14523,11 @@
                 <a:solidFill>
                   <a:srgbClr val="FFFFFF"/>
                 </a:solidFill>
-                <a:latin typeface="Georgia"/>
-              </a:defRPr>
-            </a:pPr>
-            <a:r>
-              <a:t>Digitalisasi Pemerintahan Harus Bersandar pada Kerangka Kerja Terpadu</a:t>
+                <a:latin typeface="Arial Black"/>
+              </a:defRPr>
+            </a:pPr>
+            <a:r>
+              <a:t>SPBE Bukan Digitalisasi — Ini Transformasi Sistemik Birokrasi</a:t>
             </a:r>
           </a:p>
         </p:txBody>
@@ -13892,11 +14563,11 @@
                 <a:solidFill>
                   <a:srgbClr val="64748B"/>
                 </a:solidFill>
-                <a:latin typeface="Calibri"/>
-              </a:defRPr>
-            </a:pPr>
-            <a:r>
-              <a:t>Prinsip Dasar SPBE</a:t>
+                <a:latin typeface="Arial"/>
+              </a:defRPr>
+            </a:pPr>
+            <a:r>
+              <a:t>Perbedaan Mendasar</a:t>
             </a:r>
           </a:p>
         </p:txBody>
@@ -13963,7 +14634,7 @@
             <a:avLst/>
           </a:prstGeom>
           <a:solidFill>
-            <a:srgbClr val="2563EB"/>
+            <a:srgbClr val="DC2626"/>
           </a:solidFill>
           <a:ln>
             <a:noFill/>
@@ -13993,44 +14664,41 @@
       </p:sp>
       <p:sp>
         <p:nvSpPr>
-          <p:cNvPr id="9" name="Oval 8"/>
-          <p:cNvSpPr/>
-          <p:nvPr/>
-        </p:nvSpPr>
-        <p:spPr>
-          <a:xfrm>
-            <a:off x="685800" y="1188719"/>
-            <a:ext cx="384048" cy="384048"/>
-          </a:xfrm>
-          <a:prstGeom prst="ellipse">
-            <a:avLst/>
-          </a:prstGeom>
-          <a:solidFill>
-            <a:srgbClr val="2563EB"/>
-          </a:solidFill>
-          <a:ln>
-            <a:noFill/>
-          </a:ln>
-        </p:spPr>
-        <p:style>
-          <a:lnRef idx="1">
-            <a:schemeClr val="accent1"/>
-          </a:lnRef>
-          <a:fillRef idx="3">
-            <a:schemeClr val="accent1"/>
-          </a:fillRef>
-          <a:effectRef idx="2">
-            <a:schemeClr val="accent1"/>
-          </a:effectRef>
-          <a:fontRef idx="minor">
-            <a:schemeClr val="lt1"/>
-          </a:fontRef>
-        </p:style>
-        <p:txBody>
-          <a:bodyPr rtlCol="0" anchor="ctr"/>
-          <a:lstStyle/>
-          <a:p>
-            <a:pPr algn="ctr"/>
+          <p:cNvPr id="9" name="TextBox 8"/>
+          <p:cNvSpPr txBox="1"/>
+          <p:nvPr/>
+        </p:nvSpPr>
+        <p:spPr>
+          <a:xfrm>
+            <a:off x="731520" y="1188719"/>
+            <a:ext cx="5090007" cy="274320"/>
+          </a:xfrm>
+          <a:prstGeom prst="rect">
+            <a:avLst/>
+          </a:prstGeom>
+          <a:noFill/>
+        </p:spPr>
+        <p:txBody>
+          <a:bodyPr wrap="square"/>
+          <a:lstStyle/>
+          <a:p>
+            <a:pPr algn="l">
+              <a:spcBef>
+                <a:spcPts val="0"/>
+              </a:spcBef>
+              <a:spcAft>
+                <a:spcPts val="0"/>
+              </a:spcAft>
+              <a:defRPr sz="1400" b="1">
+                <a:solidFill>
+                  <a:srgbClr val="DC2626"/>
+                </a:solidFill>
+                <a:latin typeface="Arial"/>
+              </a:defRPr>
+            </a:pPr>
+            <a:r>
+              <a:t>DIGITALISASI SEMATA</a:t>
+            </a:r>
           </a:p>
         </p:txBody>
       </p:sp>
@@ -14042,34 +14710,34 @@
         </p:nvSpPr>
         <p:spPr>
           <a:xfrm>
-            <a:off x="762609" y="1247241"/>
-            <a:ext cx="230428" cy="230428"/>
-          </a:xfrm>
-          <a:prstGeom prst="rect">
-            <a:avLst/>
-          </a:prstGeom>
-          <a:noFill/>
-        </p:spPr>
-        <p:txBody>
-          <a:bodyPr wrap="square"/>
-          <a:lstStyle/>
-          <a:p>
-            <a:pPr algn="ctr">
-              <a:spcBef>
-                <a:spcPts val="0"/>
-              </a:spcBef>
-              <a:spcAft>
-                <a:spcPts val="0"/>
-              </a:spcAft>
-              <a:defRPr sz="1200" b="0">
-                <a:solidFill>
-                  <a:srgbClr val="FFFFFF"/>
-                </a:solidFill>
-                <a:latin typeface="Calibri"/>
-              </a:defRPr>
-            </a:pPr>
-            <a:r>
-              <a:t>🚫</a:t>
+            <a:off x="731520" y="1481328"/>
+            <a:ext cx="5090007" cy="228600"/>
+          </a:xfrm>
+          <a:prstGeom prst="rect">
+            <a:avLst/>
+          </a:prstGeom>
+          <a:noFill/>
+        </p:spPr>
+        <p:txBody>
+          <a:bodyPr wrap="square"/>
+          <a:lstStyle/>
+          <a:p>
+            <a:pPr algn="l">
+              <a:spcBef>
+                <a:spcPts val="0"/>
+              </a:spcBef>
+              <a:spcAft>
+                <a:spcPts val="0"/>
+              </a:spcAft>
+              <a:defRPr sz="1100" b="0">
+                <a:solidFill>
+                  <a:srgbClr val="1A1A2E"/>
+                </a:solidFill>
+                <a:latin typeface="Arial"/>
+              </a:defRPr>
+            </a:pPr>
+            <a:r>
+              <a:t>• </a:t>
             </a:r>
           </a:p>
         </p:txBody>
@@ -14082,8 +14750,8 @@
         </p:nvSpPr>
         <p:spPr>
           <a:xfrm>
-            <a:off x="685800" y="1691639"/>
-            <a:ext cx="5135727" cy="274320"/>
+            <a:off x="731520" y="1719072"/>
+            <a:ext cx="5090007" cy="228600"/>
           </a:xfrm>
           <a:prstGeom prst="rect">
             <a:avLst/>
@@ -14101,15 +14769,15 @@
               <a:spcAft>
                 <a:spcPts val="0"/>
               </a:spcAft>
-              <a:defRPr sz="1300" b="1">
-                <a:solidFill>
-                  <a:srgbClr val="2563EB"/>
-                </a:solidFill>
-                <a:latin typeface="Calibri"/>
-              </a:defRPr>
-            </a:pPr>
-            <a:r>
-              <a:t>Hindari Ego Sektoral Digital</a:t>
+              <a:defRPr sz="1100" b="0">
+                <a:solidFill>
+                  <a:srgbClr val="1A1A2E"/>
+                </a:solidFill>
+                <a:latin typeface="Arial"/>
+              </a:defRPr>
+            </a:pPr>
+            <a:r>
+              <a:t>• Memindahkan kertas ke aplikasi</a:t>
             </a:r>
           </a:p>
         </p:txBody>
@@ -14122,8 +14790,8 @@
         </p:nvSpPr>
         <p:spPr>
           <a:xfrm>
-            <a:off x="685800" y="2039112"/>
-            <a:ext cx="5135727" cy="274320"/>
+            <a:off x="731520" y="1956815"/>
+            <a:ext cx="5090007" cy="228600"/>
           </a:xfrm>
           <a:prstGeom prst="rect">
             <a:avLst/>
@@ -14141,15 +14809,15 @@
               <a:spcAft>
                 <a:spcPts val="0"/>
               </a:spcAft>
-              <a:defRPr sz="900" b="0">
+              <a:defRPr sz="1100" b="0">
                 <a:solidFill>
                   <a:srgbClr val="1A1A2E"/>
                 </a:solidFill>
-                <a:latin typeface="Calibri"/>
-              </a:defRPr>
-            </a:pPr>
-            <a:r>
-              <a:t>• Jangan buat aplikasi sendiri-sendiri</a:t>
+                <a:latin typeface="Arial"/>
+              </a:defRPr>
+            </a:pPr>
+            <a:r>
+              <a:t>• Membuat aplikasi baru untuk setiap masalah</a:t>
             </a:r>
           </a:p>
         </p:txBody>
@@ -14162,8 +14830,8 @@
         </p:nvSpPr>
         <p:spPr>
           <a:xfrm>
-            <a:off x="685800" y="2331720"/>
-            <a:ext cx="5135727" cy="274320"/>
+            <a:off x="731520" y="2194559"/>
+            <a:ext cx="5090007" cy="228600"/>
           </a:xfrm>
           <a:prstGeom prst="rect">
             <a:avLst/>
@@ -14181,15 +14849,15 @@
               <a:spcAft>
                 <a:spcPts val="0"/>
               </a:spcAft>
-              <a:defRPr sz="900" b="0">
+              <a:defRPr sz="1100" b="0">
                 <a:solidFill>
                   <a:srgbClr val="1A1A2E"/>
                 </a:solidFill>
-                <a:latin typeface="Calibri"/>
-              </a:defRPr>
-            </a:pPr>
-            <a:r>
-              <a:t>• Setiap sistem harus terintegrasi</a:t>
+                <a:latin typeface="Arial"/>
+              </a:defRPr>
+            </a:pPr>
+            <a:r>
+              <a:t>• Berfokus pada teknologi, bukan proses</a:t>
             </a:r>
           </a:p>
         </p:txBody>
@@ -14202,8 +14870,8 @@
         </p:nvSpPr>
         <p:spPr>
           <a:xfrm>
-            <a:off x="685800" y="2624327"/>
-            <a:ext cx="5135727" cy="274320"/>
+            <a:off x="731520" y="2432303"/>
+            <a:ext cx="5090007" cy="228600"/>
           </a:xfrm>
           <a:prstGeom prst="rect">
             <a:avLst/>
@@ -14221,22 +14889,102 @@
               <a:spcAft>
                 <a:spcPts val="0"/>
               </a:spcAft>
-              <a:defRPr sz="900" b="0">
+              <a:defRPr sz="1100" b="0">
                 <a:solidFill>
                   <a:srgbClr val="1A1A2E"/>
                 </a:solidFill>
-                <a:latin typeface="Calibri"/>
-              </a:defRPr>
-            </a:pPr>
-            <a:r>
-              <a:t>• Satu data, satu platform</a:t>
-            </a:r>
-          </a:p>
-        </p:txBody>
-      </p:sp>
-      <p:sp>
-        <p:nvSpPr>
-          <p:cNvPr id="15" name="Rounded Rectangle 14"/>
+                <a:latin typeface="Arial"/>
+              </a:defRPr>
+            </a:pPr>
+            <a:r>
+              <a:t>• Rentan menciptakan ego sektoral digital</a:t>
+            </a:r>
+          </a:p>
+        </p:txBody>
+      </p:sp>
+      <p:sp>
+        <p:nvSpPr>
+          <p:cNvPr id="15" name="TextBox 14"/>
+          <p:cNvSpPr txBox="1"/>
+          <p:nvPr/>
+        </p:nvSpPr>
+        <p:spPr>
+          <a:xfrm>
+            <a:off x="731520" y="2670047"/>
+            <a:ext cx="5090007" cy="228600"/>
+          </a:xfrm>
+          <a:prstGeom prst="rect">
+            <a:avLst/>
+          </a:prstGeom>
+          <a:noFill/>
+        </p:spPr>
+        <p:txBody>
+          <a:bodyPr wrap="square"/>
+          <a:lstStyle/>
+          <a:p>
+            <a:pPr algn="l">
+              <a:spcBef>
+                <a:spcPts val="0"/>
+              </a:spcBef>
+              <a:spcAft>
+                <a:spcPts val="0"/>
+              </a:spcAft>
+              <a:defRPr sz="1100" b="0">
+                <a:solidFill>
+                  <a:srgbClr val="1A1A2E"/>
+                </a:solidFill>
+                <a:latin typeface="Arial"/>
+              </a:defRPr>
+            </a:pPr>
+            <a:r>
+              <a:t>• Aplikasi tumpang tindih &amp; tidak terintegrasi</a:t>
+            </a:r>
+          </a:p>
+        </p:txBody>
+      </p:sp>
+      <p:sp>
+        <p:nvSpPr>
+          <p:cNvPr id="16" name="TextBox 15"/>
+          <p:cNvSpPr txBox="1"/>
+          <p:nvPr/>
+        </p:nvSpPr>
+        <p:spPr>
+          <a:xfrm>
+            <a:off x="731520" y="2907791"/>
+            <a:ext cx="5090007" cy="228600"/>
+          </a:xfrm>
+          <a:prstGeom prst="rect">
+            <a:avLst/>
+          </a:prstGeom>
+          <a:noFill/>
+        </p:spPr>
+        <p:txBody>
+          <a:bodyPr wrap="square"/>
+          <a:lstStyle/>
+          <a:p>
+            <a:pPr algn="l">
+              <a:spcBef>
+                <a:spcPts val="0"/>
+              </a:spcBef>
+              <a:spcAft>
+                <a:spcPts val="0"/>
+              </a:spcAft>
+              <a:defRPr sz="1100" b="0">
+                <a:solidFill>
+                  <a:srgbClr val="1A1A2E"/>
+                </a:solidFill>
+                <a:latin typeface="Arial"/>
+              </a:defRPr>
+            </a:pPr>
+            <a:r>
+              <a:t>• Pemborosan anggaran TIK yang signifikan</a:t>
+            </a:r>
+          </a:p>
+        </p:txBody>
+      </p:sp>
+      <p:sp>
+        <p:nvSpPr>
+          <p:cNvPr id="17" name="Rounded Rectangle 16"/>
           <p:cNvSpPr/>
           <p:nvPr/>
         </p:nvSpPr>
@@ -14283,7 +15031,7 @@
       </p:sp>
       <p:sp>
         <p:nvSpPr>
-          <p:cNvPr id="16" name="Rectangle 15"/>
+          <p:cNvPr id="18" name="Rectangle 17"/>
           <p:cNvSpPr/>
           <p:nvPr/>
         </p:nvSpPr>
@@ -14326,97 +15074,14 @@
       </p:sp>
       <p:sp>
         <p:nvSpPr>
-          <p:cNvPr id="17" name="Oval 16"/>
-          <p:cNvSpPr/>
-          <p:nvPr/>
-        </p:nvSpPr>
-        <p:spPr>
-          <a:xfrm>
-            <a:off x="6370167" y="1188719"/>
-            <a:ext cx="384048" cy="384048"/>
-          </a:xfrm>
-          <a:prstGeom prst="ellipse">
-            <a:avLst/>
-          </a:prstGeom>
-          <a:solidFill>
-            <a:srgbClr val="0B7C72"/>
-          </a:solidFill>
-          <a:ln>
-            <a:noFill/>
-          </a:ln>
-        </p:spPr>
-        <p:style>
-          <a:lnRef idx="1">
-            <a:schemeClr val="accent1"/>
-          </a:lnRef>
-          <a:fillRef idx="3">
-            <a:schemeClr val="accent1"/>
-          </a:fillRef>
-          <a:effectRef idx="2">
-            <a:schemeClr val="accent1"/>
-          </a:effectRef>
-          <a:fontRef idx="minor">
-            <a:schemeClr val="lt1"/>
-          </a:fontRef>
-        </p:style>
-        <p:txBody>
-          <a:bodyPr rtlCol="0" anchor="ctr"/>
-          <a:lstStyle/>
-          <a:p>
-            <a:pPr algn="ctr"/>
-          </a:p>
-        </p:txBody>
-      </p:sp>
-      <p:sp>
-        <p:nvSpPr>
-          <p:cNvPr id="18" name="TextBox 17"/>
-          <p:cNvSpPr txBox="1"/>
-          <p:nvPr/>
-        </p:nvSpPr>
-        <p:spPr>
-          <a:xfrm>
-            <a:off x="6446977" y="1247241"/>
-            <a:ext cx="230428" cy="230428"/>
-          </a:xfrm>
-          <a:prstGeom prst="rect">
-            <a:avLst/>
-          </a:prstGeom>
-          <a:noFill/>
-        </p:spPr>
-        <p:txBody>
-          <a:bodyPr wrap="square"/>
-          <a:lstStyle/>
-          <a:p>
-            <a:pPr algn="ctr">
-              <a:spcBef>
-                <a:spcPts val="0"/>
-              </a:spcBef>
-              <a:spcAft>
-                <a:spcPts val="0"/>
-              </a:spcAft>
-              <a:defRPr sz="1200" b="0">
-                <a:solidFill>
-                  <a:srgbClr val="FFFFFF"/>
-                </a:solidFill>
-                <a:latin typeface="Calibri"/>
-              </a:defRPr>
-            </a:pPr>
-            <a:r>
-              <a:t>🔗</a:t>
-            </a:r>
-          </a:p>
-        </p:txBody>
-      </p:sp>
-      <p:sp>
-        <p:nvSpPr>
           <p:cNvPr id="19" name="TextBox 18"/>
           <p:cNvSpPr txBox="1"/>
           <p:nvPr/>
         </p:nvSpPr>
         <p:spPr>
           <a:xfrm>
-            <a:off x="6370167" y="1691639"/>
-            <a:ext cx="5135727" cy="274320"/>
+            <a:off x="6415887" y="1188719"/>
+            <a:ext cx="5090007" cy="274320"/>
           </a:xfrm>
           <a:prstGeom prst="rect">
             <a:avLst/>
@@ -14434,15 +15099,15 @@
               <a:spcAft>
                 <a:spcPts val="0"/>
               </a:spcAft>
-              <a:defRPr sz="1300" b="1">
+              <a:defRPr sz="1400" b="1">
                 <a:solidFill>
                   <a:srgbClr val="0B7C72"/>
                 </a:solidFill>
-                <a:latin typeface="Calibri"/>
-              </a:defRPr>
-            </a:pPr>
-            <a:r>
-              <a:t>Interoperabilitas adalah Kunci</a:t>
+                <a:latin typeface="Arial"/>
+              </a:defRPr>
+            </a:pPr>
+            <a:r>
+              <a:t>TRANSFORMASI SPBE</a:t>
             </a:r>
           </a:p>
         </p:txBody>
@@ -14455,8 +15120,8 @@
         </p:nvSpPr>
         <p:spPr>
           <a:xfrm>
-            <a:off x="6370167" y="2039112"/>
-            <a:ext cx="5135727" cy="274320"/>
+            <a:off x="6415887" y="1481328"/>
+            <a:ext cx="5090007" cy="228600"/>
           </a:xfrm>
           <a:prstGeom prst="rect">
             <a:avLst/>
@@ -14474,15 +15139,15 @@
               <a:spcAft>
                 <a:spcPts val="0"/>
               </a:spcAft>
-              <a:defRPr sz="900" b="0">
+              <a:defRPr sz="1100" b="0">
                 <a:solidFill>
                   <a:srgbClr val="1A1A2E"/>
                 </a:solidFill>
-                <a:latin typeface="Calibri"/>
-              </a:defRPr>
-            </a:pPr>
-            <a:r>
-              <a:t>• Sistem saling terhubung &amp; bertukar data</a:t>
+                <a:latin typeface="Arial"/>
+              </a:defRPr>
+            </a:pPr>
+            <a:r>
+              <a:t>• </a:t>
             </a:r>
           </a:p>
         </p:txBody>
@@ -14495,8 +15160,8 @@
         </p:nvSpPr>
         <p:spPr>
           <a:xfrm>
-            <a:off x="6370167" y="2331720"/>
-            <a:ext cx="5135727" cy="274320"/>
+            <a:off x="6415887" y="1719072"/>
+            <a:ext cx="5090007" cy="228600"/>
           </a:xfrm>
           <a:prstGeom prst="rect">
             <a:avLst/>
@@ -14514,15 +15179,15 @@
               <a:spcAft>
                 <a:spcPts val="0"/>
               </a:spcAft>
-              <a:defRPr sz="900" b="0">
+              <a:defRPr sz="1100" b="0">
                 <a:solidFill>
                   <a:srgbClr val="1A1A2E"/>
                 </a:solidFill>
-                <a:latin typeface="Calibri"/>
-              </a:defRPr>
-            </a:pPr>
-            <a:r>
-              <a:t>• Masyarakat tidak perlu banyak aplikasi</a:t>
+                <a:latin typeface="Arial"/>
+              </a:defRPr>
+            </a:pPr>
+            <a:r>
+              <a:t>• Menata ulang proses bisnis secara menyeluruh</a:t>
             </a:r>
           </a:p>
         </p:txBody>
@@ -14535,8 +15200,8 @@
         </p:nvSpPr>
         <p:spPr>
           <a:xfrm>
-            <a:off x="6370167" y="2624327"/>
-            <a:ext cx="5135727" cy="274320"/>
+            <a:off x="6415887" y="1956815"/>
+            <a:ext cx="5090007" cy="228600"/>
           </a:xfrm>
           <a:prstGeom prst="rect">
             <a:avLst/>
@@ -14554,22 +15219,182 @@
               <a:spcAft>
                 <a:spcPts val="0"/>
               </a:spcAft>
-              <a:defRPr sz="900" b="0">
+              <a:defRPr sz="1100" b="0">
                 <a:solidFill>
                   <a:srgbClr val="1A1A2E"/>
                 </a:solidFill>
-                <a:latin typeface="Calibri"/>
-              </a:defRPr>
-            </a:pPr>
-            <a:r>
-              <a:t>• Layanan terpadu dalam satu pintu</a:t>
-            </a:r>
-          </a:p>
-        </p:txBody>
-      </p:sp>
-      <p:sp>
-        <p:nvSpPr>
-          <p:cNvPr id="23" name="Rectangle 22"/>
+                <a:latin typeface="Arial"/>
+              </a:defRPr>
+            </a:pPr>
+            <a:r>
+              <a:t>• Interoperabilitas antar sistem yang sudah ada</a:t>
+            </a:r>
+          </a:p>
+        </p:txBody>
+      </p:sp>
+      <p:sp>
+        <p:nvSpPr>
+          <p:cNvPr id="23" name="TextBox 22"/>
+          <p:cNvSpPr txBox="1"/>
+          <p:nvPr/>
+        </p:nvSpPr>
+        <p:spPr>
+          <a:xfrm>
+            <a:off x="6415887" y="2194559"/>
+            <a:ext cx="5090007" cy="228600"/>
+          </a:xfrm>
+          <a:prstGeom prst="rect">
+            <a:avLst/>
+          </a:prstGeom>
+          <a:noFill/>
+        </p:spPr>
+        <p:txBody>
+          <a:bodyPr wrap="square"/>
+          <a:lstStyle/>
+          <a:p>
+            <a:pPr algn="l">
+              <a:spcBef>
+                <a:spcPts val="0"/>
+              </a:spcBef>
+              <a:spcAft>
+                <a:spcPts val="0"/>
+              </a:spcAft>
+              <a:defRPr sz="1100" b="0">
+                <a:solidFill>
+                  <a:srgbClr val="1A1A2E"/>
+                </a:solidFill>
+                <a:latin typeface="Arial"/>
+              </a:defRPr>
+            </a:pPr>
+            <a:r>
+              <a:t>• Berfokus pada layanan terpadu (user-centric)</a:t>
+            </a:r>
+          </a:p>
+        </p:txBody>
+      </p:sp>
+      <p:sp>
+        <p:nvSpPr>
+          <p:cNvPr id="24" name="TextBox 23"/>
+          <p:cNvSpPr txBox="1"/>
+          <p:nvPr/>
+        </p:nvSpPr>
+        <p:spPr>
+          <a:xfrm>
+            <a:off x="6415887" y="2432303"/>
+            <a:ext cx="5090007" cy="228600"/>
+          </a:xfrm>
+          <a:prstGeom prst="rect">
+            <a:avLst/>
+          </a:prstGeom>
+          <a:noFill/>
+        </p:spPr>
+        <p:txBody>
+          <a:bodyPr wrap="square"/>
+          <a:lstStyle/>
+          <a:p>
+            <a:pPr algn="l">
+              <a:spcBef>
+                <a:spcPts val="0"/>
+              </a:spcBef>
+              <a:spcAft>
+                <a:spcPts val="0"/>
+              </a:spcAft>
+              <a:defRPr sz="1100" b="0">
+                <a:solidFill>
+                  <a:srgbClr val="1A1A2E"/>
+                </a:solidFill>
+                <a:latin typeface="Arial"/>
+              </a:defRPr>
+            </a:pPr>
+            <a:r>
+              <a:t>• Satu platform terintegasi — efisien &amp; aman</a:t>
+            </a:r>
+          </a:p>
+        </p:txBody>
+      </p:sp>
+      <p:sp>
+        <p:nvSpPr>
+          <p:cNvPr id="25" name="TextBox 24"/>
+          <p:cNvSpPr txBox="1"/>
+          <p:nvPr/>
+        </p:nvSpPr>
+        <p:spPr>
+          <a:xfrm>
+            <a:off x="6415887" y="2670047"/>
+            <a:ext cx="5090007" cy="228600"/>
+          </a:xfrm>
+          <a:prstGeom prst="rect">
+            <a:avLst/>
+          </a:prstGeom>
+          <a:noFill/>
+        </p:spPr>
+        <p:txBody>
+          <a:bodyPr wrap="square"/>
+          <a:lstStyle/>
+          <a:p>
+            <a:pPr algn="l">
+              <a:spcBef>
+                <a:spcPts val="0"/>
+              </a:spcBef>
+              <a:spcAft>
+                <a:spcPts val="0"/>
+              </a:spcAft>
+              <a:defRPr sz="1100" b="0">
+                <a:solidFill>
+                  <a:srgbClr val="1A1A2E"/>
+                </a:solidFill>
+                <a:latin typeface="Arial"/>
+              </a:defRPr>
+            </a:pPr>
+            <a:r>
+              <a:t>• Data berbagi pakai antar instansi</a:t>
+            </a:r>
+          </a:p>
+        </p:txBody>
+      </p:sp>
+      <p:sp>
+        <p:nvSpPr>
+          <p:cNvPr id="26" name="TextBox 25"/>
+          <p:cNvSpPr txBox="1"/>
+          <p:nvPr/>
+        </p:nvSpPr>
+        <p:spPr>
+          <a:xfrm>
+            <a:off x="6415887" y="2907791"/>
+            <a:ext cx="5090007" cy="228600"/>
+          </a:xfrm>
+          <a:prstGeom prst="rect">
+            <a:avLst/>
+          </a:prstGeom>
+          <a:noFill/>
+        </p:spPr>
+        <p:txBody>
+          <a:bodyPr wrap="square"/>
+          <a:lstStyle/>
+          <a:p>
+            <a:pPr algn="l">
+              <a:spcBef>
+                <a:spcPts val="0"/>
+              </a:spcBef>
+              <a:spcAft>
+                <a:spcPts val="0"/>
+              </a:spcAft>
+              <a:defRPr sz="1100" b="0">
+                <a:solidFill>
+                  <a:srgbClr val="1A1A2E"/>
+                </a:solidFill>
+                <a:latin typeface="Arial"/>
+              </a:defRPr>
+            </a:pPr>
+            <a:r>
+              <a:t>• Efektivitas &amp; efisiensi anggaran nasional</a:t>
+            </a:r>
+          </a:p>
+        </p:txBody>
+      </p:sp>
+      <p:sp>
+        <p:nvSpPr>
+          <p:cNvPr id="27" name="Rectangle 26"/>
           <p:cNvSpPr/>
           <p:nvPr/>
         </p:nvSpPr>
@@ -14612,7 +15437,7 @@
       </p:sp>
       <p:sp>
         <p:nvSpPr>
-          <p:cNvPr id="24" name="TextBox 23"/>
+          <p:cNvPr id="28" name="TextBox 27"/>
           <p:cNvSpPr txBox="1"/>
           <p:nvPr/>
         </p:nvSpPr>
@@ -14641,18 +15466,18 @@
                 <a:solidFill>
                   <a:srgbClr val="64748B"/>
                 </a:solidFill>
-                <a:latin typeface="Calibri"/>
-              </a:defRPr>
-            </a:pPr>
-            <a:r>
-              <a:t>Penerapan Sistem Pemerintahan Berbasis Elektronik (SPBE)</a:t>
-            </a:r>
-          </a:p>
-        </p:txBody>
-      </p:sp>
-      <p:sp>
-        <p:nvSpPr>
-          <p:cNvPr id="25" name="TextBox 24"/>
+                <a:latin typeface="Arial"/>
+              </a:defRPr>
+            </a:pPr>
+            <a:r>
+              <a:t>Sumber: Perpres No. 95/2018, Perpres No. 132/2022, &amp; Pedoman SPBE Kemenpan-RB</a:t>
+            </a:r>
+          </a:p>
+        </p:txBody>
+      </p:sp>
+      <p:sp>
+        <p:nvSpPr>
+          <p:cNvPr id="29" name="TextBox 28"/>
           <p:cNvSpPr txBox="1"/>
           <p:nvPr/>
         </p:nvSpPr>
@@ -14681,7 +15506,7 @@
                 <a:solidFill>
                   <a:srgbClr val="64748B"/>
                 </a:solidFill>
-                <a:latin typeface="Calibri"/>
+                <a:latin typeface="Arial"/>
               </a:defRPr>
             </a:pPr>
             <a:r>
@@ -14962,15 +15787,15 @@
                 <a:solidFill>
                   <a:srgbClr val="FFFFFF"/>
                 </a:solidFill>
-                <a:latin typeface="Calibri"/>
-              </a:defRPr>
-            </a:pPr>
-            <a:r>
-              <a:t>BAB 2</a:t>
+                <a:latin typeface="Arial"/>
+              </a:defRPr>
+            </a:pPr>
+            <a:r>
+              <a:t>KERANGKA</a:t>
             </a:r>
             <a:br/>
             <a:r>
-              <a:t>ARSITEKTUR &amp; KERANGKA KERJA SPBE</a:t>
+              <a:t>ARSITEKTUR SPBE</a:t>
             </a:r>
           </a:p>
         </p:txBody>
@@ -15006,11 +15831,11 @@
                 <a:solidFill>
                   <a:srgbClr val="C8962E"/>
                 </a:solidFill>
-                <a:latin typeface="Calibri"/>
-              </a:defRPr>
-            </a:pPr>
-            <a:r>
-              <a:t>Proses Bisnis, Data, Aplikasi, Infrastruktur, dan Keamanan Saling Menopang</a:t>
+                <a:latin typeface="Arial"/>
+              </a:defRPr>
+            </a:pPr>
+            <a:r>
+              <a:t>Tata Kelola &amp; Manajemen sebagai fondasi yang mengikat</a:t>
             </a:r>
           </a:p>
         </p:txBody>
@@ -15046,11 +15871,11 @@
                 <a:solidFill>
                   <a:srgbClr val="64748B"/>
                 </a:solidFill>
-                <a:latin typeface="Calibri"/>
-              </a:defRPr>
-            </a:pPr>
-            <a:r>
-              <a:t>Tata Kelola &amp; Manajemen sebagai Pondasi</a:t>
+                <a:latin typeface="Arial"/>
+              </a:defRPr>
+            </a:pPr>
+            <a:r>
+              <a:t>8 Komponen Terintegrasi</a:t>
             </a:r>
           </a:p>
         </p:txBody>
@@ -15284,11 +16109,11 @@
                 <a:solidFill>
                   <a:srgbClr val="FFFFFF"/>
                 </a:solidFill>
-                <a:latin typeface="Georgia"/>
-              </a:defRPr>
-            </a:pPr>
-            <a:r>
-              <a:t>Tata Kelola &amp; Manajemen Mengikat Seluruh Komponen Arsitektur SPBE</a:t>
+                <a:latin typeface="Arial Black"/>
+              </a:defRPr>
+            </a:pPr>
+            <a:r>
+              <a:t>Tata Kelola dan Manajemen Menjadi Pondasi yang Mengikat Seluruh Komponen Arsitektur</a:t>
             </a:r>
           </a:p>
         </p:txBody>
@@ -15324,11 +16149,11 @@
                 <a:solidFill>
                   <a:srgbClr val="64748B"/>
                 </a:solidFill>
-                <a:latin typeface="Calibri"/>
-              </a:defRPr>
-            </a:pPr>
-            <a:r>
-              <a:t>Kerangka Arsitektur SPBE</a:t>
+                <a:latin typeface="Arial"/>
+              </a:defRPr>
+            </a:pPr>
+            <a:r>
+              <a:t>Arsitektur SPBE Instansi</a:t>
             </a:r>
           </a:p>
         </p:txBody>
@@ -15342,7 +16167,7 @@
         <p:spPr>
           <a:xfrm>
             <a:off x="548640" y="1051560"/>
-            <a:ext cx="3515258" cy="2537460"/>
+            <a:ext cx="2567863" cy="2537460"/>
           </a:xfrm>
           <a:prstGeom prst="roundRect">
             <a:avLst>
@@ -15497,11 +16322,11 @@
                 <a:solidFill>
                   <a:srgbClr val="FFFFFF"/>
                 </a:solidFill>
-                <a:latin typeface="Calibri"/>
-              </a:defRPr>
-            </a:pPr>
-            <a:r>
-              <a:t>📋</a:t>
+                <a:latin typeface="Arial"/>
+              </a:defRPr>
+            </a:pPr>
+            <a:r>
+              <a:t>🏛️</a:t>
             </a:r>
           </a:p>
         </p:txBody>
@@ -15515,7 +16340,7 @@
         <p:spPr>
           <a:xfrm>
             <a:off x="685800" y="1691639"/>
-            <a:ext cx="3240938" cy="274320"/>
+            <a:ext cx="2293543" cy="274320"/>
           </a:xfrm>
           <a:prstGeom prst="rect">
             <a:avLst/>
@@ -15537,11 +16362,11 @@
                 <a:solidFill>
                   <a:srgbClr val="2563EB"/>
                 </a:solidFill>
-                <a:latin typeface="Calibri"/>
-              </a:defRPr>
-            </a:pPr>
-            <a:r>
-              <a:t>Proses Bisnis</a:t>
+                <a:latin typeface="Arial"/>
+              </a:defRPr>
+            </a:pPr>
+            <a:r>
+              <a:t>Tata Kelola</a:t>
             </a:r>
           </a:p>
         </p:txBody>
@@ -15555,7 +16380,7 @@
         <p:spPr>
           <a:xfrm>
             <a:off x="685800" y="2039112"/>
-            <a:ext cx="3240938" cy="274320"/>
+            <a:ext cx="2293543" cy="274320"/>
           </a:xfrm>
           <a:prstGeom prst="rect">
             <a:avLst/>
@@ -15577,11 +16402,11 @@
                 <a:solidFill>
                   <a:srgbClr val="1A1A2E"/>
                 </a:solidFill>
-                <a:latin typeface="Calibri"/>
-              </a:defRPr>
-            </a:pPr>
-            <a:r>
-              <a:t>• Petakan proses bisnis dulu</a:t>
+                <a:latin typeface="Arial"/>
+              </a:defRPr>
+            </a:pPr>
+            <a:r>
+              <a:t>• Kebijakan &amp; regulasi internal</a:t>
             </a:r>
           </a:p>
         </p:txBody>
@@ -15595,7 +16420,7 @@
         <p:spPr>
           <a:xfrm>
             <a:off x="685800" y="2331720"/>
-            <a:ext cx="3240938" cy="274320"/>
+            <a:ext cx="2293543" cy="274320"/>
           </a:xfrm>
           <a:prstGeom prst="rect">
             <a:avLst/>
@@ -15617,11 +16442,11 @@
                 <a:solidFill>
                   <a:srgbClr val="1A1A2E"/>
                 </a:solidFill>
-                <a:latin typeface="Calibri"/>
-              </a:defRPr>
-            </a:pPr>
-            <a:r>
-              <a:t>• Sebelum menyentuh teknologi</a:t>
+                <a:latin typeface="Arial"/>
+              </a:defRPr>
+            </a:pPr>
+            <a:r>
+              <a:t>• Perencanaan strategis TIK</a:t>
             </a:r>
           </a:p>
         </p:txBody>
@@ -15635,7 +16460,7 @@
         <p:spPr>
           <a:xfrm>
             <a:off x="685800" y="2624327"/>
-            <a:ext cx="3240938" cy="274320"/>
+            <a:ext cx="2293543" cy="274320"/>
           </a:xfrm>
           <a:prstGeom prst="rect">
             <a:avLst/>
@@ -15657,11 +16482,11 @@
                 <a:solidFill>
                   <a:srgbClr val="1A1A2E"/>
                 </a:solidFill>
-                <a:latin typeface="Calibri"/>
-              </a:defRPr>
-            </a:pPr>
-            <a:r>
-              <a:t>• Gunakan aplikasi Arsitektur SPBE Nasional</a:t>
+                <a:latin typeface="Arial"/>
+              </a:defRPr>
+            </a:pPr>
+            <a:r>
+              <a:t>• Struktur organisasi &amp; kewenangan</a:t>
             </a:r>
           </a:p>
         </p:txBody>
@@ -15674,8 +16499,8 @@
         </p:nvSpPr>
         <p:spPr>
           <a:xfrm>
-            <a:off x="4338218" y="1051560"/>
-            <a:ext cx="3515258" cy="2537460"/>
+            <a:off x="3390823" y="1051560"/>
+            <a:ext cx="2567863" cy="2537460"/>
           </a:xfrm>
           <a:prstGeom prst="roundRect">
             <a:avLst>
@@ -15721,7 +16546,7 @@
         </p:nvSpPr>
         <p:spPr>
           <a:xfrm>
-            <a:off x="4338218" y="1051560"/>
+            <a:off x="3390823" y="1051560"/>
             <a:ext cx="45720" cy="2537460"/>
           </a:xfrm>
           <a:prstGeom prst="rect">
@@ -15764,7 +16589,7 @@
         </p:nvSpPr>
         <p:spPr>
           <a:xfrm>
-            <a:off x="4475378" y="1188719"/>
+            <a:off x="3527983" y="1188719"/>
             <a:ext cx="384048" cy="384048"/>
           </a:xfrm>
           <a:prstGeom prst="ellipse">
@@ -15807,7 +16632,7 @@
         </p:nvSpPr>
         <p:spPr>
           <a:xfrm>
-            <a:off x="4552188" y="1247241"/>
+            <a:off x="3604793" y="1247241"/>
             <a:ext cx="230428" cy="230428"/>
           </a:xfrm>
           <a:prstGeom prst="rect">
@@ -15830,11 +16655,11 @@
                 <a:solidFill>
                   <a:srgbClr val="FFFFFF"/>
                 </a:solidFill>
-                <a:latin typeface="Calibri"/>
-              </a:defRPr>
-            </a:pPr>
-            <a:r>
-              <a:t>💾</a:t>
+                <a:latin typeface="Arial"/>
+              </a:defRPr>
+            </a:pPr>
+            <a:r>
+              <a:t>📋</a:t>
             </a:r>
           </a:p>
         </p:txBody>
@@ -15847,8 +16672,8 @@
         </p:nvSpPr>
         <p:spPr>
           <a:xfrm>
-            <a:off x="4475378" y="1691639"/>
-            <a:ext cx="3240938" cy="274320"/>
+            <a:off x="3527983" y="1691639"/>
+            <a:ext cx="2293543" cy="274320"/>
           </a:xfrm>
           <a:prstGeom prst="rect">
             <a:avLst/>
@@ -15870,11 +16695,11 @@
                 <a:solidFill>
                   <a:srgbClr val="0B7C72"/>
                 </a:solidFill>
-                <a:latin typeface="Calibri"/>
-              </a:defRPr>
-            </a:pPr>
-            <a:r>
-              <a:t>Data &amp; Informasi</a:t>
+                <a:latin typeface="Arial"/>
+              </a:defRPr>
+            </a:pPr>
+            <a:r>
+              <a:t>Manajemen</a:t>
             </a:r>
           </a:p>
         </p:txBody>
@@ -15887,8 +16712,8 @@
         </p:nvSpPr>
         <p:spPr>
           <a:xfrm>
-            <a:off x="4475378" y="2039112"/>
-            <a:ext cx="3240938" cy="274320"/>
+            <a:off x="3527983" y="2039112"/>
+            <a:ext cx="2293543" cy="274320"/>
           </a:xfrm>
           <a:prstGeom prst="rect">
             <a:avLst/>
@@ -15910,11 +16735,11 @@
                 <a:solidFill>
                   <a:srgbClr val="1A1A2E"/>
                 </a:solidFill>
-                <a:latin typeface="Calibri"/>
-              </a:defRPr>
-            </a:pPr>
-            <a:r>
-              <a:t>• Prinsip Satu Data Indonesia</a:t>
+                <a:latin typeface="Arial"/>
+              </a:defRPr>
+            </a:pPr>
+            <a:r>
+              <a:t>• Pengelolaan risiko &amp; keamanan</a:t>
             </a:r>
           </a:p>
         </p:txBody>
@@ -15927,8 +16752,8 @@
         </p:nvSpPr>
         <p:spPr>
           <a:xfrm>
-            <a:off x="4475378" y="2331720"/>
-            <a:ext cx="3240938" cy="274320"/>
+            <a:off x="3527983" y="2331720"/>
+            <a:ext cx="2293543" cy="274320"/>
           </a:xfrm>
           <a:prstGeom prst="rect">
             <a:avLst/>
@@ -15950,11 +16775,11 @@
                 <a:solidFill>
                   <a:srgbClr val="1A1A2E"/>
                 </a:solidFill>
-                <a:latin typeface="Calibri"/>
-              </a:defRPr>
-            </a:pPr>
-            <a:r>
-              <a:t>• Data terstandarisasi</a:t>
+                <a:latin typeface="Arial"/>
+              </a:defRPr>
+            </a:pPr>
+            <a:r>
+              <a:t>• SDM &amp; aset TIK</a:t>
             </a:r>
           </a:p>
         </p:txBody>
@@ -15967,8 +16792,8 @@
         </p:nvSpPr>
         <p:spPr>
           <a:xfrm>
-            <a:off x="4475378" y="2624327"/>
-            <a:ext cx="3240938" cy="274320"/>
+            <a:off x="3527983" y="2624327"/>
+            <a:ext cx="2293543" cy="274320"/>
           </a:xfrm>
           <a:prstGeom prst="rect">
             <a:avLst/>
@@ -15990,11 +16815,11 @@
                 <a:solidFill>
                   <a:srgbClr val="1A1A2E"/>
                 </a:solidFill>
-                <a:latin typeface="Calibri"/>
-              </a:defRPr>
-            </a:pPr>
-            <a:r>
-              <a:t>• Berbagi pakai data antar instansi</a:t>
+                <a:latin typeface="Arial"/>
+              </a:defRPr>
+            </a:pPr>
+            <a:r>
+              <a:t>• Satu Data Indonesia</a:t>
             </a:r>
           </a:p>
         </p:txBody>
@@ -16007,8 +16832,8 @@
         </p:nvSpPr>
         <p:spPr>
           <a:xfrm>
-            <a:off x="8127796" y="1051560"/>
-            <a:ext cx="3515258" cy="2537460"/>
+            <a:off x="6233007" y="1051560"/>
+            <a:ext cx="2567863" cy="2537460"/>
           </a:xfrm>
           <a:prstGeom prst="roundRect">
             <a:avLst>
@@ -16054,7 +16879,7 @@
         </p:nvSpPr>
         <p:spPr>
           <a:xfrm>
-            <a:off x="8127796" y="1051560"/>
+            <a:off x="6233007" y="1051560"/>
             <a:ext cx="45720" cy="2537460"/>
           </a:xfrm>
           <a:prstGeom prst="rect">
@@ -16097,7 +16922,7 @@
         </p:nvSpPr>
         <p:spPr>
           <a:xfrm>
-            <a:off x="8264956" y="1188719"/>
+            <a:off x="6370167" y="1188719"/>
             <a:ext cx="384048" cy="384048"/>
           </a:xfrm>
           <a:prstGeom prst="ellipse">
@@ -16140,7 +16965,7 @@
         </p:nvSpPr>
         <p:spPr>
           <a:xfrm>
-            <a:off x="8341766" y="1247241"/>
+            <a:off x="6446977" y="1247241"/>
             <a:ext cx="230428" cy="230428"/>
           </a:xfrm>
           <a:prstGeom prst="rect">
@@ -16163,11 +16988,11 @@
                 <a:solidFill>
                   <a:srgbClr val="FFFFFF"/>
                 </a:solidFill>
-                <a:latin typeface="Calibri"/>
-              </a:defRPr>
-            </a:pPr>
-            <a:r>
-              <a:t>📱</a:t>
+                <a:latin typeface="Arial"/>
+              </a:defRPr>
+            </a:pPr>
+            <a:r>
+              <a:t>⚙️</a:t>
             </a:r>
           </a:p>
         </p:txBody>
@@ -16180,8 +17005,8 @@
         </p:nvSpPr>
         <p:spPr>
           <a:xfrm>
-            <a:off x="8264956" y="1691639"/>
-            <a:ext cx="3240938" cy="274320"/>
+            <a:off x="6370167" y="1691639"/>
+            <a:ext cx="2293543" cy="274320"/>
           </a:xfrm>
           <a:prstGeom prst="rect">
             <a:avLst/>
@@ -16203,11 +17028,11 @@
                 <a:solidFill>
                   <a:srgbClr val="A0522D"/>
                 </a:solidFill>
-                <a:latin typeface="Calibri"/>
-              </a:defRPr>
-            </a:pPr>
-            <a:r>
-              <a:t>Aplikasi</a:t>
+                <a:latin typeface="Arial"/>
+              </a:defRPr>
+            </a:pPr>
+            <a:r>
+              <a:t>Proses Bisnis</a:t>
             </a:r>
           </a:p>
         </p:txBody>
@@ -16220,8 +17045,8 @@
         </p:nvSpPr>
         <p:spPr>
           <a:xfrm>
-            <a:off x="8264956" y="2039112"/>
-            <a:ext cx="3240938" cy="274320"/>
+            <a:off x="6370167" y="2039112"/>
+            <a:ext cx="2293543" cy="274320"/>
           </a:xfrm>
           <a:prstGeom prst="rect">
             <a:avLst/>
@@ -16243,11 +17068,11 @@
                 <a:solidFill>
                   <a:srgbClr val="1A1A2E"/>
                 </a:solidFill>
-                <a:latin typeface="Calibri"/>
-              </a:defRPr>
-            </a:pPr>
-            <a:r>
-              <a:t>• Konsolidasi aplikasi sektoral</a:t>
+                <a:latin typeface="Arial"/>
+              </a:defRPr>
+            </a:pPr>
+            <a:r>
+              <a:t>• Pemetaan proses bisnis instansi</a:t>
             </a:r>
           </a:p>
         </p:txBody>
@@ -16260,8 +17085,8 @@
         </p:nvSpPr>
         <p:spPr>
           <a:xfrm>
-            <a:off x="8264956" y="2331720"/>
-            <a:ext cx="3240938" cy="274320"/>
+            <a:off x="6370167" y="2331720"/>
+            <a:ext cx="2293543" cy="274320"/>
           </a:xfrm>
           <a:prstGeom prst="rect">
             <a:avLst/>
@@ -16283,11 +17108,11 @@
                 <a:solidFill>
                   <a:srgbClr val="1A1A2E"/>
                 </a:solidFill>
-                <a:latin typeface="Calibri"/>
-              </a:defRPr>
-            </a:pPr>
-            <a:r>
-              <a:t>• Super apps terpadu</a:t>
+                <a:latin typeface="Arial"/>
+              </a:defRPr>
+            </a:pPr>
+            <a:r>
+              <a:t>• Standard operating procedure</a:t>
             </a:r>
           </a:p>
         </p:txBody>
@@ -16300,8 +17125,8 @@
         </p:nvSpPr>
         <p:spPr>
           <a:xfrm>
-            <a:off x="8264956" y="2624327"/>
-            <a:ext cx="3240938" cy="274320"/>
+            <a:off x="6370167" y="2624327"/>
+            <a:ext cx="2293543" cy="338328"/>
           </a:xfrm>
           <a:prstGeom prst="rect">
             <a:avLst/>
@@ -16323,11 +17148,11 @@
                 <a:solidFill>
                   <a:srgbClr val="1A1A2E"/>
                 </a:solidFill>
-                <a:latin typeface="Calibri"/>
-              </a:defRPr>
-            </a:pPr>
-            <a:r>
-              <a:t>• Moratorium aplikasi duplikatif</a:t>
+                <a:latin typeface="Arial"/>
+              </a:defRPr>
+            </a:pPr>
+            <a:r>
+              <a:t>• Prioritas sebelum menyentuh teknologi</a:t>
             </a:r>
           </a:p>
         </p:txBody>
@@ -16340,8 +17165,8 @@
         </p:nvSpPr>
         <p:spPr>
           <a:xfrm>
-            <a:off x="548640" y="3863339"/>
-            <a:ext cx="3515258" cy="2537460"/>
+            <a:off x="9075191" y="1051560"/>
+            <a:ext cx="2567863" cy="2537460"/>
           </a:xfrm>
           <a:prstGeom prst="roundRect">
             <a:avLst>
@@ -16387,7 +17212,7 @@
         </p:nvSpPr>
         <p:spPr>
           <a:xfrm>
-            <a:off x="548640" y="3863339"/>
+            <a:off x="9075191" y="1051560"/>
             <a:ext cx="45720" cy="2537460"/>
           </a:xfrm>
           <a:prstGeom prst="rect">
@@ -16430,7 +17255,7 @@
         </p:nvSpPr>
         <p:spPr>
           <a:xfrm>
-            <a:off x="685800" y="4000500"/>
+            <a:off x="9212351" y="1188719"/>
             <a:ext cx="384048" cy="384048"/>
           </a:xfrm>
           <a:prstGeom prst="ellipse">
@@ -16473,7 +17298,7 @@
         </p:nvSpPr>
         <p:spPr>
           <a:xfrm>
-            <a:off x="762609" y="4059021"/>
+            <a:off x="9289161" y="1247241"/>
             <a:ext cx="230428" cy="230428"/>
           </a:xfrm>
           <a:prstGeom prst="rect">
@@ -16496,11 +17321,11 @@
                 <a:solidFill>
                   <a:srgbClr val="FFFFFF"/>
                 </a:solidFill>
-                <a:latin typeface="Calibri"/>
-              </a:defRPr>
-            </a:pPr>
-            <a:r>
-              <a:t>🖧</a:t>
+                <a:latin typeface="Arial"/>
+              </a:defRPr>
+            </a:pPr>
+            <a:r>
+              <a:t>📊</a:t>
             </a:r>
           </a:p>
         </p:txBody>
@@ -16513,8 +17338,8 @@
         </p:nvSpPr>
         <p:spPr>
           <a:xfrm>
-            <a:off x="685800" y="4503420"/>
-            <a:ext cx="3240938" cy="274320"/>
+            <a:off x="9212351" y="1691639"/>
+            <a:ext cx="2293543" cy="274320"/>
           </a:xfrm>
           <a:prstGeom prst="rect">
             <a:avLst/>
@@ -16536,11 +17361,11 @@
                 <a:solidFill>
                   <a:srgbClr val="1B3A6B"/>
                 </a:solidFill>
-                <a:latin typeface="Calibri"/>
-              </a:defRPr>
-            </a:pPr>
-            <a:r>
-              <a:t>Infrastruktur</a:t>
+                <a:latin typeface="Arial"/>
+              </a:defRPr>
+            </a:pPr>
+            <a:r>
+              <a:t>Data</a:t>
             </a:r>
           </a:p>
         </p:txBody>
@@ -16553,8 +17378,8 @@
         </p:nvSpPr>
         <p:spPr>
           <a:xfrm>
-            <a:off x="685800" y="4850892"/>
-            <a:ext cx="3240938" cy="274320"/>
+            <a:off x="9212351" y="2039112"/>
+            <a:ext cx="2293543" cy="274320"/>
           </a:xfrm>
           <a:prstGeom prst="rect">
             <a:avLst/>
@@ -16576,11 +17401,11 @@
                 <a:solidFill>
                   <a:srgbClr val="1A1A2E"/>
                 </a:solidFill>
-                <a:latin typeface="Calibri"/>
-              </a:defRPr>
-            </a:pPr>
-            <a:r>
-              <a:t>• Pusat Data Nasional (PDN)</a:t>
+                <a:latin typeface="Arial"/>
+              </a:defRPr>
+            </a:pPr>
+            <a:r>
+              <a:t>• Prinsip Satu Data Indonesia</a:t>
             </a:r>
           </a:p>
         </p:txBody>
@@ -16593,8 +17418,8 @@
         </p:nvSpPr>
         <p:spPr>
           <a:xfrm>
-            <a:off x="685800" y="5143500"/>
-            <a:ext cx="3240938" cy="274320"/>
+            <a:off x="9212351" y="2331720"/>
+            <a:ext cx="2293543" cy="274320"/>
           </a:xfrm>
           <a:prstGeom prst="rect">
             <a:avLst/>
@@ -16616,11 +17441,11 @@
                 <a:solidFill>
                   <a:srgbClr val="1A1A2E"/>
                 </a:solidFill>
-                <a:latin typeface="Calibri"/>
-              </a:defRPr>
-            </a:pPr>
-            <a:r>
-              <a:t>• Cloud tersertifikasi</a:t>
+                <a:latin typeface="Arial"/>
+              </a:defRPr>
+            </a:pPr>
+            <a:r>
+              <a:t>• Interoperabilitas data</a:t>
             </a:r>
           </a:p>
         </p:txBody>
@@ -16633,8 +17458,8 @@
         </p:nvSpPr>
         <p:spPr>
           <a:xfrm>
-            <a:off x="685800" y="5436108"/>
-            <a:ext cx="3240938" cy="274320"/>
+            <a:off x="9212351" y="2624327"/>
+            <a:ext cx="2293543" cy="274320"/>
           </a:xfrm>
           <a:prstGeom prst="rect">
             <a:avLst/>
@@ -16656,11 +17481,11 @@
                 <a:solidFill>
                   <a:srgbClr val="1A1A2E"/>
                 </a:solidFill>
-                <a:latin typeface="Calibri"/>
-              </a:defRPr>
-            </a:pPr>
-            <a:r>
-              <a:t>• Hub SPLP untuk berbagi pakai</a:t>
+                <a:latin typeface="Arial"/>
+              </a:defRPr>
+            </a:pPr>
+            <a:r>
+              <a:t>• Standar metadata &amp; klasifikasi</a:t>
             </a:r>
           </a:p>
         </p:txBody>
@@ -16673,8 +17498,8 @@
         </p:nvSpPr>
         <p:spPr>
           <a:xfrm>
-            <a:off x="4338218" y="3863339"/>
-            <a:ext cx="3515258" cy="2537460"/>
+            <a:off x="548640" y="3863339"/>
+            <a:ext cx="2567863" cy="2537460"/>
           </a:xfrm>
           <a:prstGeom prst="roundRect">
             <a:avLst>
@@ -16720,7 +17545,7 @@
         </p:nvSpPr>
         <p:spPr>
           <a:xfrm>
-            <a:off x="4338218" y="3863339"/>
+            <a:off x="548640" y="3863339"/>
             <a:ext cx="45720" cy="2537460"/>
           </a:xfrm>
           <a:prstGeom prst="rect">
@@ -16763,7 +17588,7 @@
         </p:nvSpPr>
         <p:spPr>
           <a:xfrm>
-            <a:off x="4475378" y="4000500"/>
+            <a:off x="685800" y="4000500"/>
             <a:ext cx="384048" cy="384048"/>
           </a:xfrm>
           <a:prstGeom prst="ellipse">
@@ -16806,7 +17631,7 @@
         </p:nvSpPr>
         <p:spPr>
           <a:xfrm>
-            <a:off x="4552188" y="4059021"/>
+            <a:off x="762609" y="4059021"/>
             <a:ext cx="230428" cy="230428"/>
           </a:xfrm>
           <a:prstGeom prst="rect">
@@ -16829,11 +17654,11 @@
                 <a:solidFill>
                   <a:srgbClr val="FFFFFF"/>
                 </a:solidFill>
-                <a:latin typeface="Calibri"/>
-              </a:defRPr>
-            </a:pPr>
-            <a:r>
-              <a:t>🔒</a:t>
+                <a:latin typeface="Arial"/>
+              </a:defRPr>
+            </a:pPr>
+            <a:r>
+              <a:t>💻</a:t>
             </a:r>
           </a:p>
         </p:txBody>
@@ -16846,8 +17671,8 @@
         </p:nvSpPr>
         <p:spPr>
           <a:xfrm>
-            <a:off x="4475378" y="4503420"/>
-            <a:ext cx="3240938" cy="274320"/>
+            <a:off x="685800" y="4503420"/>
+            <a:ext cx="2293543" cy="274320"/>
           </a:xfrm>
           <a:prstGeom prst="rect">
             <a:avLst/>
@@ -16869,11 +17694,11 @@
                 <a:solidFill>
                   <a:srgbClr val="2563EB"/>
                 </a:solidFill>
-                <a:latin typeface="Calibri"/>
-              </a:defRPr>
-            </a:pPr>
-            <a:r>
-              <a:t>Keamanan</a:t>
+                <a:latin typeface="Arial"/>
+              </a:defRPr>
+            </a:pPr>
+            <a:r>
+              <a:t>Aplikasi</a:t>
             </a:r>
           </a:p>
         </p:txBody>
@@ -16886,8 +17711,8 @@
         </p:nvSpPr>
         <p:spPr>
           <a:xfrm>
-            <a:off x="4475378" y="4850892"/>
-            <a:ext cx="3240938" cy="274320"/>
+            <a:off x="685800" y="4850892"/>
+            <a:ext cx="2293543" cy="274320"/>
           </a:xfrm>
           <a:prstGeom prst="rect">
             <a:avLst/>
@@ -16909,11 +17734,11 @@
                 <a:solidFill>
                   <a:srgbClr val="1A1A2E"/>
                 </a:solidFill>
-                <a:latin typeface="Calibri"/>
-              </a:defRPr>
-            </a:pPr>
-            <a:r>
-              <a:t>• SMKI berbasis ISO 27001</a:t>
+                <a:latin typeface="Arial"/>
+              </a:defRPr>
+            </a:pPr>
+            <a:r>
+              <a:t>• Konsolidasi platform terpadu</a:t>
             </a:r>
           </a:p>
         </p:txBody>
@@ -16926,8 +17751,8 @@
         </p:nvSpPr>
         <p:spPr>
           <a:xfrm>
-            <a:off x="4475378" y="5143500"/>
-            <a:ext cx="3240938" cy="274320"/>
+            <a:off x="685800" y="5143500"/>
+            <a:ext cx="2293543" cy="274320"/>
           </a:xfrm>
           <a:prstGeom prst="rect">
             <a:avLst/>
@@ -16949,11 +17774,11 @@
                 <a:solidFill>
                   <a:srgbClr val="1A1A2E"/>
                 </a:solidFill>
-                <a:latin typeface="Calibri"/>
-              </a:defRPr>
-            </a:pPr>
-            <a:r>
-              <a:t>• Kolaborasi BSSN</a:t>
+                <a:latin typeface="Arial"/>
+              </a:defRPr>
+            </a:pPr>
+            <a:r>
+              <a:t>• Moratorium aplikasi duplikatif</a:t>
             </a:r>
           </a:p>
         </p:txBody>
@@ -16966,8 +17791,8 @@
         </p:nvSpPr>
         <p:spPr>
           <a:xfrm>
-            <a:off x="4475378" y="5436108"/>
-            <a:ext cx="3240938" cy="274320"/>
+            <a:off x="685800" y="5436108"/>
+            <a:ext cx="2293543" cy="274320"/>
           </a:xfrm>
           <a:prstGeom prst="rect">
             <a:avLst/>
@@ -16989,11 +17814,11 @@
                 <a:solidFill>
                   <a:srgbClr val="1A1A2E"/>
                 </a:solidFill>
-                <a:latin typeface="Calibri"/>
-              </a:defRPr>
-            </a:pPr>
-            <a:r>
-              <a:t>• CSIRT internal</a:t>
+                <a:latin typeface="Arial"/>
+              </a:defRPr>
+            </a:pPr>
+            <a:r>
+              <a:t>• Super Apps layanan digital</a:t>
             </a:r>
           </a:p>
         </p:txBody>
@@ -17006,8 +17831,8 @@
         </p:nvSpPr>
         <p:spPr>
           <a:xfrm>
-            <a:off x="8127796" y="3863339"/>
-            <a:ext cx="3515258" cy="2537460"/>
+            <a:off x="3390823" y="3863339"/>
+            <a:ext cx="2567863" cy="2537460"/>
           </a:xfrm>
           <a:prstGeom prst="roundRect">
             <a:avLst>
@@ -17053,7 +17878,7 @@
         </p:nvSpPr>
         <p:spPr>
           <a:xfrm>
-            <a:off x="8127796" y="3863339"/>
+            <a:off x="3390823" y="3863339"/>
             <a:ext cx="45720" cy="2537460"/>
           </a:xfrm>
           <a:prstGeom prst="rect">
@@ -17096,7 +17921,7 @@
         </p:nvSpPr>
         <p:spPr>
           <a:xfrm>
-            <a:off x="8264956" y="4000500"/>
+            <a:off x="3527983" y="4000500"/>
             <a:ext cx="384048" cy="384048"/>
           </a:xfrm>
           <a:prstGeom prst="ellipse">
@@ -17139,7 +17964,7 @@
         </p:nvSpPr>
         <p:spPr>
           <a:xfrm>
-            <a:off x="8341766" y="4059021"/>
+            <a:off x="3604793" y="4059021"/>
             <a:ext cx="230428" cy="230428"/>
           </a:xfrm>
           <a:prstGeom prst="rect">
@@ -17162,7 +17987,673 @@
                 <a:solidFill>
                   <a:srgbClr val="FFFFFF"/>
                 </a:solidFill>
-                <a:latin typeface="Calibri"/>
+                <a:latin typeface="Arial"/>
+              </a:defRPr>
+            </a:pPr>
+            <a:r>
+              <a:t>🌐</a:t>
+            </a:r>
+          </a:p>
+        </p:txBody>
+      </p:sp>
+      <p:sp>
+        <p:nvSpPr>
+          <p:cNvPr id="51" name="TextBox 50"/>
+          <p:cNvSpPr txBox="1"/>
+          <p:nvPr/>
+        </p:nvSpPr>
+        <p:spPr>
+          <a:xfrm>
+            <a:off x="3527983" y="4503420"/>
+            <a:ext cx="2293543" cy="274320"/>
+          </a:xfrm>
+          <a:prstGeom prst="rect">
+            <a:avLst/>
+          </a:prstGeom>
+          <a:noFill/>
+        </p:spPr>
+        <p:txBody>
+          <a:bodyPr wrap="square"/>
+          <a:lstStyle/>
+          <a:p>
+            <a:pPr algn="l">
+              <a:spcBef>
+                <a:spcPts val="0"/>
+              </a:spcBef>
+              <a:spcAft>
+                <a:spcPts val="0"/>
+              </a:spcAft>
+              <a:defRPr sz="1300" b="1">
+                <a:solidFill>
+                  <a:srgbClr val="0B7C72"/>
+                </a:solidFill>
+                <a:latin typeface="Arial"/>
+              </a:defRPr>
+            </a:pPr>
+            <a:r>
+              <a:t>Infrastruktur</a:t>
+            </a:r>
+          </a:p>
+        </p:txBody>
+      </p:sp>
+      <p:sp>
+        <p:nvSpPr>
+          <p:cNvPr id="52" name="TextBox 51"/>
+          <p:cNvSpPr txBox="1"/>
+          <p:nvPr/>
+        </p:nvSpPr>
+        <p:spPr>
+          <a:xfrm>
+            <a:off x="3527983" y="4850892"/>
+            <a:ext cx="2293543" cy="274320"/>
+          </a:xfrm>
+          <a:prstGeom prst="rect">
+            <a:avLst/>
+          </a:prstGeom>
+          <a:noFill/>
+        </p:spPr>
+        <p:txBody>
+          <a:bodyPr wrap="square"/>
+          <a:lstStyle/>
+          <a:p>
+            <a:pPr algn="l">
+              <a:spcBef>
+                <a:spcPts val="0"/>
+              </a:spcBef>
+              <a:spcAft>
+                <a:spcPts val="0"/>
+              </a:spcAft>
+              <a:defRPr sz="900" b="0">
+                <a:solidFill>
+                  <a:srgbClr val="1A1A2E"/>
+                </a:solidFill>
+                <a:latin typeface="Arial"/>
+              </a:defRPr>
+            </a:pPr>
+            <a:r>
+              <a:t>• Pusat Data Nasional (PDN)</a:t>
+            </a:r>
+          </a:p>
+        </p:txBody>
+      </p:sp>
+      <p:sp>
+        <p:nvSpPr>
+          <p:cNvPr id="53" name="TextBox 52"/>
+          <p:cNvSpPr txBox="1"/>
+          <p:nvPr/>
+        </p:nvSpPr>
+        <p:spPr>
+          <a:xfrm>
+            <a:off x="3527983" y="5143500"/>
+            <a:ext cx="2293543" cy="274320"/>
+          </a:xfrm>
+          <a:prstGeom prst="rect">
+            <a:avLst/>
+          </a:prstGeom>
+          <a:noFill/>
+        </p:spPr>
+        <p:txBody>
+          <a:bodyPr wrap="square"/>
+          <a:lstStyle/>
+          <a:p>
+            <a:pPr algn="l">
+              <a:spcBef>
+                <a:spcPts val="0"/>
+              </a:spcBef>
+              <a:spcAft>
+                <a:spcPts val="0"/>
+              </a:spcAft>
+              <a:defRPr sz="900" b="0">
+                <a:solidFill>
+                  <a:srgbClr val="1A1A2E"/>
+                </a:solidFill>
+                <a:latin typeface="Arial"/>
+              </a:defRPr>
+            </a:pPr>
+            <a:r>
+              <a:t>• Cloud tersertifikasi</a:t>
+            </a:r>
+          </a:p>
+        </p:txBody>
+      </p:sp>
+      <p:sp>
+        <p:nvSpPr>
+          <p:cNvPr id="54" name="TextBox 53"/>
+          <p:cNvSpPr txBox="1"/>
+          <p:nvPr/>
+        </p:nvSpPr>
+        <p:spPr>
+          <a:xfrm>
+            <a:off x="3527983" y="5436108"/>
+            <a:ext cx="2293543" cy="274320"/>
+          </a:xfrm>
+          <a:prstGeom prst="rect">
+            <a:avLst/>
+          </a:prstGeom>
+          <a:noFill/>
+        </p:spPr>
+        <p:txBody>
+          <a:bodyPr wrap="square"/>
+          <a:lstStyle/>
+          <a:p>
+            <a:pPr algn="l">
+              <a:spcBef>
+                <a:spcPts val="0"/>
+              </a:spcBef>
+              <a:spcAft>
+                <a:spcPts val="0"/>
+              </a:spcAft>
+              <a:defRPr sz="900" b="0">
+                <a:solidFill>
+                  <a:srgbClr val="1A1A2E"/>
+                </a:solidFill>
+                <a:latin typeface="Arial"/>
+              </a:defRPr>
+            </a:pPr>
+            <a:r>
+              <a:t>• Hub SPLP — sistem berbagi pakai</a:t>
+            </a:r>
+          </a:p>
+        </p:txBody>
+      </p:sp>
+      <p:sp>
+        <p:nvSpPr>
+          <p:cNvPr id="55" name="Rounded Rectangle 54"/>
+          <p:cNvSpPr/>
+          <p:nvPr/>
+        </p:nvSpPr>
+        <p:spPr>
+          <a:xfrm>
+            <a:off x="6233007" y="3863339"/>
+            <a:ext cx="2567863" cy="2537460"/>
+          </a:xfrm>
+          <a:prstGeom prst="roundRect">
+            <a:avLst>
+              <a:gd name="adj" fmla="val 4000"/>
+            </a:avLst>
+          </a:prstGeom>
+          <a:solidFill>
+            <a:srgbClr val="FFFFFF"/>
+          </a:solidFill>
+          <a:ln w="6350">
+            <a:solidFill>
+              <a:srgbClr val="E8EDF5"/>
+            </a:solidFill>
+          </a:ln>
+        </p:spPr>
+        <p:style>
+          <a:lnRef idx="1">
+            <a:schemeClr val="accent1"/>
+          </a:lnRef>
+          <a:fillRef idx="3">
+            <a:schemeClr val="accent1"/>
+          </a:fillRef>
+          <a:effectRef idx="2">
+            <a:schemeClr val="accent1"/>
+          </a:effectRef>
+          <a:fontRef idx="minor">
+            <a:schemeClr val="lt1"/>
+          </a:fontRef>
+        </p:style>
+        <p:txBody>
+          <a:bodyPr rtlCol="0" anchor="ctr"/>
+          <a:lstStyle/>
+          <a:p>
+            <a:pPr algn="ctr"/>
+          </a:p>
+        </p:txBody>
+      </p:sp>
+      <p:sp>
+        <p:nvSpPr>
+          <p:cNvPr id="56" name="Rectangle 55"/>
+          <p:cNvSpPr/>
+          <p:nvPr/>
+        </p:nvSpPr>
+        <p:spPr>
+          <a:xfrm>
+            <a:off x="6233007" y="3863339"/>
+            <a:ext cx="45720" cy="2537460"/>
+          </a:xfrm>
+          <a:prstGeom prst="rect">
+            <a:avLst/>
+          </a:prstGeom>
+          <a:solidFill>
+            <a:srgbClr val="A0522D"/>
+          </a:solidFill>
+          <a:ln>
+            <a:noFill/>
+          </a:ln>
+        </p:spPr>
+        <p:style>
+          <a:lnRef idx="1">
+            <a:schemeClr val="accent1"/>
+          </a:lnRef>
+          <a:fillRef idx="3">
+            <a:schemeClr val="accent1"/>
+          </a:fillRef>
+          <a:effectRef idx="2">
+            <a:schemeClr val="accent1"/>
+          </a:effectRef>
+          <a:fontRef idx="minor">
+            <a:schemeClr val="lt1"/>
+          </a:fontRef>
+        </p:style>
+        <p:txBody>
+          <a:bodyPr rtlCol="0" anchor="ctr"/>
+          <a:lstStyle/>
+          <a:p>
+            <a:pPr algn="ctr"/>
+          </a:p>
+        </p:txBody>
+      </p:sp>
+      <p:sp>
+        <p:nvSpPr>
+          <p:cNvPr id="57" name="Oval 56"/>
+          <p:cNvSpPr/>
+          <p:nvPr/>
+        </p:nvSpPr>
+        <p:spPr>
+          <a:xfrm>
+            <a:off x="6370167" y="4000500"/>
+            <a:ext cx="384048" cy="384048"/>
+          </a:xfrm>
+          <a:prstGeom prst="ellipse">
+            <a:avLst/>
+          </a:prstGeom>
+          <a:solidFill>
+            <a:srgbClr val="A0522D"/>
+          </a:solidFill>
+          <a:ln>
+            <a:noFill/>
+          </a:ln>
+        </p:spPr>
+        <p:style>
+          <a:lnRef idx="1">
+            <a:schemeClr val="accent1"/>
+          </a:lnRef>
+          <a:fillRef idx="3">
+            <a:schemeClr val="accent1"/>
+          </a:fillRef>
+          <a:effectRef idx="2">
+            <a:schemeClr val="accent1"/>
+          </a:effectRef>
+          <a:fontRef idx="minor">
+            <a:schemeClr val="lt1"/>
+          </a:fontRef>
+        </p:style>
+        <p:txBody>
+          <a:bodyPr rtlCol="0" anchor="ctr"/>
+          <a:lstStyle/>
+          <a:p>
+            <a:pPr algn="ctr"/>
+          </a:p>
+        </p:txBody>
+      </p:sp>
+      <p:sp>
+        <p:nvSpPr>
+          <p:cNvPr id="58" name="TextBox 57"/>
+          <p:cNvSpPr txBox="1"/>
+          <p:nvPr/>
+        </p:nvSpPr>
+        <p:spPr>
+          <a:xfrm>
+            <a:off x="6446977" y="4059021"/>
+            <a:ext cx="230428" cy="230428"/>
+          </a:xfrm>
+          <a:prstGeom prst="rect">
+            <a:avLst/>
+          </a:prstGeom>
+          <a:noFill/>
+        </p:spPr>
+        <p:txBody>
+          <a:bodyPr wrap="square"/>
+          <a:lstStyle/>
+          <a:p>
+            <a:pPr algn="ctr">
+              <a:spcBef>
+                <a:spcPts val="0"/>
+              </a:spcBef>
+              <a:spcAft>
+                <a:spcPts val="0"/>
+              </a:spcAft>
+              <a:defRPr sz="1200" b="0">
+                <a:solidFill>
+                  <a:srgbClr val="FFFFFF"/>
+                </a:solidFill>
+                <a:latin typeface="Arial"/>
+              </a:defRPr>
+            </a:pPr>
+            <a:r>
+              <a:t>🔒</a:t>
+            </a:r>
+          </a:p>
+        </p:txBody>
+      </p:sp>
+      <p:sp>
+        <p:nvSpPr>
+          <p:cNvPr id="59" name="TextBox 58"/>
+          <p:cNvSpPr txBox="1"/>
+          <p:nvPr/>
+        </p:nvSpPr>
+        <p:spPr>
+          <a:xfrm>
+            <a:off x="6370167" y="4503420"/>
+            <a:ext cx="2293543" cy="274320"/>
+          </a:xfrm>
+          <a:prstGeom prst="rect">
+            <a:avLst/>
+          </a:prstGeom>
+          <a:noFill/>
+        </p:spPr>
+        <p:txBody>
+          <a:bodyPr wrap="square"/>
+          <a:lstStyle/>
+          <a:p>
+            <a:pPr algn="l">
+              <a:spcBef>
+                <a:spcPts val="0"/>
+              </a:spcBef>
+              <a:spcAft>
+                <a:spcPts val="0"/>
+              </a:spcAft>
+              <a:defRPr sz="1300" b="1">
+                <a:solidFill>
+                  <a:srgbClr val="A0522D"/>
+                </a:solidFill>
+                <a:latin typeface="Arial"/>
+              </a:defRPr>
+            </a:pPr>
+            <a:r>
+              <a:t>Keamanan</a:t>
+            </a:r>
+          </a:p>
+        </p:txBody>
+      </p:sp>
+      <p:sp>
+        <p:nvSpPr>
+          <p:cNvPr id="60" name="TextBox 59"/>
+          <p:cNvSpPr txBox="1"/>
+          <p:nvPr/>
+        </p:nvSpPr>
+        <p:spPr>
+          <a:xfrm>
+            <a:off x="6370167" y="4850892"/>
+            <a:ext cx="2293543" cy="274320"/>
+          </a:xfrm>
+          <a:prstGeom prst="rect">
+            <a:avLst/>
+          </a:prstGeom>
+          <a:noFill/>
+        </p:spPr>
+        <p:txBody>
+          <a:bodyPr wrap="square"/>
+          <a:lstStyle/>
+          <a:p>
+            <a:pPr algn="l">
+              <a:spcBef>
+                <a:spcPts val="0"/>
+              </a:spcBef>
+              <a:spcAft>
+                <a:spcPts val="0"/>
+              </a:spcAft>
+              <a:defRPr sz="900" b="0">
+                <a:solidFill>
+                  <a:srgbClr val="1A1A2E"/>
+                </a:solidFill>
+                <a:latin typeface="Arial"/>
+              </a:defRPr>
+            </a:pPr>
+            <a:r>
+              <a:t>• SMKI berbasis ISO 27001</a:t>
+            </a:r>
+          </a:p>
+        </p:txBody>
+      </p:sp>
+      <p:sp>
+        <p:nvSpPr>
+          <p:cNvPr id="61" name="TextBox 60"/>
+          <p:cNvSpPr txBox="1"/>
+          <p:nvPr/>
+        </p:nvSpPr>
+        <p:spPr>
+          <a:xfrm>
+            <a:off x="6370167" y="5143500"/>
+            <a:ext cx="2293543" cy="274320"/>
+          </a:xfrm>
+          <a:prstGeom prst="rect">
+            <a:avLst/>
+          </a:prstGeom>
+          <a:noFill/>
+        </p:spPr>
+        <p:txBody>
+          <a:bodyPr wrap="square"/>
+          <a:lstStyle/>
+          <a:p>
+            <a:pPr algn="l">
+              <a:spcBef>
+                <a:spcPts val="0"/>
+              </a:spcBef>
+              <a:spcAft>
+                <a:spcPts val="0"/>
+              </a:spcAft>
+              <a:defRPr sz="900" b="0">
+                <a:solidFill>
+                  <a:srgbClr val="1A1A2E"/>
+                </a:solidFill>
+                <a:latin typeface="Arial"/>
+              </a:defRPr>
+            </a:pPr>
+            <a:r>
+              <a:t>• BSSN — vulnerability assessment</a:t>
+            </a:r>
+          </a:p>
+        </p:txBody>
+      </p:sp>
+      <p:sp>
+        <p:nvSpPr>
+          <p:cNvPr id="62" name="TextBox 61"/>
+          <p:cNvSpPr txBox="1"/>
+          <p:nvPr/>
+        </p:nvSpPr>
+        <p:spPr>
+          <a:xfrm>
+            <a:off x="6370167" y="5436108"/>
+            <a:ext cx="2293543" cy="274320"/>
+          </a:xfrm>
+          <a:prstGeom prst="rect">
+            <a:avLst/>
+          </a:prstGeom>
+          <a:noFill/>
+        </p:spPr>
+        <p:txBody>
+          <a:bodyPr wrap="square"/>
+          <a:lstStyle/>
+          <a:p>
+            <a:pPr algn="l">
+              <a:spcBef>
+                <a:spcPts val="0"/>
+              </a:spcBef>
+              <a:spcAft>
+                <a:spcPts val="0"/>
+              </a:spcAft>
+              <a:defRPr sz="900" b="0">
+                <a:solidFill>
+                  <a:srgbClr val="1A1A2E"/>
+                </a:solidFill>
+                <a:latin typeface="Arial"/>
+              </a:defRPr>
+            </a:pPr>
+            <a:r>
+              <a:t>• CSIRT internal</a:t>
+            </a:r>
+          </a:p>
+        </p:txBody>
+      </p:sp>
+      <p:sp>
+        <p:nvSpPr>
+          <p:cNvPr id="63" name="Rounded Rectangle 62"/>
+          <p:cNvSpPr/>
+          <p:nvPr/>
+        </p:nvSpPr>
+        <p:spPr>
+          <a:xfrm>
+            <a:off x="9075191" y="3863339"/>
+            <a:ext cx="2567863" cy="2537460"/>
+          </a:xfrm>
+          <a:prstGeom prst="roundRect">
+            <a:avLst>
+              <a:gd name="adj" fmla="val 4000"/>
+            </a:avLst>
+          </a:prstGeom>
+          <a:solidFill>
+            <a:srgbClr val="FFFFFF"/>
+          </a:solidFill>
+          <a:ln w="6350">
+            <a:solidFill>
+              <a:srgbClr val="E8EDF5"/>
+            </a:solidFill>
+          </a:ln>
+        </p:spPr>
+        <p:style>
+          <a:lnRef idx="1">
+            <a:schemeClr val="accent1"/>
+          </a:lnRef>
+          <a:fillRef idx="3">
+            <a:schemeClr val="accent1"/>
+          </a:fillRef>
+          <a:effectRef idx="2">
+            <a:schemeClr val="accent1"/>
+          </a:effectRef>
+          <a:fontRef idx="minor">
+            <a:schemeClr val="lt1"/>
+          </a:fontRef>
+        </p:style>
+        <p:txBody>
+          <a:bodyPr rtlCol="0" anchor="ctr"/>
+          <a:lstStyle/>
+          <a:p>
+            <a:pPr algn="ctr"/>
+          </a:p>
+        </p:txBody>
+      </p:sp>
+      <p:sp>
+        <p:nvSpPr>
+          <p:cNvPr id="64" name="Rectangle 63"/>
+          <p:cNvSpPr/>
+          <p:nvPr/>
+        </p:nvSpPr>
+        <p:spPr>
+          <a:xfrm>
+            <a:off x="9075191" y="3863339"/>
+            <a:ext cx="45720" cy="2537460"/>
+          </a:xfrm>
+          <a:prstGeom prst="rect">
+            <a:avLst/>
+          </a:prstGeom>
+          <a:solidFill>
+            <a:srgbClr val="1B3A6B"/>
+          </a:solidFill>
+          <a:ln>
+            <a:noFill/>
+          </a:ln>
+        </p:spPr>
+        <p:style>
+          <a:lnRef idx="1">
+            <a:schemeClr val="accent1"/>
+          </a:lnRef>
+          <a:fillRef idx="3">
+            <a:schemeClr val="accent1"/>
+          </a:fillRef>
+          <a:effectRef idx="2">
+            <a:schemeClr val="accent1"/>
+          </a:effectRef>
+          <a:fontRef idx="minor">
+            <a:schemeClr val="lt1"/>
+          </a:fontRef>
+        </p:style>
+        <p:txBody>
+          <a:bodyPr rtlCol="0" anchor="ctr"/>
+          <a:lstStyle/>
+          <a:p>
+            <a:pPr algn="ctr"/>
+          </a:p>
+        </p:txBody>
+      </p:sp>
+      <p:sp>
+        <p:nvSpPr>
+          <p:cNvPr id="65" name="Oval 64"/>
+          <p:cNvSpPr/>
+          <p:nvPr/>
+        </p:nvSpPr>
+        <p:spPr>
+          <a:xfrm>
+            <a:off x="9212351" y="4000500"/>
+            <a:ext cx="384048" cy="384048"/>
+          </a:xfrm>
+          <a:prstGeom prst="ellipse">
+            <a:avLst/>
+          </a:prstGeom>
+          <a:solidFill>
+            <a:srgbClr val="1B3A6B"/>
+          </a:solidFill>
+          <a:ln>
+            <a:noFill/>
+          </a:ln>
+        </p:spPr>
+        <p:style>
+          <a:lnRef idx="1">
+            <a:schemeClr val="accent1"/>
+          </a:lnRef>
+          <a:fillRef idx="3">
+            <a:schemeClr val="accent1"/>
+          </a:fillRef>
+          <a:effectRef idx="2">
+            <a:schemeClr val="accent1"/>
+          </a:effectRef>
+          <a:fontRef idx="minor">
+            <a:schemeClr val="lt1"/>
+          </a:fontRef>
+        </p:style>
+        <p:txBody>
+          <a:bodyPr rtlCol="0" anchor="ctr"/>
+          <a:lstStyle/>
+          <a:p>
+            <a:pPr algn="ctr"/>
+          </a:p>
+        </p:txBody>
+      </p:sp>
+      <p:sp>
+        <p:nvSpPr>
+          <p:cNvPr id="66" name="TextBox 65"/>
+          <p:cNvSpPr txBox="1"/>
+          <p:nvPr/>
+        </p:nvSpPr>
+        <p:spPr>
+          <a:xfrm>
+            <a:off x="9289161" y="4059021"/>
+            <a:ext cx="230428" cy="230428"/>
+          </a:xfrm>
+          <a:prstGeom prst="rect">
+            <a:avLst/>
+          </a:prstGeom>
+          <a:noFill/>
+        </p:spPr>
+        <p:txBody>
+          <a:bodyPr wrap="square"/>
+          <a:lstStyle/>
+          <a:p>
+            <a:pPr algn="ctr">
+              <a:spcBef>
+                <a:spcPts val="0"/>
+              </a:spcBef>
+              <a:spcAft>
+                <a:spcPts val="0"/>
+              </a:spcAft>
+              <a:defRPr sz="1200" b="0">
+                <a:solidFill>
+                  <a:srgbClr val="FFFFFF"/>
+                </a:solidFill>
+                <a:latin typeface="Arial"/>
               </a:defRPr>
             </a:pPr>
             <a:r>
@@ -17173,14 +18664,14 @@
       </p:sp>
       <p:sp>
         <p:nvSpPr>
-          <p:cNvPr id="51" name="TextBox 50"/>
-          <p:cNvSpPr txBox="1"/>
-          <p:nvPr/>
-        </p:nvSpPr>
-        <p:spPr>
-          <a:xfrm>
-            <a:off x="8264956" y="4503420"/>
-            <a:ext cx="3240938" cy="274320"/>
+          <p:cNvPr id="67" name="TextBox 66"/>
+          <p:cNvSpPr txBox="1"/>
+          <p:nvPr/>
+        </p:nvSpPr>
+        <p:spPr>
+          <a:xfrm>
+            <a:off x="9212351" y="4503420"/>
+            <a:ext cx="2293543" cy="274320"/>
           </a:xfrm>
           <a:prstGeom prst="rect">
             <a:avLst/>
@@ -17200,9 +18691,9 @@
               </a:spcAft>
               <a:defRPr sz="1300" b="1">
                 <a:solidFill>
-                  <a:srgbClr val="0B7C72"/>
-                </a:solidFill>
-                <a:latin typeface="Calibri"/>
+                  <a:srgbClr val="1B3A6B"/>
+                </a:solidFill>
+                <a:latin typeface="Arial"/>
               </a:defRPr>
             </a:pPr>
             <a:r>
@@ -17213,14 +18704,14 @@
       </p:sp>
       <p:sp>
         <p:nvSpPr>
-          <p:cNvPr id="52" name="TextBox 51"/>
-          <p:cNvSpPr txBox="1"/>
-          <p:nvPr/>
-        </p:nvSpPr>
-        <p:spPr>
-          <a:xfrm>
-            <a:off x="8264956" y="4850892"/>
-            <a:ext cx="3240938" cy="274320"/>
+          <p:cNvPr id="68" name="TextBox 67"/>
+          <p:cNvSpPr txBox="1"/>
+          <p:nvPr/>
+        </p:nvSpPr>
+        <p:spPr>
+          <a:xfrm>
+            <a:off x="9212351" y="4850892"/>
+            <a:ext cx="2293543" cy="274320"/>
           </a:xfrm>
           <a:prstGeom prst="rect">
             <a:avLst/>
@@ -17242,7 +18733,7 @@
                 <a:solidFill>
                   <a:srgbClr val="1A1A2E"/>
                 </a:solidFill>
-                <a:latin typeface="Calibri"/>
+                <a:latin typeface="Arial"/>
               </a:defRPr>
             </a:pPr>
             <a:r>
@@ -17253,14 +18744,14 @@
       </p:sp>
       <p:sp>
         <p:nvSpPr>
-          <p:cNvPr id="53" name="TextBox 52"/>
-          <p:cNvSpPr txBox="1"/>
-          <p:nvPr/>
-        </p:nvSpPr>
-        <p:spPr>
-          <a:xfrm>
-            <a:off x="8264956" y="5143500"/>
-            <a:ext cx="3240938" cy="274320"/>
+          <p:cNvPr id="69" name="TextBox 68"/>
+          <p:cNvSpPr txBox="1"/>
+          <p:nvPr/>
+        </p:nvSpPr>
+        <p:spPr>
+          <a:xfrm>
+            <a:off x="9212351" y="5143500"/>
+            <a:ext cx="2293543" cy="274320"/>
           </a:xfrm>
           <a:prstGeom prst="rect">
             <a:avLst/>
@@ -17282,7 +18773,7 @@
                 <a:solidFill>
                   <a:srgbClr val="1A1A2E"/>
                 </a:solidFill>
-                <a:latin typeface="Calibri"/>
+                <a:latin typeface="Arial"/>
               </a:defRPr>
             </a:pPr>
             <a:r>
@@ -17293,14 +18784,14 @@
       </p:sp>
       <p:sp>
         <p:nvSpPr>
-          <p:cNvPr id="54" name="TextBox 53"/>
-          <p:cNvSpPr txBox="1"/>
-          <p:nvPr/>
-        </p:nvSpPr>
-        <p:spPr>
-          <a:xfrm>
-            <a:off x="8264956" y="5436108"/>
-            <a:ext cx="3240938" cy="274320"/>
+          <p:cNvPr id="70" name="TextBox 69"/>
+          <p:cNvSpPr txBox="1"/>
+          <p:nvPr/>
+        </p:nvSpPr>
+        <p:spPr>
+          <a:xfrm>
+            <a:off x="9212351" y="5436108"/>
+            <a:ext cx="2293543" cy="274320"/>
           </a:xfrm>
           <a:prstGeom prst="rect">
             <a:avLst/>
@@ -17322,18 +18813,18 @@
                 <a:solidFill>
                   <a:srgbClr val="1A1A2E"/>
                 </a:solidFill>
-                <a:latin typeface="Calibri"/>
-              </a:defRPr>
-            </a:pPr>
-            <a:r>
-              <a:t>• Terintegrasi &amp; tepercaya</a:t>
-            </a:r>
-          </a:p>
-        </p:txBody>
-      </p:sp>
-      <p:sp>
-        <p:nvSpPr>
-          <p:cNvPr id="55" name="Rectangle 54"/>
+                <a:latin typeface="Arial"/>
+              </a:defRPr>
+            </a:pPr>
+            <a:r>
+              <a:t>• Terintegrasi penuh — satu pintu</a:t>
+            </a:r>
+          </a:p>
+        </p:txBody>
+      </p:sp>
+      <p:sp>
+        <p:nvSpPr>
+          <p:cNvPr id="71" name="Rectangle 70"/>
           <p:cNvSpPr/>
           <p:nvPr/>
         </p:nvSpPr>
@@ -17376,7 +18867,7 @@
       </p:sp>
       <p:sp>
         <p:nvSpPr>
-          <p:cNvPr id="56" name="TextBox 55"/>
+          <p:cNvPr id="72" name="TextBox 71"/>
           <p:cNvSpPr txBox="1"/>
           <p:nvPr/>
         </p:nvSpPr>
@@ -17405,18 +18896,18 @@
                 <a:solidFill>
                   <a:srgbClr val="64748B"/>
                 </a:solidFill>
-                <a:latin typeface="Calibri"/>
-              </a:defRPr>
-            </a:pPr>
-            <a:r>
-              <a:t>Penerapan Sistem Pemerintahan Berbasis Elektronik (SPBE)</a:t>
-            </a:r>
-          </a:p>
-        </p:txBody>
-      </p:sp>
-      <p:sp>
-        <p:nvSpPr>
-          <p:cNvPr id="57" name="TextBox 56"/>
+                <a:latin typeface="Arial"/>
+              </a:defRPr>
+            </a:pPr>
+            <a:r>
+              <a:t>Sumber: Perpres No. 95/2018, Perpres No. 132/2022, &amp; Pedoman SPBE Kemenpan-RB</a:t>
+            </a:r>
+          </a:p>
+        </p:txBody>
+      </p:sp>
+      <p:sp>
+        <p:nvSpPr>
+          <p:cNvPr id="73" name="TextBox 72"/>
           <p:cNvSpPr txBox="1"/>
           <p:nvPr/>
         </p:nvSpPr>
@@ -17445,7 +18936,7 @@
                 <a:solidFill>
                   <a:srgbClr val="64748B"/>
                 </a:solidFill>
-                <a:latin typeface="Calibri"/>
+                <a:latin typeface="Arial"/>
               </a:defRPr>
             </a:pPr>
             <a:r>
@@ -17726,15 +19217,15 @@
                 <a:solidFill>
                   <a:srgbClr val="FFFFFF"/>
                 </a:solidFill>
-                <a:latin typeface="Calibri"/>
-              </a:defRPr>
-            </a:pPr>
-            <a:r>
-              <a:t>BAB 3</a:t>
+                <a:latin typeface="Arial"/>
+              </a:defRPr>
+            </a:pPr>
+            <a:r>
+              <a:t>4 DOMAIN</a:t>
             </a:r>
             <a:br/>
             <a:r>
-              <a:t>4 DOMAIN UTAMA EVALUASI SPBE</a:t>
+              <a:t>EVALUASI SPBE</a:t>
             </a:r>
           </a:p>
         </p:txBody>
@@ -17770,11 +19261,11 @@
                 <a:solidFill>
                   <a:srgbClr val="C8962E"/>
                 </a:solidFill>
-                <a:latin typeface="Calibri"/>
-              </a:defRPr>
-            </a:pPr>
-            <a:r>
-              <a:t>Kebijakan, Tata Kelola, Manajemen, dan Layanan — Indikator Tingkat Kematangan</a:t>
+                <a:latin typeface="Arial"/>
+              </a:defRPr>
+            </a:pPr>
+            <a:r>
+              <a:t>Kebijakan → Tata Kelola → Manajemen → Layanan</a:t>
             </a:r>
           </a:p>
         </p:txBody>
@@ -17810,11 +19301,11 @@
                 <a:solidFill>
                   <a:srgbClr val="64748B"/>
                 </a:solidFill>
-                <a:latin typeface="Calibri"/>
-              </a:defRPr>
-            </a:pPr>
-            <a:r>
-              <a:t>Maturity Index SPBE</a:t>
+                <a:latin typeface="Arial"/>
+              </a:defRPr>
+            </a:pPr>
+            <a:r>
+              <a:t>Indikator Tingkat Kematangan (Maturity Index)</a:t>
             </a:r>
           </a:p>
         </p:txBody>
@@ -18048,11 +19539,11 @@
                 <a:solidFill>
                   <a:srgbClr val="FFFFFF"/>
                 </a:solidFill>
-                <a:latin typeface="Georgia"/>
-              </a:defRPr>
-            </a:pPr>
-            <a:r>
-              <a:t>Empat Domain Evaluasi Menentukan Tingkat Kematangan SPBE Instansi Anda</a:t>
+                <a:latin typeface="Arial Black"/>
+              </a:defRPr>
+            </a:pPr>
+            <a:r>
+              <a:t>Empat Domain Evaluasi Menentukan Tingkat Kematangan SPBE Instansi</a:t>
             </a:r>
           </a:p>
         </p:txBody>
@@ -18088,7 +19579,7 @@
                 <a:solidFill>
                   <a:srgbClr val="64748B"/>
                 </a:solidFill>
-                <a:latin typeface="Calibri"/>
+                <a:latin typeface="Arial"/>
               </a:defRPr>
             </a:pPr>
             <a:r>
@@ -18131,7 +19622,7 @@
                           <a:solidFill>
                             <a:srgbClr val="FFFFFF"/>
                           </a:solidFill>
-                          <a:latin typeface="Calibri"/>
+                          <a:latin typeface="Arial"/>
                         </a:defRPr>
                       </a:pPr>
                       <a:r>
@@ -18155,7 +19646,7 @@
                           <a:solidFill>
                             <a:srgbClr val="FFFFFF"/>
                           </a:solidFill>
-                          <a:latin typeface="Calibri"/>
+                          <a:latin typeface="Arial"/>
                         </a:defRPr>
                       </a:pPr>
                       <a:r>
@@ -18179,7 +19670,7 @@
                           <a:solidFill>
                             <a:srgbClr val="FFFFFF"/>
                           </a:solidFill>
-                          <a:latin typeface="Calibri"/>
+                          <a:latin typeface="Arial"/>
                         </a:defRPr>
                       </a:pPr>
                       <a:r>
@@ -18205,7 +19696,7 @@
                           <a:solidFill>
                             <a:srgbClr val="1A1A2E"/>
                           </a:solidFill>
-                          <a:latin typeface="Calibri"/>
+                          <a:latin typeface="Arial"/>
                         </a:defRPr>
                       </a:pPr>
                       <a:r>
@@ -18229,11 +19720,11 @@
                           <a:solidFill>
                             <a:srgbClr val="1A1A2E"/>
                           </a:solidFill>
-                          <a:latin typeface="Calibri"/>
+                          <a:latin typeface="Arial"/>
                         </a:defRPr>
                       </a:pPr>
                       <a:r>
-                        <a:t>Regulasi, pedoman, dan SK formal di internal instansi</a:t>
+                        <a:t>Regulasi, pedoman, dan SK formal internal instansi</a:t>
                       </a:r>
                     </a:p>
                   </a:txBody>
@@ -18253,11 +19744,11 @@
                           <a:solidFill>
                             <a:srgbClr val="1A1A2E"/>
                           </a:solidFill>
-                          <a:latin typeface="Calibri"/>
+                          <a:latin typeface="Arial"/>
                         </a:defRPr>
                       </a:pPr>
                       <a:r>
-                        <a:t>Perbup/Perwali/Perka terkait Tim Koordinasi &amp; Tata Kelola TIK</a:t>
+                        <a:t>Perbup/Perwali/Perka Tim Koordinasi &amp; Tata Kelola TIK</a:t>
                       </a:r>
                     </a:p>
                   </a:txBody>
@@ -18279,7 +19770,7 @@
                           <a:solidFill>
                             <a:srgbClr val="1A1A2E"/>
                           </a:solidFill>
-                          <a:latin typeface="Calibri"/>
+                          <a:latin typeface="Arial"/>
                         </a:defRPr>
                       </a:pPr>
                       <a:r>
@@ -18303,11 +19794,11 @@
                           <a:solidFill>
                             <a:srgbClr val="1A1A2E"/>
                           </a:solidFill>
-                          <a:latin typeface="Calibri"/>
+                          <a:latin typeface="Arial"/>
                         </a:defRPr>
                       </a:pPr>
                       <a:r>
-                        <a:t>Perencanaan arsitektur, peta rencana, dan integrasi sistem</a:t>
+                        <a:t>Perencanaan arsitektur, peta rencana, integrasi sistem</a:t>
                       </a:r>
                     </a:p>
                   </a:txBody>
@@ -18327,11 +19818,11 @@
                           <a:solidFill>
                             <a:srgbClr val="1A1A2E"/>
                           </a:solidFill>
-                          <a:latin typeface="Calibri"/>
+                          <a:latin typeface="Arial"/>
                         </a:defRPr>
                       </a:pPr>
                       <a:r>
-                        <a:t>Dokumen Arsitektur SPBE &amp; Peta Rencana Instansi 5 tahun</a:t>
+                        <a:t>Dokumen Arsitektur SPBE &amp; Peta Rencana 5 tahun</a:t>
                       </a:r>
                     </a:p>
                   </a:txBody>
@@ -18353,7 +19844,7 @@
                           <a:solidFill>
                             <a:srgbClr val="1A1A2E"/>
                           </a:solidFill>
-                          <a:latin typeface="Calibri"/>
+                          <a:latin typeface="Arial"/>
                         </a:defRPr>
                       </a:pPr>
                       <a:r>
@@ -18377,11 +19868,11 @@
                           <a:solidFill>
                             <a:srgbClr val="1A1A2E"/>
                           </a:solidFill>
-                          <a:latin typeface="Calibri"/>
+                          <a:latin typeface="Arial"/>
                         </a:defRPr>
                       </a:pPr>
                       <a:r>
-                        <a:t>Pengelolaan risiko, data, keamanan, SDM, dan aset TIK</a:t>
+                        <a:t>Pengelolaan risiko, data, keamanan, SDM, aset TIK</a:t>
                       </a:r>
                     </a:p>
                   </a:txBody>
@@ -18401,7 +19892,7 @@
                           <a:solidFill>
                             <a:srgbClr val="1A1A2E"/>
                           </a:solidFill>
-                          <a:latin typeface="Calibri"/>
+                          <a:latin typeface="Arial"/>
                         </a:defRPr>
                       </a:pPr>
                       <a:r>
@@ -18427,7 +19918,7 @@
                           <a:solidFill>
                             <a:srgbClr val="1A1A2E"/>
                           </a:solidFill>
-                          <a:latin typeface="Calibri"/>
+                          <a:latin typeface="Arial"/>
                         </a:defRPr>
                       </a:pPr>
                       <a:r>
@@ -18451,7 +19942,7 @@
                           <a:solidFill>
                             <a:srgbClr val="1A1A2E"/>
                           </a:solidFill>
-                          <a:latin typeface="Calibri"/>
+                          <a:latin typeface="Arial"/>
                         </a:defRPr>
                       </a:pPr>
                       <a:r>
@@ -18475,11 +19966,11 @@
                           <a:solidFill>
                             <a:srgbClr val="1A1A2E"/>
                           </a:solidFill>
-                          <a:latin typeface="Calibri"/>
+                          <a:latin typeface="Arial"/>
                         </a:defRPr>
                       </a:pPr>
                       <a:r>
-                        <a:t>Aplikasi saling terintegrasi (bukan platform terpisah-pisah)</a:t>
+                        <a:t>Aplikasi saling terintegrasi — bukan platform terpisah</a:t>
                       </a:r>
                     </a:p>
                   </a:txBody>
@@ -18568,11 +20059,11 @@
                 <a:solidFill>
                   <a:srgbClr val="64748B"/>
                 </a:solidFill>
-                <a:latin typeface="Calibri"/>
-              </a:defRPr>
-            </a:pPr>
-            <a:r>
-              <a:t>Penerapan Sistem Pemerintahan Berbasis Elektronik (SPBE)</a:t>
+                <a:latin typeface="Arial"/>
+              </a:defRPr>
+            </a:pPr>
+            <a:r>
+              <a:t>Sumber: Perpres No. 95/2018, Perpres No. 132/2022, &amp; Pedoman SPBE Kemenpan-RB</a:t>
             </a:r>
           </a:p>
         </p:txBody>
@@ -18608,7 +20099,7 @@
                 <a:solidFill>
                   <a:srgbClr val="64748B"/>
                 </a:solidFill>
-                <a:latin typeface="Calibri"/>
+                <a:latin typeface="Arial"/>
               </a:defRPr>
             </a:pPr>
             <a:r>

--- a/SPBE_Transformasi_Birokrasi.pptx
+++ b/SPBE_Transformasi_Birokrasi.pptx
@@ -3357,7 +3357,7 @@
                 <a:solidFill>
                   <a:srgbClr val="C8962E"/>
                 </a:solidFill>
-                <a:latin typeface="Arial"/>
+                <a:latin typeface="Calibri"/>
               </a:defRPr>
             </a:pPr>
             <a:r>
@@ -3397,11 +3397,11 @@
                 <a:solidFill>
                   <a:srgbClr val="FFFFFF"/>
                 </a:solidFill>
-                <a:latin typeface="Arial"/>
+                <a:latin typeface="Calibri"/>
               </a:defRPr>
             </a:pPr>
             <a:r>
-              <a:t>TRANSFORMASI BIROKRASI DIGITAL</a:t>
+              <a:t>INDONESIA</a:t>
             </a:r>
           </a:p>
         </p:txBody>
@@ -3437,11 +3437,11 @@
                 <a:solidFill>
                   <a:srgbClr val="FFFFFF"/>
                 </a:solidFill>
-                <a:latin typeface="Arial"/>
+                <a:latin typeface="Calibri"/>
               </a:defRPr>
             </a:pPr>
             <a:r>
-              <a:t>Penerapan SPBE</a:t>
+              <a:t>PENERAPAN SPBE</a:t>
             </a:r>
           </a:p>
         </p:txBody>
@@ -3477,11 +3477,11 @@
                 <a:solidFill>
                   <a:srgbClr val="C8962E"/>
                 </a:solidFill>
-                <a:latin typeface="Arial"/>
+                <a:latin typeface="Calibri"/>
               </a:defRPr>
             </a:pPr>
             <a:r>
-              <a:t>Perpres No. 95/2018 — Perpres No. 132/2022</a:t>
+              <a:t>Perpres No. 95/2018 &amp; Perpres No. 132/2022</a:t>
             </a:r>
           </a:p>
         </p:txBody>
@@ -3517,19 +3517,19 @@
                 <a:solidFill>
                   <a:srgbClr val="FFFFFF"/>
                 </a:solidFill>
-                <a:latin typeface="Arial"/>
+                <a:latin typeface="Calibri"/>
               </a:defRPr>
             </a:pPr>
             <a:r>
-              <a:t>Mewujudkan Birokrasi</a:t>
+              <a:t>Transformasi</a:t>
             </a:r>
             <a:br/>
             <a:r>
-              <a:t>Terintegrasi, Efisien,</a:t>
+              <a:t>Birokrasi Digital</a:t>
             </a:r>
             <a:br/>
             <a:r>
-              <a:t>Aman, dan Tepercaya</a:t>
+              <a:t>Terintegrasi</a:t>
             </a:r>
           </a:p>
         </p:txBody>
@@ -3612,11 +3612,11 @@
                 <a:solidFill>
                   <a:srgbClr val="E8EDF5"/>
                 </a:solidFill>
-                <a:latin typeface="Arial"/>
+                <a:latin typeface="Calibri"/>
               </a:defRPr>
             </a:pPr>
             <a:r>
-              <a:t>Kementerian/Lembaga/Pemda · 2025</a:t>
+              <a:t>SPBE · 2024</a:t>
             </a:r>
           </a:p>
         </p:txBody>
@@ -3652,11 +3652,11 @@
                 <a:solidFill>
                   <a:srgbClr val="64748B"/>
                 </a:solidFill>
-                <a:latin typeface="Arial"/>
+                <a:latin typeface="Calibri"/>
               </a:defRPr>
             </a:pPr>
             <a:r>
-              <a:t>Arsitektur &amp; Peta Rencana SPBE</a:t>
+              <a:t>Mewujudkan Birokrasi Efisien, Aman &amp; Tepercaya</a:t>
             </a:r>
           </a:p>
         </p:txBody>
@@ -3976,15 +3976,15 @@
                 <a:solidFill>
                   <a:srgbClr val="FFFFFF"/>
                 </a:solidFill>
-                <a:latin typeface="Arial"/>
+                <a:latin typeface="Calibri"/>
               </a:defRPr>
             </a:pPr>
             <a:r>
-              <a:t>6 LANGKAH</a:t>
+              <a:t>BAB 4</a:t>
             </a:r>
             <a:br/>
             <a:r>
-              <a:t>PENERAPAN SPBE</a:t>
+              <a:t>6 LANGKAH PENERAPAN SPBE</a:t>
             </a:r>
           </a:p>
         </p:txBody>
@@ -4020,7 +4020,7 @@
                 <a:solidFill>
                   <a:srgbClr val="C8962E"/>
                 </a:solidFill>
-                <a:latin typeface="Arial"/>
+                <a:latin typeface="Calibri"/>
               </a:defRPr>
             </a:pPr>
             <a:r>
@@ -4060,11 +4060,11 @@
                 <a:solidFill>
                   <a:srgbClr val="64748B"/>
                 </a:solidFill>
-                <a:latin typeface="Arial"/>
+                <a:latin typeface="Calibri"/>
               </a:defRPr>
             </a:pPr>
             <a:r>
-              <a:t>Urutan Wajib — Jangan Terjebak Pemborosan Anggaran</a:t>
+              <a:t>Langkah Demi Langkah Implementasi</a:t>
             </a:r>
           </a:p>
         </p:txBody>
@@ -4298,7 +4298,7 @@
                 <a:solidFill>
                   <a:srgbClr val="FFFFFF"/>
                 </a:solidFill>
-                <a:latin typeface="Arial Black"/>
+                <a:latin typeface="Georgia"/>
               </a:defRPr>
             </a:pPr>
             <a:r>
@@ -4338,7 +4338,7 @@
                 <a:solidFill>
                   <a:srgbClr val="64748B"/>
                 </a:solidFill>
-                <a:latin typeface="Arial"/>
+                <a:latin typeface="Calibri"/>
               </a:defRPr>
             </a:pPr>
             <a:r>
@@ -4511,7 +4511,7 @@
                 <a:solidFill>
                   <a:srgbClr val="FFFFFF"/>
                 </a:solidFill>
-                <a:latin typeface="Arial"/>
+                <a:latin typeface="Calibri"/>
               </a:defRPr>
             </a:pPr>
             <a:r>
@@ -4551,7 +4551,7 @@
                 <a:solidFill>
                   <a:srgbClr val="2563EB"/>
                 </a:solidFill>
-                <a:latin typeface="Arial"/>
+                <a:latin typeface="Calibri"/>
               </a:defRPr>
             </a:pPr>
             <a:r>
@@ -4591,7 +4591,7 @@
                 <a:solidFill>
                   <a:srgbClr val="8899B0"/>
                 </a:solidFill>
-                <a:latin typeface="Arial"/>
+                <a:latin typeface="Calibri"/>
               </a:defRPr>
             </a:pPr>
             <a:r>
@@ -4639,7 +4639,7 @@
                 <a:solidFill>
                   <a:srgbClr val="C8962E"/>
                 </a:solidFill>
-                <a:latin typeface="Arial"/>
+                <a:latin typeface="Calibri"/>
               </a:defRPr>
             </a:pPr>
             <a:r>
@@ -4812,7 +4812,7 @@
                 <a:solidFill>
                   <a:srgbClr val="FFFFFF"/>
                 </a:solidFill>
-                <a:latin typeface="Arial"/>
+                <a:latin typeface="Calibri"/>
               </a:defRPr>
             </a:pPr>
             <a:r>
@@ -4852,7 +4852,7 @@
                 <a:solidFill>
                   <a:srgbClr val="0B7C72"/>
                 </a:solidFill>
-                <a:latin typeface="Arial"/>
+                <a:latin typeface="Calibri"/>
               </a:defRPr>
             </a:pPr>
             <a:r>
@@ -4892,7 +4892,7 @@
                 <a:solidFill>
                   <a:srgbClr val="8899B0"/>
                 </a:solidFill>
-                <a:latin typeface="Arial"/>
+                <a:latin typeface="Calibri"/>
               </a:defRPr>
             </a:pPr>
             <a:r>
@@ -4940,7 +4940,7 @@
                 <a:solidFill>
                   <a:srgbClr val="C8962E"/>
                 </a:solidFill>
-                <a:latin typeface="Arial"/>
+                <a:latin typeface="Calibri"/>
               </a:defRPr>
             </a:pPr>
             <a:r>
@@ -5113,7 +5113,7 @@
                 <a:solidFill>
                   <a:srgbClr val="FFFFFF"/>
                 </a:solidFill>
-                <a:latin typeface="Arial"/>
+                <a:latin typeface="Calibri"/>
               </a:defRPr>
             </a:pPr>
             <a:r>
@@ -5153,7 +5153,7 @@
                 <a:solidFill>
                   <a:srgbClr val="A0522D"/>
                 </a:solidFill>
-                <a:latin typeface="Arial"/>
+                <a:latin typeface="Calibri"/>
               </a:defRPr>
             </a:pPr>
             <a:r>
@@ -5193,7 +5193,7 @@
                 <a:solidFill>
                   <a:srgbClr val="8899B0"/>
                 </a:solidFill>
-                <a:latin typeface="Arial"/>
+                <a:latin typeface="Calibri"/>
               </a:defRPr>
             </a:pPr>
             <a:r>
@@ -5241,7 +5241,7 @@
                 <a:solidFill>
                   <a:srgbClr val="C8962E"/>
                 </a:solidFill>
-                <a:latin typeface="Arial"/>
+                <a:latin typeface="Calibri"/>
               </a:defRPr>
             </a:pPr>
             <a:r>
@@ -5414,7 +5414,7 @@
                 <a:solidFill>
                   <a:srgbClr val="FFFFFF"/>
                 </a:solidFill>
-                <a:latin typeface="Arial"/>
+                <a:latin typeface="Calibri"/>
               </a:defRPr>
             </a:pPr>
             <a:r>
@@ -5454,7 +5454,7 @@
                 <a:solidFill>
                   <a:srgbClr val="1B3A6B"/>
                 </a:solidFill>
-                <a:latin typeface="Arial"/>
+                <a:latin typeface="Calibri"/>
               </a:defRPr>
             </a:pPr>
             <a:r>
@@ -5494,7 +5494,7 @@
                 <a:solidFill>
                   <a:srgbClr val="8899B0"/>
                 </a:solidFill>
-                <a:latin typeface="Arial"/>
+                <a:latin typeface="Calibri"/>
               </a:defRPr>
             </a:pPr>
             <a:r>
@@ -5542,7 +5542,7 @@
                 <a:solidFill>
                   <a:srgbClr val="C8962E"/>
                 </a:solidFill>
-                <a:latin typeface="Arial"/>
+                <a:latin typeface="Calibri"/>
               </a:defRPr>
             </a:pPr>
             <a:r>
@@ -5715,7 +5715,7 @@
                 <a:solidFill>
                   <a:srgbClr val="FFFFFF"/>
                 </a:solidFill>
-                <a:latin typeface="Arial"/>
+                <a:latin typeface="Calibri"/>
               </a:defRPr>
             </a:pPr>
             <a:r>
@@ -5755,7 +5755,7 @@
                 <a:solidFill>
                   <a:srgbClr val="2563EB"/>
                 </a:solidFill>
-                <a:latin typeface="Arial"/>
+                <a:latin typeface="Calibri"/>
               </a:defRPr>
             </a:pPr>
             <a:r>
@@ -5795,7 +5795,7 @@
                 <a:solidFill>
                   <a:srgbClr val="8899B0"/>
                 </a:solidFill>
-                <a:latin typeface="Arial"/>
+                <a:latin typeface="Calibri"/>
               </a:defRPr>
             </a:pPr>
             <a:r>
@@ -5843,7 +5843,7 @@
                 <a:solidFill>
                   <a:srgbClr val="C8962E"/>
                 </a:solidFill>
-                <a:latin typeface="Arial"/>
+                <a:latin typeface="Calibri"/>
               </a:defRPr>
             </a:pPr>
             <a:r>
@@ -6016,7 +6016,7 @@
                 <a:solidFill>
                   <a:srgbClr val="FFFFFF"/>
                 </a:solidFill>
-                <a:latin typeface="Arial"/>
+                <a:latin typeface="Calibri"/>
               </a:defRPr>
             </a:pPr>
             <a:r>
@@ -6056,7 +6056,7 @@
                 <a:solidFill>
                   <a:srgbClr val="0B7C72"/>
                 </a:solidFill>
-                <a:latin typeface="Arial"/>
+                <a:latin typeface="Calibri"/>
               </a:defRPr>
             </a:pPr>
             <a:r>
@@ -6096,7 +6096,7 @@
                 <a:solidFill>
                   <a:srgbClr val="8899B0"/>
                 </a:solidFill>
-                <a:latin typeface="Arial"/>
+                <a:latin typeface="Calibri"/>
               </a:defRPr>
             </a:pPr>
             <a:r>
@@ -6187,11 +6187,11 @@
                 <a:solidFill>
                   <a:srgbClr val="64748B"/>
                 </a:solidFill>
-                <a:latin typeface="Arial"/>
+                <a:latin typeface="Calibri"/>
               </a:defRPr>
             </a:pPr>
             <a:r>
-              <a:t>Sumber: Perpres No. 95/2018, Perpres No. 132/2022, &amp; Pedoman SPBE Kemenpan-RB</a:t>
+              <a:t>Penerapan Sistem Pemerintahan Berbasis Elektronik (SPBE)</a:t>
             </a:r>
           </a:p>
         </p:txBody>
@@ -6227,7 +6227,7 @@
                 <a:solidFill>
                   <a:srgbClr val="64748B"/>
                 </a:solidFill>
-                <a:latin typeface="Arial"/>
+                <a:latin typeface="Calibri"/>
               </a:defRPr>
             </a:pPr>
             <a:r>
@@ -6422,11 +6422,11 @@
                 <a:solidFill>
                   <a:srgbClr val="FFFFFF"/>
                 </a:solidFill>
-                <a:latin typeface="Arial Black"/>
+                <a:latin typeface="Georgia"/>
               </a:defRPr>
             </a:pPr>
             <a:r>
-              <a:t>Fondasi, Perencanaan, dan Infrastruktur — Tiga Langkah Awal yang Menentukan Keberhasilan</a:t>
+              <a:t>Fondasi, Perencanaan, dan Infrastruktur — Tiga Langkah Awal Menentukan Keberhasilan</a:t>
             </a:r>
           </a:p>
         </p:txBody>
@@ -6462,7 +6462,7 @@
                 <a:solidFill>
                   <a:srgbClr val="64748B"/>
                 </a:solidFill>
-                <a:latin typeface="Arial"/>
+                <a:latin typeface="Calibri"/>
               </a:defRPr>
             </a:pPr>
             <a:r>
@@ -6635,7 +6635,7 @@
                 <a:solidFill>
                   <a:srgbClr val="FFFFFF"/>
                 </a:solidFill>
-                <a:latin typeface="Arial"/>
+                <a:latin typeface="Calibri"/>
               </a:defRPr>
             </a:pPr>
             <a:r>
@@ -6675,7 +6675,7 @@
                 <a:solidFill>
                   <a:srgbClr val="2563EB"/>
                 </a:solidFill>
-                <a:latin typeface="Arial"/>
+                <a:latin typeface="Calibri"/>
               </a:defRPr>
             </a:pPr>
             <a:r>
@@ -6693,7 +6693,7 @@
         <p:spPr>
           <a:xfrm>
             <a:off x="685800" y="2039112"/>
-            <a:ext cx="3240938" cy="274320"/>
+            <a:ext cx="3240938" cy="338328"/>
           </a:xfrm>
           <a:prstGeom prst="rect">
             <a:avLst/>
@@ -6715,11 +6715,11 @@
                 <a:solidFill>
                   <a:srgbClr val="1A1A2E"/>
                 </a:solidFill>
-                <a:latin typeface="Arial"/>
+                <a:latin typeface="Calibri"/>
               </a:defRPr>
             </a:pPr>
             <a:r>
-              <a:t>• SK Kepala Daerah/Menteri</a:t>
+              <a:t>• SK Kepala Daerah/Menteri — dipimpin Sekda/Sekjen</a:t>
             </a:r>
           </a:p>
         </p:txBody>
@@ -6732,7 +6732,7 @@
         </p:nvSpPr>
         <p:spPr>
           <a:xfrm>
-            <a:off x="685800" y="2331720"/>
+            <a:off x="685800" y="2395728"/>
             <a:ext cx="3240938" cy="274320"/>
           </a:xfrm>
           <a:prstGeom prst="rect">
@@ -6755,11 +6755,11 @@
                 <a:solidFill>
                   <a:srgbClr val="1A1A2E"/>
                 </a:solidFill>
-                <a:latin typeface="Arial"/>
+                <a:latin typeface="Calibri"/>
               </a:defRPr>
             </a:pPr>
             <a:r>
-              <a:t>• Dipimpin Sekda/Sekjen</a:t>
+              <a:t>• Unsur: Bappeda, Ortala, BPKAD, Diskominfo</a:t>
             </a:r>
           </a:p>
         </p:txBody>
@@ -6772,7 +6772,7 @@
         </p:nvSpPr>
         <p:spPr>
           <a:xfrm>
-            <a:off x="685800" y="2624327"/>
+            <a:off x="685800" y="2688336"/>
             <a:ext cx="3240938" cy="274320"/>
           </a:xfrm>
           <a:prstGeom prst="rect">
@@ -6795,50 +6795,10 @@
                 <a:solidFill>
                   <a:srgbClr val="1A1A2E"/>
                 </a:solidFill>
-                <a:latin typeface="Arial"/>
+                <a:latin typeface="Calibri"/>
               </a:defRPr>
             </a:pPr>
             <a:r>
-              <a:t>• Unsur: Bappeda, Ortala, BPKAD, Diskominfo</a:t>
-            </a:r>
-          </a:p>
-        </p:txBody>
-      </p:sp>
-      <p:sp>
-        <p:nvSpPr>
-          <p:cNvPr id="15" name="TextBox 14"/>
-          <p:cNvSpPr txBox="1"/>
-          <p:nvPr/>
-        </p:nvSpPr>
-        <p:spPr>
-          <a:xfrm>
-            <a:off x="685800" y="2916935"/>
-            <a:ext cx="3240938" cy="274320"/>
-          </a:xfrm>
-          <a:prstGeom prst="rect">
-            <a:avLst/>
-          </a:prstGeom>
-          <a:noFill/>
-        </p:spPr>
-        <p:txBody>
-          <a:bodyPr wrap="square"/>
-          <a:lstStyle/>
-          <a:p>
-            <a:pPr algn="l">
-              <a:spcBef>
-                <a:spcPts val="0"/>
-              </a:spcBef>
-              <a:spcAft>
-                <a:spcPts val="0"/>
-              </a:spcAft>
-              <a:defRPr sz="900" b="0">
-                <a:solidFill>
-                  <a:srgbClr val="1A1A2E"/>
-                </a:solidFill>
-                <a:latin typeface="Arial"/>
-              </a:defRPr>
-            </a:pPr>
-            <a:r>
               <a:t>• Bersifat lintas sektor</a:t>
             </a:r>
           </a:p>
@@ -6846,7 +6806,7 @@
       </p:sp>
       <p:sp>
         <p:nvSpPr>
-          <p:cNvPr id="16" name="Rounded Rectangle 15"/>
+          <p:cNvPr id="15" name="Rounded Rectangle 14"/>
           <p:cNvSpPr/>
           <p:nvPr/>
         </p:nvSpPr>
@@ -6893,7 +6853,7 @@
       </p:sp>
       <p:sp>
         <p:nvSpPr>
-          <p:cNvPr id="17" name="Rectangle 16"/>
+          <p:cNvPr id="16" name="Rectangle 15"/>
           <p:cNvSpPr/>
           <p:nvPr/>
         </p:nvSpPr>
@@ -6936,7 +6896,7 @@
       </p:sp>
       <p:sp>
         <p:nvSpPr>
-          <p:cNvPr id="18" name="Oval 17"/>
+          <p:cNvPr id="17" name="Oval 16"/>
           <p:cNvSpPr/>
           <p:nvPr/>
         </p:nvSpPr>
@@ -6979,14 +6939,54 @@
       </p:sp>
       <p:sp>
         <p:nvSpPr>
+          <p:cNvPr id="18" name="TextBox 17"/>
+          <p:cNvSpPr txBox="1"/>
+          <p:nvPr/>
+        </p:nvSpPr>
+        <p:spPr>
+          <a:xfrm>
+            <a:off x="4552188" y="1247241"/>
+            <a:ext cx="230428" cy="230428"/>
+          </a:xfrm>
+          <a:prstGeom prst="rect">
+            <a:avLst/>
+          </a:prstGeom>
+          <a:noFill/>
+        </p:spPr>
+        <p:txBody>
+          <a:bodyPr wrap="square"/>
+          <a:lstStyle/>
+          <a:p>
+            <a:pPr algn="ctr">
+              <a:spcBef>
+                <a:spcPts val="0"/>
+              </a:spcBef>
+              <a:spcAft>
+                <a:spcPts val="0"/>
+              </a:spcAft>
+              <a:defRPr sz="1200" b="0">
+                <a:solidFill>
+                  <a:srgbClr val="FFFFFF"/>
+                </a:solidFill>
+                <a:latin typeface="Calibri"/>
+              </a:defRPr>
+            </a:pPr>
+            <a:r>
+              <a:t>🗺️</a:t>
+            </a:r>
+          </a:p>
+        </p:txBody>
+      </p:sp>
+      <p:sp>
+        <p:nvSpPr>
           <p:cNvPr id="19" name="TextBox 18"/>
           <p:cNvSpPr txBox="1"/>
           <p:nvPr/>
         </p:nvSpPr>
         <p:spPr>
           <a:xfrm>
-            <a:off x="4552188" y="1247241"/>
-            <a:ext cx="230428" cy="230428"/>
+            <a:off x="4475378" y="1691639"/>
+            <a:ext cx="3240938" cy="274320"/>
           </a:xfrm>
           <a:prstGeom prst="rect">
             <a:avLst/>
@@ -6997,22 +6997,22 @@
           <a:bodyPr wrap="square"/>
           <a:lstStyle/>
           <a:p>
-            <a:pPr algn="ctr">
+            <a:pPr algn="l">
               <a:spcBef>
                 <a:spcPts val="0"/>
               </a:spcBef>
               <a:spcAft>
                 <a:spcPts val="0"/>
               </a:spcAft>
-              <a:defRPr sz="1200" b="0">
-                <a:solidFill>
-                  <a:srgbClr val="FFFFFF"/>
-                </a:solidFill>
-                <a:latin typeface="Arial"/>
+              <a:defRPr sz="1300" b="1">
+                <a:solidFill>
+                  <a:srgbClr val="0B7C72"/>
+                </a:solidFill>
+                <a:latin typeface="Calibri"/>
               </a:defRPr>
             </a:pPr>
             <a:r>
-              <a:t>🗺️</a:t>
+              <a:t>2. Arsitektur &amp; Peta Rencana</a:t>
             </a:r>
           </a:p>
         </p:txBody>
@@ -7025,7 +7025,7 @@
         </p:nvSpPr>
         <p:spPr>
           <a:xfrm>
-            <a:off x="4475378" y="1691639"/>
+            <a:off x="4475378" y="2039112"/>
             <a:ext cx="3240938" cy="274320"/>
           </a:xfrm>
           <a:prstGeom prst="rect">
@@ -7044,15 +7044,15 @@
               <a:spcAft>
                 <a:spcPts val="0"/>
               </a:spcAft>
-              <a:defRPr sz="1300" b="1">
-                <a:solidFill>
-                  <a:srgbClr val="0B7C72"/>
-                </a:solidFill>
-                <a:latin typeface="Arial"/>
+              <a:defRPr sz="900" b="0">
+                <a:solidFill>
+                  <a:srgbClr val="1A1A2E"/>
+                </a:solidFill>
+                <a:latin typeface="Calibri"/>
               </a:defRPr>
             </a:pPr>
             <a:r>
-              <a:t>2. Arsitektur &amp; Peta Rencana</a:t>
+              <a:t>• Petakan proses bisnis DAHULU sebelum teknologi</a:t>
             </a:r>
           </a:p>
         </p:txBody>
@@ -7065,7 +7065,7 @@
         </p:nvSpPr>
         <p:spPr>
           <a:xfrm>
-            <a:off x="4475378" y="2039112"/>
+            <a:off x="4475378" y="2331720"/>
             <a:ext cx="3240938" cy="274320"/>
           </a:xfrm>
           <a:prstGeom prst="rect">
@@ -7088,11 +7088,11 @@
                 <a:solidFill>
                   <a:srgbClr val="1A1A2E"/>
                 </a:solidFill>
-                <a:latin typeface="Arial"/>
+                <a:latin typeface="Calibri"/>
               </a:defRPr>
             </a:pPr>
             <a:r>
-              <a:t>• Petakan proses bisnis DAHULU</a:t>
+              <a:t>• Gunakan aplikasi Arsitektur SPBE Nasional</a:t>
             </a:r>
           </a:p>
         </p:txBody>
@@ -7105,7 +7105,7 @@
         </p:nvSpPr>
         <p:spPr>
           <a:xfrm>
-            <a:off x="4475378" y="2331720"/>
+            <a:off x="4475378" y="2624327"/>
             <a:ext cx="3240938" cy="274320"/>
           </a:xfrm>
           <a:prstGeom prst="rect">
@@ -7128,98 +7128,18 @@
                 <a:solidFill>
                   <a:srgbClr val="1A1A2E"/>
                 </a:solidFill>
-                <a:latin typeface="Arial"/>
+                <a:latin typeface="Calibri"/>
               </a:defRPr>
             </a:pPr>
             <a:r>
-              <a:t>• Gunakan aplikasi Arsitektur SPBE Nasional</a:t>
-            </a:r>
-          </a:p>
-        </p:txBody>
-      </p:sp>
-      <p:sp>
-        <p:nvSpPr>
-          <p:cNvPr id="23" name="TextBox 22"/>
-          <p:cNvSpPr txBox="1"/>
-          <p:nvPr/>
-        </p:nvSpPr>
-        <p:spPr>
-          <a:xfrm>
-            <a:off x="4475378" y="2624327"/>
-            <a:ext cx="3240938" cy="274320"/>
-          </a:xfrm>
-          <a:prstGeom prst="rect">
-            <a:avLst/>
-          </a:prstGeom>
-          <a:noFill/>
-        </p:spPr>
-        <p:txBody>
-          <a:bodyPr wrap="square"/>
-          <a:lstStyle/>
-          <a:p>
-            <a:pPr algn="l">
-              <a:spcBef>
-                <a:spcPts val="0"/>
-              </a:spcBef>
-              <a:spcAft>
-                <a:spcPts val="0"/>
-              </a:spcAft>
-              <a:defRPr sz="900" b="0">
-                <a:solidFill>
-                  <a:srgbClr val="1A1A2E"/>
-                </a:solidFill>
-                <a:latin typeface="Arial"/>
-              </a:defRPr>
-            </a:pPr>
-            <a:r>
-              <a:t>• Susun Peta Rencana 5 tahun</a:t>
-            </a:r>
-          </a:p>
-        </p:txBody>
-      </p:sp>
-      <p:sp>
-        <p:nvSpPr>
-          <p:cNvPr id="24" name="TextBox 23"/>
-          <p:cNvSpPr txBox="1"/>
-          <p:nvPr/>
-        </p:nvSpPr>
-        <p:spPr>
-          <a:xfrm>
-            <a:off x="4475378" y="2916935"/>
-            <a:ext cx="3240938" cy="274320"/>
-          </a:xfrm>
-          <a:prstGeom prst="rect">
-            <a:avLst/>
-          </a:prstGeom>
-          <a:noFill/>
-        </p:spPr>
-        <p:txBody>
-          <a:bodyPr wrap="square"/>
-          <a:lstStyle/>
-          <a:p>
-            <a:pPr algn="l">
-              <a:spcBef>
-                <a:spcPts val="0"/>
-              </a:spcBef>
-              <a:spcAft>
-                <a:spcPts val="0"/>
-              </a:spcAft>
-              <a:defRPr sz="900" b="0">
-                <a:solidFill>
-                  <a:srgbClr val="1A1A2E"/>
-                </a:solidFill>
-                <a:latin typeface="Arial"/>
-              </a:defRPr>
-            </a:pPr>
-            <a:r>
-              <a:t>• Selaras arah strategis nasional</a:t>
-            </a:r>
-          </a:p>
-        </p:txBody>
-      </p:sp>
-      <p:sp>
-        <p:nvSpPr>
-          <p:cNvPr id="25" name="Rounded Rectangle 24"/>
+              <a:t>• Susun Peta Rencana 5 tahun — selaras nasional</a:t>
+            </a:r>
+          </a:p>
+        </p:txBody>
+      </p:sp>
+      <p:sp>
+        <p:nvSpPr>
+          <p:cNvPr id="23" name="Rounded Rectangle 22"/>
           <p:cNvSpPr/>
           <p:nvPr/>
         </p:nvSpPr>
@@ -7266,7 +7186,7 @@
       </p:sp>
       <p:sp>
         <p:nvSpPr>
-          <p:cNvPr id="26" name="Rectangle 25"/>
+          <p:cNvPr id="24" name="Rectangle 23"/>
           <p:cNvSpPr/>
           <p:nvPr/>
         </p:nvSpPr>
@@ -7309,7 +7229,7 @@
       </p:sp>
       <p:sp>
         <p:nvSpPr>
-          <p:cNvPr id="27" name="Oval 26"/>
+          <p:cNvPr id="25" name="Oval 24"/>
           <p:cNvSpPr/>
           <p:nvPr/>
         </p:nvSpPr>
@@ -7352,14 +7272,94 @@
       </p:sp>
       <p:sp>
         <p:nvSpPr>
+          <p:cNvPr id="26" name="TextBox 25"/>
+          <p:cNvSpPr txBox="1"/>
+          <p:nvPr/>
+        </p:nvSpPr>
+        <p:spPr>
+          <a:xfrm>
+            <a:off x="8341766" y="1247241"/>
+            <a:ext cx="230428" cy="230428"/>
+          </a:xfrm>
+          <a:prstGeom prst="rect">
+            <a:avLst/>
+          </a:prstGeom>
+          <a:noFill/>
+        </p:spPr>
+        <p:txBody>
+          <a:bodyPr wrap="square"/>
+          <a:lstStyle/>
+          <a:p>
+            <a:pPr algn="ctr">
+              <a:spcBef>
+                <a:spcPts val="0"/>
+              </a:spcBef>
+              <a:spcAft>
+                <a:spcPts val="0"/>
+              </a:spcAft>
+              <a:defRPr sz="1200" b="0">
+                <a:solidFill>
+                  <a:srgbClr val="FFFFFF"/>
+                </a:solidFill>
+                <a:latin typeface="Calibri"/>
+              </a:defRPr>
+            </a:pPr>
+            <a:r>
+              <a:t>🔗</a:t>
+            </a:r>
+          </a:p>
+        </p:txBody>
+      </p:sp>
+      <p:sp>
+        <p:nvSpPr>
+          <p:cNvPr id="27" name="TextBox 26"/>
+          <p:cNvSpPr txBox="1"/>
+          <p:nvPr/>
+        </p:nvSpPr>
+        <p:spPr>
+          <a:xfrm>
+            <a:off x="8264956" y="1691639"/>
+            <a:ext cx="3240938" cy="274320"/>
+          </a:xfrm>
+          <a:prstGeom prst="rect">
+            <a:avLst/>
+          </a:prstGeom>
+          <a:noFill/>
+        </p:spPr>
+        <p:txBody>
+          <a:bodyPr wrap="square"/>
+          <a:lstStyle/>
+          <a:p>
+            <a:pPr algn="l">
+              <a:spcBef>
+                <a:spcPts val="0"/>
+              </a:spcBef>
+              <a:spcAft>
+                <a:spcPts val="0"/>
+              </a:spcAft>
+              <a:defRPr sz="1300" b="1">
+                <a:solidFill>
+                  <a:srgbClr val="A0522D"/>
+                </a:solidFill>
+                <a:latin typeface="Calibri"/>
+              </a:defRPr>
+            </a:pPr>
+            <a:r>
+              <a:t>3. Infrastruktur &amp; Integrasi Data</a:t>
+            </a:r>
+          </a:p>
+        </p:txBody>
+      </p:sp>
+      <p:sp>
+        <p:nvSpPr>
           <p:cNvPr id="28" name="TextBox 27"/>
           <p:cNvSpPr txBox="1"/>
           <p:nvPr/>
         </p:nvSpPr>
         <p:spPr>
           <a:xfrm>
-            <a:off x="8341766" y="1247241"/>
-            <a:ext cx="230428" cy="230428"/>
+            <a:off x="8264956" y="2039112"/>
+            <a:ext cx="3240938" cy="274320"/>
           </a:xfrm>
           <a:prstGeom prst="rect">
             <a:avLst/>
@@ -7370,22 +7370,22 @@
           <a:bodyPr wrap="square"/>
           <a:lstStyle/>
           <a:p>
-            <a:pPr algn="ctr">
+            <a:pPr algn="l">
               <a:spcBef>
                 <a:spcPts val="0"/>
               </a:spcBef>
               <a:spcAft>
                 <a:spcPts val="0"/>
               </a:spcAft>
-              <a:defRPr sz="1200" b="0">
-                <a:solidFill>
-                  <a:srgbClr val="FFFFFF"/>
-                </a:solidFill>
-                <a:latin typeface="Arial"/>
+              <a:defRPr sz="900" b="0">
+                <a:solidFill>
+                  <a:srgbClr val="1A1A2E"/>
+                </a:solidFill>
+                <a:latin typeface="Calibri"/>
               </a:defRPr>
             </a:pPr>
             <a:r>
-              <a:t>🔗</a:t>
+              <a:t>• Batasi pembangunan data center mandiri</a:t>
             </a:r>
           </a:p>
         </p:txBody>
@@ -7398,7 +7398,7 @@
         </p:nvSpPr>
         <p:spPr>
           <a:xfrm>
-            <a:off x="8264956" y="1691639"/>
+            <a:off x="8264956" y="2331720"/>
             <a:ext cx="3240938" cy="274320"/>
           </a:xfrm>
           <a:prstGeom prst="rect">
@@ -7417,15 +7417,15 @@
               <a:spcAft>
                 <a:spcPts val="0"/>
               </a:spcAft>
-              <a:defRPr sz="1300" b="1">
-                <a:solidFill>
-                  <a:srgbClr val="A0522D"/>
-                </a:solidFill>
-                <a:latin typeface="Arial"/>
+              <a:defRPr sz="900" b="0">
+                <a:solidFill>
+                  <a:srgbClr val="1A1A2E"/>
+                </a:solidFill>
+                <a:latin typeface="Calibri"/>
               </a:defRPr>
             </a:pPr>
             <a:r>
-              <a:t>3. Infrastruktur &amp; Integrasi Data</a:t>
+              <a:t>• Migrasi ke PDN / cloud tersertifikasi</a:t>
             </a:r>
           </a:p>
         </p:txBody>
@@ -7438,7 +7438,7 @@
         </p:nvSpPr>
         <p:spPr>
           <a:xfrm>
-            <a:off x="8264956" y="2039112"/>
+            <a:off x="8264956" y="2624327"/>
             <a:ext cx="3240938" cy="274320"/>
           </a:xfrm>
           <a:prstGeom prst="rect">
@@ -7461,138 +7461,18 @@
                 <a:solidFill>
                   <a:srgbClr val="1A1A2E"/>
                 </a:solidFill>
-                <a:latin typeface="Arial"/>
+                <a:latin typeface="Calibri"/>
               </a:defRPr>
             </a:pPr>
             <a:r>
-              <a:t>• Batasi pembangunan data center mandiri</a:t>
-            </a:r>
-          </a:p>
-        </p:txBody>
-      </p:sp>
-      <p:sp>
-        <p:nvSpPr>
-          <p:cNvPr id="31" name="TextBox 30"/>
-          <p:cNvSpPr txBox="1"/>
-          <p:nvPr/>
-        </p:nvSpPr>
-        <p:spPr>
-          <a:xfrm>
-            <a:off x="8264956" y="2331720"/>
-            <a:ext cx="3240938" cy="274320"/>
-          </a:xfrm>
-          <a:prstGeom prst="rect">
-            <a:avLst/>
-          </a:prstGeom>
-          <a:noFill/>
-        </p:spPr>
-        <p:txBody>
-          <a:bodyPr wrap="square"/>
-          <a:lstStyle/>
-          <a:p>
-            <a:pPr algn="l">
-              <a:spcBef>
-                <a:spcPts val="0"/>
-              </a:spcBef>
-              <a:spcAft>
-                <a:spcPts val="0"/>
-              </a:spcAft>
-              <a:defRPr sz="900" b="0">
-                <a:solidFill>
-                  <a:srgbClr val="1A1A2E"/>
-                </a:solidFill>
-                <a:latin typeface="Arial"/>
-              </a:defRPr>
-            </a:pPr>
-            <a:r>
-              <a:t>• Migrasi ke PDN / cloud tersertifikasi</a:t>
-            </a:r>
-          </a:p>
-        </p:txBody>
-      </p:sp>
-      <p:sp>
-        <p:nvSpPr>
-          <p:cNvPr id="32" name="TextBox 31"/>
-          <p:cNvSpPr txBox="1"/>
-          <p:nvPr/>
-        </p:nvSpPr>
-        <p:spPr>
-          <a:xfrm>
-            <a:off x="8264956" y="2624327"/>
-            <a:ext cx="3240938" cy="274320"/>
-          </a:xfrm>
-          <a:prstGeom prst="rect">
-            <a:avLst/>
-          </a:prstGeom>
-          <a:noFill/>
-        </p:spPr>
-        <p:txBody>
-          <a:bodyPr wrap="square"/>
-          <a:lstStyle/>
-          <a:p>
-            <a:pPr algn="l">
-              <a:spcBef>
-                <a:spcPts val="0"/>
-              </a:spcBef>
-              <a:spcAft>
-                <a:spcPts val="0"/>
-              </a:spcAft>
-              <a:defRPr sz="900" b="0">
-                <a:solidFill>
-                  <a:srgbClr val="1A1A2E"/>
-                </a:solidFill>
-                <a:latin typeface="Arial"/>
-              </a:defRPr>
-            </a:pPr>
-            <a:r>
-              <a:t>• Implementasi Hub SPLP</a:t>
-            </a:r>
-          </a:p>
-        </p:txBody>
-      </p:sp>
-      <p:sp>
-        <p:nvSpPr>
-          <p:cNvPr id="33" name="TextBox 32"/>
-          <p:cNvSpPr txBox="1"/>
-          <p:nvPr/>
-        </p:nvSpPr>
-        <p:spPr>
-          <a:xfrm>
-            <a:off x="8264956" y="2916935"/>
-            <a:ext cx="3240938" cy="274320"/>
-          </a:xfrm>
-          <a:prstGeom prst="rect">
-            <a:avLst/>
-          </a:prstGeom>
-          <a:noFill/>
-        </p:spPr>
-        <p:txBody>
-          <a:bodyPr wrap="square"/>
-          <a:lstStyle/>
-          <a:p>
-            <a:pPr algn="l">
-              <a:spcBef>
-                <a:spcPts val="0"/>
-              </a:spcBef>
-              <a:spcAft>
-                <a:spcPts val="0"/>
-              </a:spcAft>
-              <a:defRPr sz="900" b="0">
-                <a:solidFill>
-                  <a:srgbClr val="1A1A2E"/>
-                </a:solidFill>
-                <a:latin typeface="Arial"/>
-              </a:defRPr>
-            </a:pPr>
-            <a:r>
-              <a:t>• Prinsip Satu Data Indonesia</a:t>
-            </a:r>
-          </a:p>
-        </p:txBody>
-      </p:sp>
-      <p:sp>
-        <p:nvSpPr>
-          <p:cNvPr id="34" name="Rectangle 33"/>
+              <a:t>• Implementasi Hub SPLP &amp; Satu Data Indonesia</a:t>
+            </a:r>
+          </a:p>
+        </p:txBody>
+      </p:sp>
+      <p:sp>
+        <p:nvSpPr>
+          <p:cNvPr id="31" name="Rectangle 30"/>
           <p:cNvSpPr/>
           <p:nvPr/>
         </p:nvSpPr>
@@ -7635,7 +7515,7 @@
       </p:sp>
       <p:sp>
         <p:nvSpPr>
-          <p:cNvPr id="35" name="TextBox 34"/>
+          <p:cNvPr id="32" name="TextBox 31"/>
           <p:cNvSpPr txBox="1"/>
           <p:nvPr/>
         </p:nvSpPr>
@@ -7664,18 +7544,18 @@
                 <a:solidFill>
                   <a:srgbClr val="64748B"/>
                 </a:solidFill>
-                <a:latin typeface="Arial"/>
+                <a:latin typeface="Calibri"/>
               </a:defRPr>
             </a:pPr>
             <a:r>
-              <a:t>Sumber: Perpres No. 95/2018, Perpres No. 132/2022, &amp; Pedoman SPBE Kemenpan-RB</a:t>
-            </a:r>
-          </a:p>
-        </p:txBody>
-      </p:sp>
-      <p:sp>
-        <p:nvSpPr>
-          <p:cNvPr id="36" name="TextBox 35"/>
+              <a:t>Penerapan Sistem Pemerintahan Berbasis Elektronik (SPBE)</a:t>
+            </a:r>
+          </a:p>
+        </p:txBody>
+      </p:sp>
+      <p:sp>
+        <p:nvSpPr>
+          <p:cNvPr id="33" name="TextBox 32"/>
           <p:cNvSpPr txBox="1"/>
           <p:nvPr/>
         </p:nvSpPr>
@@ -7704,7 +7584,7 @@
                 <a:solidFill>
                   <a:srgbClr val="64748B"/>
                 </a:solidFill>
-                <a:latin typeface="Arial"/>
+                <a:latin typeface="Calibri"/>
               </a:defRPr>
             </a:pPr>
             <a:r>
@@ -7899,7 +7779,7 @@
                 <a:solidFill>
                   <a:srgbClr val="FFFFFF"/>
                 </a:solidFill>
-                <a:latin typeface="Arial Black"/>
+                <a:latin typeface="Georgia"/>
               </a:defRPr>
             </a:pPr>
             <a:r>
@@ -7939,7 +7819,7 @@
                 <a:solidFill>
                   <a:srgbClr val="64748B"/>
                 </a:solidFill>
-                <a:latin typeface="Arial"/>
+                <a:latin typeface="Calibri"/>
               </a:defRPr>
             </a:pPr>
             <a:r>
@@ -8112,7 +7992,7 @@
                 <a:solidFill>
                   <a:srgbClr val="FFFFFF"/>
                 </a:solidFill>
-                <a:latin typeface="Arial"/>
+                <a:latin typeface="Calibri"/>
               </a:defRPr>
             </a:pPr>
             <a:r>
@@ -8152,7 +8032,7 @@
                 <a:solidFill>
                   <a:srgbClr val="2563EB"/>
                 </a:solidFill>
-                <a:latin typeface="Arial"/>
+                <a:latin typeface="Calibri"/>
               </a:defRPr>
             </a:pPr>
             <a:r>
@@ -8192,7 +8072,7 @@
                 <a:solidFill>
                   <a:srgbClr val="1A1A2E"/>
                 </a:solidFill>
-                <a:latin typeface="Arial"/>
+                <a:latin typeface="Calibri"/>
               </a:defRPr>
             </a:pPr>
             <a:r>
@@ -8232,7 +8112,7 @@
                 <a:solidFill>
                   <a:srgbClr val="1A1A2E"/>
                 </a:solidFill>
-                <a:latin typeface="Arial"/>
+                <a:latin typeface="Calibri"/>
               </a:defRPr>
             </a:pPr>
             <a:r>
@@ -8272,58 +8152,18 @@
                 <a:solidFill>
                   <a:srgbClr val="1A1A2E"/>
                 </a:solidFill>
-                <a:latin typeface="Arial"/>
+                <a:latin typeface="Calibri"/>
               </a:defRPr>
             </a:pPr>
             <a:r>
-              <a:t>• Gabung ke satu platform terpadu</a:t>
-            </a:r>
-          </a:p>
-        </p:txBody>
-      </p:sp>
-      <p:sp>
-        <p:nvSpPr>
-          <p:cNvPr id="15" name="TextBox 14"/>
-          <p:cNvSpPr txBox="1"/>
-          <p:nvPr/>
-        </p:nvSpPr>
-        <p:spPr>
-          <a:xfrm>
-            <a:off x="685800" y="2916935"/>
-            <a:ext cx="3240938" cy="274320"/>
-          </a:xfrm>
-          <a:prstGeom prst="rect">
-            <a:avLst/>
-          </a:prstGeom>
-          <a:noFill/>
-        </p:spPr>
-        <p:txBody>
-          <a:bodyPr wrap="square"/>
-          <a:lstStyle/>
-          <a:p>
-            <a:pPr algn="l">
-              <a:spcBef>
-                <a:spcPts val="0"/>
-              </a:spcBef>
-              <a:spcAft>
-                <a:spcPts val="0"/>
-              </a:spcAft>
-              <a:defRPr sz="900" b="0">
-                <a:solidFill>
-                  <a:srgbClr val="1A1A2E"/>
-                </a:solidFill>
-                <a:latin typeface="Arial"/>
-              </a:defRPr>
-            </a:pPr>
-            <a:r>
-              <a:t>• Super Apps layanan publik &amp; administrasi</a:t>
-            </a:r>
-          </a:p>
-        </p:txBody>
-      </p:sp>
-      <p:sp>
-        <p:nvSpPr>
-          <p:cNvPr id="16" name="Rounded Rectangle 15"/>
+              <a:t>• Gabung ke satu platform terpadu (Super Apps)</a:t>
+            </a:r>
+          </a:p>
+        </p:txBody>
+      </p:sp>
+      <p:sp>
+        <p:nvSpPr>
+          <p:cNvPr id="15" name="Rounded Rectangle 14"/>
           <p:cNvSpPr/>
           <p:nvPr/>
         </p:nvSpPr>
@@ -8370,7 +8210,7 @@
       </p:sp>
       <p:sp>
         <p:nvSpPr>
-          <p:cNvPr id="17" name="Rectangle 16"/>
+          <p:cNvPr id="16" name="Rectangle 15"/>
           <p:cNvSpPr/>
           <p:nvPr/>
         </p:nvSpPr>
@@ -8413,7 +8253,7 @@
       </p:sp>
       <p:sp>
         <p:nvSpPr>
-          <p:cNvPr id="18" name="Oval 17"/>
+          <p:cNvPr id="17" name="Oval 16"/>
           <p:cNvSpPr/>
           <p:nvPr/>
         </p:nvSpPr>
@@ -8456,14 +8296,54 @@
       </p:sp>
       <p:sp>
         <p:nvSpPr>
+          <p:cNvPr id="18" name="TextBox 17"/>
+          <p:cNvSpPr txBox="1"/>
+          <p:nvPr/>
+        </p:nvSpPr>
+        <p:spPr>
+          <a:xfrm>
+            <a:off x="4552188" y="1247241"/>
+            <a:ext cx="230428" cy="230428"/>
+          </a:xfrm>
+          <a:prstGeom prst="rect">
+            <a:avLst/>
+          </a:prstGeom>
+          <a:noFill/>
+        </p:spPr>
+        <p:txBody>
+          <a:bodyPr wrap="square"/>
+          <a:lstStyle/>
+          <a:p>
+            <a:pPr algn="ctr">
+              <a:spcBef>
+                <a:spcPts val="0"/>
+              </a:spcBef>
+              <a:spcAft>
+                <a:spcPts val="0"/>
+              </a:spcAft>
+              <a:defRPr sz="1200" b="0">
+                <a:solidFill>
+                  <a:srgbClr val="FFFFFF"/>
+                </a:solidFill>
+                <a:latin typeface="Calibri"/>
+              </a:defRPr>
+            </a:pPr>
+            <a:r>
+              <a:t>🔐</a:t>
+            </a:r>
+          </a:p>
+        </p:txBody>
+      </p:sp>
+      <p:sp>
+        <p:nvSpPr>
           <p:cNvPr id="19" name="TextBox 18"/>
           <p:cNvSpPr txBox="1"/>
           <p:nvPr/>
         </p:nvSpPr>
         <p:spPr>
           <a:xfrm>
-            <a:off x="4552188" y="1247241"/>
-            <a:ext cx="230428" cy="230428"/>
+            <a:off x="4475378" y="1691639"/>
+            <a:ext cx="3240938" cy="274320"/>
           </a:xfrm>
           <a:prstGeom prst="rect">
             <a:avLst/>
@@ -8474,22 +8354,22 @@
           <a:bodyPr wrap="square"/>
           <a:lstStyle/>
           <a:p>
-            <a:pPr algn="ctr">
+            <a:pPr algn="l">
               <a:spcBef>
                 <a:spcPts val="0"/>
               </a:spcBef>
               <a:spcAft>
                 <a:spcPts val="0"/>
               </a:spcAft>
-              <a:defRPr sz="1200" b="0">
-                <a:solidFill>
-                  <a:srgbClr val="FFFFFF"/>
-                </a:solidFill>
-                <a:latin typeface="Arial"/>
+              <a:defRPr sz="1300" b="1">
+                <a:solidFill>
+                  <a:srgbClr val="0B7C72"/>
+                </a:solidFill>
+                <a:latin typeface="Calibri"/>
               </a:defRPr>
             </a:pPr>
             <a:r>
-              <a:t>🔐</a:t>
+              <a:t>5. Keamanan Informasi</a:t>
             </a:r>
           </a:p>
         </p:txBody>
@@ -8502,7 +8382,7 @@
         </p:nvSpPr>
         <p:spPr>
           <a:xfrm>
-            <a:off x="4475378" y="1691639"/>
+            <a:off x="4475378" y="2039112"/>
             <a:ext cx="3240938" cy="274320"/>
           </a:xfrm>
           <a:prstGeom prst="rect">
@@ -8521,15 +8401,15 @@
               <a:spcAft>
                 <a:spcPts val="0"/>
               </a:spcAft>
-              <a:defRPr sz="1300" b="1">
-                <a:solidFill>
-                  <a:srgbClr val="0B7C72"/>
-                </a:solidFill>
-                <a:latin typeface="Arial"/>
+              <a:defRPr sz="900" b="0">
+                <a:solidFill>
+                  <a:srgbClr val="1A1A2E"/>
+                </a:solidFill>
+                <a:latin typeface="Calibri"/>
               </a:defRPr>
             </a:pPr>
             <a:r>
-              <a:t>5. Keamanan Informasi</a:t>
+              <a:t>• SMKI berbasis ISO 27001 bertahap</a:t>
             </a:r>
           </a:p>
         </p:txBody>
@@ -8542,8 +8422,8 @@
         </p:nvSpPr>
         <p:spPr>
           <a:xfrm>
-            <a:off x="4475378" y="2039112"/>
-            <a:ext cx="3240938" cy="274320"/>
+            <a:off x="4475378" y="2331720"/>
+            <a:ext cx="3240938" cy="338328"/>
           </a:xfrm>
           <a:prstGeom prst="rect">
             <a:avLst/>
@@ -8565,11 +8445,11 @@
                 <a:solidFill>
                   <a:srgbClr val="1A1A2E"/>
                 </a:solidFill>
-                <a:latin typeface="Arial"/>
+                <a:latin typeface="Calibri"/>
               </a:defRPr>
             </a:pPr>
             <a:r>
-              <a:t>• SMKI berbasis ISO 27001 bertahap</a:t>
+              <a:t>• Kolaborasi dengan BSSN — Vulnerability Assessment</a:t>
             </a:r>
           </a:p>
         </p:txBody>
@@ -8582,7 +8462,7 @@
         </p:nvSpPr>
         <p:spPr>
           <a:xfrm>
-            <a:off x="4475378" y="2331720"/>
+            <a:off x="4475378" y="2688336"/>
             <a:ext cx="3240938" cy="274320"/>
           </a:xfrm>
           <a:prstGeom prst="rect">
@@ -8605,90 +8485,10 @@
                 <a:solidFill>
                   <a:srgbClr val="1A1A2E"/>
                 </a:solidFill>
-                <a:latin typeface="Arial"/>
+                <a:latin typeface="Calibri"/>
               </a:defRPr>
             </a:pPr>
             <a:r>
-              <a:t>• Kolaborasi dengan BSSN</a:t>
-            </a:r>
-          </a:p>
-        </p:txBody>
-      </p:sp>
-      <p:sp>
-        <p:nvSpPr>
-          <p:cNvPr id="23" name="TextBox 22"/>
-          <p:cNvSpPr txBox="1"/>
-          <p:nvPr/>
-        </p:nvSpPr>
-        <p:spPr>
-          <a:xfrm>
-            <a:off x="4475378" y="2624327"/>
-            <a:ext cx="3240938" cy="274320"/>
-          </a:xfrm>
-          <a:prstGeom prst="rect">
-            <a:avLst/>
-          </a:prstGeom>
-          <a:noFill/>
-        </p:spPr>
-        <p:txBody>
-          <a:bodyPr wrap="square"/>
-          <a:lstStyle/>
-          <a:p>
-            <a:pPr algn="l">
-              <a:spcBef>
-                <a:spcPts val="0"/>
-              </a:spcBef>
-              <a:spcAft>
-                <a:spcPts val="0"/>
-              </a:spcAft>
-              <a:defRPr sz="900" b="0">
-                <a:solidFill>
-                  <a:srgbClr val="1A1A2E"/>
-                </a:solidFill>
-                <a:latin typeface="Arial"/>
-              </a:defRPr>
-            </a:pPr>
-            <a:r>
-              <a:t>• Vulnerability Assessment berkala</a:t>
-            </a:r>
-          </a:p>
-        </p:txBody>
-      </p:sp>
-      <p:sp>
-        <p:nvSpPr>
-          <p:cNvPr id="24" name="TextBox 23"/>
-          <p:cNvSpPr txBox="1"/>
-          <p:nvPr/>
-        </p:nvSpPr>
-        <p:spPr>
-          <a:xfrm>
-            <a:off x="4475378" y="2916935"/>
-            <a:ext cx="3240938" cy="274320"/>
-          </a:xfrm>
-          <a:prstGeom prst="rect">
-            <a:avLst/>
-          </a:prstGeom>
-          <a:noFill/>
-        </p:spPr>
-        <p:txBody>
-          <a:bodyPr wrap="square"/>
-          <a:lstStyle/>
-          <a:p>
-            <a:pPr algn="l">
-              <a:spcBef>
-                <a:spcPts val="0"/>
-              </a:spcBef>
-              <a:spcAft>
-                <a:spcPts val="0"/>
-              </a:spcAft>
-              <a:defRPr sz="900" b="0">
-                <a:solidFill>
-                  <a:srgbClr val="1A1A2E"/>
-                </a:solidFill>
-                <a:latin typeface="Arial"/>
-              </a:defRPr>
-            </a:pPr>
-            <a:r>
               <a:t>• Bentuk CSIRT internal</a:t>
             </a:r>
           </a:p>
@@ -8696,7 +8496,7 @@
       </p:sp>
       <p:sp>
         <p:nvSpPr>
-          <p:cNvPr id="25" name="Rounded Rectangle 24"/>
+          <p:cNvPr id="23" name="Rounded Rectangle 22"/>
           <p:cNvSpPr/>
           <p:nvPr/>
         </p:nvSpPr>
@@ -8743,7 +8543,7 @@
       </p:sp>
       <p:sp>
         <p:nvSpPr>
-          <p:cNvPr id="26" name="Rectangle 25"/>
+          <p:cNvPr id="24" name="Rectangle 23"/>
           <p:cNvSpPr/>
           <p:nvPr/>
         </p:nvSpPr>
@@ -8786,7 +8586,7 @@
       </p:sp>
       <p:sp>
         <p:nvSpPr>
-          <p:cNvPr id="27" name="Oval 26"/>
+          <p:cNvPr id="25" name="Oval 24"/>
           <p:cNvSpPr/>
           <p:nvPr/>
         </p:nvSpPr>
@@ -8829,14 +8629,94 @@
       </p:sp>
       <p:sp>
         <p:nvSpPr>
+          <p:cNvPr id="26" name="TextBox 25"/>
+          <p:cNvSpPr txBox="1"/>
+          <p:nvPr/>
+        </p:nvSpPr>
+        <p:spPr>
+          <a:xfrm>
+            <a:off x="8341766" y="1247241"/>
+            <a:ext cx="230428" cy="230428"/>
+          </a:xfrm>
+          <a:prstGeom prst="rect">
+            <a:avLst/>
+          </a:prstGeom>
+          <a:noFill/>
+        </p:spPr>
+        <p:txBody>
+          <a:bodyPr wrap="square"/>
+          <a:lstStyle/>
+          <a:p>
+            <a:pPr algn="ctr">
+              <a:spcBef>
+                <a:spcPts val="0"/>
+              </a:spcBef>
+              <a:spcAft>
+                <a:spcPts val="0"/>
+              </a:spcAft>
+              <a:defRPr sz="1200" b="0">
+                <a:solidFill>
+                  <a:srgbClr val="FFFFFF"/>
+                </a:solidFill>
+                <a:latin typeface="Calibri"/>
+              </a:defRPr>
+            </a:pPr>
+            <a:r>
+              <a:t>📊</a:t>
+            </a:r>
+          </a:p>
+        </p:txBody>
+      </p:sp>
+      <p:sp>
+        <p:nvSpPr>
+          <p:cNvPr id="27" name="TextBox 26"/>
+          <p:cNvSpPr txBox="1"/>
+          <p:nvPr/>
+        </p:nvSpPr>
+        <p:spPr>
+          <a:xfrm>
+            <a:off x="8264956" y="1691639"/>
+            <a:ext cx="3240938" cy="274320"/>
+          </a:xfrm>
+          <a:prstGeom prst="rect">
+            <a:avLst/>
+          </a:prstGeom>
+          <a:noFill/>
+        </p:spPr>
+        <p:txBody>
+          <a:bodyPr wrap="square"/>
+          <a:lstStyle/>
+          <a:p>
+            <a:pPr algn="l">
+              <a:spcBef>
+                <a:spcPts val="0"/>
+              </a:spcBef>
+              <a:spcAft>
+                <a:spcPts val="0"/>
+              </a:spcAft>
+              <a:defRPr sz="1300" b="1">
+                <a:solidFill>
+                  <a:srgbClr val="A0522D"/>
+                </a:solidFill>
+                <a:latin typeface="Calibri"/>
+              </a:defRPr>
+            </a:pPr>
+            <a:r>
+              <a:t>6. Evaluasi &amp; Audit</a:t>
+            </a:r>
+          </a:p>
+        </p:txBody>
+      </p:sp>
+      <p:sp>
+        <p:nvSpPr>
           <p:cNvPr id="28" name="TextBox 27"/>
           <p:cNvSpPr txBox="1"/>
           <p:nvPr/>
         </p:nvSpPr>
         <p:spPr>
           <a:xfrm>
-            <a:off x="8341766" y="1247241"/>
-            <a:ext cx="230428" cy="230428"/>
+            <a:off x="8264956" y="2039112"/>
+            <a:ext cx="3240938" cy="338328"/>
           </a:xfrm>
           <a:prstGeom prst="rect">
             <a:avLst/>
@@ -8847,22 +8727,22 @@
           <a:bodyPr wrap="square"/>
           <a:lstStyle/>
           <a:p>
-            <a:pPr algn="ctr">
+            <a:pPr algn="l">
               <a:spcBef>
                 <a:spcPts val="0"/>
               </a:spcBef>
               <a:spcAft>
                 <a:spcPts val="0"/>
               </a:spcAft>
-              <a:defRPr sz="1200" b="0">
-                <a:solidFill>
-                  <a:srgbClr val="FFFFFF"/>
-                </a:solidFill>
-                <a:latin typeface="Arial"/>
+              <a:defRPr sz="900" b="0">
+                <a:solidFill>
+                  <a:srgbClr val="1A1A2E"/>
+                </a:solidFill>
+                <a:latin typeface="Calibri"/>
               </a:defRPr>
             </a:pPr>
             <a:r>
-              <a:t>📊</a:t>
+              <a:t>• Self-assessment berkala sebelum penilaian formal</a:t>
             </a:r>
           </a:p>
         </p:txBody>
@@ -8875,7 +8755,7 @@
         </p:nvSpPr>
         <p:spPr>
           <a:xfrm>
-            <a:off x="8264956" y="1691639"/>
+            <a:off x="8264956" y="2395728"/>
             <a:ext cx="3240938" cy="274320"/>
           </a:xfrm>
           <a:prstGeom prst="rect">
@@ -8894,15 +8774,15 @@
               <a:spcAft>
                 <a:spcPts val="0"/>
               </a:spcAft>
-              <a:defRPr sz="1300" b="1">
-                <a:solidFill>
-                  <a:srgbClr val="A0522D"/>
-                </a:solidFill>
-                <a:latin typeface="Arial"/>
+              <a:defRPr sz="900" b="0">
+                <a:solidFill>
+                  <a:srgbClr val="1A1A2E"/>
+                </a:solidFill>
+                <a:latin typeface="Calibri"/>
               </a:defRPr>
             </a:pPr>
             <a:r>
-              <a:t>6. Evaluasi &amp; Audit</a:t>
+              <a:t>• Penilaian oleh Kemenpan-RB</a:t>
             </a:r>
           </a:p>
         </p:txBody>
@@ -8915,7 +8795,7 @@
         </p:nvSpPr>
         <p:spPr>
           <a:xfrm>
-            <a:off x="8264956" y="2039112"/>
+            <a:off x="8264956" y="2688336"/>
             <a:ext cx="3240938" cy="274320"/>
           </a:xfrm>
           <a:prstGeom prst="rect">
@@ -8938,90 +8818,10 @@
                 <a:solidFill>
                   <a:srgbClr val="1A1A2E"/>
                 </a:solidFill>
-                <a:latin typeface="Arial"/>
+                <a:latin typeface="Calibri"/>
               </a:defRPr>
             </a:pPr>
             <a:r>
-              <a:t>• Self-assessment berkala</a:t>
-            </a:r>
-          </a:p>
-        </p:txBody>
-      </p:sp>
-      <p:sp>
-        <p:nvSpPr>
-          <p:cNvPr id="31" name="TextBox 30"/>
-          <p:cNvSpPr txBox="1"/>
-          <p:nvPr/>
-        </p:nvSpPr>
-        <p:spPr>
-          <a:xfrm>
-            <a:off x="8264956" y="2331720"/>
-            <a:ext cx="3240938" cy="274320"/>
-          </a:xfrm>
-          <a:prstGeom prst="rect">
-            <a:avLst/>
-          </a:prstGeom>
-          <a:noFill/>
-        </p:spPr>
-        <p:txBody>
-          <a:bodyPr wrap="square"/>
-          <a:lstStyle/>
-          <a:p>
-            <a:pPr algn="l">
-              <a:spcBef>
-                <a:spcPts val="0"/>
-              </a:spcBef>
-              <a:spcAft>
-                <a:spcPts val="0"/>
-              </a:spcAft>
-              <a:defRPr sz="900" b="0">
-                <a:solidFill>
-                  <a:srgbClr val="1A1A2E"/>
-                </a:solidFill>
-                <a:latin typeface="Arial"/>
-              </a:defRPr>
-            </a:pPr>
-            <a:r>
-              <a:t>• Penilaian formal Kemenpan-RB</a:t>
-            </a:r>
-          </a:p>
-        </p:txBody>
-      </p:sp>
-      <p:sp>
-        <p:nvSpPr>
-          <p:cNvPr id="32" name="TextBox 31"/>
-          <p:cNvSpPr txBox="1"/>
-          <p:nvPr/>
-        </p:nvSpPr>
-        <p:spPr>
-          <a:xfrm>
-            <a:off x="8264956" y="2624327"/>
-            <a:ext cx="3240938" cy="274320"/>
-          </a:xfrm>
-          <a:prstGeom prst="rect">
-            <a:avLst/>
-          </a:prstGeom>
-          <a:noFill/>
-        </p:spPr>
-        <p:txBody>
-          <a:bodyPr wrap="square"/>
-          <a:lstStyle/>
-          <a:p>
-            <a:pPr algn="l">
-              <a:spcBef>
-                <a:spcPts val="0"/>
-              </a:spcBef>
-              <a:spcAft>
-                <a:spcPts val="0"/>
-              </a:spcAft>
-              <a:defRPr sz="900" b="0">
-                <a:solidFill>
-                  <a:srgbClr val="1A1A2E"/>
-                </a:solidFill>
-                <a:latin typeface="Arial"/>
-              </a:defRPr>
-            </a:pPr>
-            <a:r>
               <a:t>• Audit TIK infrastruktur &amp; aplikasi</a:t>
             </a:r>
           </a:p>
@@ -9029,47 +8829,7 @@
       </p:sp>
       <p:sp>
         <p:nvSpPr>
-          <p:cNvPr id="33" name="TextBox 32"/>
-          <p:cNvSpPr txBox="1"/>
-          <p:nvPr/>
-        </p:nvSpPr>
-        <p:spPr>
-          <a:xfrm>
-            <a:off x="8264956" y="2916935"/>
-            <a:ext cx="3240938" cy="274320"/>
-          </a:xfrm>
-          <a:prstGeom prst="rect">
-            <a:avLst/>
-          </a:prstGeom>
-          <a:noFill/>
-        </p:spPr>
-        <p:txBody>
-          <a:bodyPr wrap="square"/>
-          <a:lstStyle/>
-          <a:p>
-            <a:pPr algn="l">
-              <a:spcBef>
-                <a:spcPts val="0"/>
-              </a:spcBef>
-              <a:spcAft>
-                <a:spcPts val="0"/>
-              </a:spcAft>
-              <a:defRPr sz="900" b="0">
-                <a:solidFill>
-                  <a:srgbClr val="1A1A2E"/>
-                </a:solidFill>
-                <a:latin typeface="Arial"/>
-              </a:defRPr>
-            </a:pPr>
-            <a:r>
-              <a:t>• Continuous improvement</a:t>
-            </a:r>
-          </a:p>
-        </p:txBody>
-      </p:sp>
-      <p:sp>
-        <p:nvSpPr>
-          <p:cNvPr id="34" name="Rectangle 33"/>
+          <p:cNvPr id="31" name="Rectangle 30"/>
           <p:cNvSpPr/>
           <p:nvPr/>
         </p:nvSpPr>
@@ -9112,7 +8872,7 @@
       </p:sp>
       <p:sp>
         <p:nvSpPr>
-          <p:cNvPr id="35" name="TextBox 34"/>
+          <p:cNvPr id="32" name="TextBox 31"/>
           <p:cNvSpPr txBox="1"/>
           <p:nvPr/>
         </p:nvSpPr>
@@ -9141,18 +8901,18 @@
                 <a:solidFill>
                   <a:srgbClr val="64748B"/>
                 </a:solidFill>
-                <a:latin typeface="Arial"/>
+                <a:latin typeface="Calibri"/>
               </a:defRPr>
             </a:pPr>
             <a:r>
-              <a:t>Sumber: Perpres No. 95/2018, Perpres No. 132/2022, &amp; Pedoman SPBE Kemenpan-RB</a:t>
-            </a:r>
-          </a:p>
-        </p:txBody>
-      </p:sp>
-      <p:sp>
-        <p:nvSpPr>
-          <p:cNvPr id="36" name="TextBox 35"/>
+              <a:t>Penerapan Sistem Pemerintahan Berbasis Elektronik (SPBE)</a:t>
+            </a:r>
+          </a:p>
+        </p:txBody>
+      </p:sp>
+      <p:sp>
+        <p:nvSpPr>
+          <p:cNvPr id="33" name="TextBox 32"/>
           <p:cNvSpPr txBox="1"/>
           <p:nvPr/>
         </p:nvSpPr>
@@ -9181,7 +8941,7 @@
                 <a:solidFill>
                   <a:srgbClr val="64748B"/>
                 </a:solidFill>
-                <a:latin typeface="Arial"/>
+                <a:latin typeface="Calibri"/>
               </a:defRPr>
             </a:pPr>
             <a:r>
@@ -9462,15 +9222,15 @@
                 <a:solidFill>
                   <a:srgbClr val="FFFFFF"/>
                 </a:solidFill>
-                <a:latin typeface="Arial"/>
+                <a:latin typeface="Calibri"/>
               </a:defRPr>
             </a:pPr>
             <a:r>
-              <a:t>PRINSIP UTAMA</a:t>
+              <a:t>BAB 5</a:t>
             </a:r>
             <a:br/>
             <a:r>
-              <a:t>SPBE</a:t>
+              <a:t>PRINSIP UTAMA &amp; KESIMPULAN</a:t>
             </a:r>
           </a:p>
         </p:txBody>
@@ -9506,11 +9266,11 @@
                 <a:solidFill>
                   <a:srgbClr val="C8962E"/>
                 </a:solidFill>
-                <a:latin typeface="Arial"/>
+                <a:latin typeface="Calibri"/>
               </a:defRPr>
             </a:pPr>
             <a:r>
-              <a:t>Interoperabilitas — sistem saling berbicara, bukan aplikasi baru</a:t>
+              <a:t>Interoperabilitas — sistem saling berbicara, bukan aplikasi baru untuk setiap masalah</a:t>
             </a:r>
           </a:p>
         </p:txBody>
@@ -9546,11 +9306,11 @@
                 <a:solidFill>
                   <a:srgbClr val="64748B"/>
                 </a:solidFill>
-                <a:latin typeface="Arial"/>
+                <a:latin typeface="Calibri"/>
               </a:defRPr>
             </a:pPr>
             <a:r>
-              <a:t>Paradigma Modern</a:t>
+              <a:t>Paradigma SPBE Modern</a:t>
             </a:r>
           </a:p>
         </p:txBody>
@@ -9784,7 +9544,7 @@
                 <a:solidFill>
                   <a:srgbClr val="FFFFFF"/>
                 </a:solidFill>
-                <a:latin typeface="Arial Black"/>
+                <a:latin typeface="Georgia"/>
               </a:defRPr>
             </a:pPr>
             <a:r>
@@ -9824,7 +9584,7 @@
                 <a:solidFill>
                   <a:srgbClr val="64748B"/>
                 </a:solidFill>
-                <a:latin typeface="Arial"/>
+                <a:latin typeface="Calibri"/>
               </a:defRPr>
             </a:pPr>
             <a:r>
@@ -9925,14 +9685,97 @@
       </p:sp>
       <p:sp>
         <p:nvSpPr>
-          <p:cNvPr id="9" name="TextBox 8"/>
+          <p:cNvPr id="9" name="Oval 8"/>
+          <p:cNvSpPr/>
+          <p:nvPr/>
+        </p:nvSpPr>
+        <p:spPr>
+          <a:xfrm>
+            <a:off x="685800" y="1188719"/>
+            <a:ext cx="384048" cy="384048"/>
+          </a:xfrm>
+          <a:prstGeom prst="ellipse">
+            <a:avLst/>
+          </a:prstGeom>
+          <a:solidFill>
+            <a:srgbClr val="DC2626"/>
+          </a:solidFill>
+          <a:ln>
+            <a:noFill/>
+          </a:ln>
+        </p:spPr>
+        <p:style>
+          <a:lnRef idx="1">
+            <a:schemeClr val="accent1"/>
+          </a:lnRef>
+          <a:fillRef idx="3">
+            <a:schemeClr val="accent1"/>
+          </a:fillRef>
+          <a:effectRef idx="2">
+            <a:schemeClr val="accent1"/>
+          </a:effectRef>
+          <a:fontRef idx="minor">
+            <a:schemeClr val="lt1"/>
+          </a:fontRef>
+        </p:style>
+        <p:txBody>
+          <a:bodyPr rtlCol="0" anchor="ctr"/>
+          <a:lstStyle/>
+          <a:p>
+            <a:pPr algn="ctr"/>
+          </a:p>
+        </p:txBody>
+      </p:sp>
+      <p:sp>
+        <p:nvSpPr>
+          <p:cNvPr id="10" name="TextBox 9"/>
           <p:cNvSpPr txBox="1"/>
           <p:nvPr/>
         </p:nvSpPr>
         <p:spPr>
           <a:xfrm>
-            <a:off x="731520" y="1188719"/>
-            <a:ext cx="5090007" cy="274320"/>
+            <a:off x="762609" y="1247241"/>
+            <a:ext cx="230428" cy="230428"/>
+          </a:xfrm>
+          <a:prstGeom prst="rect">
+            <a:avLst/>
+          </a:prstGeom>
+          <a:noFill/>
+        </p:spPr>
+        <p:txBody>
+          <a:bodyPr wrap="square"/>
+          <a:lstStyle/>
+          <a:p>
+            <a:pPr algn="ctr">
+              <a:spcBef>
+                <a:spcPts val="0"/>
+              </a:spcBef>
+              <a:spcAft>
+                <a:spcPts val="0"/>
+              </a:spcAft>
+              <a:defRPr sz="1200" b="0">
+                <a:solidFill>
+                  <a:srgbClr val="FFFFFF"/>
+                </a:solidFill>
+                <a:latin typeface="Calibri"/>
+              </a:defRPr>
+            </a:pPr>
+            <a:r>
+              <a:t>⚠️</a:t>
+            </a:r>
+          </a:p>
+        </p:txBody>
+      </p:sp>
+      <p:sp>
+        <p:nvSpPr>
+          <p:cNvPr id="11" name="TextBox 10"/>
+          <p:cNvSpPr txBox="1"/>
+          <p:nvPr/>
+        </p:nvSpPr>
+        <p:spPr>
+          <a:xfrm>
+            <a:off x="685800" y="1691639"/>
+            <a:ext cx="5135727" cy="274320"/>
           </a:xfrm>
           <a:prstGeom prst="rect">
             <a:avLst/>
@@ -9950,29 +9793,29 @@
               <a:spcAft>
                 <a:spcPts val="0"/>
               </a:spcAft>
-              <a:defRPr sz="1400" b="1">
+              <a:defRPr sz="1300" b="1">
                 <a:solidFill>
                   <a:srgbClr val="DC2626"/>
                 </a:solidFill>
-                <a:latin typeface="Arial"/>
+                <a:latin typeface="Calibri"/>
               </a:defRPr>
             </a:pPr>
             <a:r>
-              <a:t>PARADIGMA LAMA</a:t>
-            </a:r>
-          </a:p>
-        </p:txBody>
-      </p:sp>
-      <p:sp>
-        <p:nvSpPr>
-          <p:cNvPr id="10" name="TextBox 9"/>
+              <a:t>Jebakan yang Harus Dihindari</a:t>
+            </a:r>
+          </a:p>
+        </p:txBody>
+      </p:sp>
+      <p:sp>
+        <p:nvSpPr>
+          <p:cNvPr id="12" name="TextBox 11"/>
           <p:cNvSpPr txBox="1"/>
           <p:nvPr/>
         </p:nvSpPr>
         <p:spPr>
           <a:xfrm>
-            <a:off x="731520" y="1481328"/>
-            <a:ext cx="5090007" cy="228600"/>
+            <a:off x="685800" y="2039112"/>
+            <a:ext cx="5135727" cy="274320"/>
           </a:xfrm>
           <a:prstGeom prst="rect">
             <a:avLst/>
@@ -9990,29 +9833,29 @@
               <a:spcAft>
                 <a:spcPts val="0"/>
               </a:spcAft>
-              <a:defRPr sz="1100" b="0">
+              <a:defRPr sz="900" b="0">
                 <a:solidFill>
                   <a:srgbClr val="1A1A2E"/>
                 </a:solidFill>
-                <a:latin typeface="Arial"/>
+                <a:latin typeface="Calibri"/>
               </a:defRPr>
             </a:pPr>
             <a:r>
-              <a:t>• </a:t>
-            </a:r>
-          </a:p>
-        </p:txBody>
-      </p:sp>
-      <p:sp>
-        <p:nvSpPr>
-          <p:cNvPr id="11" name="TextBox 10"/>
+              <a:t>• Menganggap digitalisasi = membuat aplikasi baru untuk setiap masalah</a:t>
+            </a:r>
+          </a:p>
+        </p:txBody>
+      </p:sp>
+      <p:sp>
+        <p:nvSpPr>
+          <p:cNvPr id="13" name="TextBox 12"/>
           <p:cNvSpPr txBox="1"/>
           <p:nvPr/>
         </p:nvSpPr>
         <p:spPr>
           <a:xfrm>
-            <a:off x="731520" y="1719072"/>
-            <a:ext cx="5090007" cy="228600"/>
+            <a:off x="685800" y="2331720"/>
+            <a:ext cx="5135727" cy="274320"/>
           </a:xfrm>
           <a:prstGeom prst="rect">
             <a:avLst/>
@@ -10030,29 +9873,29 @@
               <a:spcAft>
                 <a:spcPts val="0"/>
               </a:spcAft>
-              <a:defRPr sz="1100" b="0">
+              <a:defRPr sz="900" b="0">
                 <a:solidFill>
                   <a:srgbClr val="1A1A2E"/>
                 </a:solidFill>
-                <a:latin typeface="Arial"/>
+                <a:latin typeface="Calibri"/>
               </a:defRPr>
             </a:pPr>
             <a:r>
-              <a:t>• Setiap masalah → aplikasi baru</a:t>
-            </a:r>
-          </a:p>
-        </p:txBody>
-      </p:sp>
-      <p:sp>
-        <p:nvSpPr>
-          <p:cNvPr id="12" name="TextBox 11"/>
+              <a:t>• Puluhan aplikasi terpisah yang tidak saling terintegrasi</a:t>
+            </a:r>
+          </a:p>
+        </p:txBody>
+      </p:sp>
+      <p:sp>
+        <p:nvSpPr>
+          <p:cNvPr id="14" name="TextBox 13"/>
           <p:cNvSpPr txBox="1"/>
           <p:nvPr/>
         </p:nvSpPr>
         <p:spPr>
           <a:xfrm>
-            <a:off x="731520" y="1956815"/>
-            <a:ext cx="5090007" cy="228600"/>
+            <a:off x="685800" y="2624327"/>
+            <a:ext cx="5135727" cy="274320"/>
           </a:xfrm>
           <a:prstGeom prst="rect">
             <a:avLst/>
@@ -10070,29 +9913,29 @@
               <a:spcAft>
                 <a:spcPts val="0"/>
               </a:spcAft>
-              <a:defRPr sz="1100" b="0">
+              <a:defRPr sz="900" b="0">
                 <a:solidFill>
                   <a:srgbClr val="1A1A2E"/>
                 </a:solidFill>
-                <a:latin typeface="Arial"/>
+                <a:latin typeface="Calibri"/>
               </a:defRPr>
             </a:pPr>
             <a:r>
-              <a:t>• Masyarakat unduh puluhan aplikasi</a:t>
-            </a:r>
-          </a:p>
-        </p:txBody>
-      </p:sp>
-      <p:sp>
-        <p:nvSpPr>
-          <p:cNvPr id="13" name="TextBox 12"/>
+              <a:t>• Masyarakat dipaksa mengunduh banyak aplikasi berbeda</a:t>
+            </a:r>
+          </a:p>
+        </p:txBody>
+      </p:sp>
+      <p:sp>
+        <p:nvSpPr>
+          <p:cNvPr id="15" name="TextBox 14"/>
           <p:cNvSpPr txBox="1"/>
           <p:nvPr/>
         </p:nvSpPr>
         <p:spPr>
           <a:xfrm>
-            <a:off x="731520" y="2194559"/>
-            <a:ext cx="5090007" cy="228600"/>
+            <a:off x="685800" y="2916935"/>
+            <a:ext cx="5135727" cy="274320"/>
           </a:xfrm>
           <a:prstGeom prst="rect">
             <a:avLst/>
@@ -10110,142 +9953,22 @@
               <a:spcAft>
                 <a:spcPts val="0"/>
               </a:spcAft>
-              <a:defRPr sz="1100" b="0">
+              <a:defRPr sz="900" b="0">
                 <a:solidFill>
                   <a:srgbClr val="1A1A2E"/>
                 </a:solidFill>
-                <a:latin typeface="Arial"/>
+                <a:latin typeface="Calibri"/>
               </a:defRPr>
             </a:pPr>
             <a:r>
-              <a:t>• Data tersekat di masing-masing sistem</a:t>
-            </a:r>
-          </a:p>
-        </p:txBody>
-      </p:sp>
-      <p:sp>
-        <p:nvSpPr>
-          <p:cNvPr id="14" name="TextBox 13"/>
-          <p:cNvSpPr txBox="1"/>
-          <p:nvPr/>
-        </p:nvSpPr>
-        <p:spPr>
-          <a:xfrm>
-            <a:off x="731520" y="2432303"/>
-            <a:ext cx="5090007" cy="228600"/>
-          </a:xfrm>
-          <a:prstGeom prst="rect">
-            <a:avLst/>
-          </a:prstGeom>
-          <a:noFill/>
-        </p:spPr>
-        <p:txBody>
-          <a:bodyPr wrap="square"/>
-          <a:lstStyle/>
-          <a:p>
-            <a:pPr algn="l">
-              <a:spcBef>
-                <a:spcPts val="0"/>
-              </a:spcBef>
-              <a:spcAft>
-                <a:spcPts val="0"/>
-              </a:spcAft>
-              <a:defRPr sz="1100" b="0">
-                <a:solidFill>
-                  <a:srgbClr val="1A1A2E"/>
-                </a:solidFill>
-                <a:latin typeface="Arial"/>
-              </a:defRPr>
-            </a:pPr>
-            <a:r>
-              <a:t>• Tidak ada standar keamanan terpadu</a:t>
-            </a:r>
-          </a:p>
-        </p:txBody>
-      </p:sp>
-      <p:sp>
-        <p:nvSpPr>
-          <p:cNvPr id="15" name="TextBox 14"/>
-          <p:cNvSpPr txBox="1"/>
-          <p:nvPr/>
-        </p:nvSpPr>
-        <p:spPr>
-          <a:xfrm>
-            <a:off x="731520" y="2670047"/>
-            <a:ext cx="5090007" cy="228600"/>
-          </a:xfrm>
-          <a:prstGeom prst="rect">
-            <a:avLst/>
-          </a:prstGeom>
-          <a:noFill/>
-        </p:spPr>
-        <p:txBody>
-          <a:bodyPr wrap="square"/>
-          <a:lstStyle/>
-          <a:p>
-            <a:pPr algn="l">
-              <a:spcBef>
-                <a:spcPts val="0"/>
-              </a:spcBef>
-              <a:spcAft>
-                <a:spcPts val="0"/>
-              </a:spcAft>
-              <a:defRPr sz="1100" b="0">
-                <a:solidFill>
-                  <a:srgbClr val="1A1A2E"/>
-                </a:solidFill>
-                <a:latin typeface="Arial"/>
-              </a:defRPr>
-            </a:pPr>
-            <a:r>
-              <a:t>• Anggaran membengkak — tumpang tindih</a:t>
-            </a:r>
-          </a:p>
-        </p:txBody>
-      </p:sp>
-      <p:sp>
-        <p:nvSpPr>
-          <p:cNvPr id="16" name="TextBox 15"/>
-          <p:cNvSpPr txBox="1"/>
-          <p:nvPr/>
-        </p:nvSpPr>
-        <p:spPr>
-          <a:xfrm>
-            <a:off x="731520" y="2907791"/>
-            <a:ext cx="5090007" cy="228600"/>
-          </a:xfrm>
-          <a:prstGeom prst="rect">
-            <a:avLst/>
-          </a:prstGeom>
-          <a:noFill/>
-        </p:spPr>
-        <p:txBody>
-          <a:bodyPr wrap="square"/>
-          <a:lstStyle/>
-          <a:p>
-            <a:pPr algn="l">
-              <a:spcBef>
-                <a:spcPts val="0"/>
-              </a:spcBef>
-              <a:spcAft>
-                <a:spcPts val="0"/>
-              </a:spcAft>
-              <a:defRPr sz="1100" b="0">
-                <a:solidFill>
-                  <a:srgbClr val="1A1A2E"/>
-                </a:solidFill>
-                <a:latin typeface="Arial"/>
-              </a:defRPr>
-            </a:pPr>
-            <a:r>
-              <a:t>• Ego sektoral digital menguat</a:t>
-            </a:r>
-          </a:p>
-        </p:txBody>
-      </p:sp>
-      <p:sp>
-        <p:nvSpPr>
-          <p:cNvPr id="17" name="Rounded Rectangle 16"/>
+              <a:t>• Pemborosan anggaran TIK nasional</a:t>
+            </a:r>
+          </a:p>
+        </p:txBody>
+      </p:sp>
+      <p:sp>
+        <p:nvSpPr>
+          <p:cNvPr id="16" name="Rounded Rectangle 15"/>
           <p:cNvSpPr/>
           <p:nvPr/>
         </p:nvSpPr>
@@ -10292,7 +10015,7 @@
       </p:sp>
       <p:sp>
         <p:nvSpPr>
-          <p:cNvPr id="18" name="Rectangle 17"/>
+          <p:cNvPr id="17" name="Rectangle 16"/>
           <p:cNvSpPr/>
           <p:nvPr/>
         </p:nvSpPr>
@@ -10335,14 +10058,97 @@
       </p:sp>
       <p:sp>
         <p:nvSpPr>
+          <p:cNvPr id="18" name="Oval 17"/>
+          <p:cNvSpPr/>
+          <p:nvPr/>
+        </p:nvSpPr>
+        <p:spPr>
+          <a:xfrm>
+            <a:off x="6370167" y="1188719"/>
+            <a:ext cx="384048" cy="384048"/>
+          </a:xfrm>
+          <a:prstGeom prst="ellipse">
+            <a:avLst/>
+          </a:prstGeom>
+          <a:solidFill>
+            <a:srgbClr val="0B7C72"/>
+          </a:solidFill>
+          <a:ln>
+            <a:noFill/>
+          </a:ln>
+        </p:spPr>
+        <p:style>
+          <a:lnRef idx="1">
+            <a:schemeClr val="accent1"/>
+          </a:lnRef>
+          <a:fillRef idx="3">
+            <a:schemeClr val="accent1"/>
+          </a:fillRef>
+          <a:effectRef idx="2">
+            <a:schemeClr val="accent1"/>
+          </a:effectRef>
+          <a:fontRef idx="minor">
+            <a:schemeClr val="lt1"/>
+          </a:fontRef>
+        </p:style>
+        <p:txBody>
+          <a:bodyPr rtlCol="0" anchor="ctr"/>
+          <a:lstStyle/>
+          <a:p>
+            <a:pPr algn="ctr"/>
+          </a:p>
+        </p:txBody>
+      </p:sp>
+      <p:sp>
+        <p:nvSpPr>
           <p:cNvPr id="19" name="TextBox 18"/>
           <p:cNvSpPr txBox="1"/>
           <p:nvPr/>
         </p:nvSpPr>
         <p:spPr>
           <a:xfrm>
-            <a:off x="6415887" y="1188719"/>
-            <a:ext cx="5090007" cy="274320"/>
+            <a:off x="6446977" y="1247241"/>
+            <a:ext cx="230428" cy="230428"/>
+          </a:xfrm>
+          <a:prstGeom prst="rect">
+            <a:avLst/>
+          </a:prstGeom>
+          <a:noFill/>
+        </p:spPr>
+        <p:txBody>
+          <a:bodyPr wrap="square"/>
+          <a:lstStyle/>
+          <a:p>
+            <a:pPr algn="ctr">
+              <a:spcBef>
+                <a:spcPts val="0"/>
+              </a:spcBef>
+              <a:spcAft>
+                <a:spcPts val="0"/>
+              </a:spcAft>
+              <a:defRPr sz="1200" b="0">
+                <a:solidFill>
+                  <a:srgbClr val="FFFFFF"/>
+                </a:solidFill>
+                <a:latin typeface="Calibri"/>
+              </a:defRPr>
+            </a:pPr>
+            <a:r>
+              <a:t>💡</a:t>
+            </a:r>
+          </a:p>
+        </p:txBody>
+      </p:sp>
+      <p:sp>
+        <p:nvSpPr>
+          <p:cNvPr id="20" name="TextBox 19"/>
+          <p:cNvSpPr txBox="1"/>
+          <p:nvPr/>
+        </p:nvSpPr>
+        <p:spPr>
+          <a:xfrm>
+            <a:off x="6370167" y="1691639"/>
+            <a:ext cx="5135727" cy="274320"/>
           </a:xfrm>
           <a:prstGeom prst="rect">
             <a:avLst/>
@@ -10360,29 +10166,29 @@
               <a:spcAft>
                 <a:spcPts val="0"/>
               </a:spcAft>
-              <a:defRPr sz="1400" b="1">
+              <a:defRPr sz="1300" b="1">
                 <a:solidFill>
                   <a:srgbClr val="0B7C72"/>
                 </a:solidFill>
-                <a:latin typeface="Arial"/>
+                <a:latin typeface="Calibri"/>
               </a:defRPr>
             </a:pPr>
             <a:r>
-              <a:t>PARADIGMA SPBE MODERN</a:t>
-            </a:r>
-          </a:p>
-        </p:txBody>
-      </p:sp>
-      <p:sp>
-        <p:nvSpPr>
-          <p:cNvPr id="20" name="TextBox 19"/>
+              <a:t>Paradigma SPBE Modern</a:t>
+            </a:r>
+          </a:p>
+        </p:txBody>
+      </p:sp>
+      <p:sp>
+        <p:nvSpPr>
+          <p:cNvPr id="21" name="TextBox 20"/>
           <p:cNvSpPr txBox="1"/>
           <p:nvPr/>
         </p:nvSpPr>
         <p:spPr>
           <a:xfrm>
-            <a:off x="6415887" y="1481328"/>
-            <a:ext cx="5090007" cy="228600"/>
+            <a:off x="6370167" y="2039112"/>
+            <a:ext cx="5135727" cy="274320"/>
           </a:xfrm>
           <a:prstGeom prst="rect">
             <a:avLst/>
@@ -10400,29 +10206,29 @@
               <a:spcAft>
                 <a:spcPts val="0"/>
               </a:spcAft>
-              <a:defRPr sz="1100" b="0">
+              <a:defRPr sz="900" b="0">
                 <a:solidFill>
                   <a:srgbClr val="1A1A2E"/>
                 </a:solidFill>
-                <a:latin typeface="Arial"/>
+                <a:latin typeface="Calibri"/>
               </a:defRPr>
             </a:pPr>
             <a:r>
-              <a:t>• </a:t>
-            </a:r>
-          </a:p>
-        </p:txBody>
-      </p:sp>
-      <p:sp>
-        <p:nvSpPr>
-          <p:cNvPr id="21" name="TextBox 20"/>
+              <a:t>• Fokus pada interoperabilitas — sistem yang ada saling berbicara</a:t>
+            </a:r>
+          </a:p>
+        </p:txBody>
+      </p:sp>
+      <p:sp>
+        <p:nvSpPr>
+          <p:cNvPr id="22" name="TextBox 21"/>
           <p:cNvSpPr txBox="1"/>
           <p:nvPr/>
         </p:nvSpPr>
         <p:spPr>
           <a:xfrm>
-            <a:off x="6415887" y="1719072"/>
-            <a:ext cx="5090007" cy="228600"/>
+            <a:off x="6370167" y="2331720"/>
+            <a:ext cx="5135727" cy="274320"/>
           </a:xfrm>
           <a:prstGeom prst="rect">
             <a:avLst/>
@@ -10440,29 +10246,29 @@
               <a:spcAft>
                 <a:spcPts val="0"/>
               </a:spcAft>
-              <a:defRPr sz="1100" b="0">
+              <a:defRPr sz="900" b="0">
                 <a:solidFill>
                   <a:srgbClr val="1A1A2E"/>
                 </a:solidFill>
-                <a:latin typeface="Arial"/>
+                <a:latin typeface="Calibri"/>
               </a:defRPr>
             </a:pPr>
             <a:r>
-              <a:t>• Fokus pada interoperabilitas</a:t>
-            </a:r>
-          </a:p>
-        </p:txBody>
-      </p:sp>
-      <p:sp>
-        <p:nvSpPr>
-          <p:cNvPr id="22" name="TextBox 21"/>
+              <a:t>• Satu platform layanan terpadu (Super Apps)</a:t>
+            </a:r>
+          </a:p>
+        </p:txBody>
+      </p:sp>
+      <p:sp>
+        <p:nvSpPr>
+          <p:cNvPr id="23" name="TextBox 22"/>
           <p:cNvSpPr txBox="1"/>
           <p:nvPr/>
         </p:nvSpPr>
         <p:spPr>
           <a:xfrm>
-            <a:off x="6415887" y="1956815"/>
-            <a:ext cx="5090007" cy="228600"/>
+            <a:off x="6370167" y="2624327"/>
+            <a:ext cx="5135727" cy="274320"/>
           </a:xfrm>
           <a:prstGeom prst="rect">
             <a:avLst/>
@@ -10480,29 +10286,29 @@
               <a:spcAft>
                 <a:spcPts val="0"/>
               </a:spcAft>
-              <a:defRPr sz="1100" b="0">
+              <a:defRPr sz="900" b="0">
                 <a:solidFill>
                   <a:srgbClr val="1A1A2E"/>
                 </a:solidFill>
-                <a:latin typeface="Arial"/>
+                <a:latin typeface="Calibri"/>
               </a:defRPr>
             </a:pPr>
             <a:r>
-              <a:t>• Sistem yang ada saling berbicara</a:t>
-            </a:r>
-          </a:p>
-        </p:txBody>
-      </p:sp>
-      <p:sp>
-        <p:nvSpPr>
-          <p:cNvPr id="23" name="TextBox 22"/>
+              <a:t>• Efisien, transparan, aman, dan tepercaya</a:t>
+            </a:r>
+          </a:p>
+        </p:txBody>
+      </p:sp>
+      <p:sp>
+        <p:nvSpPr>
+          <p:cNvPr id="24" name="TextBox 23"/>
           <p:cNvSpPr txBox="1"/>
           <p:nvPr/>
         </p:nvSpPr>
         <p:spPr>
           <a:xfrm>
-            <a:off x="6415887" y="2194559"/>
-            <a:ext cx="5090007" cy="228600"/>
+            <a:off x="6370167" y="2916935"/>
+            <a:ext cx="5135727" cy="274320"/>
           </a:xfrm>
           <a:prstGeom prst="rect">
             <a:avLst/>
@@ -10520,142 +10326,22 @@
               <a:spcAft>
                 <a:spcPts val="0"/>
               </a:spcAft>
-              <a:defRPr sz="1100" b="0">
+              <a:defRPr sz="900" b="0">
                 <a:solidFill>
                   <a:srgbClr val="1A1A2E"/>
                 </a:solidFill>
-                <a:latin typeface="Arial"/>
+                <a:latin typeface="Calibri"/>
               </a:defRPr>
             </a:pPr>
             <a:r>
-              <a:t>• Bertukar data via Hub SPLP</a:t>
-            </a:r>
-          </a:p>
-        </p:txBody>
-      </p:sp>
-      <p:sp>
-        <p:nvSpPr>
-          <p:cNvPr id="24" name="TextBox 23"/>
-          <p:cNvSpPr txBox="1"/>
-          <p:nvPr/>
-        </p:nvSpPr>
-        <p:spPr>
-          <a:xfrm>
-            <a:off x="6415887" y="2432303"/>
-            <a:ext cx="5090007" cy="228600"/>
-          </a:xfrm>
-          <a:prstGeom prst="rect">
-            <a:avLst/>
-          </a:prstGeom>
-          <a:noFill/>
-        </p:spPr>
-        <p:txBody>
-          <a:bodyPr wrap="square"/>
-          <a:lstStyle/>
-          <a:p>
-            <a:pPr algn="l">
-              <a:spcBef>
-                <a:spcPts val="0"/>
-              </a:spcBef>
-              <a:spcAft>
-                <a:spcPts val="0"/>
-              </a:spcAft>
-              <a:defRPr sz="1100" b="0">
-                <a:solidFill>
-                  <a:srgbClr val="1A1A2E"/>
-                </a:solidFill>
-                <a:latin typeface="Arial"/>
-              </a:defRPr>
-            </a:pPr>
-            <a:r>
-              <a:t>• Satu pintu layanan — masyarakat cukup 1 aplikasi</a:t>
-            </a:r>
-          </a:p>
-        </p:txBody>
-      </p:sp>
-      <p:sp>
-        <p:nvSpPr>
-          <p:cNvPr id="25" name="TextBox 24"/>
-          <p:cNvSpPr txBox="1"/>
-          <p:nvPr/>
-        </p:nvSpPr>
-        <p:spPr>
-          <a:xfrm>
-            <a:off x="6415887" y="2670047"/>
-            <a:ext cx="5090007" cy="228600"/>
-          </a:xfrm>
-          <a:prstGeom prst="rect">
-            <a:avLst/>
-          </a:prstGeom>
-          <a:noFill/>
-        </p:spPr>
-        <p:txBody>
-          <a:bodyPr wrap="square"/>
-          <a:lstStyle/>
-          <a:p>
-            <a:pPr algn="l">
-              <a:spcBef>
-                <a:spcPts val="0"/>
-              </a:spcBef>
-              <a:spcAft>
-                <a:spcPts val="0"/>
-              </a:spcAft>
-              <a:defRPr sz="1100" b="0">
-                <a:solidFill>
-                  <a:srgbClr val="1A1A2E"/>
-                </a:solidFill>
-                <a:latin typeface="Arial"/>
-              </a:defRPr>
-            </a:pPr>
-            <a:r>
-              <a:t>• Efisien, aman, dan tepercaya</a:t>
-            </a:r>
-          </a:p>
-        </p:txBody>
-      </p:sp>
-      <p:sp>
-        <p:nvSpPr>
-          <p:cNvPr id="26" name="TextBox 25"/>
-          <p:cNvSpPr txBox="1"/>
-          <p:nvPr/>
-        </p:nvSpPr>
-        <p:spPr>
-          <a:xfrm>
-            <a:off x="6415887" y="2907791"/>
-            <a:ext cx="5090007" cy="228600"/>
-          </a:xfrm>
-          <a:prstGeom prst="rect">
-            <a:avLst/>
-          </a:prstGeom>
-          <a:noFill/>
-        </p:spPr>
-        <p:txBody>
-          <a:bodyPr wrap="square"/>
-          <a:lstStyle/>
-          <a:p>
-            <a:pPr algn="l">
-              <a:spcBef>
-                <a:spcPts val="0"/>
-              </a:spcBef>
-              <a:spcAft>
-                <a:spcPts val="0"/>
-              </a:spcAft>
-              <a:defRPr sz="1100" b="0">
-                <a:solidFill>
-                  <a:srgbClr val="1A1A2E"/>
-                </a:solidFill>
-                <a:latin typeface="Arial"/>
-              </a:defRPr>
-            </a:pPr>
-            <a:r>
-              <a:t>• Kolaborasi antar instansi</a:t>
-            </a:r>
-          </a:p>
-        </p:txBody>
-      </p:sp>
-      <p:sp>
-        <p:nvSpPr>
-          <p:cNvPr id="27" name="Rectangle 26"/>
+              <a:t>• Masyarakat cukup satu aplikasi untuk semua layanan</a:t>
+            </a:r>
+          </a:p>
+        </p:txBody>
+      </p:sp>
+      <p:sp>
+        <p:nvSpPr>
+          <p:cNvPr id="25" name="Rectangle 24"/>
           <p:cNvSpPr/>
           <p:nvPr/>
         </p:nvSpPr>
@@ -10698,7 +10384,7 @@
       </p:sp>
       <p:sp>
         <p:nvSpPr>
-          <p:cNvPr id="28" name="TextBox 27"/>
+          <p:cNvPr id="26" name="TextBox 25"/>
           <p:cNvSpPr txBox="1"/>
           <p:nvPr/>
         </p:nvSpPr>
@@ -10727,18 +10413,18 @@
                 <a:solidFill>
                   <a:srgbClr val="64748B"/>
                 </a:solidFill>
-                <a:latin typeface="Arial"/>
+                <a:latin typeface="Calibri"/>
               </a:defRPr>
             </a:pPr>
             <a:r>
-              <a:t>Sumber: Perpres No. 95/2018, Perpres No. 132/2022, &amp; Pedoman SPBE Kemenpan-RB</a:t>
-            </a:r>
-          </a:p>
-        </p:txBody>
-      </p:sp>
-      <p:sp>
-        <p:nvSpPr>
-          <p:cNvPr id="29" name="TextBox 28"/>
+              <a:t>Penerapan Sistem Pemerintahan Berbasis Elektronik (SPBE)</a:t>
+            </a:r>
+          </a:p>
+        </p:txBody>
+      </p:sp>
+      <p:sp>
+        <p:nvSpPr>
+          <p:cNvPr id="27" name="TextBox 26"/>
           <p:cNvSpPr txBox="1"/>
           <p:nvPr/>
         </p:nvSpPr>
@@ -10767,7 +10453,7 @@
                 <a:solidFill>
                   <a:srgbClr val="64748B"/>
                 </a:solidFill>
-                <a:latin typeface="Arial"/>
+                <a:latin typeface="Calibri"/>
               </a:defRPr>
             </a:pPr>
             <a:r>
@@ -11005,7 +10691,7 @@
                 <a:solidFill>
                   <a:srgbClr val="C8962E"/>
                 </a:solidFill>
-                <a:latin typeface="Arial"/>
+                <a:latin typeface="Calibri"/>
               </a:defRPr>
             </a:pPr>
             <a:r>
@@ -11045,7 +10731,7 @@
                 <a:solidFill>
                   <a:srgbClr val="FFFFFF"/>
                 </a:solidFill>
-                <a:latin typeface="Arial"/>
+                <a:latin typeface="Calibri"/>
               </a:defRPr>
             </a:pPr>
             <a:r>
@@ -11085,15 +10771,15 @@
                 <a:solidFill>
                   <a:srgbClr val="E8EDF5"/>
                 </a:solidFill>
-                <a:latin typeface="Arial"/>
+                <a:latin typeface="Calibri"/>
               </a:defRPr>
             </a:pPr>
             <a:r>
-              <a:t>Mewujudkan Birokrasi Terintegrasi, Efisien, Aman, dan Tepercaya</a:t>
+              <a:t>Bersama Mewujudkan Birokrasi Digital</a:t>
             </a:r>
             <a:br/>
             <a:r>
-              <a:t>Melalui Transformasi SPBE</a:t>
+              <a:t>Terintegrasi, Efisien, Aman, dan Tepercaya</a:t>
             </a:r>
           </a:p>
         </p:txBody>
@@ -11129,7 +10815,7 @@
                 <a:solidFill>
                   <a:srgbClr val="64748B"/>
                 </a:solidFill>
-                <a:latin typeface="Arial"/>
+                <a:latin typeface="Calibri"/>
               </a:defRPr>
             </a:pPr>
             <a:r>
@@ -11367,11 +11053,11 @@
                 <a:solidFill>
                   <a:srgbClr val="FFFFFF"/>
                 </a:solidFill>
-                <a:latin typeface="Arial Black"/>
+                <a:latin typeface="Georgia"/>
               </a:defRPr>
             </a:pPr>
             <a:r>
-              <a:t>5 Pokok Bahasan Memandu Transformasi SPBE Instansi</a:t>
+              <a:t>Lima Pokok Bahasan Memandu Transformasi SPBE Instansi</a:t>
             </a:r>
           </a:p>
         </p:txBody>
@@ -11407,7 +11093,7 @@
                 <a:solidFill>
                   <a:srgbClr val="64748B"/>
                 </a:solidFill>
-                <a:latin typeface="Arial"/>
+                <a:latin typeface="Calibri"/>
               </a:defRPr>
             </a:pPr>
             <a:r>
@@ -11507,7 +11193,7 @@
                 <a:solidFill>
                   <a:srgbClr val="FFFFFF"/>
                 </a:solidFill>
-                <a:latin typeface="Arial"/>
+                <a:latin typeface="Calibri"/>
               </a:defRPr>
             </a:pPr>
             <a:r>
@@ -11547,11 +11233,11 @@
                 <a:solidFill>
                   <a:srgbClr val="1A1A2E"/>
                 </a:solidFill>
-                <a:latin typeface="Arial"/>
+                <a:latin typeface="Calibri"/>
               </a:defRPr>
             </a:pPr>
             <a:r>
-              <a:t>Konsep Dasar &amp; Landasan Hukum SPBE</a:t>
+              <a:t>Transformasi SPBE</a:t>
             </a:r>
           </a:p>
         </p:txBody>
@@ -11647,7 +11333,7 @@
                 <a:solidFill>
                   <a:srgbClr val="FFFFFF"/>
                 </a:solidFill>
-                <a:latin typeface="Arial"/>
+                <a:latin typeface="Calibri"/>
               </a:defRPr>
             </a:pPr>
             <a:r>
@@ -11687,11 +11373,11 @@
                 <a:solidFill>
                   <a:srgbClr val="1A1A2E"/>
                 </a:solidFill>
-                <a:latin typeface="Arial"/>
+                <a:latin typeface="Calibri"/>
               </a:defRPr>
             </a:pPr>
             <a:r>
-              <a:t>Kerangka Arsitektur SPBE</a:t>
+              <a:t>Arsitektur &amp; Kerangka Kerja</a:t>
             </a:r>
           </a:p>
         </p:txBody>
@@ -11787,7 +11473,7 @@
                 <a:solidFill>
                   <a:srgbClr val="FFFFFF"/>
                 </a:solidFill>
-                <a:latin typeface="Arial"/>
+                <a:latin typeface="Calibri"/>
               </a:defRPr>
             </a:pPr>
             <a:r>
@@ -11827,11 +11513,11 @@
                 <a:solidFill>
                   <a:srgbClr val="1A1A2E"/>
                 </a:solidFill>
-                <a:latin typeface="Arial"/>
+                <a:latin typeface="Calibri"/>
               </a:defRPr>
             </a:pPr>
             <a:r>
-              <a:t>4 Domain Evaluasi Tingkat Kematangan</a:t>
+              <a:t>4 Domain Utama Evaluasi SPBE</a:t>
             </a:r>
           </a:p>
         </p:txBody>
@@ -11927,7 +11613,7 @@
                 <a:solidFill>
                   <a:srgbClr val="FFFFFF"/>
                 </a:solidFill>
-                <a:latin typeface="Arial"/>
+                <a:latin typeface="Calibri"/>
               </a:defRPr>
             </a:pPr>
             <a:r>
@@ -11967,7 +11653,7 @@
                 <a:solidFill>
                   <a:srgbClr val="1A1A2E"/>
                 </a:solidFill>
-                <a:latin typeface="Arial"/>
+                <a:latin typeface="Calibri"/>
               </a:defRPr>
             </a:pPr>
             <a:r>
@@ -12067,7 +11753,7 @@
                 <a:solidFill>
                   <a:srgbClr val="FFFFFF"/>
                 </a:solidFill>
-                <a:latin typeface="Arial"/>
+                <a:latin typeface="Calibri"/>
               </a:defRPr>
             </a:pPr>
             <a:r>
@@ -12107,11 +11793,11 @@
                 <a:solidFill>
                   <a:srgbClr val="1A1A2E"/>
                 </a:solidFill>
-                <a:latin typeface="Arial"/>
+                <a:latin typeface="Calibri"/>
               </a:defRPr>
             </a:pPr>
             <a:r>
-              <a:t>Prinsip Interoperabilitas</a:t>
+              <a:t>Prinsip Utama &amp; Kesimpulan</a:t>
             </a:r>
           </a:p>
         </p:txBody>
@@ -12190,11 +11876,11 @@
                 <a:solidFill>
                   <a:srgbClr val="64748B"/>
                 </a:solidFill>
-                <a:latin typeface="Arial"/>
+                <a:latin typeface="Calibri"/>
               </a:defRPr>
             </a:pPr>
             <a:r>
-              <a:t>Sumber: Perpres No. 95/2018, Perpres No. 132/2022, &amp; Pedoman SPBE Kemenpan-RB</a:t>
+              <a:t>Penerapan Sistem Pemerintahan Berbasis Elektronik (SPBE)</a:t>
             </a:r>
           </a:p>
         </p:txBody>
@@ -12230,7 +11916,7 @@
                 <a:solidFill>
                   <a:srgbClr val="64748B"/>
                 </a:solidFill>
-                <a:latin typeface="Arial"/>
+                <a:latin typeface="Calibri"/>
               </a:defRPr>
             </a:pPr>
             <a:r>
@@ -12511,15 +12197,15 @@
                 <a:solidFill>
                   <a:srgbClr val="FFFFFF"/>
                 </a:solidFill>
-                <a:latin typeface="Arial"/>
+                <a:latin typeface="Calibri"/>
               </a:defRPr>
             </a:pPr>
             <a:r>
-              <a:t>KONSEP DASAR</a:t>
+              <a:t>BAB 1</a:t>
             </a:r>
             <a:br/>
             <a:r>
-              <a:t>SPBE</a:t>
+              <a:t>TRANSFORMASI SPBE</a:t>
             </a:r>
           </a:p>
         </p:txBody>
@@ -12555,7 +12241,7 @@
                 <a:solidFill>
                   <a:srgbClr val="C8962E"/>
                 </a:solidFill>
-                <a:latin typeface="Arial"/>
+                <a:latin typeface="Calibri"/>
               </a:defRPr>
             </a:pPr>
             <a:r>
@@ -12595,11 +12281,11 @@
                 <a:solidFill>
                   <a:srgbClr val="64748B"/>
                 </a:solidFill>
-                <a:latin typeface="Arial"/>
+                <a:latin typeface="Calibri"/>
               </a:defRPr>
             </a:pPr>
             <a:r>
-              <a:t>Paradigma Baru Birokrasi Pemerintahan</a:t>
+              <a:t>Perpres No. 95/2018 &amp; Perpres No. 132/2022</a:t>
             </a:r>
           </a:p>
         </p:txBody>
@@ -12833,7 +12519,7 @@
                 <a:solidFill>
                   <a:srgbClr val="FFFFFF"/>
                 </a:solidFill>
-                <a:latin typeface="Arial Black"/>
+                <a:latin typeface="Georgia"/>
               </a:defRPr>
             </a:pPr>
             <a:r>
@@ -12873,7 +12559,7 @@
                 <a:solidFill>
                   <a:srgbClr val="64748B"/>
                 </a:solidFill>
-                <a:latin typeface="Arial"/>
+                <a:latin typeface="Calibri"/>
               </a:defRPr>
             </a:pPr>
             <a:r>
@@ -12891,7 +12577,7 @@
         <p:spPr>
           <a:xfrm>
             <a:off x="548640" y="1051560"/>
-            <a:ext cx="5410047" cy="2537460"/>
+            <a:ext cx="3515258" cy="5349240"/>
           </a:xfrm>
           <a:prstGeom prst="roundRect">
             <a:avLst>
@@ -12938,7 +12624,7 @@
         <p:spPr>
           <a:xfrm>
             <a:off x="548640" y="1051560"/>
-            <a:ext cx="45720" cy="2537460"/>
+            <a:ext cx="45720" cy="5349240"/>
           </a:xfrm>
           <a:prstGeom prst="rect">
             <a:avLst/>
@@ -13046,7 +12732,7 @@
                 <a:solidFill>
                   <a:srgbClr val="FFFFFF"/>
                 </a:solidFill>
-                <a:latin typeface="Arial"/>
+                <a:latin typeface="Calibri"/>
               </a:defRPr>
             </a:pPr>
             <a:r>
@@ -13064,7 +12750,7 @@
         <p:spPr>
           <a:xfrm>
             <a:off x="685800" y="1691639"/>
-            <a:ext cx="5135727" cy="274320"/>
+            <a:ext cx="3240938" cy="274320"/>
           </a:xfrm>
           <a:prstGeom prst="rect">
             <a:avLst/>
@@ -13086,11 +12772,11 @@
                 <a:solidFill>
                   <a:srgbClr val="2563EB"/>
                 </a:solidFill>
-                <a:latin typeface="Arial"/>
+                <a:latin typeface="Calibri"/>
               </a:defRPr>
             </a:pPr>
             <a:r>
-              <a:t>Amanat Perpres No. 95/2018</a:t>
+              <a:t>Apa Itu SPBE?</a:t>
             </a:r>
           </a:p>
         </p:txBody>
@@ -13104,7 +12790,7 @@
         <p:spPr>
           <a:xfrm>
             <a:off x="685800" y="2039112"/>
-            <a:ext cx="5135727" cy="274320"/>
+            <a:ext cx="3240938" cy="338328"/>
           </a:xfrm>
           <a:prstGeom prst="rect">
             <a:avLst/>
@@ -13126,11 +12812,11 @@
                 <a:solidFill>
                   <a:srgbClr val="1A1A2E"/>
                 </a:solidFill>
-                <a:latin typeface="Arial"/>
+                <a:latin typeface="Calibri"/>
               </a:defRPr>
             </a:pPr>
             <a:r>
-              <a:t>• SPBE adalah penyelenggaraan pemerintahan yang memanfaatkan TIK</a:t>
+              <a:t>• Penyelenggaraan pemerintahan berbasis elektronik</a:t>
             </a:r>
           </a:p>
         </p:txBody>
@@ -13143,8 +12829,8 @@
         </p:nvSpPr>
         <p:spPr>
           <a:xfrm>
-            <a:off x="685800" y="2331720"/>
-            <a:ext cx="5135727" cy="274320"/>
+            <a:off x="685800" y="2395728"/>
+            <a:ext cx="3240938" cy="338328"/>
           </a:xfrm>
           <a:prstGeom prst="rect">
             <a:avLst/>
@@ -13166,11 +12852,11 @@
                 <a:solidFill>
                   <a:srgbClr val="1A1A2E"/>
                 </a:solidFill>
-                <a:latin typeface="Arial"/>
+                <a:latin typeface="Calibri"/>
               </a:defRPr>
             </a:pPr>
             <a:r>
-              <a:t>• Memberi layanan kepada instansi, ASN, pelaku bisnis, dan masyarakat</a:t>
+              <a:t>• Transformasi birokrasi terintegrasi, efisien, aman, tepercaya</a:t>
             </a:r>
           </a:p>
         </p:txBody>
@@ -13183,8 +12869,8 @@
         </p:nvSpPr>
         <p:spPr>
           <a:xfrm>
-            <a:off x="685800" y="2624327"/>
-            <a:ext cx="5135727" cy="274320"/>
+            <a:off x="685800" y="2752344"/>
+            <a:ext cx="3240938" cy="274320"/>
           </a:xfrm>
           <a:prstGeom prst="rect">
             <a:avLst/>
@@ -13206,11 +12892,11 @@
                 <a:solidFill>
                   <a:srgbClr val="1A1A2E"/>
                 </a:solidFill>
-                <a:latin typeface="Arial"/>
+                <a:latin typeface="Calibri"/>
               </a:defRPr>
             </a:pPr>
             <a:r>
-              <a:t>• Menjadi dasar bagi seluruh transformasi digital pemerintahan</a:t>
+              <a:t>• Berdasarkan Perpres No. 95/2018 &amp; No. 132/2022</a:t>
             </a:r>
           </a:p>
         </p:txBody>
@@ -13223,8 +12909,8 @@
         </p:nvSpPr>
         <p:spPr>
           <a:xfrm>
-            <a:off x="6233007" y="1051560"/>
-            <a:ext cx="5410047" cy="2537460"/>
+            <a:off x="4338218" y="1051560"/>
+            <a:ext cx="3515258" cy="5349240"/>
           </a:xfrm>
           <a:prstGeom prst="roundRect">
             <a:avLst>
@@ -13270,8 +12956,8 @@
         </p:nvSpPr>
         <p:spPr>
           <a:xfrm>
-            <a:off x="6233007" y="1051560"/>
-            <a:ext cx="45720" cy="2537460"/>
+            <a:off x="4338218" y="1051560"/>
+            <a:ext cx="45720" cy="5349240"/>
           </a:xfrm>
           <a:prstGeom prst="rect">
             <a:avLst/>
@@ -13313,7 +12999,7 @@
         </p:nvSpPr>
         <p:spPr>
           <a:xfrm>
-            <a:off x="6370167" y="1188719"/>
+            <a:off x="4475378" y="1188719"/>
             <a:ext cx="384048" cy="384048"/>
           </a:xfrm>
           <a:prstGeom prst="ellipse">
@@ -13356,7 +13042,7 @@
         </p:nvSpPr>
         <p:spPr>
           <a:xfrm>
-            <a:off x="6446977" y="1247241"/>
+            <a:off x="4552188" y="1247241"/>
             <a:ext cx="230428" cy="230428"/>
           </a:xfrm>
           <a:prstGeom prst="rect">
@@ -13379,7 +13065,7 @@
                 <a:solidFill>
                   <a:srgbClr val="FFFFFF"/>
                 </a:solidFill>
-                <a:latin typeface="Arial"/>
+                <a:latin typeface="Calibri"/>
               </a:defRPr>
             </a:pPr>
             <a:r>
@@ -13396,8 +13082,8 @@
         </p:nvSpPr>
         <p:spPr>
           <a:xfrm>
-            <a:off x="6370167" y="1691639"/>
-            <a:ext cx="5135727" cy="274320"/>
+            <a:off x="4475378" y="1691639"/>
+            <a:ext cx="3240938" cy="274320"/>
           </a:xfrm>
           <a:prstGeom prst="rect">
             <a:avLst/>
@@ -13419,11 +13105,11 @@
                 <a:solidFill>
                   <a:srgbClr val="0B7C72"/>
                 </a:solidFill>
-                <a:latin typeface="Arial"/>
+                <a:latin typeface="Calibri"/>
               </a:defRPr>
             </a:pPr>
             <a:r>
-              <a:t>Penyempurnaan Perpres No. 132/2022</a:t>
+              <a:t>Landasan Hukum</a:t>
             </a:r>
           </a:p>
         </p:txBody>
@@ -13436,8 +13122,8 @@
         </p:nvSpPr>
         <p:spPr>
           <a:xfrm>
-            <a:off x="6370167" y="2039112"/>
-            <a:ext cx="5135727" cy="274320"/>
+            <a:off x="4475378" y="2039112"/>
+            <a:ext cx="3240938" cy="274320"/>
           </a:xfrm>
           <a:prstGeom prst="rect">
             <a:avLst/>
@@ -13459,11 +13145,11 @@
                 <a:solidFill>
                   <a:srgbClr val="1A1A2E"/>
                 </a:solidFill>
-                <a:latin typeface="Arial"/>
+                <a:latin typeface="Calibri"/>
               </a:defRPr>
             </a:pPr>
             <a:r>
-              <a:t>• Memperkuat arsitektur SPBE nasional yang terpadu</a:t>
+              <a:t>• Perpres No. 95 Tahun 2018 — kerangka awal SPBE</a:t>
             </a:r>
           </a:p>
         </p:txBody>
@@ -13476,8 +13162,8 @@
         </p:nvSpPr>
         <p:spPr>
           <a:xfrm>
-            <a:off x="6370167" y="2331720"/>
-            <a:ext cx="5135727" cy="274320"/>
+            <a:off x="4475378" y="2331720"/>
+            <a:ext cx="3240938" cy="338328"/>
           </a:xfrm>
           <a:prstGeom prst="rect">
             <a:avLst/>
@@ -13499,11 +13185,11 @@
                 <a:solidFill>
                   <a:srgbClr val="1A1A2E"/>
                 </a:solidFill>
-                <a:latin typeface="Arial"/>
+                <a:latin typeface="Calibri"/>
               </a:defRPr>
             </a:pPr>
             <a:r>
-              <a:t>• Menekankan interoperabilitas dan keamanan informasi</a:t>
+              <a:t>• Perpres No. 132 Tahun 2022 — penyempurnaan arah kebijakan</a:t>
             </a:r>
           </a:p>
         </p:txBody>
@@ -13516,8 +13202,8 @@
         </p:nvSpPr>
         <p:spPr>
           <a:xfrm>
-            <a:off x="6370167" y="2624327"/>
-            <a:ext cx="5135727" cy="274320"/>
+            <a:off x="4475378" y="2688336"/>
+            <a:ext cx="3240938" cy="274320"/>
           </a:xfrm>
           <a:prstGeom prst="rect">
             <a:avLst/>
@@ -13539,11 +13225,11 @@
                 <a:solidFill>
                   <a:srgbClr val="1A1A2E"/>
                 </a:solidFill>
-                <a:latin typeface="Arial"/>
+                <a:latin typeface="Calibri"/>
               </a:defRPr>
             </a:pPr>
             <a:r>
-              <a:t>• Mendorong konsolidasi infrastruktur ke Pusat Data Nasional</a:t>
+              <a:t>• Pedoman teknis dari Kemenpan-RB</a:t>
             </a:r>
           </a:p>
         </p:txBody>
@@ -13556,8 +13242,8 @@
         </p:nvSpPr>
         <p:spPr>
           <a:xfrm>
-            <a:off x="548640" y="3863339"/>
-            <a:ext cx="5410047" cy="2537460"/>
+            <a:off x="8127796" y="1051560"/>
+            <a:ext cx="3515258" cy="5349240"/>
           </a:xfrm>
           <a:prstGeom prst="roundRect">
             <a:avLst>
@@ -13603,8 +13289,8 @@
         </p:nvSpPr>
         <p:spPr>
           <a:xfrm>
-            <a:off x="548640" y="3863339"/>
-            <a:ext cx="45720" cy="2537460"/>
+            <a:off x="8127796" y="1051560"/>
+            <a:ext cx="45720" cy="5349240"/>
           </a:xfrm>
           <a:prstGeom prst="rect">
             <a:avLst/>
@@ -13646,7 +13332,7 @@
         </p:nvSpPr>
         <p:spPr>
           <a:xfrm>
-            <a:off x="685800" y="4000500"/>
+            <a:off x="8264956" y="1188719"/>
             <a:ext cx="384048" cy="384048"/>
           </a:xfrm>
           <a:prstGeom prst="ellipse">
@@ -13689,7 +13375,7 @@
         </p:nvSpPr>
         <p:spPr>
           <a:xfrm>
-            <a:off x="762609" y="4059021"/>
+            <a:off x="8341766" y="1247241"/>
             <a:ext cx="230428" cy="230428"/>
           </a:xfrm>
           <a:prstGeom prst="rect">
@@ -13712,11 +13398,11 @@
                 <a:solidFill>
                   <a:srgbClr val="FFFFFF"/>
                 </a:solidFill>
-                <a:latin typeface="Arial"/>
+                <a:latin typeface="Calibri"/>
               </a:defRPr>
             </a:pPr>
             <a:r>
-              <a:t>🔄</a:t>
+              <a:t>🎯</a:t>
             </a:r>
           </a:p>
         </p:txBody>
@@ -13729,8 +13415,8 @@
         </p:nvSpPr>
         <p:spPr>
           <a:xfrm>
-            <a:off x="685800" y="4503420"/>
-            <a:ext cx="5135727" cy="274320"/>
+            <a:off x="8264956" y="1691639"/>
+            <a:ext cx="3240938" cy="274320"/>
           </a:xfrm>
           <a:prstGeom prst="rect">
             <a:avLst/>
@@ -13752,11 +13438,11 @@
                 <a:solidFill>
                   <a:srgbClr val="A0522D"/>
                 </a:solidFill>
-                <a:latin typeface="Arial"/>
+                <a:latin typeface="Calibri"/>
               </a:defRPr>
             </a:pPr>
             <a:r>
-              <a:t>Transformasi Menyeluruh</a:t>
+              <a:t>Tujuan Strategis</a:t>
             </a:r>
           </a:p>
         </p:txBody>
@@ -13769,8 +13455,8 @@
         </p:nvSpPr>
         <p:spPr>
           <a:xfrm>
-            <a:off x="685800" y="4850892"/>
-            <a:ext cx="5135727" cy="274320"/>
+            <a:off x="8264956" y="2039112"/>
+            <a:ext cx="3240938" cy="274320"/>
           </a:xfrm>
           <a:prstGeom prst="rect">
             <a:avLst/>
@@ -13792,11 +13478,11 @@
                 <a:solidFill>
                   <a:srgbClr val="1A1A2E"/>
                 </a:solidFill>
-                <a:latin typeface="Arial"/>
+                <a:latin typeface="Calibri"/>
               </a:defRPr>
             </a:pPr>
             <a:r>
-              <a:t>• Bukan sekadar digitalisasi proses manual</a:t>
+              <a:t>• Menghilangkan ego sektoral digital</a:t>
             </a:r>
           </a:p>
         </p:txBody>
@@ -13809,8 +13495,8 @@
         </p:nvSpPr>
         <p:spPr>
           <a:xfrm>
-            <a:off x="685800" y="5143500"/>
-            <a:ext cx="5135727" cy="274320"/>
+            <a:off x="8264956" y="2331720"/>
+            <a:ext cx="3240938" cy="274320"/>
           </a:xfrm>
           <a:prstGeom prst="rect">
             <a:avLst/>
@@ -13832,11 +13518,11 @@
                 <a:solidFill>
                   <a:srgbClr val="1A1A2E"/>
                 </a:solidFill>
-                <a:latin typeface="Arial"/>
+                <a:latin typeface="Calibri"/>
               </a:defRPr>
             </a:pPr>
             <a:r>
-              <a:t>• Mencakup aspek proses bisnis, data, aplikasi, infrastruktur</a:t>
+              <a:t>• Birokrasi modern, transparan, dan akuntabel</a:t>
             </a:r>
           </a:p>
         </p:txBody>
@@ -13849,8 +13535,8 @@
         </p:nvSpPr>
         <p:spPr>
           <a:xfrm>
-            <a:off x="685800" y="5436108"/>
-            <a:ext cx="5135727" cy="274320"/>
+            <a:off x="8264956" y="2624327"/>
+            <a:ext cx="3240938" cy="274320"/>
           </a:xfrm>
           <a:prstGeom prst="rect">
             <a:avLst/>
@@ -13872,351 +13558,18 @@
                 <a:solidFill>
                   <a:srgbClr val="1A1A2E"/>
                 </a:solidFill>
-                <a:latin typeface="Arial"/>
+                <a:latin typeface="Calibri"/>
               </a:defRPr>
             </a:pPr>
             <a:r>
-              <a:t>• Menciptakan birokrasi yang terintegrasi, efisien, aman, tepercaya</a:t>
-            </a:r>
-          </a:p>
-        </p:txBody>
-      </p:sp>
-      <p:sp>
-        <p:nvSpPr>
-          <p:cNvPr id="31" name="Rounded Rectangle 30"/>
-          <p:cNvSpPr/>
-          <p:nvPr/>
-        </p:nvSpPr>
-        <p:spPr>
-          <a:xfrm>
-            <a:off x="6233007" y="3863339"/>
-            <a:ext cx="5410047" cy="2537460"/>
-          </a:xfrm>
-          <a:prstGeom prst="roundRect">
-            <a:avLst>
-              <a:gd name="adj" fmla="val 4000"/>
-            </a:avLst>
-          </a:prstGeom>
-          <a:solidFill>
-            <a:srgbClr val="FFFFFF"/>
-          </a:solidFill>
-          <a:ln w="6350">
-            <a:solidFill>
-              <a:srgbClr val="E8EDF5"/>
-            </a:solidFill>
-          </a:ln>
-        </p:spPr>
-        <p:style>
-          <a:lnRef idx="1">
-            <a:schemeClr val="accent1"/>
-          </a:lnRef>
-          <a:fillRef idx="3">
-            <a:schemeClr val="accent1"/>
-          </a:fillRef>
-          <a:effectRef idx="2">
-            <a:schemeClr val="accent1"/>
-          </a:effectRef>
-          <a:fontRef idx="minor">
-            <a:schemeClr val="lt1"/>
-          </a:fontRef>
-        </p:style>
-        <p:txBody>
-          <a:bodyPr rtlCol="0" anchor="ctr"/>
-          <a:lstStyle/>
-          <a:p>
-            <a:pPr algn="ctr"/>
-          </a:p>
-        </p:txBody>
-      </p:sp>
-      <p:sp>
-        <p:nvSpPr>
-          <p:cNvPr id="32" name="Rectangle 31"/>
-          <p:cNvSpPr/>
-          <p:nvPr/>
-        </p:nvSpPr>
-        <p:spPr>
-          <a:xfrm>
-            <a:off x="6233007" y="3863339"/>
-            <a:ext cx="45720" cy="2537460"/>
-          </a:xfrm>
-          <a:prstGeom prst="rect">
-            <a:avLst/>
-          </a:prstGeom>
-          <a:solidFill>
-            <a:srgbClr val="1B3A6B"/>
-          </a:solidFill>
-          <a:ln>
-            <a:noFill/>
-          </a:ln>
-        </p:spPr>
-        <p:style>
-          <a:lnRef idx="1">
-            <a:schemeClr val="accent1"/>
-          </a:lnRef>
-          <a:fillRef idx="3">
-            <a:schemeClr val="accent1"/>
-          </a:fillRef>
-          <a:effectRef idx="2">
-            <a:schemeClr val="accent1"/>
-          </a:effectRef>
-          <a:fontRef idx="minor">
-            <a:schemeClr val="lt1"/>
-          </a:fontRef>
-        </p:style>
-        <p:txBody>
-          <a:bodyPr rtlCol="0" anchor="ctr"/>
-          <a:lstStyle/>
-          <a:p>
-            <a:pPr algn="ctr"/>
-          </a:p>
-        </p:txBody>
-      </p:sp>
-      <p:sp>
-        <p:nvSpPr>
-          <p:cNvPr id="33" name="Oval 32"/>
-          <p:cNvSpPr/>
-          <p:nvPr/>
-        </p:nvSpPr>
-        <p:spPr>
-          <a:xfrm>
-            <a:off x="6370167" y="4000500"/>
-            <a:ext cx="384048" cy="384048"/>
-          </a:xfrm>
-          <a:prstGeom prst="ellipse">
-            <a:avLst/>
-          </a:prstGeom>
-          <a:solidFill>
-            <a:srgbClr val="1B3A6B"/>
-          </a:solidFill>
-          <a:ln>
-            <a:noFill/>
-          </a:ln>
-        </p:spPr>
-        <p:style>
-          <a:lnRef idx="1">
-            <a:schemeClr val="accent1"/>
-          </a:lnRef>
-          <a:fillRef idx="3">
-            <a:schemeClr val="accent1"/>
-          </a:fillRef>
-          <a:effectRef idx="2">
-            <a:schemeClr val="accent1"/>
-          </a:effectRef>
-          <a:fontRef idx="minor">
-            <a:schemeClr val="lt1"/>
-          </a:fontRef>
-        </p:style>
-        <p:txBody>
-          <a:bodyPr rtlCol="0" anchor="ctr"/>
-          <a:lstStyle/>
-          <a:p>
-            <a:pPr algn="ctr"/>
-          </a:p>
-        </p:txBody>
-      </p:sp>
-      <p:sp>
-        <p:nvSpPr>
-          <p:cNvPr id="34" name="TextBox 33"/>
-          <p:cNvSpPr txBox="1"/>
-          <p:nvPr/>
-        </p:nvSpPr>
-        <p:spPr>
-          <a:xfrm>
-            <a:off x="6446977" y="4059021"/>
-            <a:ext cx="230428" cy="230428"/>
-          </a:xfrm>
-          <a:prstGeom prst="rect">
-            <a:avLst/>
-          </a:prstGeom>
-          <a:noFill/>
-        </p:spPr>
-        <p:txBody>
-          <a:bodyPr wrap="square"/>
-          <a:lstStyle/>
-          <a:p>
-            <a:pPr algn="ctr">
-              <a:spcBef>
-                <a:spcPts val="0"/>
-              </a:spcBef>
-              <a:spcAft>
-                <a:spcPts val="0"/>
-              </a:spcAft>
-              <a:defRPr sz="1200" b="0">
-                <a:solidFill>
-                  <a:srgbClr val="FFFFFF"/>
-                </a:solidFill>
-                <a:latin typeface="Arial"/>
-              </a:defRPr>
-            </a:pPr>
-            <a:r>
-              <a:t>🚫</a:t>
-            </a:r>
-          </a:p>
-        </p:txBody>
-      </p:sp>
-      <p:sp>
-        <p:nvSpPr>
-          <p:cNvPr id="35" name="TextBox 34"/>
-          <p:cNvSpPr txBox="1"/>
-          <p:nvPr/>
-        </p:nvSpPr>
-        <p:spPr>
-          <a:xfrm>
-            <a:off x="6370167" y="4503420"/>
-            <a:ext cx="5135727" cy="274320"/>
-          </a:xfrm>
-          <a:prstGeom prst="rect">
-            <a:avLst/>
-          </a:prstGeom>
-          <a:noFill/>
-        </p:spPr>
-        <p:txBody>
-          <a:bodyPr wrap="square"/>
-          <a:lstStyle/>
-          <a:p>
-            <a:pPr algn="l">
-              <a:spcBef>
-                <a:spcPts val="0"/>
-              </a:spcBef>
-              <a:spcAft>
-                <a:spcPts val="0"/>
-              </a:spcAft>
-              <a:defRPr sz="1300" b="1">
-                <a:solidFill>
-                  <a:srgbClr val="1B3A6B"/>
-                </a:solidFill>
-                <a:latin typeface="Arial"/>
-              </a:defRPr>
-            </a:pPr>
-            <a:r>
-              <a:t>Antisipasi Ego Sektoral Digital</a:t>
-            </a:r>
-          </a:p>
-        </p:txBody>
-      </p:sp>
-      <p:sp>
-        <p:nvSpPr>
-          <p:cNvPr id="36" name="TextBox 35"/>
-          <p:cNvSpPr txBox="1"/>
-          <p:nvPr/>
-        </p:nvSpPr>
-        <p:spPr>
-          <a:xfrm>
-            <a:off x="6370167" y="4850892"/>
-            <a:ext cx="5135727" cy="274320"/>
-          </a:xfrm>
-          <a:prstGeom prst="rect">
-            <a:avLst/>
-          </a:prstGeom>
-          <a:noFill/>
-        </p:spPr>
-        <p:txBody>
-          <a:bodyPr wrap="square"/>
-          <a:lstStyle/>
-          <a:p>
-            <a:pPr algn="l">
-              <a:spcBef>
-                <a:spcPts val="0"/>
-              </a:spcBef>
-              <a:spcAft>
-                <a:spcPts val="0"/>
-              </a:spcAft>
-              <a:defRPr sz="900" b="0">
-                <a:solidFill>
-                  <a:srgbClr val="1A1A2E"/>
-                </a:solidFill>
-                <a:latin typeface="Arial"/>
-              </a:defRPr>
-            </a:pPr>
-            <a:r>
-              <a:t>• Digitalisasi harus bersandar pada kerangka kerja terpadu</a:t>
-            </a:r>
-          </a:p>
-        </p:txBody>
-      </p:sp>
-      <p:sp>
-        <p:nvSpPr>
-          <p:cNvPr id="37" name="TextBox 36"/>
-          <p:cNvSpPr txBox="1"/>
-          <p:nvPr/>
-        </p:nvSpPr>
-        <p:spPr>
-          <a:xfrm>
-            <a:off x="6370167" y="5143500"/>
-            <a:ext cx="5135727" cy="274320"/>
-          </a:xfrm>
-          <a:prstGeom prst="rect">
-            <a:avLst/>
-          </a:prstGeom>
-          <a:noFill/>
-        </p:spPr>
-        <p:txBody>
-          <a:bodyPr wrap="square"/>
-          <a:lstStyle/>
-          <a:p>
-            <a:pPr algn="l">
-              <a:spcBef>
-                <a:spcPts val="0"/>
-              </a:spcBef>
-              <a:spcAft>
-                <a:spcPts val="0"/>
-              </a:spcAft>
-              <a:defRPr sz="900" b="0">
-                <a:solidFill>
-                  <a:srgbClr val="1A1A2E"/>
-                </a:solidFill>
-                <a:latin typeface="Arial"/>
-              </a:defRPr>
-            </a:pPr>
-            <a:r>
-              <a:t>• Setiap instansi terikat dalam arsitektur SPBE nasional</a:t>
-            </a:r>
-          </a:p>
-        </p:txBody>
-      </p:sp>
-      <p:sp>
-        <p:nvSpPr>
-          <p:cNvPr id="38" name="TextBox 37"/>
-          <p:cNvSpPr txBox="1"/>
-          <p:nvPr/>
-        </p:nvSpPr>
-        <p:spPr>
-          <a:xfrm>
-            <a:off x="6370167" y="5436108"/>
-            <a:ext cx="5135727" cy="274320"/>
-          </a:xfrm>
-          <a:prstGeom prst="rect">
-            <a:avLst/>
-          </a:prstGeom>
-          <a:noFill/>
-        </p:spPr>
-        <p:txBody>
-          <a:bodyPr wrap="square"/>
-          <a:lstStyle/>
-          <a:p>
-            <a:pPr algn="l">
-              <a:spcBef>
-                <a:spcPts val="0"/>
-              </a:spcBef>
-              <a:spcAft>
-                <a:spcPts val="0"/>
-              </a:spcAft>
-              <a:defRPr sz="900" b="0">
-                <a:solidFill>
-                  <a:srgbClr val="1A1A2E"/>
-                </a:solidFill>
-                <a:latin typeface="Arial"/>
-              </a:defRPr>
-            </a:pPr>
-            <a:r>
-              <a:t>• Menghindari pembuatan aplikasi sektoral yang tumpang tindih</a:t>
-            </a:r>
-          </a:p>
-        </p:txBody>
-      </p:sp>
-      <p:sp>
-        <p:nvSpPr>
-          <p:cNvPr id="39" name="Rectangle 38"/>
+              <a:t>• Layanan publik &amp; administrasi yang prima</a:t>
+            </a:r>
+          </a:p>
+        </p:txBody>
+      </p:sp>
+      <p:sp>
+        <p:nvSpPr>
+          <p:cNvPr id="31" name="Rectangle 30"/>
           <p:cNvSpPr/>
           <p:nvPr/>
         </p:nvSpPr>
@@ -14259,7 +13612,7 @@
       </p:sp>
       <p:sp>
         <p:nvSpPr>
-          <p:cNvPr id="40" name="TextBox 39"/>
+          <p:cNvPr id="32" name="TextBox 31"/>
           <p:cNvSpPr txBox="1"/>
           <p:nvPr/>
         </p:nvSpPr>
@@ -14288,18 +13641,18 @@
                 <a:solidFill>
                   <a:srgbClr val="64748B"/>
                 </a:solidFill>
-                <a:latin typeface="Arial"/>
+                <a:latin typeface="Calibri"/>
               </a:defRPr>
             </a:pPr>
             <a:r>
-              <a:t>Sumber: Perpres No. 95/2018, Perpres No. 132/2022, &amp; Pedoman SPBE Kemenpan-RB</a:t>
-            </a:r>
-          </a:p>
-        </p:txBody>
-      </p:sp>
-      <p:sp>
-        <p:nvSpPr>
-          <p:cNvPr id="41" name="TextBox 40"/>
+              <a:t>Penerapan Sistem Pemerintahan Berbasis Elektronik (SPBE)</a:t>
+            </a:r>
+          </a:p>
+        </p:txBody>
+      </p:sp>
+      <p:sp>
+        <p:nvSpPr>
+          <p:cNvPr id="33" name="TextBox 32"/>
           <p:cNvSpPr txBox="1"/>
           <p:nvPr/>
         </p:nvSpPr>
@@ -14328,7 +13681,7 @@
                 <a:solidFill>
                   <a:srgbClr val="64748B"/>
                 </a:solidFill>
-                <a:latin typeface="Arial"/>
+                <a:latin typeface="Calibri"/>
               </a:defRPr>
             </a:pPr>
             <a:r>
@@ -14523,11 +13876,11 @@
                 <a:solidFill>
                   <a:srgbClr val="FFFFFF"/>
                 </a:solidFill>
-                <a:latin typeface="Arial Black"/>
+                <a:latin typeface="Georgia"/>
               </a:defRPr>
             </a:pPr>
             <a:r>
-              <a:t>SPBE Bukan Digitalisasi — Ini Transformasi Sistemik Birokrasi</a:t>
+              <a:t>SPBE Bukan Digitalisasi — Ini Transformasi Sistemik Birokrasi Negara</a:t>
             </a:r>
           </a:p>
         </p:txBody>
@@ -14563,7 +13916,7 @@
                 <a:solidFill>
                   <a:srgbClr val="64748B"/>
                 </a:solidFill>
-                <a:latin typeface="Arial"/>
+                <a:latin typeface="Calibri"/>
               </a:defRPr>
             </a:pPr>
             <a:r>
@@ -14664,14 +14017,97 @@
       </p:sp>
       <p:sp>
         <p:nvSpPr>
-          <p:cNvPr id="9" name="TextBox 8"/>
+          <p:cNvPr id="9" name="Oval 8"/>
+          <p:cNvSpPr/>
+          <p:nvPr/>
+        </p:nvSpPr>
+        <p:spPr>
+          <a:xfrm>
+            <a:off x="685800" y="1188719"/>
+            <a:ext cx="384048" cy="384048"/>
+          </a:xfrm>
+          <a:prstGeom prst="ellipse">
+            <a:avLst/>
+          </a:prstGeom>
+          <a:solidFill>
+            <a:srgbClr val="DC2626"/>
+          </a:solidFill>
+          <a:ln>
+            <a:noFill/>
+          </a:ln>
+        </p:spPr>
+        <p:style>
+          <a:lnRef idx="1">
+            <a:schemeClr val="accent1"/>
+          </a:lnRef>
+          <a:fillRef idx="3">
+            <a:schemeClr val="accent1"/>
+          </a:fillRef>
+          <a:effectRef idx="2">
+            <a:schemeClr val="accent1"/>
+          </a:effectRef>
+          <a:fontRef idx="minor">
+            <a:schemeClr val="lt1"/>
+          </a:fontRef>
+        </p:style>
+        <p:txBody>
+          <a:bodyPr rtlCol="0" anchor="ctr"/>
+          <a:lstStyle/>
+          <a:p>
+            <a:pPr algn="ctr"/>
+          </a:p>
+        </p:txBody>
+      </p:sp>
+      <p:sp>
+        <p:nvSpPr>
+          <p:cNvPr id="10" name="TextBox 9"/>
           <p:cNvSpPr txBox="1"/>
           <p:nvPr/>
         </p:nvSpPr>
         <p:spPr>
           <a:xfrm>
-            <a:off x="731520" y="1188719"/>
-            <a:ext cx="5090007" cy="274320"/>
+            <a:off x="762609" y="1247241"/>
+            <a:ext cx="230428" cy="230428"/>
+          </a:xfrm>
+          <a:prstGeom prst="rect">
+            <a:avLst/>
+          </a:prstGeom>
+          <a:noFill/>
+        </p:spPr>
+        <p:txBody>
+          <a:bodyPr wrap="square"/>
+          <a:lstStyle/>
+          <a:p>
+            <a:pPr algn="ctr">
+              <a:spcBef>
+                <a:spcPts val="0"/>
+              </a:spcBef>
+              <a:spcAft>
+                <a:spcPts val="0"/>
+              </a:spcAft>
+              <a:defRPr sz="1200" b="0">
+                <a:solidFill>
+                  <a:srgbClr val="FFFFFF"/>
+                </a:solidFill>
+                <a:latin typeface="Calibri"/>
+              </a:defRPr>
+            </a:pPr>
+            <a:r>
+              <a:t>⚠️</a:t>
+            </a:r>
+          </a:p>
+        </p:txBody>
+      </p:sp>
+      <p:sp>
+        <p:nvSpPr>
+          <p:cNvPr id="11" name="TextBox 10"/>
+          <p:cNvSpPr txBox="1"/>
+          <p:nvPr/>
+        </p:nvSpPr>
+        <p:spPr>
+          <a:xfrm>
+            <a:off x="685800" y="1691639"/>
+            <a:ext cx="5135727" cy="274320"/>
           </a:xfrm>
           <a:prstGeom prst="rect">
             <a:avLst/>
@@ -14689,29 +14125,29 @@
               <a:spcAft>
                 <a:spcPts val="0"/>
               </a:spcAft>
-              <a:defRPr sz="1400" b="1">
+              <a:defRPr sz="1300" b="1">
                 <a:solidFill>
                   <a:srgbClr val="DC2626"/>
                 </a:solidFill>
-                <a:latin typeface="Arial"/>
+                <a:latin typeface="Calibri"/>
               </a:defRPr>
             </a:pPr>
             <a:r>
-              <a:t>DIGITALISASI SEMATA</a:t>
-            </a:r>
-          </a:p>
-        </p:txBody>
-      </p:sp>
-      <p:sp>
-        <p:nvSpPr>
-          <p:cNvPr id="10" name="TextBox 9"/>
+              <a:t>Kesalahan Umum</a:t>
+            </a:r>
+          </a:p>
+        </p:txBody>
+      </p:sp>
+      <p:sp>
+        <p:nvSpPr>
+          <p:cNvPr id="12" name="TextBox 11"/>
           <p:cNvSpPr txBox="1"/>
           <p:nvPr/>
         </p:nvSpPr>
         <p:spPr>
           <a:xfrm>
-            <a:off x="731520" y="1481328"/>
-            <a:ext cx="5090007" cy="228600"/>
+            <a:off x="685800" y="2039112"/>
+            <a:ext cx="5135727" cy="274320"/>
           </a:xfrm>
           <a:prstGeom prst="rect">
             <a:avLst/>
@@ -14729,29 +14165,29 @@
               <a:spcAft>
                 <a:spcPts val="0"/>
               </a:spcAft>
-              <a:defRPr sz="1100" b="0">
+              <a:defRPr sz="900" b="0">
                 <a:solidFill>
                   <a:srgbClr val="1A1A2E"/>
                 </a:solidFill>
-                <a:latin typeface="Arial"/>
+                <a:latin typeface="Calibri"/>
               </a:defRPr>
             </a:pPr>
             <a:r>
-              <a:t>• </a:t>
-            </a:r>
-          </a:p>
-        </p:txBody>
-      </p:sp>
-      <p:sp>
-        <p:nvSpPr>
-          <p:cNvPr id="11" name="TextBox 10"/>
+              <a:t>• Digitalisasi dianggap = membuat aplikasi baru</a:t>
+            </a:r>
+          </a:p>
+        </p:txBody>
+      </p:sp>
+      <p:sp>
+        <p:nvSpPr>
+          <p:cNvPr id="13" name="TextBox 12"/>
           <p:cNvSpPr txBox="1"/>
           <p:nvPr/>
         </p:nvSpPr>
         <p:spPr>
           <a:xfrm>
-            <a:off x="731520" y="1719072"/>
-            <a:ext cx="5090007" cy="228600"/>
+            <a:off x="685800" y="2331720"/>
+            <a:ext cx="5135727" cy="274320"/>
           </a:xfrm>
           <a:prstGeom prst="rect">
             <a:avLst/>
@@ -14769,29 +14205,29 @@
               <a:spcAft>
                 <a:spcPts val="0"/>
               </a:spcAft>
-              <a:defRPr sz="1100" b="0">
+              <a:defRPr sz="900" b="0">
                 <a:solidFill>
                   <a:srgbClr val="1A1A2E"/>
                 </a:solidFill>
-                <a:latin typeface="Arial"/>
+                <a:latin typeface="Calibri"/>
               </a:defRPr>
             </a:pPr>
             <a:r>
-              <a:t>• Memindahkan kertas ke aplikasi</a:t>
-            </a:r>
-          </a:p>
-        </p:txBody>
-      </p:sp>
-      <p:sp>
-        <p:nvSpPr>
-          <p:cNvPr id="12" name="TextBox 11"/>
+              <a:t>• Setiap masalah → aplikasi baru → ego sektoral digital</a:t>
+            </a:r>
+          </a:p>
+        </p:txBody>
+      </p:sp>
+      <p:sp>
+        <p:nvSpPr>
+          <p:cNvPr id="14" name="TextBox 13"/>
           <p:cNvSpPr txBox="1"/>
           <p:nvPr/>
         </p:nvSpPr>
         <p:spPr>
           <a:xfrm>
-            <a:off x="731520" y="1956815"/>
-            <a:ext cx="5090007" cy="228600"/>
+            <a:off x="685800" y="2624327"/>
+            <a:ext cx="5135727" cy="274320"/>
           </a:xfrm>
           <a:prstGeom prst="rect">
             <a:avLst/>
@@ -14809,29 +14245,29 @@
               <a:spcAft>
                 <a:spcPts val="0"/>
               </a:spcAft>
-              <a:defRPr sz="1100" b="0">
+              <a:defRPr sz="900" b="0">
                 <a:solidFill>
                   <a:srgbClr val="1A1A2E"/>
                 </a:solidFill>
-                <a:latin typeface="Arial"/>
+                <a:latin typeface="Calibri"/>
               </a:defRPr>
             </a:pPr>
             <a:r>
-              <a:t>• Membuat aplikasi baru untuk setiap masalah</a:t>
-            </a:r>
-          </a:p>
-        </p:txBody>
-      </p:sp>
-      <p:sp>
-        <p:nvSpPr>
-          <p:cNvPr id="13" name="TextBox 12"/>
+              <a:t>• Puluhan aplikasi terpisah, tidak saling terhubung</a:t>
+            </a:r>
+          </a:p>
+        </p:txBody>
+      </p:sp>
+      <p:sp>
+        <p:nvSpPr>
+          <p:cNvPr id="15" name="TextBox 14"/>
           <p:cNvSpPr txBox="1"/>
           <p:nvPr/>
         </p:nvSpPr>
         <p:spPr>
           <a:xfrm>
-            <a:off x="731520" y="2194559"/>
-            <a:ext cx="5090007" cy="228600"/>
+            <a:off x="685800" y="2916935"/>
+            <a:ext cx="5135727" cy="274320"/>
           </a:xfrm>
           <a:prstGeom prst="rect">
             <a:avLst/>
@@ -14849,142 +14285,22 @@
               <a:spcAft>
                 <a:spcPts val="0"/>
               </a:spcAft>
-              <a:defRPr sz="1100" b="0">
+              <a:defRPr sz="900" b="0">
                 <a:solidFill>
                   <a:srgbClr val="1A1A2E"/>
                 </a:solidFill>
-                <a:latin typeface="Arial"/>
+                <a:latin typeface="Calibri"/>
               </a:defRPr>
             </a:pPr>
             <a:r>
-              <a:t>• Berfokus pada teknologi, bukan proses</a:t>
-            </a:r>
-          </a:p>
-        </p:txBody>
-      </p:sp>
-      <p:sp>
-        <p:nvSpPr>
-          <p:cNvPr id="14" name="TextBox 13"/>
-          <p:cNvSpPr txBox="1"/>
-          <p:nvPr/>
-        </p:nvSpPr>
-        <p:spPr>
-          <a:xfrm>
-            <a:off x="731520" y="2432303"/>
-            <a:ext cx="5090007" cy="228600"/>
-          </a:xfrm>
-          <a:prstGeom prst="rect">
-            <a:avLst/>
-          </a:prstGeom>
-          <a:noFill/>
-        </p:spPr>
-        <p:txBody>
-          <a:bodyPr wrap="square"/>
-          <a:lstStyle/>
-          <a:p>
-            <a:pPr algn="l">
-              <a:spcBef>
-                <a:spcPts val="0"/>
-              </a:spcBef>
-              <a:spcAft>
-                <a:spcPts val="0"/>
-              </a:spcAft>
-              <a:defRPr sz="1100" b="0">
-                <a:solidFill>
-                  <a:srgbClr val="1A1A2E"/>
-                </a:solidFill>
-                <a:latin typeface="Arial"/>
-              </a:defRPr>
-            </a:pPr>
-            <a:r>
-              <a:t>• Rentan menciptakan ego sektoral digital</a:t>
-            </a:r>
-          </a:p>
-        </p:txBody>
-      </p:sp>
-      <p:sp>
-        <p:nvSpPr>
-          <p:cNvPr id="15" name="TextBox 14"/>
-          <p:cNvSpPr txBox="1"/>
-          <p:nvPr/>
-        </p:nvSpPr>
-        <p:spPr>
-          <a:xfrm>
-            <a:off x="731520" y="2670047"/>
-            <a:ext cx="5090007" cy="228600"/>
-          </a:xfrm>
-          <a:prstGeom prst="rect">
-            <a:avLst/>
-          </a:prstGeom>
-          <a:noFill/>
-        </p:spPr>
-        <p:txBody>
-          <a:bodyPr wrap="square"/>
-          <a:lstStyle/>
-          <a:p>
-            <a:pPr algn="l">
-              <a:spcBef>
-                <a:spcPts val="0"/>
-              </a:spcBef>
-              <a:spcAft>
-                <a:spcPts val="0"/>
-              </a:spcAft>
-              <a:defRPr sz="1100" b="0">
-                <a:solidFill>
-                  <a:srgbClr val="1A1A2E"/>
-                </a:solidFill>
-                <a:latin typeface="Arial"/>
-              </a:defRPr>
-            </a:pPr>
-            <a:r>
-              <a:t>• Aplikasi tumpang tindih &amp; tidak terintegrasi</a:t>
-            </a:r>
-          </a:p>
-        </p:txBody>
-      </p:sp>
-      <p:sp>
-        <p:nvSpPr>
-          <p:cNvPr id="16" name="TextBox 15"/>
-          <p:cNvSpPr txBox="1"/>
-          <p:nvPr/>
-        </p:nvSpPr>
-        <p:spPr>
-          <a:xfrm>
-            <a:off x="731520" y="2907791"/>
-            <a:ext cx="5090007" cy="228600"/>
-          </a:xfrm>
-          <a:prstGeom prst="rect">
-            <a:avLst/>
-          </a:prstGeom>
-          <a:noFill/>
-        </p:spPr>
-        <p:txBody>
-          <a:bodyPr wrap="square"/>
-          <a:lstStyle/>
-          <a:p>
-            <a:pPr algn="l">
-              <a:spcBef>
-                <a:spcPts val="0"/>
-              </a:spcBef>
-              <a:spcAft>
-                <a:spcPts val="0"/>
-              </a:spcAft>
-              <a:defRPr sz="1100" b="0">
-                <a:solidFill>
-                  <a:srgbClr val="1A1A2E"/>
-                </a:solidFill>
-                <a:latin typeface="Arial"/>
-              </a:defRPr>
-            </a:pPr>
-            <a:r>
-              <a:t>• Pemborosan anggaran TIK yang signifikan</a:t>
-            </a:r>
-          </a:p>
-        </p:txBody>
-      </p:sp>
-      <p:sp>
-        <p:nvSpPr>
-          <p:cNvPr id="17" name="Rounded Rectangle 16"/>
+              <a:t>• Pemborosan anggaran TIK &amp; beban masyarakat</a:t>
+            </a:r>
+          </a:p>
+        </p:txBody>
+      </p:sp>
+      <p:sp>
+        <p:nvSpPr>
+          <p:cNvPr id="16" name="Rounded Rectangle 15"/>
           <p:cNvSpPr/>
           <p:nvPr/>
         </p:nvSpPr>
@@ -15031,7 +14347,7 @@
       </p:sp>
       <p:sp>
         <p:nvSpPr>
-          <p:cNvPr id="18" name="Rectangle 17"/>
+          <p:cNvPr id="17" name="Rectangle 16"/>
           <p:cNvSpPr/>
           <p:nvPr/>
         </p:nvSpPr>
@@ -15074,14 +14390,97 @@
       </p:sp>
       <p:sp>
         <p:nvSpPr>
+          <p:cNvPr id="18" name="Oval 17"/>
+          <p:cNvSpPr/>
+          <p:nvPr/>
+        </p:nvSpPr>
+        <p:spPr>
+          <a:xfrm>
+            <a:off x="6370167" y="1188719"/>
+            <a:ext cx="384048" cy="384048"/>
+          </a:xfrm>
+          <a:prstGeom prst="ellipse">
+            <a:avLst/>
+          </a:prstGeom>
+          <a:solidFill>
+            <a:srgbClr val="0B7C72"/>
+          </a:solidFill>
+          <a:ln>
+            <a:noFill/>
+          </a:ln>
+        </p:spPr>
+        <p:style>
+          <a:lnRef idx="1">
+            <a:schemeClr val="accent1"/>
+          </a:lnRef>
+          <a:fillRef idx="3">
+            <a:schemeClr val="accent1"/>
+          </a:fillRef>
+          <a:effectRef idx="2">
+            <a:schemeClr val="accent1"/>
+          </a:effectRef>
+          <a:fontRef idx="minor">
+            <a:schemeClr val="lt1"/>
+          </a:fontRef>
+        </p:style>
+        <p:txBody>
+          <a:bodyPr rtlCol="0" anchor="ctr"/>
+          <a:lstStyle/>
+          <a:p>
+            <a:pPr algn="ctr"/>
+          </a:p>
+        </p:txBody>
+      </p:sp>
+      <p:sp>
+        <p:nvSpPr>
           <p:cNvPr id="19" name="TextBox 18"/>
           <p:cNvSpPr txBox="1"/>
           <p:nvPr/>
         </p:nvSpPr>
         <p:spPr>
           <a:xfrm>
-            <a:off x="6415887" y="1188719"/>
-            <a:ext cx="5090007" cy="274320"/>
+            <a:off x="6446977" y="1247241"/>
+            <a:ext cx="230428" cy="230428"/>
+          </a:xfrm>
+          <a:prstGeom prst="rect">
+            <a:avLst/>
+          </a:prstGeom>
+          <a:noFill/>
+        </p:spPr>
+        <p:txBody>
+          <a:bodyPr wrap="square"/>
+          <a:lstStyle/>
+          <a:p>
+            <a:pPr algn="ctr">
+              <a:spcBef>
+                <a:spcPts val="0"/>
+              </a:spcBef>
+              <a:spcAft>
+                <a:spcPts val="0"/>
+              </a:spcAft>
+              <a:defRPr sz="1200" b="0">
+                <a:solidFill>
+                  <a:srgbClr val="FFFFFF"/>
+                </a:solidFill>
+                <a:latin typeface="Calibri"/>
+              </a:defRPr>
+            </a:pPr>
+            <a:r>
+              <a:t>💡</a:t>
+            </a:r>
+          </a:p>
+        </p:txBody>
+      </p:sp>
+      <p:sp>
+        <p:nvSpPr>
+          <p:cNvPr id="20" name="TextBox 19"/>
+          <p:cNvSpPr txBox="1"/>
+          <p:nvPr/>
+        </p:nvSpPr>
+        <p:spPr>
+          <a:xfrm>
+            <a:off x="6370167" y="1691639"/>
+            <a:ext cx="5135727" cy="274320"/>
           </a:xfrm>
           <a:prstGeom prst="rect">
             <a:avLst/>
@@ -15099,29 +14498,29 @@
               <a:spcAft>
                 <a:spcPts val="0"/>
               </a:spcAft>
-              <a:defRPr sz="1400" b="1">
+              <a:defRPr sz="1300" b="1">
                 <a:solidFill>
                   <a:srgbClr val="0B7C72"/>
                 </a:solidFill>
-                <a:latin typeface="Arial"/>
+                <a:latin typeface="Calibri"/>
               </a:defRPr>
             </a:pPr>
             <a:r>
-              <a:t>TRANSFORMASI SPBE</a:t>
-            </a:r>
-          </a:p>
-        </p:txBody>
-      </p:sp>
-      <p:sp>
-        <p:nvSpPr>
-          <p:cNvPr id="20" name="TextBox 19"/>
+              <a:t>Paradigma SPBE Modern</a:t>
+            </a:r>
+          </a:p>
+        </p:txBody>
+      </p:sp>
+      <p:sp>
+        <p:nvSpPr>
+          <p:cNvPr id="21" name="TextBox 20"/>
           <p:cNvSpPr txBox="1"/>
           <p:nvPr/>
         </p:nvSpPr>
         <p:spPr>
           <a:xfrm>
-            <a:off x="6415887" y="1481328"/>
-            <a:ext cx="5090007" cy="228600"/>
+            <a:off x="6370167" y="2039112"/>
+            <a:ext cx="5135727" cy="274320"/>
           </a:xfrm>
           <a:prstGeom prst="rect">
             <a:avLst/>
@@ -15139,29 +14538,29 @@
               <a:spcAft>
                 <a:spcPts val="0"/>
               </a:spcAft>
-              <a:defRPr sz="1100" b="0">
+              <a:defRPr sz="900" b="0">
                 <a:solidFill>
                   <a:srgbClr val="1A1A2E"/>
                 </a:solidFill>
-                <a:latin typeface="Arial"/>
+                <a:latin typeface="Calibri"/>
               </a:defRPr>
             </a:pPr>
             <a:r>
-              <a:t>• </a:t>
-            </a:r>
-          </a:p>
-        </p:txBody>
-      </p:sp>
-      <p:sp>
-        <p:nvSpPr>
-          <p:cNvPr id="21" name="TextBox 20"/>
+              <a:t>• Kerangka kerja terpadu — Tata Kelola &amp; Manajemen sebagai fondasi</a:t>
+            </a:r>
+          </a:p>
+        </p:txBody>
+      </p:sp>
+      <p:sp>
+        <p:nvSpPr>
+          <p:cNvPr id="22" name="TextBox 21"/>
           <p:cNvSpPr txBox="1"/>
           <p:nvPr/>
         </p:nvSpPr>
         <p:spPr>
           <a:xfrm>
-            <a:off x="6415887" y="1719072"/>
-            <a:ext cx="5090007" cy="228600"/>
+            <a:off x="6370167" y="2331720"/>
+            <a:ext cx="5135727" cy="274320"/>
           </a:xfrm>
           <a:prstGeom prst="rect">
             <a:avLst/>
@@ -15179,29 +14578,29 @@
               <a:spcAft>
                 <a:spcPts val="0"/>
               </a:spcAft>
-              <a:defRPr sz="1100" b="0">
+              <a:defRPr sz="900" b="0">
                 <a:solidFill>
                   <a:srgbClr val="1A1A2E"/>
                 </a:solidFill>
-                <a:latin typeface="Arial"/>
+                <a:latin typeface="Calibri"/>
               </a:defRPr>
             </a:pPr>
             <a:r>
-              <a:t>• Menata ulang proses bisnis secara menyeluruh</a:t>
-            </a:r>
-          </a:p>
-        </p:txBody>
-      </p:sp>
-      <p:sp>
-        <p:nvSpPr>
-          <p:cNvPr id="22" name="TextBox 21"/>
+              <a:t>• Proses bisnis, data, aplikasi, infrastruktur, keamanan saling menopang</a:t>
+            </a:r>
+          </a:p>
+        </p:txBody>
+      </p:sp>
+      <p:sp>
+        <p:nvSpPr>
+          <p:cNvPr id="23" name="TextBox 22"/>
           <p:cNvSpPr txBox="1"/>
           <p:nvPr/>
         </p:nvSpPr>
         <p:spPr>
           <a:xfrm>
-            <a:off x="6415887" y="1956815"/>
-            <a:ext cx="5090007" cy="228600"/>
+            <a:off x="6370167" y="2624327"/>
+            <a:ext cx="5135727" cy="274320"/>
           </a:xfrm>
           <a:prstGeom prst="rect">
             <a:avLst/>
@@ -15219,29 +14618,29 @@
               <a:spcAft>
                 <a:spcPts val="0"/>
               </a:spcAft>
-              <a:defRPr sz="1100" b="0">
+              <a:defRPr sz="900" b="0">
                 <a:solidFill>
                   <a:srgbClr val="1A1A2E"/>
                 </a:solidFill>
-                <a:latin typeface="Arial"/>
+                <a:latin typeface="Calibri"/>
               </a:defRPr>
             </a:pPr>
             <a:r>
-              <a:t>• Interoperabilitas antar sistem yang sudah ada</a:t>
-            </a:r>
-          </a:p>
-        </p:txBody>
-      </p:sp>
-      <p:sp>
-        <p:nvSpPr>
-          <p:cNvPr id="23" name="TextBox 22"/>
+              <a:t>• Interoperabilitas: sistem bisa saling berbicara &amp; bertukar data</a:t>
+            </a:r>
+          </a:p>
+        </p:txBody>
+      </p:sp>
+      <p:sp>
+        <p:nvSpPr>
+          <p:cNvPr id="24" name="TextBox 23"/>
           <p:cNvSpPr txBox="1"/>
           <p:nvPr/>
         </p:nvSpPr>
         <p:spPr>
           <a:xfrm>
-            <a:off x="6415887" y="2194559"/>
-            <a:ext cx="5090007" cy="228600"/>
+            <a:off x="6370167" y="2916935"/>
+            <a:ext cx="5135727" cy="274320"/>
           </a:xfrm>
           <a:prstGeom prst="rect">
             <a:avLst/>
@@ -15259,142 +14658,22 @@
               <a:spcAft>
                 <a:spcPts val="0"/>
               </a:spcAft>
-              <a:defRPr sz="1100" b="0">
+              <a:defRPr sz="900" b="0">
                 <a:solidFill>
                   <a:srgbClr val="1A1A2E"/>
                 </a:solidFill>
-                <a:latin typeface="Arial"/>
+                <a:latin typeface="Calibri"/>
               </a:defRPr>
             </a:pPr>
             <a:r>
-              <a:t>• Berfokus pada layanan terpadu (user-centric)</a:t>
-            </a:r>
-          </a:p>
-        </p:txBody>
-      </p:sp>
-      <p:sp>
-        <p:nvSpPr>
-          <p:cNvPr id="24" name="TextBox 23"/>
-          <p:cNvSpPr txBox="1"/>
-          <p:nvPr/>
-        </p:nvSpPr>
-        <p:spPr>
-          <a:xfrm>
-            <a:off x="6415887" y="2432303"/>
-            <a:ext cx="5090007" cy="228600"/>
-          </a:xfrm>
-          <a:prstGeom prst="rect">
-            <a:avLst/>
-          </a:prstGeom>
-          <a:noFill/>
-        </p:spPr>
-        <p:txBody>
-          <a:bodyPr wrap="square"/>
-          <a:lstStyle/>
-          <a:p>
-            <a:pPr algn="l">
-              <a:spcBef>
-                <a:spcPts val="0"/>
-              </a:spcBef>
-              <a:spcAft>
-                <a:spcPts val="0"/>
-              </a:spcAft>
-              <a:defRPr sz="1100" b="0">
-                <a:solidFill>
-                  <a:srgbClr val="1A1A2E"/>
-                </a:solidFill>
-                <a:latin typeface="Arial"/>
-              </a:defRPr>
-            </a:pPr>
-            <a:r>
-              <a:t>• Satu platform terintegasi — efisien &amp; aman</a:t>
-            </a:r>
-          </a:p>
-        </p:txBody>
-      </p:sp>
-      <p:sp>
-        <p:nvSpPr>
-          <p:cNvPr id="25" name="TextBox 24"/>
-          <p:cNvSpPr txBox="1"/>
-          <p:nvPr/>
-        </p:nvSpPr>
-        <p:spPr>
-          <a:xfrm>
-            <a:off x="6415887" y="2670047"/>
-            <a:ext cx="5090007" cy="228600"/>
-          </a:xfrm>
-          <a:prstGeom prst="rect">
-            <a:avLst/>
-          </a:prstGeom>
-          <a:noFill/>
-        </p:spPr>
-        <p:txBody>
-          <a:bodyPr wrap="square"/>
-          <a:lstStyle/>
-          <a:p>
-            <a:pPr algn="l">
-              <a:spcBef>
-                <a:spcPts val="0"/>
-              </a:spcBef>
-              <a:spcAft>
-                <a:spcPts val="0"/>
-              </a:spcAft>
-              <a:defRPr sz="1100" b="0">
-                <a:solidFill>
-                  <a:srgbClr val="1A1A2E"/>
-                </a:solidFill>
-                <a:latin typeface="Arial"/>
-              </a:defRPr>
-            </a:pPr>
-            <a:r>
-              <a:t>• Data berbagi pakai antar instansi</a:t>
-            </a:r>
-          </a:p>
-        </p:txBody>
-      </p:sp>
-      <p:sp>
-        <p:nvSpPr>
-          <p:cNvPr id="26" name="TextBox 25"/>
-          <p:cNvSpPr txBox="1"/>
-          <p:nvPr/>
-        </p:nvSpPr>
-        <p:spPr>
-          <a:xfrm>
-            <a:off x="6415887" y="2907791"/>
-            <a:ext cx="5090007" cy="228600"/>
-          </a:xfrm>
-          <a:prstGeom prst="rect">
-            <a:avLst/>
-          </a:prstGeom>
-          <a:noFill/>
-        </p:spPr>
-        <p:txBody>
-          <a:bodyPr wrap="square"/>
-          <a:lstStyle/>
-          <a:p>
-            <a:pPr algn="l">
-              <a:spcBef>
-                <a:spcPts val="0"/>
-              </a:spcBef>
-              <a:spcAft>
-                <a:spcPts val="0"/>
-              </a:spcAft>
-              <a:defRPr sz="1100" b="0">
-                <a:solidFill>
-                  <a:srgbClr val="1A1A2E"/>
-                </a:solidFill>
-                <a:latin typeface="Arial"/>
-              </a:defRPr>
-            </a:pPr>
-            <a:r>
-              <a:t>• Efektivitas &amp; efisiensi anggaran nasional</a:t>
-            </a:r>
-          </a:p>
-        </p:txBody>
-      </p:sp>
-      <p:sp>
-        <p:nvSpPr>
-          <p:cNvPr id="27" name="Rectangle 26"/>
+              <a:t>• Satu platform terpadu untuk semua layanan</a:t>
+            </a:r>
+          </a:p>
+        </p:txBody>
+      </p:sp>
+      <p:sp>
+        <p:nvSpPr>
+          <p:cNvPr id="25" name="Rectangle 24"/>
           <p:cNvSpPr/>
           <p:nvPr/>
         </p:nvSpPr>
@@ -15437,7 +14716,7 @@
       </p:sp>
       <p:sp>
         <p:nvSpPr>
-          <p:cNvPr id="28" name="TextBox 27"/>
+          <p:cNvPr id="26" name="TextBox 25"/>
           <p:cNvSpPr txBox="1"/>
           <p:nvPr/>
         </p:nvSpPr>
@@ -15466,18 +14745,18 @@
                 <a:solidFill>
                   <a:srgbClr val="64748B"/>
                 </a:solidFill>
-                <a:latin typeface="Arial"/>
+                <a:latin typeface="Calibri"/>
               </a:defRPr>
             </a:pPr>
             <a:r>
-              <a:t>Sumber: Perpres No. 95/2018, Perpres No. 132/2022, &amp; Pedoman SPBE Kemenpan-RB</a:t>
-            </a:r>
-          </a:p>
-        </p:txBody>
-      </p:sp>
-      <p:sp>
-        <p:nvSpPr>
-          <p:cNvPr id="29" name="TextBox 28"/>
+              <a:t>Penerapan Sistem Pemerintahan Berbasis Elektronik (SPBE)</a:t>
+            </a:r>
+          </a:p>
+        </p:txBody>
+      </p:sp>
+      <p:sp>
+        <p:nvSpPr>
+          <p:cNvPr id="27" name="TextBox 26"/>
           <p:cNvSpPr txBox="1"/>
           <p:nvPr/>
         </p:nvSpPr>
@@ -15506,7 +14785,7 @@
                 <a:solidFill>
                   <a:srgbClr val="64748B"/>
                 </a:solidFill>
-                <a:latin typeface="Arial"/>
+                <a:latin typeface="Calibri"/>
               </a:defRPr>
             </a:pPr>
             <a:r>
@@ -15787,15 +15066,15 @@
                 <a:solidFill>
                   <a:srgbClr val="FFFFFF"/>
                 </a:solidFill>
-                <a:latin typeface="Arial"/>
+                <a:latin typeface="Calibri"/>
               </a:defRPr>
             </a:pPr>
             <a:r>
-              <a:t>KERANGKA</a:t>
+              <a:t>BAB 2</a:t>
             </a:r>
             <a:br/>
             <a:r>
-              <a:t>ARSITEKTUR SPBE</a:t>
+              <a:t>ARSITEKTUR &amp; KERANGKA KERJA SPBE</a:t>
             </a:r>
           </a:p>
         </p:txBody>
@@ -15831,11 +15110,11 @@
                 <a:solidFill>
                   <a:srgbClr val="C8962E"/>
                 </a:solidFill>
-                <a:latin typeface="Arial"/>
+                <a:latin typeface="Calibri"/>
               </a:defRPr>
             </a:pPr>
             <a:r>
-              <a:t>Tata Kelola &amp; Manajemen sebagai fondasi yang mengikat</a:t>
+              <a:t>Enam komponen saling menopang untuk satu tujuan: Layanan SPBE prima</a:t>
             </a:r>
           </a:p>
         </p:txBody>
@@ -15871,11 +15150,11 @@
                 <a:solidFill>
                   <a:srgbClr val="64748B"/>
                 </a:solidFill>
-                <a:latin typeface="Arial"/>
+                <a:latin typeface="Calibri"/>
               </a:defRPr>
             </a:pPr>
             <a:r>
-              <a:t>8 Komponen Terintegrasi</a:t>
+              <a:t>Tata Kelola &amp; Manajemen sebagai Pondasi</a:t>
             </a:r>
           </a:p>
         </p:txBody>
@@ -16109,7 +15388,7 @@
                 <a:solidFill>
                   <a:srgbClr val="FFFFFF"/>
                 </a:solidFill>
-                <a:latin typeface="Arial Black"/>
+                <a:latin typeface="Georgia"/>
               </a:defRPr>
             </a:pPr>
             <a:r>
@@ -16149,11 +15428,11 @@
                 <a:solidFill>
                   <a:srgbClr val="64748B"/>
                 </a:solidFill>
-                <a:latin typeface="Arial"/>
+                <a:latin typeface="Calibri"/>
               </a:defRPr>
             </a:pPr>
             <a:r>
-              <a:t>Arsitektur SPBE Instansi</a:t>
+              <a:t>Kerangka Arsitektur SPBE Instansi</a:t>
             </a:r>
           </a:p>
         </p:txBody>
@@ -16167,7 +15446,7 @@
         <p:spPr>
           <a:xfrm>
             <a:off x="548640" y="1051560"/>
-            <a:ext cx="2567863" cy="2537460"/>
+            <a:ext cx="3515258" cy="2537460"/>
           </a:xfrm>
           <a:prstGeom prst="roundRect">
             <a:avLst>
@@ -16322,11 +15601,11 @@
                 <a:solidFill>
                   <a:srgbClr val="FFFFFF"/>
                 </a:solidFill>
-                <a:latin typeface="Arial"/>
+                <a:latin typeface="Calibri"/>
               </a:defRPr>
             </a:pPr>
             <a:r>
-              <a:t>🏛️</a:t>
+              <a:t>📋</a:t>
             </a:r>
           </a:p>
         </p:txBody>
@@ -16340,7 +15619,7 @@
         <p:spPr>
           <a:xfrm>
             <a:off x="685800" y="1691639"/>
-            <a:ext cx="2293543" cy="274320"/>
+            <a:ext cx="3240938" cy="274320"/>
           </a:xfrm>
           <a:prstGeom prst="rect">
             <a:avLst/>
@@ -16362,11 +15641,11 @@
                 <a:solidFill>
                   <a:srgbClr val="2563EB"/>
                 </a:solidFill>
-                <a:latin typeface="Arial"/>
+                <a:latin typeface="Calibri"/>
               </a:defRPr>
             </a:pPr>
             <a:r>
-              <a:t>Tata Kelola</a:t>
+              <a:t>Proses Bisnis</a:t>
             </a:r>
           </a:p>
         </p:txBody>
@@ -16380,7 +15659,7 @@
         <p:spPr>
           <a:xfrm>
             <a:off x="685800" y="2039112"/>
-            <a:ext cx="2293543" cy="274320"/>
+            <a:ext cx="3240938" cy="338328"/>
           </a:xfrm>
           <a:prstGeom prst="rect">
             <a:avLst/>
@@ -16402,11 +15681,11 @@
                 <a:solidFill>
                   <a:srgbClr val="1A1A2E"/>
                 </a:solidFill>
-                <a:latin typeface="Arial"/>
+                <a:latin typeface="Calibri"/>
               </a:defRPr>
             </a:pPr>
             <a:r>
-              <a:t>• Kebijakan &amp; regulasi internal</a:t>
+              <a:t>• Petakan proses bisnis sebelum menyentuh teknologi</a:t>
             </a:r>
           </a:p>
         </p:txBody>
@@ -16419,8 +15698,8 @@
         </p:nvSpPr>
         <p:spPr>
           <a:xfrm>
-            <a:off x="685800" y="2331720"/>
-            <a:ext cx="2293543" cy="274320"/>
+            <a:off x="685800" y="2395728"/>
+            <a:ext cx="3240938" cy="274320"/>
           </a:xfrm>
           <a:prstGeom prst="rect">
             <a:avLst/>
@@ -16442,65 +15721,25 @@
                 <a:solidFill>
                   <a:srgbClr val="1A1A2E"/>
                 </a:solidFill>
-                <a:latin typeface="Arial"/>
+                <a:latin typeface="Calibri"/>
               </a:defRPr>
             </a:pPr>
             <a:r>
-              <a:t>• Perencanaan strategis TIK</a:t>
-            </a:r>
-          </a:p>
-        </p:txBody>
-      </p:sp>
-      <p:sp>
-        <p:nvSpPr>
-          <p:cNvPr id="14" name="TextBox 13"/>
-          <p:cNvSpPr txBox="1"/>
-          <p:nvPr/>
-        </p:nvSpPr>
-        <p:spPr>
-          <a:xfrm>
-            <a:off x="685800" y="2624327"/>
-            <a:ext cx="2293543" cy="274320"/>
-          </a:xfrm>
-          <a:prstGeom prst="rect">
-            <a:avLst/>
-          </a:prstGeom>
-          <a:noFill/>
-        </p:spPr>
-        <p:txBody>
-          <a:bodyPr wrap="square"/>
-          <a:lstStyle/>
-          <a:p>
-            <a:pPr algn="l">
-              <a:spcBef>
-                <a:spcPts val="0"/>
-              </a:spcBef>
-              <a:spcAft>
-                <a:spcPts val="0"/>
-              </a:spcAft>
-              <a:defRPr sz="900" b="0">
-                <a:solidFill>
-                  <a:srgbClr val="1A1A2E"/>
-                </a:solidFill>
-                <a:latin typeface="Arial"/>
-              </a:defRPr>
-            </a:pPr>
-            <a:r>
-              <a:t>• Struktur organisasi &amp; kewenangan</a:t>
-            </a:r>
-          </a:p>
-        </p:txBody>
-      </p:sp>
-      <p:sp>
-        <p:nvSpPr>
-          <p:cNvPr id="15" name="Rounded Rectangle 14"/>
+              <a:t>• Gunakan aplikasi Arsitektur SPBE Nasional</a:t>
+            </a:r>
+          </a:p>
+        </p:txBody>
+      </p:sp>
+      <p:sp>
+        <p:nvSpPr>
+          <p:cNvPr id="14" name="Rounded Rectangle 13"/>
           <p:cNvSpPr/>
           <p:nvPr/>
         </p:nvSpPr>
         <p:spPr>
           <a:xfrm>
-            <a:off x="3390823" y="1051560"/>
-            <a:ext cx="2567863" cy="2537460"/>
+            <a:off x="4338218" y="1051560"/>
+            <a:ext cx="3515258" cy="2537460"/>
           </a:xfrm>
           <a:prstGeom prst="roundRect">
             <a:avLst>
@@ -16540,13 +15779,13 @@
       </p:sp>
       <p:sp>
         <p:nvSpPr>
-          <p:cNvPr id="16" name="Rectangle 15"/>
+          <p:cNvPr id="15" name="Rectangle 14"/>
           <p:cNvSpPr/>
           <p:nvPr/>
         </p:nvSpPr>
         <p:spPr>
           <a:xfrm>
-            <a:off x="3390823" y="1051560"/>
+            <a:off x="4338218" y="1051560"/>
             <a:ext cx="45720" cy="2537460"/>
           </a:xfrm>
           <a:prstGeom prst="rect">
@@ -16583,13 +15822,13 @@
       </p:sp>
       <p:sp>
         <p:nvSpPr>
-          <p:cNvPr id="17" name="Oval 16"/>
+          <p:cNvPr id="16" name="Oval 15"/>
           <p:cNvSpPr/>
           <p:nvPr/>
         </p:nvSpPr>
         <p:spPr>
           <a:xfrm>
-            <a:off x="3527983" y="1188719"/>
+            <a:off x="4475378" y="1188719"/>
             <a:ext cx="384048" cy="384048"/>
           </a:xfrm>
           <a:prstGeom prst="ellipse">
@@ -16626,14 +15865,54 @@
       </p:sp>
       <p:sp>
         <p:nvSpPr>
+          <p:cNvPr id="17" name="TextBox 16"/>
+          <p:cNvSpPr txBox="1"/>
+          <p:nvPr/>
+        </p:nvSpPr>
+        <p:spPr>
+          <a:xfrm>
+            <a:off x="4552188" y="1247241"/>
+            <a:ext cx="230428" cy="230428"/>
+          </a:xfrm>
+          <a:prstGeom prst="rect">
+            <a:avLst/>
+          </a:prstGeom>
+          <a:noFill/>
+        </p:spPr>
+        <p:txBody>
+          <a:bodyPr wrap="square"/>
+          <a:lstStyle/>
+          <a:p>
+            <a:pPr algn="ctr">
+              <a:spcBef>
+                <a:spcPts val="0"/>
+              </a:spcBef>
+              <a:spcAft>
+                <a:spcPts val="0"/>
+              </a:spcAft>
+              <a:defRPr sz="1200" b="0">
+                <a:solidFill>
+                  <a:srgbClr val="FFFFFF"/>
+                </a:solidFill>
+                <a:latin typeface="Calibri"/>
+              </a:defRPr>
+            </a:pPr>
+            <a:r>
+              <a:t>💾</a:t>
+            </a:r>
+          </a:p>
+        </p:txBody>
+      </p:sp>
+      <p:sp>
+        <p:nvSpPr>
           <p:cNvPr id="18" name="TextBox 17"/>
           <p:cNvSpPr txBox="1"/>
           <p:nvPr/>
         </p:nvSpPr>
         <p:spPr>
           <a:xfrm>
-            <a:off x="3604793" y="1247241"/>
-            <a:ext cx="230428" cy="230428"/>
+            <a:off x="4475378" y="1691639"/>
+            <a:ext cx="3240938" cy="274320"/>
           </a:xfrm>
           <a:prstGeom prst="rect">
             <a:avLst/>
@@ -16644,22 +15923,22 @@
           <a:bodyPr wrap="square"/>
           <a:lstStyle/>
           <a:p>
-            <a:pPr algn="ctr">
+            <a:pPr algn="l">
               <a:spcBef>
                 <a:spcPts val="0"/>
               </a:spcBef>
               <a:spcAft>
                 <a:spcPts val="0"/>
               </a:spcAft>
-              <a:defRPr sz="1200" b="0">
-                <a:solidFill>
-                  <a:srgbClr val="FFFFFF"/>
-                </a:solidFill>
-                <a:latin typeface="Arial"/>
+              <a:defRPr sz="1300" b="1">
+                <a:solidFill>
+                  <a:srgbClr val="0B7C72"/>
+                </a:solidFill>
+                <a:latin typeface="Calibri"/>
               </a:defRPr>
             </a:pPr>
             <a:r>
-              <a:t>📋</a:t>
+              <a:t>Data &amp; Informasi</a:t>
             </a:r>
           </a:p>
         </p:txBody>
@@ -16672,8 +15951,8 @@
         </p:nvSpPr>
         <p:spPr>
           <a:xfrm>
-            <a:off x="3527983" y="1691639"/>
-            <a:ext cx="2293543" cy="274320"/>
+            <a:off x="4475378" y="2039112"/>
+            <a:ext cx="3240938" cy="274320"/>
           </a:xfrm>
           <a:prstGeom prst="rect">
             <a:avLst/>
@@ -16691,15 +15970,15 @@
               <a:spcAft>
                 <a:spcPts val="0"/>
               </a:spcAft>
-              <a:defRPr sz="1300" b="1">
-                <a:solidFill>
-                  <a:srgbClr val="0B7C72"/>
-                </a:solidFill>
-                <a:latin typeface="Arial"/>
+              <a:defRPr sz="900" b="0">
+                <a:solidFill>
+                  <a:srgbClr val="1A1A2E"/>
+                </a:solidFill>
+                <a:latin typeface="Calibri"/>
               </a:defRPr>
             </a:pPr>
             <a:r>
-              <a:t>Manajemen</a:t>
+              <a:t>• Prinsip Satu Data Indonesia</a:t>
             </a:r>
           </a:p>
         </p:txBody>
@@ -16712,8 +15991,8 @@
         </p:nvSpPr>
         <p:spPr>
           <a:xfrm>
-            <a:off x="3527983" y="2039112"/>
-            <a:ext cx="2293543" cy="274320"/>
+            <a:off x="4475378" y="2331720"/>
+            <a:ext cx="3240938" cy="274320"/>
           </a:xfrm>
           <a:prstGeom prst="rect">
             <a:avLst/>
@@ -16735,105 +16014,25 @@
                 <a:solidFill>
                   <a:srgbClr val="1A1A2E"/>
                 </a:solidFill>
-                <a:latin typeface="Arial"/>
+                <a:latin typeface="Calibri"/>
               </a:defRPr>
             </a:pPr>
             <a:r>
-              <a:t>• Pengelolaan risiko &amp; keamanan</a:t>
-            </a:r>
-          </a:p>
-        </p:txBody>
-      </p:sp>
-      <p:sp>
-        <p:nvSpPr>
-          <p:cNvPr id="21" name="TextBox 20"/>
-          <p:cNvSpPr txBox="1"/>
-          <p:nvPr/>
-        </p:nvSpPr>
-        <p:spPr>
-          <a:xfrm>
-            <a:off x="3527983" y="2331720"/>
-            <a:ext cx="2293543" cy="274320"/>
-          </a:xfrm>
-          <a:prstGeom prst="rect">
-            <a:avLst/>
-          </a:prstGeom>
-          <a:noFill/>
-        </p:spPr>
-        <p:txBody>
-          <a:bodyPr wrap="square"/>
-          <a:lstStyle/>
-          <a:p>
-            <a:pPr algn="l">
-              <a:spcBef>
-                <a:spcPts val="0"/>
-              </a:spcBef>
-              <a:spcAft>
-                <a:spcPts val="0"/>
-              </a:spcAft>
-              <a:defRPr sz="900" b="0">
-                <a:solidFill>
-                  <a:srgbClr val="1A1A2E"/>
-                </a:solidFill>
-                <a:latin typeface="Arial"/>
-              </a:defRPr>
-            </a:pPr>
-            <a:r>
-              <a:t>• SDM &amp; aset TIK</a:t>
-            </a:r>
-          </a:p>
-        </p:txBody>
-      </p:sp>
-      <p:sp>
-        <p:nvSpPr>
-          <p:cNvPr id="22" name="TextBox 21"/>
-          <p:cNvSpPr txBox="1"/>
-          <p:nvPr/>
-        </p:nvSpPr>
-        <p:spPr>
-          <a:xfrm>
-            <a:off x="3527983" y="2624327"/>
-            <a:ext cx="2293543" cy="274320"/>
-          </a:xfrm>
-          <a:prstGeom prst="rect">
-            <a:avLst/>
-          </a:prstGeom>
-          <a:noFill/>
-        </p:spPr>
-        <p:txBody>
-          <a:bodyPr wrap="square"/>
-          <a:lstStyle/>
-          <a:p>
-            <a:pPr algn="l">
-              <a:spcBef>
-                <a:spcPts val="0"/>
-              </a:spcBef>
-              <a:spcAft>
-                <a:spcPts val="0"/>
-              </a:spcAft>
-              <a:defRPr sz="900" b="0">
-                <a:solidFill>
-                  <a:srgbClr val="1A1A2E"/>
-                </a:solidFill>
-                <a:latin typeface="Arial"/>
-              </a:defRPr>
-            </a:pPr>
-            <a:r>
-              <a:t>• Satu Data Indonesia</a:t>
-            </a:r>
-          </a:p>
-        </p:txBody>
-      </p:sp>
-      <p:sp>
-        <p:nvSpPr>
-          <p:cNvPr id="23" name="Rounded Rectangle 22"/>
+              <a:t>• Standarisasi &amp; berbagi pakai data</a:t>
+            </a:r>
+          </a:p>
+        </p:txBody>
+      </p:sp>
+      <p:sp>
+        <p:nvSpPr>
+          <p:cNvPr id="21" name="Rounded Rectangle 20"/>
           <p:cNvSpPr/>
           <p:nvPr/>
         </p:nvSpPr>
         <p:spPr>
           <a:xfrm>
-            <a:off x="6233007" y="1051560"/>
-            <a:ext cx="2567863" cy="2537460"/>
+            <a:off x="8127796" y="1051560"/>
+            <a:ext cx="3515258" cy="2537460"/>
           </a:xfrm>
           <a:prstGeom prst="roundRect">
             <a:avLst>
@@ -16873,13 +16072,13 @@
       </p:sp>
       <p:sp>
         <p:nvSpPr>
-          <p:cNvPr id="24" name="Rectangle 23"/>
+          <p:cNvPr id="22" name="Rectangle 21"/>
           <p:cNvSpPr/>
           <p:nvPr/>
         </p:nvSpPr>
         <p:spPr>
           <a:xfrm>
-            <a:off x="6233007" y="1051560"/>
+            <a:off x="8127796" y="1051560"/>
             <a:ext cx="45720" cy="2537460"/>
           </a:xfrm>
           <a:prstGeom prst="rect">
@@ -16916,13 +16115,13 @@
       </p:sp>
       <p:sp>
         <p:nvSpPr>
-          <p:cNvPr id="25" name="Oval 24"/>
+          <p:cNvPr id="23" name="Oval 22"/>
           <p:cNvSpPr/>
           <p:nvPr/>
         </p:nvSpPr>
         <p:spPr>
           <a:xfrm>
-            <a:off x="6370167" y="1188719"/>
+            <a:off x="8264956" y="1188719"/>
             <a:ext cx="384048" cy="384048"/>
           </a:xfrm>
           <a:prstGeom prst="ellipse">
@@ -16959,14 +16158,94 @@
       </p:sp>
       <p:sp>
         <p:nvSpPr>
+          <p:cNvPr id="24" name="TextBox 23"/>
+          <p:cNvSpPr txBox="1"/>
+          <p:nvPr/>
+        </p:nvSpPr>
+        <p:spPr>
+          <a:xfrm>
+            <a:off x="8341766" y="1247241"/>
+            <a:ext cx="230428" cy="230428"/>
+          </a:xfrm>
+          <a:prstGeom prst="rect">
+            <a:avLst/>
+          </a:prstGeom>
+          <a:noFill/>
+        </p:spPr>
+        <p:txBody>
+          <a:bodyPr wrap="square"/>
+          <a:lstStyle/>
+          <a:p>
+            <a:pPr algn="ctr">
+              <a:spcBef>
+                <a:spcPts val="0"/>
+              </a:spcBef>
+              <a:spcAft>
+                <a:spcPts val="0"/>
+              </a:spcAft>
+              <a:defRPr sz="1200" b="0">
+                <a:solidFill>
+                  <a:srgbClr val="FFFFFF"/>
+                </a:solidFill>
+                <a:latin typeface="Calibri"/>
+              </a:defRPr>
+            </a:pPr>
+            <a:r>
+              <a:t>📱</a:t>
+            </a:r>
+          </a:p>
+        </p:txBody>
+      </p:sp>
+      <p:sp>
+        <p:nvSpPr>
+          <p:cNvPr id="25" name="TextBox 24"/>
+          <p:cNvSpPr txBox="1"/>
+          <p:nvPr/>
+        </p:nvSpPr>
+        <p:spPr>
+          <a:xfrm>
+            <a:off x="8264956" y="1691639"/>
+            <a:ext cx="3240938" cy="274320"/>
+          </a:xfrm>
+          <a:prstGeom prst="rect">
+            <a:avLst/>
+          </a:prstGeom>
+          <a:noFill/>
+        </p:spPr>
+        <p:txBody>
+          <a:bodyPr wrap="square"/>
+          <a:lstStyle/>
+          <a:p>
+            <a:pPr algn="l">
+              <a:spcBef>
+                <a:spcPts val="0"/>
+              </a:spcBef>
+              <a:spcAft>
+                <a:spcPts val="0"/>
+              </a:spcAft>
+              <a:defRPr sz="1300" b="1">
+                <a:solidFill>
+                  <a:srgbClr val="A0522D"/>
+                </a:solidFill>
+                <a:latin typeface="Calibri"/>
+              </a:defRPr>
+            </a:pPr>
+            <a:r>
+              <a:t>Aplikasi</a:t>
+            </a:r>
+          </a:p>
+        </p:txBody>
+      </p:sp>
+      <p:sp>
+        <p:nvSpPr>
           <p:cNvPr id="26" name="TextBox 25"/>
           <p:cNvSpPr txBox="1"/>
           <p:nvPr/>
         </p:nvSpPr>
         <p:spPr>
           <a:xfrm>
-            <a:off x="6446977" y="1247241"/>
-            <a:ext cx="230428" cy="230428"/>
+            <a:off x="8264956" y="2039112"/>
+            <a:ext cx="3240938" cy="274320"/>
           </a:xfrm>
           <a:prstGeom prst="rect">
             <a:avLst/>
@@ -16977,22 +16256,22 @@
           <a:bodyPr wrap="square"/>
           <a:lstStyle/>
           <a:p>
-            <a:pPr algn="ctr">
+            <a:pPr algn="l">
               <a:spcBef>
                 <a:spcPts val="0"/>
               </a:spcBef>
               <a:spcAft>
                 <a:spcPts val="0"/>
               </a:spcAft>
-              <a:defRPr sz="1200" b="0">
-                <a:solidFill>
-                  <a:srgbClr val="FFFFFF"/>
-                </a:solidFill>
-                <a:latin typeface="Arial"/>
+              <a:defRPr sz="900" b="0">
+                <a:solidFill>
+                  <a:srgbClr val="1A1A2E"/>
+                </a:solidFill>
+                <a:latin typeface="Calibri"/>
               </a:defRPr>
             </a:pPr>
             <a:r>
-              <a:t>⚙️</a:t>
+              <a:t>• Konsolidasi aplikasi sektoral</a:t>
             </a:r>
           </a:p>
         </p:txBody>
@@ -17005,8 +16284,8 @@
         </p:nvSpPr>
         <p:spPr>
           <a:xfrm>
-            <a:off x="6370167" y="1691639"/>
-            <a:ext cx="2293543" cy="274320"/>
+            <a:off x="8264956" y="2331720"/>
+            <a:ext cx="3240938" cy="274320"/>
           </a:xfrm>
           <a:prstGeom prst="rect">
             <a:avLst/>
@@ -17024,149 +16303,29 @@
               <a:spcAft>
                 <a:spcPts val="0"/>
               </a:spcAft>
-              <a:defRPr sz="1300" b="1">
-                <a:solidFill>
-                  <a:srgbClr val="A0522D"/>
-                </a:solidFill>
-                <a:latin typeface="Arial"/>
+              <a:defRPr sz="900" b="0">
+                <a:solidFill>
+                  <a:srgbClr val="1A1A2E"/>
+                </a:solidFill>
+                <a:latin typeface="Calibri"/>
               </a:defRPr>
             </a:pPr>
             <a:r>
-              <a:t>Proses Bisnis</a:t>
-            </a:r>
-          </a:p>
-        </p:txBody>
-      </p:sp>
-      <p:sp>
-        <p:nvSpPr>
-          <p:cNvPr id="28" name="TextBox 27"/>
-          <p:cNvSpPr txBox="1"/>
-          <p:nvPr/>
-        </p:nvSpPr>
-        <p:spPr>
-          <a:xfrm>
-            <a:off x="6370167" y="2039112"/>
-            <a:ext cx="2293543" cy="274320"/>
-          </a:xfrm>
-          <a:prstGeom prst="rect">
-            <a:avLst/>
-          </a:prstGeom>
-          <a:noFill/>
-        </p:spPr>
-        <p:txBody>
-          <a:bodyPr wrap="square"/>
-          <a:lstStyle/>
-          <a:p>
-            <a:pPr algn="l">
-              <a:spcBef>
-                <a:spcPts val="0"/>
-              </a:spcBef>
-              <a:spcAft>
-                <a:spcPts val="0"/>
-              </a:spcAft>
-              <a:defRPr sz="900" b="0">
-                <a:solidFill>
-                  <a:srgbClr val="1A1A2E"/>
-                </a:solidFill>
-                <a:latin typeface="Arial"/>
-              </a:defRPr>
-            </a:pPr>
-            <a:r>
-              <a:t>• Pemetaan proses bisnis instansi</a:t>
-            </a:r>
-          </a:p>
-        </p:txBody>
-      </p:sp>
-      <p:sp>
-        <p:nvSpPr>
-          <p:cNvPr id="29" name="TextBox 28"/>
-          <p:cNvSpPr txBox="1"/>
-          <p:nvPr/>
-        </p:nvSpPr>
-        <p:spPr>
-          <a:xfrm>
-            <a:off x="6370167" y="2331720"/>
-            <a:ext cx="2293543" cy="274320"/>
-          </a:xfrm>
-          <a:prstGeom prst="rect">
-            <a:avLst/>
-          </a:prstGeom>
-          <a:noFill/>
-        </p:spPr>
-        <p:txBody>
-          <a:bodyPr wrap="square"/>
-          <a:lstStyle/>
-          <a:p>
-            <a:pPr algn="l">
-              <a:spcBef>
-                <a:spcPts val="0"/>
-              </a:spcBef>
-              <a:spcAft>
-                <a:spcPts val="0"/>
-              </a:spcAft>
-              <a:defRPr sz="900" b="0">
-                <a:solidFill>
-                  <a:srgbClr val="1A1A2E"/>
-                </a:solidFill>
-                <a:latin typeface="Arial"/>
-              </a:defRPr>
-            </a:pPr>
-            <a:r>
-              <a:t>• Standard operating procedure</a:t>
-            </a:r>
-          </a:p>
-        </p:txBody>
-      </p:sp>
-      <p:sp>
-        <p:nvSpPr>
-          <p:cNvPr id="30" name="TextBox 29"/>
-          <p:cNvSpPr txBox="1"/>
-          <p:nvPr/>
-        </p:nvSpPr>
-        <p:spPr>
-          <a:xfrm>
-            <a:off x="6370167" y="2624327"/>
-            <a:ext cx="2293543" cy="338328"/>
-          </a:xfrm>
-          <a:prstGeom prst="rect">
-            <a:avLst/>
-          </a:prstGeom>
-          <a:noFill/>
-        </p:spPr>
-        <p:txBody>
-          <a:bodyPr wrap="square"/>
-          <a:lstStyle/>
-          <a:p>
-            <a:pPr algn="l">
-              <a:spcBef>
-                <a:spcPts val="0"/>
-              </a:spcBef>
-              <a:spcAft>
-                <a:spcPts val="0"/>
-              </a:spcAft>
-              <a:defRPr sz="900" b="0">
-                <a:solidFill>
-                  <a:srgbClr val="1A1A2E"/>
-                </a:solidFill>
-                <a:latin typeface="Arial"/>
-              </a:defRPr>
-            </a:pPr>
-            <a:r>
-              <a:t>• Prioritas sebelum menyentuh teknologi</a:t>
-            </a:r>
-          </a:p>
-        </p:txBody>
-      </p:sp>
-      <p:sp>
-        <p:nvSpPr>
-          <p:cNvPr id="31" name="Rounded Rectangle 30"/>
+              <a:t>• Super apps terpadu</a:t>
+            </a:r>
+          </a:p>
+        </p:txBody>
+      </p:sp>
+      <p:sp>
+        <p:nvSpPr>
+          <p:cNvPr id="28" name="Rounded Rectangle 27"/>
           <p:cNvSpPr/>
           <p:nvPr/>
         </p:nvSpPr>
         <p:spPr>
           <a:xfrm>
-            <a:off x="9075191" y="1051560"/>
-            <a:ext cx="2567863" cy="2537460"/>
+            <a:off x="548640" y="3863339"/>
+            <a:ext cx="3515258" cy="2537460"/>
           </a:xfrm>
           <a:prstGeom prst="roundRect">
             <a:avLst>
@@ -17206,13 +16365,13 @@
       </p:sp>
       <p:sp>
         <p:nvSpPr>
-          <p:cNvPr id="32" name="Rectangle 31"/>
+          <p:cNvPr id="29" name="Rectangle 28"/>
           <p:cNvSpPr/>
           <p:nvPr/>
         </p:nvSpPr>
         <p:spPr>
           <a:xfrm>
-            <a:off x="9075191" y="1051560"/>
+            <a:off x="548640" y="3863339"/>
             <a:ext cx="45720" cy="2537460"/>
           </a:xfrm>
           <a:prstGeom prst="rect">
@@ -17249,13 +16408,13 @@
       </p:sp>
       <p:sp>
         <p:nvSpPr>
-          <p:cNvPr id="33" name="Oval 32"/>
+          <p:cNvPr id="30" name="Oval 29"/>
           <p:cNvSpPr/>
           <p:nvPr/>
         </p:nvSpPr>
         <p:spPr>
           <a:xfrm>
-            <a:off x="9212351" y="1188719"/>
+            <a:off x="685800" y="4000500"/>
             <a:ext cx="384048" cy="384048"/>
           </a:xfrm>
           <a:prstGeom prst="ellipse">
@@ -17292,14 +16451,134 @@
       </p:sp>
       <p:sp>
         <p:nvSpPr>
+          <p:cNvPr id="31" name="TextBox 30"/>
+          <p:cNvSpPr txBox="1"/>
+          <p:nvPr/>
+        </p:nvSpPr>
+        <p:spPr>
+          <a:xfrm>
+            <a:off x="762609" y="4059021"/>
+            <a:ext cx="230428" cy="230428"/>
+          </a:xfrm>
+          <a:prstGeom prst="rect">
+            <a:avLst/>
+          </a:prstGeom>
+          <a:noFill/>
+        </p:spPr>
+        <p:txBody>
+          <a:bodyPr wrap="square"/>
+          <a:lstStyle/>
+          <a:p>
+            <a:pPr algn="ctr">
+              <a:spcBef>
+                <a:spcPts val="0"/>
+              </a:spcBef>
+              <a:spcAft>
+                <a:spcPts val="0"/>
+              </a:spcAft>
+              <a:defRPr sz="1200" b="0">
+                <a:solidFill>
+                  <a:srgbClr val="FFFFFF"/>
+                </a:solidFill>
+                <a:latin typeface="Calibri"/>
+              </a:defRPr>
+            </a:pPr>
+            <a:r>
+              <a:t>🖧</a:t>
+            </a:r>
+          </a:p>
+        </p:txBody>
+      </p:sp>
+      <p:sp>
+        <p:nvSpPr>
+          <p:cNvPr id="32" name="TextBox 31"/>
+          <p:cNvSpPr txBox="1"/>
+          <p:nvPr/>
+        </p:nvSpPr>
+        <p:spPr>
+          <a:xfrm>
+            <a:off x="685800" y="4503420"/>
+            <a:ext cx="3240938" cy="274320"/>
+          </a:xfrm>
+          <a:prstGeom prst="rect">
+            <a:avLst/>
+          </a:prstGeom>
+          <a:noFill/>
+        </p:spPr>
+        <p:txBody>
+          <a:bodyPr wrap="square"/>
+          <a:lstStyle/>
+          <a:p>
+            <a:pPr algn="l">
+              <a:spcBef>
+                <a:spcPts val="0"/>
+              </a:spcBef>
+              <a:spcAft>
+                <a:spcPts val="0"/>
+              </a:spcAft>
+              <a:defRPr sz="1300" b="1">
+                <a:solidFill>
+                  <a:srgbClr val="1B3A6B"/>
+                </a:solidFill>
+                <a:latin typeface="Calibri"/>
+              </a:defRPr>
+            </a:pPr>
+            <a:r>
+              <a:t>Infrastruktur</a:t>
+            </a:r>
+          </a:p>
+        </p:txBody>
+      </p:sp>
+      <p:sp>
+        <p:nvSpPr>
+          <p:cNvPr id="33" name="TextBox 32"/>
+          <p:cNvSpPr txBox="1"/>
+          <p:nvPr/>
+        </p:nvSpPr>
+        <p:spPr>
+          <a:xfrm>
+            <a:off x="685800" y="4850892"/>
+            <a:ext cx="3240938" cy="274320"/>
+          </a:xfrm>
+          <a:prstGeom prst="rect">
+            <a:avLst/>
+          </a:prstGeom>
+          <a:noFill/>
+        </p:spPr>
+        <p:txBody>
+          <a:bodyPr wrap="square"/>
+          <a:lstStyle/>
+          <a:p>
+            <a:pPr algn="l">
+              <a:spcBef>
+                <a:spcPts val="0"/>
+              </a:spcBef>
+              <a:spcAft>
+                <a:spcPts val="0"/>
+              </a:spcAft>
+              <a:defRPr sz="900" b="0">
+                <a:solidFill>
+                  <a:srgbClr val="1A1A2E"/>
+                </a:solidFill>
+                <a:latin typeface="Calibri"/>
+              </a:defRPr>
+            </a:pPr>
+            <a:r>
+              <a:t>• Pusat Data Nasional (PDN)</a:t>
+            </a:r>
+          </a:p>
+        </p:txBody>
+      </p:sp>
+      <p:sp>
+        <p:nvSpPr>
           <p:cNvPr id="34" name="TextBox 33"/>
           <p:cNvSpPr txBox="1"/>
           <p:nvPr/>
         </p:nvSpPr>
         <p:spPr>
           <a:xfrm>
-            <a:off x="9289161" y="1247241"/>
-            <a:ext cx="230428" cy="230428"/>
+            <a:off x="685800" y="5143500"/>
+            <a:ext cx="3240938" cy="274320"/>
           </a:xfrm>
           <a:prstGeom prst="rect">
             <a:avLst/>
@@ -17310,196 +16589,36 @@
           <a:bodyPr wrap="square"/>
           <a:lstStyle/>
           <a:p>
-            <a:pPr algn="ctr">
+            <a:pPr algn="l">
               <a:spcBef>
                 <a:spcPts val="0"/>
               </a:spcBef>
               <a:spcAft>
                 <a:spcPts val="0"/>
               </a:spcAft>
-              <a:defRPr sz="1200" b="0">
-                <a:solidFill>
-                  <a:srgbClr val="FFFFFF"/>
-                </a:solidFill>
-                <a:latin typeface="Arial"/>
+              <a:defRPr sz="900" b="0">
+                <a:solidFill>
+                  <a:srgbClr val="1A1A2E"/>
+                </a:solidFill>
+                <a:latin typeface="Calibri"/>
               </a:defRPr>
             </a:pPr>
             <a:r>
-              <a:t>📊</a:t>
-            </a:r>
-          </a:p>
-        </p:txBody>
-      </p:sp>
-      <p:sp>
-        <p:nvSpPr>
-          <p:cNvPr id="35" name="TextBox 34"/>
-          <p:cNvSpPr txBox="1"/>
-          <p:nvPr/>
-        </p:nvSpPr>
-        <p:spPr>
-          <a:xfrm>
-            <a:off x="9212351" y="1691639"/>
-            <a:ext cx="2293543" cy="274320"/>
-          </a:xfrm>
-          <a:prstGeom prst="rect">
-            <a:avLst/>
-          </a:prstGeom>
-          <a:noFill/>
-        </p:spPr>
-        <p:txBody>
-          <a:bodyPr wrap="square"/>
-          <a:lstStyle/>
-          <a:p>
-            <a:pPr algn="l">
-              <a:spcBef>
-                <a:spcPts val="0"/>
-              </a:spcBef>
-              <a:spcAft>
-                <a:spcPts val="0"/>
-              </a:spcAft>
-              <a:defRPr sz="1300" b="1">
-                <a:solidFill>
-                  <a:srgbClr val="1B3A6B"/>
-                </a:solidFill>
-                <a:latin typeface="Arial"/>
-              </a:defRPr>
-            </a:pPr>
-            <a:r>
-              <a:t>Data</a:t>
-            </a:r>
-          </a:p>
-        </p:txBody>
-      </p:sp>
-      <p:sp>
-        <p:nvSpPr>
-          <p:cNvPr id="36" name="TextBox 35"/>
-          <p:cNvSpPr txBox="1"/>
-          <p:nvPr/>
-        </p:nvSpPr>
-        <p:spPr>
-          <a:xfrm>
-            <a:off x="9212351" y="2039112"/>
-            <a:ext cx="2293543" cy="274320"/>
-          </a:xfrm>
-          <a:prstGeom prst="rect">
-            <a:avLst/>
-          </a:prstGeom>
-          <a:noFill/>
-        </p:spPr>
-        <p:txBody>
-          <a:bodyPr wrap="square"/>
-          <a:lstStyle/>
-          <a:p>
-            <a:pPr algn="l">
-              <a:spcBef>
-                <a:spcPts val="0"/>
-              </a:spcBef>
-              <a:spcAft>
-                <a:spcPts val="0"/>
-              </a:spcAft>
-              <a:defRPr sz="900" b="0">
-                <a:solidFill>
-                  <a:srgbClr val="1A1A2E"/>
-                </a:solidFill>
-                <a:latin typeface="Arial"/>
-              </a:defRPr>
-            </a:pPr>
-            <a:r>
-              <a:t>• Prinsip Satu Data Indonesia</a:t>
-            </a:r>
-          </a:p>
-        </p:txBody>
-      </p:sp>
-      <p:sp>
-        <p:nvSpPr>
-          <p:cNvPr id="37" name="TextBox 36"/>
-          <p:cNvSpPr txBox="1"/>
-          <p:nvPr/>
-        </p:nvSpPr>
-        <p:spPr>
-          <a:xfrm>
-            <a:off x="9212351" y="2331720"/>
-            <a:ext cx="2293543" cy="274320"/>
-          </a:xfrm>
-          <a:prstGeom prst="rect">
-            <a:avLst/>
-          </a:prstGeom>
-          <a:noFill/>
-        </p:spPr>
-        <p:txBody>
-          <a:bodyPr wrap="square"/>
-          <a:lstStyle/>
-          <a:p>
-            <a:pPr algn="l">
-              <a:spcBef>
-                <a:spcPts val="0"/>
-              </a:spcBef>
-              <a:spcAft>
-                <a:spcPts val="0"/>
-              </a:spcAft>
-              <a:defRPr sz="900" b="0">
-                <a:solidFill>
-                  <a:srgbClr val="1A1A2E"/>
-                </a:solidFill>
-                <a:latin typeface="Arial"/>
-              </a:defRPr>
-            </a:pPr>
-            <a:r>
-              <a:t>• Interoperabilitas data</a:t>
-            </a:r>
-          </a:p>
-        </p:txBody>
-      </p:sp>
-      <p:sp>
-        <p:nvSpPr>
-          <p:cNvPr id="38" name="TextBox 37"/>
-          <p:cNvSpPr txBox="1"/>
-          <p:nvPr/>
-        </p:nvSpPr>
-        <p:spPr>
-          <a:xfrm>
-            <a:off x="9212351" y="2624327"/>
-            <a:ext cx="2293543" cy="274320"/>
-          </a:xfrm>
-          <a:prstGeom prst="rect">
-            <a:avLst/>
-          </a:prstGeom>
-          <a:noFill/>
-        </p:spPr>
-        <p:txBody>
-          <a:bodyPr wrap="square"/>
-          <a:lstStyle/>
-          <a:p>
-            <a:pPr algn="l">
-              <a:spcBef>
-                <a:spcPts val="0"/>
-              </a:spcBef>
-              <a:spcAft>
-                <a:spcPts val="0"/>
-              </a:spcAft>
-              <a:defRPr sz="900" b="0">
-                <a:solidFill>
-                  <a:srgbClr val="1A1A2E"/>
-                </a:solidFill>
-                <a:latin typeface="Arial"/>
-              </a:defRPr>
-            </a:pPr>
-            <a:r>
-              <a:t>• Standar metadata &amp; klasifikasi</a:t>
-            </a:r>
-          </a:p>
-        </p:txBody>
-      </p:sp>
-      <p:sp>
-        <p:nvSpPr>
-          <p:cNvPr id="39" name="Rounded Rectangle 38"/>
+              <a:t>• Cloud tersertifikasi &amp; Hub SPLP</a:t>
+            </a:r>
+          </a:p>
+        </p:txBody>
+      </p:sp>
+      <p:sp>
+        <p:nvSpPr>
+          <p:cNvPr id="35" name="Rounded Rectangle 34"/>
           <p:cNvSpPr/>
           <p:nvPr/>
         </p:nvSpPr>
         <p:spPr>
           <a:xfrm>
-            <a:off x="548640" y="3863339"/>
-            <a:ext cx="2567863" cy="2537460"/>
+            <a:off x="4338218" y="3863339"/>
+            <a:ext cx="3515258" cy="2537460"/>
           </a:xfrm>
           <a:prstGeom prst="roundRect">
             <a:avLst>
@@ -17539,13 +16658,13 @@
       </p:sp>
       <p:sp>
         <p:nvSpPr>
-          <p:cNvPr id="40" name="Rectangle 39"/>
+          <p:cNvPr id="36" name="Rectangle 35"/>
           <p:cNvSpPr/>
           <p:nvPr/>
         </p:nvSpPr>
         <p:spPr>
           <a:xfrm>
-            <a:off x="548640" y="3863339"/>
+            <a:off x="4338218" y="3863339"/>
             <a:ext cx="45720" cy="2537460"/>
           </a:xfrm>
           <a:prstGeom prst="rect">
@@ -17582,13 +16701,13 @@
       </p:sp>
       <p:sp>
         <p:nvSpPr>
-          <p:cNvPr id="41" name="Oval 40"/>
+          <p:cNvPr id="37" name="Oval 36"/>
           <p:cNvSpPr/>
           <p:nvPr/>
         </p:nvSpPr>
         <p:spPr>
           <a:xfrm>
-            <a:off x="685800" y="4000500"/>
+            <a:off x="4475378" y="4000500"/>
             <a:ext cx="384048" cy="384048"/>
           </a:xfrm>
           <a:prstGeom prst="ellipse">
@@ -17625,13 +16744,13 @@
       </p:sp>
       <p:sp>
         <p:nvSpPr>
-          <p:cNvPr id="42" name="TextBox 41"/>
+          <p:cNvPr id="38" name="TextBox 37"/>
           <p:cNvSpPr txBox="1"/>
           <p:nvPr/>
         </p:nvSpPr>
         <p:spPr>
           <a:xfrm>
-            <a:off x="762609" y="4059021"/>
+            <a:off x="4552188" y="4059021"/>
             <a:ext cx="230428" cy="230428"/>
           </a:xfrm>
           <a:prstGeom prst="rect">
@@ -17654,25 +16773,25 @@
                 <a:solidFill>
                   <a:srgbClr val="FFFFFF"/>
                 </a:solidFill>
-                <a:latin typeface="Arial"/>
+                <a:latin typeface="Calibri"/>
               </a:defRPr>
             </a:pPr>
             <a:r>
-              <a:t>💻</a:t>
-            </a:r>
-          </a:p>
-        </p:txBody>
-      </p:sp>
-      <p:sp>
-        <p:nvSpPr>
-          <p:cNvPr id="43" name="TextBox 42"/>
+              <a:t>🔒</a:t>
+            </a:r>
+          </a:p>
+        </p:txBody>
+      </p:sp>
+      <p:sp>
+        <p:nvSpPr>
+          <p:cNvPr id="39" name="TextBox 38"/>
           <p:cNvSpPr txBox="1"/>
           <p:nvPr/>
         </p:nvSpPr>
         <p:spPr>
           <a:xfrm>
-            <a:off x="685800" y="4503420"/>
-            <a:ext cx="2293543" cy="274320"/>
+            <a:off x="4475378" y="4503420"/>
+            <a:ext cx="3240938" cy="274320"/>
           </a:xfrm>
           <a:prstGeom prst="rect">
             <a:avLst/>
@@ -17694,25 +16813,25 @@
                 <a:solidFill>
                   <a:srgbClr val="2563EB"/>
                 </a:solidFill>
-                <a:latin typeface="Arial"/>
+                <a:latin typeface="Calibri"/>
               </a:defRPr>
             </a:pPr>
             <a:r>
-              <a:t>Aplikasi</a:t>
-            </a:r>
-          </a:p>
-        </p:txBody>
-      </p:sp>
-      <p:sp>
-        <p:nvSpPr>
-          <p:cNvPr id="44" name="TextBox 43"/>
+              <a:t>Keamanan</a:t>
+            </a:r>
+          </a:p>
+        </p:txBody>
+      </p:sp>
+      <p:sp>
+        <p:nvSpPr>
+          <p:cNvPr id="40" name="TextBox 39"/>
           <p:cNvSpPr txBox="1"/>
           <p:nvPr/>
         </p:nvSpPr>
         <p:spPr>
           <a:xfrm>
-            <a:off x="685800" y="4850892"/>
-            <a:ext cx="2293543" cy="274320"/>
+            <a:off x="4475378" y="4850892"/>
+            <a:ext cx="3240938" cy="274320"/>
           </a:xfrm>
           <a:prstGeom prst="rect">
             <a:avLst/>
@@ -17734,25 +16853,25 @@
                 <a:solidFill>
                   <a:srgbClr val="1A1A2E"/>
                 </a:solidFill>
-                <a:latin typeface="Arial"/>
+                <a:latin typeface="Calibri"/>
               </a:defRPr>
             </a:pPr>
             <a:r>
-              <a:t>• Konsolidasi platform terpadu</a:t>
-            </a:r>
-          </a:p>
-        </p:txBody>
-      </p:sp>
-      <p:sp>
-        <p:nvSpPr>
-          <p:cNvPr id="45" name="TextBox 44"/>
+              <a:t>• SMKI ISO 27001</a:t>
+            </a:r>
+          </a:p>
+        </p:txBody>
+      </p:sp>
+      <p:sp>
+        <p:nvSpPr>
+          <p:cNvPr id="41" name="TextBox 40"/>
           <p:cNvSpPr txBox="1"/>
           <p:nvPr/>
         </p:nvSpPr>
         <p:spPr>
           <a:xfrm>
-            <a:off x="685800" y="5143500"/>
-            <a:ext cx="2293543" cy="274320"/>
+            <a:off x="4475378" y="5143500"/>
+            <a:ext cx="3240938" cy="274320"/>
           </a:xfrm>
           <a:prstGeom prst="rect">
             <a:avLst/>
@@ -17774,65 +16893,25 @@
                 <a:solidFill>
                   <a:srgbClr val="1A1A2E"/>
                 </a:solidFill>
-                <a:latin typeface="Arial"/>
+                <a:latin typeface="Calibri"/>
               </a:defRPr>
             </a:pPr>
             <a:r>
-              <a:t>• Moratorium aplikasi duplikatif</a:t>
-            </a:r>
-          </a:p>
-        </p:txBody>
-      </p:sp>
-      <p:sp>
-        <p:nvSpPr>
-          <p:cNvPr id="46" name="TextBox 45"/>
-          <p:cNvSpPr txBox="1"/>
-          <p:nvPr/>
-        </p:nvSpPr>
-        <p:spPr>
-          <a:xfrm>
-            <a:off x="685800" y="5436108"/>
-            <a:ext cx="2293543" cy="274320"/>
-          </a:xfrm>
-          <a:prstGeom prst="rect">
-            <a:avLst/>
-          </a:prstGeom>
-          <a:noFill/>
-        </p:spPr>
-        <p:txBody>
-          <a:bodyPr wrap="square"/>
-          <a:lstStyle/>
-          <a:p>
-            <a:pPr algn="l">
-              <a:spcBef>
-                <a:spcPts val="0"/>
-              </a:spcBef>
-              <a:spcAft>
-                <a:spcPts val="0"/>
-              </a:spcAft>
-              <a:defRPr sz="900" b="0">
-                <a:solidFill>
-                  <a:srgbClr val="1A1A2E"/>
-                </a:solidFill>
-                <a:latin typeface="Arial"/>
-              </a:defRPr>
-            </a:pPr>
-            <a:r>
-              <a:t>• Super Apps layanan digital</a:t>
-            </a:r>
-          </a:p>
-        </p:txBody>
-      </p:sp>
-      <p:sp>
-        <p:nvSpPr>
-          <p:cNvPr id="47" name="Rounded Rectangle 46"/>
+              <a:t>• BSSN &amp; CSIRT internal</a:t>
+            </a:r>
+          </a:p>
+        </p:txBody>
+      </p:sp>
+      <p:sp>
+        <p:nvSpPr>
+          <p:cNvPr id="42" name="Rounded Rectangle 41"/>
           <p:cNvSpPr/>
           <p:nvPr/>
         </p:nvSpPr>
         <p:spPr>
           <a:xfrm>
-            <a:off x="3390823" y="3863339"/>
-            <a:ext cx="2567863" cy="2537460"/>
+            <a:off x="8127796" y="3863339"/>
+            <a:ext cx="3515258" cy="2537460"/>
           </a:xfrm>
           <a:prstGeom prst="roundRect">
             <a:avLst>
@@ -17872,13 +16951,13 @@
       </p:sp>
       <p:sp>
         <p:nvSpPr>
-          <p:cNvPr id="48" name="Rectangle 47"/>
+          <p:cNvPr id="43" name="Rectangle 42"/>
           <p:cNvSpPr/>
           <p:nvPr/>
         </p:nvSpPr>
         <p:spPr>
           <a:xfrm>
-            <a:off x="3390823" y="3863339"/>
+            <a:off x="8127796" y="3863339"/>
             <a:ext cx="45720" cy="2537460"/>
           </a:xfrm>
           <a:prstGeom prst="rect">
@@ -17915,13 +16994,13 @@
       </p:sp>
       <p:sp>
         <p:nvSpPr>
-          <p:cNvPr id="49" name="Oval 48"/>
+          <p:cNvPr id="44" name="Oval 43"/>
           <p:cNvSpPr/>
           <p:nvPr/>
         </p:nvSpPr>
         <p:spPr>
           <a:xfrm>
-            <a:off x="3527983" y="4000500"/>
+            <a:off x="8264956" y="4000500"/>
             <a:ext cx="384048" cy="384048"/>
           </a:xfrm>
           <a:prstGeom prst="ellipse">
@@ -17958,13 +17037,13 @@
       </p:sp>
       <p:sp>
         <p:nvSpPr>
-          <p:cNvPr id="50" name="TextBox 49"/>
+          <p:cNvPr id="45" name="TextBox 44"/>
           <p:cNvSpPr txBox="1"/>
           <p:nvPr/>
         </p:nvSpPr>
         <p:spPr>
           <a:xfrm>
-            <a:off x="3604793" y="4059021"/>
+            <a:off x="8341766" y="4059021"/>
             <a:ext cx="230428" cy="230428"/>
           </a:xfrm>
           <a:prstGeom prst="rect">
@@ -17987,25 +17066,25 @@
                 <a:solidFill>
                   <a:srgbClr val="FFFFFF"/>
                 </a:solidFill>
-                <a:latin typeface="Arial"/>
+                <a:latin typeface="Calibri"/>
               </a:defRPr>
             </a:pPr>
             <a:r>
-              <a:t>🌐</a:t>
-            </a:r>
-          </a:p>
-        </p:txBody>
-      </p:sp>
-      <p:sp>
-        <p:nvSpPr>
-          <p:cNvPr id="51" name="TextBox 50"/>
+              <a:t>🤝</a:t>
+            </a:r>
+          </a:p>
+        </p:txBody>
+      </p:sp>
+      <p:sp>
+        <p:nvSpPr>
+          <p:cNvPr id="46" name="TextBox 45"/>
           <p:cNvSpPr txBox="1"/>
           <p:nvPr/>
         </p:nvSpPr>
         <p:spPr>
           <a:xfrm>
-            <a:off x="3527983" y="4503420"/>
-            <a:ext cx="2293543" cy="274320"/>
+            <a:off x="8264956" y="4503420"/>
+            <a:ext cx="3240938" cy="274320"/>
           </a:xfrm>
           <a:prstGeom prst="rect">
             <a:avLst/>
@@ -18027,25 +17106,25 @@
                 <a:solidFill>
                   <a:srgbClr val="0B7C72"/>
                 </a:solidFill>
-                <a:latin typeface="Arial"/>
+                <a:latin typeface="Calibri"/>
               </a:defRPr>
             </a:pPr>
             <a:r>
-              <a:t>Infrastruktur</a:t>
-            </a:r>
-          </a:p>
-        </p:txBody>
-      </p:sp>
-      <p:sp>
-        <p:nvSpPr>
-          <p:cNvPr id="52" name="TextBox 51"/>
+              <a:t>Layanan SPBE</a:t>
+            </a:r>
+          </a:p>
+        </p:txBody>
+      </p:sp>
+      <p:sp>
+        <p:nvSpPr>
+          <p:cNvPr id="47" name="TextBox 46"/>
           <p:cNvSpPr txBox="1"/>
           <p:nvPr/>
         </p:nvSpPr>
         <p:spPr>
           <a:xfrm>
-            <a:off x="3527983" y="4850892"/>
-            <a:ext cx="2293543" cy="274320"/>
+            <a:off x="8264956" y="4850892"/>
+            <a:ext cx="3240938" cy="274320"/>
           </a:xfrm>
           <a:prstGeom prst="rect">
             <a:avLst/>
@@ -18067,25 +17146,25 @@
                 <a:solidFill>
                   <a:srgbClr val="1A1A2E"/>
                 </a:solidFill>
-                <a:latin typeface="Arial"/>
+                <a:latin typeface="Calibri"/>
               </a:defRPr>
             </a:pPr>
             <a:r>
-              <a:t>• Pusat Data Nasional (PDN)</a:t>
-            </a:r>
-          </a:p>
-        </p:txBody>
-      </p:sp>
-      <p:sp>
-        <p:nvSpPr>
-          <p:cNvPr id="53" name="TextBox 52"/>
+              <a:t>• Layanan publik prima</a:t>
+            </a:r>
+          </a:p>
+        </p:txBody>
+      </p:sp>
+      <p:sp>
+        <p:nvSpPr>
+          <p:cNvPr id="48" name="TextBox 47"/>
           <p:cNvSpPr txBox="1"/>
           <p:nvPr/>
         </p:nvSpPr>
         <p:spPr>
           <a:xfrm>
-            <a:off x="3527983" y="5143500"/>
-            <a:ext cx="2293543" cy="274320"/>
+            <a:off x="8264956" y="5143500"/>
+            <a:ext cx="3240938" cy="274320"/>
           </a:xfrm>
           <a:prstGeom prst="rect">
             <a:avLst/>
@@ -18107,676 +17186,10 @@
                 <a:solidFill>
                   <a:srgbClr val="1A1A2E"/>
                 </a:solidFill>
-                <a:latin typeface="Arial"/>
+                <a:latin typeface="Calibri"/>
               </a:defRPr>
             </a:pPr>
             <a:r>
-              <a:t>• Cloud tersertifikasi</a:t>
-            </a:r>
-          </a:p>
-        </p:txBody>
-      </p:sp>
-      <p:sp>
-        <p:nvSpPr>
-          <p:cNvPr id="54" name="TextBox 53"/>
-          <p:cNvSpPr txBox="1"/>
-          <p:nvPr/>
-        </p:nvSpPr>
-        <p:spPr>
-          <a:xfrm>
-            <a:off x="3527983" y="5436108"/>
-            <a:ext cx="2293543" cy="274320"/>
-          </a:xfrm>
-          <a:prstGeom prst="rect">
-            <a:avLst/>
-          </a:prstGeom>
-          <a:noFill/>
-        </p:spPr>
-        <p:txBody>
-          <a:bodyPr wrap="square"/>
-          <a:lstStyle/>
-          <a:p>
-            <a:pPr algn="l">
-              <a:spcBef>
-                <a:spcPts val="0"/>
-              </a:spcBef>
-              <a:spcAft>
-                <a:spcPts val="0"/>
-              </a:spcAft>
-              <a:defRPr sz="900" b="0">
-                <a:solidFill>
-                  <a:srgbClr val="1A1A2E"/>
-                </a:solidFill>
-                <a:latin typeface="Arial"/>
-              </a:defRPr>
-            </a:pPr>
-            <a:r>
-              <a:t>• Hub SPLP — sistem berbagi pakai</a:t>
-            </a:r>
-          </a:p>
-        </p:txBody>
-      </p:sp>
-      <p:sp>
-        <p:nvSpPr>
-          <p:cNvPr id="55" name="Rounded Rectangle 54"/>
-          <p:cNvSpPr/>
-          <p:nvPr/>
-        </p:nvSpPr>
-        <p:spPr>
-          <a:xfrm>
-            <a:off x="6233007" y="3863339"/>
-            <a:ext cx="2567863" cy="2537460"/>
-          </a:xfrm>
-          <a:prstGeom prst="roundRect">
-            <a:avLst>
-              <a:gd name="adj" fmla="val 4000"/>
-            </a:avLst>
-          </a:prstGeom>
-          <a:solidFill>
-            <a:srgbClr val="FFFFFF"/>
-          </a:solidFill>
-          <a:ln w="6350">
-            <a:solidFill>
-              <a:srgbClr val="E8EDF5"/>
-            </a:solidFill>
-          </a:ln>
-        </p:spPr>
-        <p:style>
-          <a:lnRef idx="1">
-            <a:schemeClr val="accent1"/>
-          </a:lnRef>
-          <a:fillRef idx="3">
-            <a:schemeClr val="accent1"/>
-          </a:fillRef>
-          <a:effectRef idx="2">
-            <a:schemeClr val="accent1"/>
-          </a:effectRef>
-          <a:fontRef idx="minor">
-            <a:schemeClr val="lt1"/>
-          </a:fontRef>
-        </p:style>
-        <p:txBody>
-          <a:bodyPr rtlCol="0" anchor="ctr"/>
-          <a:lstStyle/>
-          <a:p>
-            <a:pPr algn="ctr"/>
-          </a:p>
-        </p:txBody>
-      </p:sp>
-      <p:sp>
-        <p:nvSpPr>
-          <p:cNvPr id="56" name="Rectangle 55"/>
-          <p:cNvSpPr/>
-          <p:nvPr/>
-        </p:nvSpPr>
-        <p:spPr>
-          <a:xfrm>
-            <a:off x="6233007" y="3863339"/>
-            <a:ext cx="45720" cy="2537460"/>
-          </a:xfrm>
-          <a:prstGeom prst="rect">
-            <a:avLst/>
-          </a:prstGeom>
-          <a:solidFill>
-            <a:srgbClr val="A0522D"/>
-          </a:solidFill>
-          <a:ln>
-            <a:noFill/>
-          </a:ln>
-        </p:spPr>
-        <p:style>
-          <a:lnRef idx="1">
-            <a:schemeClr val="accent1"/>
-          </a:lnRef>
-          <a:fillRef idx="3">
-            <a:schemeClr val="accent1"/>
-          </a:fillRef>
-          <a:effectRef idx="2">
-            <a:schemeClr val="accent1"/>
-          </a:effectRef>
-          <a:fontRef idx="minor">
-            <a:schemeClr val="lt1"/>
-          </a:fontRef>
-        </p:style>
-        <p:txBody>
-          <a:bodyPr rtlCol="0" anchor="ctr"/>
-          <a:lstStyle/>
-          <a:p>
-            <a:pPr algn="ctr"/>
-          </a:p>
-        </p:txBody>
-      </p:sp>
-      <p:sp>
-        <p:nvSpPr>
-          <p:cNvPr id="57" name="Oval 56"/>
-          <p:cNvSpPr/>
-          <p:nvPr/>
-        </p:nvSpPr>
-        <p:spPr>
-          <a:xfrm>
-            <a:off x="6370167" y="4000500"/>
-            <a:ext cx="384048" cy="384048"/>
-          </a:xfrm>
-          <a:prstGeom prst="ellipse">
-            <a:avLst/>
-          </a:prstGeom>
-          <a:solidFill>
-            <a:srgbClr val="A0522D"/>
-          </a:solidFill>
-          <a:ln>
-            <a:noFill/>
-          </a:ln>
-        </p:spPr>
-        <p:style>
-          <a:lnRef idx="1">
-            <a:schemeClr val="accent1"/>
-          </a:lnRef>
-          <a:fillRef idx="3">
-            <a:schemeClr val="accent1"/>
-          </a:fillRef>
-          <a:effectRef idx="2">
-            <a:schemeClr val="accent1"/>
-          </a:effectRef>
-          <a:fontRef idx="minor">
-            <a:schemeClr val="lt1"/>
-          </a:fontRef>
-        </p:style>
-        <p:txBody>
-          <a:bodyPr rtlCol="0" anchor="ctr"/>
-          <a:lstStyle/>
-          <a:p>
-            <a:pPr algn="ctr"/>
-          </a:p>
-        </p:txBody>
-      </p:sp>
-      <p:sp>
-        <p:nvSpPr>
-          <p:cNvPr id="58" name="TextBox 57"/>
-          <p:cNvSpPr txBox="1"/>
-          <p:nvPr/>
-        </p:nvSpPr>
-        <p:spPr>
-          <a:xfrm>
-            <a:off x="6446977" y="4059021"/>
-            <a:ext cx="230428" cy="230428"/>
-          </a:xfrm>
-          <a:prstGeom prst="rect">
-            <a:avLst/>
-          </a:prstGeom>
-          <a:noFill/>
-        </p:spPr>
-        <p:txBody>
-          <a:bodyPr wrap="square"/>
-          <a:lstStyle/>
-          <a:p>
-            <a:pPr algn="ctr">
-              <a:spcBef>
-                <a:spcPts val="0"/>
-              </a:spcBef>
-              <a:spcAft>
-                <a:spcPts val="0"/>
-              </a:spcAft>
-              <a:defRPr sz="1200" b="0">
-                <a:solidFill>
-                  <a:srgbClr val="FFFFFF"/>
-                </a:solidFill>
-                <a:latin typeface="Arial"/>
-              </a:defRPr>
-            </a:pPr>
-            <a:r>
-              <a:t>🔒</a:t>
-            </a:r>
-          </a:p>
-        </p:txBody>
-      </p:sp>
-      <p:sp>
-        <p:nvSpPr>
-          <p:cNvPr id="59" name="TextBox 58"/>
-          <p:cNvSpPr txBox="1"/>
-          <p:nvPr/>
-        </p:nvSpPr>
-        <p:spPr>
-          <a:xfrm>
-            <a:off x="6370167" y="4503420"/>
-            <a:ext cx="2293543" cy="274320"/>
-          </a:xfrm>
-          <a:prstGeom prst="rect">
-            <a:avLst/>
-          </a:prstGeom>
-          <a:noFill/>
-        </p:spPr>
-        <p:txBody>
-          <a:bodyPr wrap="square"/>
-          <a:lstStyle/>
-          <a:p>
-            <a:pPr algn="l">
-              <a:spcBef>
-                <a:spcPts val="0"/>
-              </a:spcBef>
-              <a:spcAft>
-                <a:spcPts val="0"/>
-              </a:spcAft>
-              <a:defRPr sz="1300" b="1">
-                <a:solidFill>
-                  <a:srgbClr val="A0522D"/>
-                </a:solidFill>
-                <a:latin typeface="Arial"/>
-              </a:defRPr>
-            </a:pPr>
-            <a:r>
-              <a:t>Keamanan</a:t>
-            </a:r>
-          </a:p>
-        </p:txBody>
-      </p:sp>
-      <p:sp>
-        <p:nvSpPr>
-          <p:cNvPr id="60" name="TextBox 59"/>
-          <p:cNvSpPr txBox="1"/>
-          <p:nvPr/>
-        </p:nvSpPr>
-        <p:spPr>
-          <a:xfrm>
-            <a:off x="6370167" y="4850892"/>
-            <a:ext cx="2293543" cy="274320"/>
-          </a:xfrm>
-          <a:prstGeom prst="rect">
-            <a:avLst/>
-          </a:prstGeom>
-          <a:noFill/>
-        </p:spPr>
-        <p:txBody>
-          <a:bodyPr wrap="square"/>
-          <a:lstStyle/>
-          <a:p>
-            <a:pPr algn="l">
-              <a:spcBef>
-                <a:spcPts val="0"/>
-              </a:spcBef>
-              <a:spcAft>
-                <a:spcPts val="0"/>
-              </a:spcAft>
-              <a:defRPr sz="900" b="0">
-                <a:solidFill>
-                  <a:srgbClr val="1A1A2E"/>
-                </a:solidFill>
-                <a:latin typeface="Arial"/>
-              </a:defRPr>
-            </a:pPr>
-            <a:r>
-              <a:t>• SMKI berbasis ISO 27001</a:t>
-            </a:r>
-          </a:p>
-        </p:txBody>
-      </p:sp>
-      <p:sp>
-        <p:nvSpPr>
-          <p:cNvPr id="61" name="TextBox 60"/>
-          <p:cNvSpPr txBox="1"/>
-          <p:nvPr/>
-        </p:nvSpPr>
-        <p:spPr>
-          <a:xfrm>
-            <a:off x="6370167" y="5143500"/>
-            <a:ext cx="2293543" cy="274320"/>
-          </a:xfrm>
-          <a:prstGeom prst="rect">
-            <a:avLst/>
-          </a:prstGeom>
-          <a:noFill/>
-        </p:spPr>
-        <p:txBody>
-          <a:bodyPr wrap="square"/>
-          <a:lstStyle/>
-          <a:p>
-            <a:pPr algn="l">
-              <a:spcBef>
-                <a:spcPts val="0"/>
-              </a:spcBef>
-              <a:spcAft>
-                <a:spcPts val="0"/>
-              </a:spcAft>
-              <a:defRPr sz="900" b="0">
-                <a:solidFill>
-                  <a:srgbClr val="1A1A2E"/>
-                </a:solidFill>
-                <a:latin typeface="Arial"/>
-              </a:defRPr>
-            </a:pPr>
-            <a:r>
-              <a:t>• BSSN — vulnerability assessment</a:t>
-            </a:r>
-          </a:p>
-        </p:txBody>
-      </p:sp>
-      <p:sp>
-        <p:nvSpPr>
-          <p:cNvPr id="62" name="TextBox 61"/>
-          <p:cNvSpPr txBox="1"/>
-          <p:nvPr/>
-        </p:nvSpPr>
-        <p:spPr>
-          <a:xfrm>
-            <a:off x="6370167" y="5436108"/>
-            <a:ext cx="2293543" cy="274320"/>
-          </a:xfrm>
-          <a:prstGeom prst="rect">
-            <a:avLst/>
-          </a:prstGeom>
-          <a:noFill/>
-        </p:spPr>
-        <p:txBody>
-          <a:bodyPr wrap="square"/>
-          <a:lstStyle/>
-          <a:p>
-            <a:pPr algn="l">
-              <a:spcBef>
-                <a:spcPts val="0"/>
-              </a:spcBef>
-              <a:spcAft>
-                <a:spcPts val="0"/>
-              </a:spcAft>
-              <a:defRPr sz="900" b="0">
-                <a:solidFill>
-                  <a:srgbClr val="1A1A2E"/>
-                </a:solidFill>
-                <a:latin typeface="Arial"/>
-              </a:defRPr>
-            </a:pPr>
-            <a:r>
-              <a:t>• CSIRT internal</a:t>
-            </a:r>
-          </a:p>
-        </p:txBody>
-      </p:sp>
-      <p:sp>
-        <p:nvSpPr>
-          <p:cNvPr id="63" name="Rounded Rectangle 62"/>
-          <p:cNvSpPr/>
-          <p:nvPr/>
-        </p:nvSpPr>
-        <p:spPr>
-          <a:xfrm>
-            <a:off x="9075191" y="3863339"/>
-            <a:ext cx="2567863" cy="2537460"/>
-          </a:xfrm>
-          <a:prstGeom prst="roundRect">
-            <a:avLst>
-              <a:gd name="adj" fmla="val 4000"/>
-            </a:avLst>
-          </a:prstGeom>
-          <a:solidFill>
-            <a:srgbClr val="FFFFFF"/>
-          </a:solidFill>
-          <a:ln w="6350">
-            <a:solidFill>
-              <a:srgbClr val="E8EDF5"/>
-            </a:solidFill>
-          </a:ln>
-        </p:spPr>
-        <p:style>
-          <a:lnRef idx="1">
-            <a:schemeClr val="accent1"/>
-          </a:lnRef>
-          <a:fillRef idx="3">
-            <a:schemeClr val="accent1"/>
-          </a:fillRef>
-          <a:effectRef idx="2">
-            <a:schemeClr val="accent1"/>
-          </a:effectRef>
-          <a:fontRef idx="minor">
-            <a:schemeClr val="lt1"/>
-          </a:fontRef>
-        </p:style>
-        <p:txBody>
-          <a:bodyPr rtlCol="0" anchor="ctr"/>
-          <a:lstStyle/>
-          <a:p>
-            <a:pPr algn="ctr"/>
-          </a:p>
-        </p:txBody>
-      </p:sp>
-      <p:sp>
-        <p:nvSpPr>
-          <p:cNvPr id="64" name="Rectangle 63"/>
-          <p:cNvSpPr/>
-          <p:nvPr/>
-        </p:nvSpPr>
-        <p:spPr>
-          <a:xfrm>
-            <a:off x="9075191" y="3863339"/>
-            <a:ext cx="45720" cy="2537460"/>
-          </a:xfrm>
-          <a:prstGeom prst="rect">
-            <a:avLst/>
-          </a:prstGeom>
-          <a:solidFill>
-            <a:srgbClr val="1B3A6B"/>
-          </a:solidFill>
-          <a:ln>
-            <a:noFill/>
-          </a:ln>
-        </p:spPr>
-        <p:style>
-          <a:lnRef idx="1">
-            <a:schemeClr val="accent1"/>
-          </a:lnRef>
-          <a:fillRef idx="3">
-            <a:schemeClr val="accent1"/>
-          </a:fillRef>
-          <a:effectRef idx="2">
-            <a:schemeClr val="accent1"/>
-          </a:effectRef>
-          <a:fontRef idx="minor">
-            <a:schemeClr val="lt1"/>
-          </a:fontRef>
-        </p:style>
-        <p:txBody>
-          <a:bodyPr rtlCol="0" anchor="ctr"/>
-          <a:lstStyle/>
-          <a:p>
-            <a:pPr algn="ctr"/>
-          </a:p>
-        </p:txBody>
-      </p:sp>
-      <p:sp>
-        <p:nvSpPr>
-          <p:cNvPr id="65" name="Oval 64"/>
-          <p:cNvSpPr/>
-          <p:nvPr/>
-        </p:nvSpPr>
-        <p:spPr>
-          <a:xfrm>
-            <a:off x="9212351" y="4000500"/>
-            <a:ext cx="384048" cy="384048"/>
-          </a:xfrm>
-          <a:prstGeom prst="ellipse">
-            <a:avLst/>
-          </a:prstGeom>
-          <a:solidFill>
-            <a:srgbClr val="1B3A6B"/>
-          </a:solidFill>
-          <a:ln>
-            <a:noFill/>
-          </a:ln>
-        </p:spPr>
-        <p:style>
-          <a:lnRef idx="1">
-            <a:schemeClr val="accent1"/>
-          </a:lnRef>
-          <a:fillRef idx="3">
-            <a:schemeClr val="accent1"/>
-          </a:fillRef>
-          <a:effectRef idx="2">
-            <a:schemeClr val="accent1"/>
-          </a:effectRef>
-          <a:fontRef idx="minor">
-            <a:schemeClr val="lt1"/>
-          </a:fontRef>
-        </p:style>
-        <p:txBody>
-          <a:bodyPr rtlCol="0" anchor="ctr"/>
-          <a:lstStyle/>
-          <a:p>
-            <a:pPr algn="ctr"/>
-          </a:p>
-        </p:txBody>
-      </p:sp>
-      <p:sp>
-        <p:nvSpPr>
-          <p:cNvPr id="66" name="TextBox 65"/>
-          <p:cNvSpPr txBox="1"/>
-          <p:nvPr/>
-        </p:nvSpPr>
-        <p:spPr>
-          <a:xfrm>
-            <a:off x="9289161" y="4059021"/>
-            <a:ext cx="230428" cy="230428"/>
-          </a:xfrm>
-          <a:prstGeom prst="rect">
-            <a:avLst/>
-          </a:prstGeom>
-          <a:noFill/>
-        </p:spPr>
-        <p:txBody>
-          <a:bodyPr wrap="square"/>
-          <a:lstStyle/>
-          <a:p>
-            <a:pPr algn="ctr">
-              <a:spcBef>
-                <a:spcPts val="0"/>
-              </a:spcBef>
-              <a:spcAft>
-                <a:spcPts val="0"/>
-              </a:spcAft>
-              <a:defRPr sz="1200" b="0">
-                <a:solidFill>
-                  <a:srgbClr val="FFFFFF"/>
-                </a:solidFill>
-                <a:latin typeface="Arial"/>
-              </a:defRPr>
-            </a:pPr>
-            <a:r>
-              <a:t>🤝</a:t>
-            </a:r>
-          </a:p>
-        </p:txBody>
-      </p:sp>
-      <p:sp>
-        <p:nvSpPr>
-          <p:cNvPr id="67" name="TextBox 66"/>
-          <p:cNvSpPr txBox="1"/>
-          <p:nvPr/>
-        </p:nvSpPr>
-        <p:spPr>
-          <a:xfrm>
-            <a:off x="9212351" y="4503420"/>
-            <a:ext cx="2293543" cy="274320"/>
-          </a:xfrm>
-          <a:prstGeom prst="rect">
-            <a:avLst/>
-          </a:prstGeom>
-          <a:noFill/>
-        </p:spPr>
-        <p:txBody>
-          <a:bodyPr wrap="square"/>
-          <a:lstStyle/>
-          <a:p>
-            <a:pPr algn="l">
-              <a:spcBef>
-                <a:spcPts val="0"/>
-              </a:spcBef>
-              <a:spcAft>
-                <a:spcPts val="0"/>
-              </a:spcAft>
-              <a:defRPr sz="1300" b="1">
-                <a:solidFill>
-                  <a:srgbClr val="1B3A6B"/>
-                </a:solidFill>
-                <a:latin typeface="Arial"/>
-              </a:defRPr>
-            </a:pPr>
-            <a:r>
-              <a:t>Layanan SPBE</a:t>
-            </a:r>
-          </a:p>
-        </p:txBody>
-      </p:sp>
-      <p:sp>
-        <p:nvSpPr>
-          <p:cNvPr id="68" name="TextBox 67"/>
-          <p:cNvSpPr txBox="1"/>
-          <p:nvPr/>
-        </p:nvSpPr>
-        <p:spPr>
-          <a:xfrm>
-            <a:off x="9212351" y="4850892"/>
-            <a:ext cx="2293543" cy="274320"/>
-          </a:xfrm>
-          <a:prstGeom prst="rect">
-            <a:avLst/>
-          </a:prstGeom>
-          <a:noFill/>
-        </p:spPr>
-        <p:txBody>
-          <a:bodyPr wrap="square"/>
-          <a:lstStyle/>
-          <a:p>
-            <a:pPr algn="l">
-              <a:spcBef>
-                <a:spcPts val="0"/>
-              </a:spcBef>
-              <a:spcAft>
-                <a:spcPts val="0"/>
-              </a:spcAft>
-              <a:defRPr sz="900" b="0">
-                <a:solidFill>
-                  <a:srgbClr val="1A1A2E"/>
-                </a:solidFill>
-                <a:latin typeface="Arial"/>
-              </a:defRPr>
-            </a:pPr>
-            <a:r>
-              <a:t>• Layanan publik prima</a:t>
-            </a:r>
-          </a:p>
-        </p:txBody>
-      </p:sp>
-      <p:sp>
-        <p:nvSpPr>
-          <p:cNvPr id="69" name="TextBox 68"/>
-          <p:cNvSpPr txBox="1"/>
-          <p:nvPr/>
-        </p:nvSpPr>
-        <p:spPr>
-          <a:xfrm>
-            <a:off x="9212351" y="5143500"/>
-            <a:ext cx="2293543" cy="274320"/>
-          </a:xfrm>
-          <a:prstGeom prst="rect">
-            <a:avLst/>
-          </a:prstGeom>
-          <a:noFill/>
-        </p:spPr>
-        <p:txBody>
-          <a:bodyPr wrap="square"/>
-          <a:lstStyle/>
-          <a:p>
-            <a:pPr algn="l">
-              <a:spcBef>
-                <a:spcPts val="0"/>
-              </a:spcBef>
-              <a:spcAft>
-                <a:spcPts val="0"/>
-              </a:spcAft>
-              <a:defRPr sz="900" b="0">
-                <a:solidFill>
-                  <a:srgbClr val="1A1A2E"/>
-                </a:solidFill>
-                <a:latin typeface="Arial"/>
-              </a:defRPr>
-            </a:pPr>
-            <a:r>
               <a:t>• Layanan administrasi internal</a:t>
             </a:r>
           </a:p>
@@ -18784,47 +17197,7 @@
       </p:sp>
       <p:sp>
         <p:nvSpPr>
-          <p:cNvPr id="70" name="TextBox 69"/>
-          <p:cNvSpPr txBox="1"/>
-          <p:nvPr/>
-        </p:nvSpPr>
-        <p:spPr>
-          <a:xfrm>
-            <a:off x="9212351" y="5436108"/>
-            <a:ext cx="2293543" cy="274320"/>
-          </a:xfrm>
-          <a:prstGeom prst="rect">
-            <a:avLst/>
-          </a:prstGeom>
-          <a:noFill/>
-        </p:spPr>
-        <p:txBody>
-          <a:bodyPr wrap="square"/>
-          <a:lstStyle/>
-          <a:p>
-            <a:pPr algn="l">
-              <a:spcBef>
-                <a:spcPts val="0"/>
-              </a:spcBef>
-              <a:spcAft>
-                <a:spcPts val="0"/>
-              </a:spcAft>
-              <a:defRPr sz="900" b="0">
-                <a:solidFill>
-                  <a:srgbClr val="1A1A2E"/>
-                </a:solidFill>
-                <a:latin typeface="Arial"/>
-              </a:defRPr>
-            </a:pPr>
-            <a:r>
-              <a:t>• Terintegrasi penuh — satu pintu</a:t>
-            </a:r>
-          </a:p>
-        </p:txBody>
-      </p:sp>
-      <p:sp>
-        <p:nvSpPr>
-          <p:cNvPr id="71" name="Rectangle 70"/>
+          <p:cNvPr id="49" name="Rectangle 48"/>
           <p:cNvSpPr/>
           <p:nvPr/>
         </p:nvSpPr>
@@ -18867,7 +17240,7 @@
       </p:sp>
       <p:sp>
         <p:nvSpPr>
-          <p:cNvPr id="72" name="TextBox 71"/>
+          <p:cNvPr id="50" name="TextBox 49"/>
           <p:cNvSpPr txBox="1"/>
           <p:nvPr/>
         </p:nvSpPr>
@@ -18896,18 +17269,18 @@
                 <a:solidFill>
                   <a:srgbClr val="64748B"/>
                 </a:solidFill>
-                <a:latin typeface="Arial"/>
+                <a:latin typeface="Calibri"/>
               </a:defRPr>
             </a:pPr>
             <a:r>
-              <a:t>Sumber: Perpres No. 95/2018, Perpres No. 132/2022, &amp; Pedoman SPBE Kemenpan-RB</a:t>
-            </a:r>
-          </a:p>
-        </p:txBody>
-      </p:sp>
-      <p:sp>
-        <p:nvSpPr>
-          <p:cNvPr id="73" name="TextBox 72"/>
+              <a:t>Penerapan Sistem Pemerintahan Berbasis Elektronik (SPBE)</a:t>
+            </a:r>
+          </a:p>
+        </p:txBody>
+      </p:sp>
+      <p:sp>
+        <p:nvSpPr>
+          <p:cNvPr id="51" name="TextBox 50"/>
           <p:cNvSpPr txBox="1"/>
           <p:nvPr/>
         </p:nvSpPr>
@@ -18936,7 +17309,7 @@
                 <a:solidFill>
                   <a:srgbClr val="64748B"/>
                 </a:solidFill>
-                <a:latin typeface="Arial"/>
+                <a:latin typeface="Calibri"/>
               </a:defRPr>
             </a:pPr>
             <a:r>
@@ -19217,15 +17590,15 @@
                 <a:solidFill>
                   <a:srgbClr val="FFFFFF"/>
                 </a:solidFill>
-                <a:latin typeface="Arial"/>
+                <a:latin typeface="Calibri"/>
               </a:defRPr>
             </a:pPr>
             <a:r>
-              <a:t>4 DOMAIN</a:t>
+              <a:t>BAB 3</a:t>
             </a:r>
             <a:br/>
             <a:r>
-              <a:t>EVALUASI SPBE</a:t>
+              <a:t>4 DOMAIN UTAMA EVALUASI SPBE</a:t>
             </a:r>
           </a:p>
         </p:txBody>
@@ -19261,11 +17634,11 @@
                 <a:solidFill>
                   <a:srgbClr val="C8962E"/>
                 </a:solidFill>
-                <a:latin typeface="Arial"/>
+                <a:latin typeface="Calibri"/>
               </a:defRPr>
             </a:pPr>
             <a:r>
-              <a:t>Kebijakan → Tata Kelola → Manajemen → Layanan</a:t>
+              <a:t>Kebijakan → Tata Kelola → Manajemen → Layanan — Indikator Tingkat Kematangan</a:t>
             </a:r>
           </a:p>
         </p:txBody>
@@ -19301,11 +17674,11 @@
                 <a:solidFill>
                   <a:srgbClr val="64748B"/>
                 </a:solidFill>
-                <a:latin typeface="Arial"/>
+                <a:latin typeface="Calibri"/>
               </a:defRPr>
             </a:pPr>
             <a:r>
-              <a:t>Indikator Tingkat Kematangan (Maturity Index)</a:t>
+              <a:t>Maturity Index SPBE — Kemenpan-RB</a:t>
             </a:r>
           </a:p>
         </p:txBody>
@@ -19539,11 +17912,11 @@
                 <a:solidFill>
                   <a:srgbClr val="FFFFFF"/>
                 </a:solidFill>
-                <a:latin typeface="Arial Black"/>
+                <a:latin typeface="Georgia"/>
               </a:defRPr>
             </a:pPr>
             <a:r>
-              <a:t>Empat Domain Evaluasi Menentukan Tingkat Kematangan SPBE Instansi</a:t>
+              <a:t>Empat Domain Evaluasi Menentukan Tingkat Kematangan SPBE Instansi Anda</a:t>
             </a:r>
           </a:p>
         </p:txBody>
@@ -19579,11 +17952,11 @@
                 <a:solidFill>
                   <a:srgbClr val="64748B"/>
                 </a:solidFill>
-                <a:latin typeface="Arial"/>
+                <a:latin typeface="Calibri"/>
               </a:defRPr>
             </a:pPr>
             <a:r>
-              <a:t>Domain Evaluasi SPBE</a:t>
+              <a:t>Domain Evaluasi SPBE — Sebelum menyusun strategi, instansi dinilai berdasarkan 4 domain ini</a:t>
             </a:r>
           </a:p>
         </p:txBody>
@@ -19622,7 +17995,7 @@
                           <a:solidFill>
                             <a:srgbClr val="FFFFFF"/>
                           </a:solidFill>
-                          <a:latin typeface="Arial"/>
+                          <a:latin typeface="Calibri"/>
                         </a:defRPr>
                       </a:pPr>
                       <a:r>
@@ -19646,7 +18019,7 @@
                           <a:solidFill>
                             <a:srgbClr val="FFFFFF"/>
                           </a:solidFill>
-                          <a:latin typeface="Arial"/>
+                          <a:latin typeface="Calibri"/>
                         </a:defRPr>
                       </a:pPr>
                       <a:r>
@@ -19670,7 +18043,7 @@
                           <a:solidFill>
                             <a:srgbClr val="FFFFFF"/>
                           </a:solidFill>
-                          <a:latin typeface="Arial"/>
+                          <a:latin typeface="Calibri"/>
                         </a:defRPr>
                       </a:pPr>
                       <a:r>
@@ -19696,7 +18069,7 @@
                           <a:solidFill>
                             <a:srgbClr val="1A1A2E"/>
                           </a:solidFill>
-                          <a:latin typeface="Arial"/>
+                          <a:latin typeface="Calibri"/>
                         </a:defRPr>
                       </a:pPr>
                       <a:r>
@@ -19720,11 +18093,11 @@
                           <a:solidFill>
                             <a:srgbClr val="1A1A2E"/>
                           </a:solidFill>
-                          <a:latin typeface="Arial"/>
+                          <a:latin typeface="Calibri"/>
                         </a:defRPr>
                       </a:pPr>
                       <a:r>
-                        <a:t>Regulasi, pedoman, dan SK formal internal instansi</a:t>
+                        <a:t>Regulasi, pedoman, SK formal internal</a:t>
                       </a:r>
                     </a:p>
                   </a:txBody>
@@ -19744,7 +18117,7 @@
                           <a:solidFill>
                             <a:srgbClr val="1A1A2E"/>
                           </a:solidFill>
-                          <a:latin typeface="Arial"/>
+                          <a:latin typeface="Calibri"/>
                         </a:defRPr>
                       </a:pPr>
                       <a:r>
@@ -19770,7 +18143,7 @@
                           <a:solidFill>
                             <a:srgbClr val="1A1A2E"/>
                           </a:solidFill>
-                          <a:latin typeface="Arial"/>
+                          <a:latin typeface="Calibri"/>
                         </a:defRPr>
                       </a:pPr>
                       <a:r>
@@ -19794,7 +18167,7 @@
                           <a:solidFill>
                             <a:srgbClr val="1A1A2E"/>
                           </a:solidFill>
-                          <a:latin typeface="Arial"/>
+                          <a:latin typeface="Calibri"/>
                         </a:defRPr>
                       </a:pPr>
                       <a:r>
@@ -19818,11 +18191,11 @@
                           <a:solidFill>
                             <a:srgbClr val="1A1A2E"/>
                           </a:solidFill>
-                          <a:latin typeface="Arial"/>
+                          <a:latin typeface="Calibri"/>
                         </a:defRPr>
                       </a:pPr>
                       <a:r>
-                        <a:t>Dokumen Arsitektur SPBE &amp; Peta Rencana 5 tahun</a:t>
+                        <a:t>Dokumen Arsitektur SPBE &amp; Peta Rencana 5 Tahun</a:t>
                       </a:r>
                     </a:p>
                   </a:txBody>
@@ -19844,7 +18217,7 @@
                           <a:solidFill>
                             <a:srgbClr val="1A1A2E"/>
                           </a:solidFill>
-                          <a:latin typeface="Arial"/>
+                          <a:latin typeface="Calibri"/>
                         </a:defRPr>
                       </a:pPr>
                       <a:r>
@@ -19868,7 +18241,7 @@
                           <a:solidFill>
                             <a:srgbClr val="1A1A2E"/>
                           </a:solidFill>
-                          <a:latin typeface="Arial"/>
+                          <a:latin typeface="Calibri"/>
                         </a:defRPr>
                       </a:pPr>
                       <a:r>
@@ -19892,7 +18265,7 @@
                           <a:solidFill>
                             <a:srgbClr val="1A1A2E"/>
                           </a:solidFill>
-                          <a:latin typeface="Arial"/>
+                          <a:latin typeface="Calibri"/>
                         </a:defRPr>
                       </a:pPr>
                       <a:r>
@@ -19918,7 +18291,7 @@
                           <a:solidFill>
                             <a:srgbClr val="1A1A2E"/>
                           </a:solidFill>
-                          <a:latin typeface="Arial"/>
+                          <a:latin typeface="Calibri"/>
                         </a:defRPr>
                       </a:pPr>
                       <a:r>
@@ -19942,11 +18315,11 @@
                           <a:solidFill>
                             <a:srgbClr val="1A1A2E"/>
                           </a:solidFill>
-                          <a:latin typeface="Arial"/>
+                          <a:latin typeface="Calibri"/>
                         </a:defRPr>
                       </a:pPr>
                       <a:r>
-                        <a:t>Kualitas fungsi aplikasi pelayanan publik &amp; administrasi</a:t>
+                        <a:t>Kualitas fungsi aplikasi publik &amp; administrasi</a:t>
                       </a:r>
                     </a:p>
                   </a:txBody>
@@ -19966,11 +18339,11 @@
                           <a:solidFill>
                             <a:srgbClr val="1A1A2E"/>
                           </a:solidFill>
-                          <a:latin typeface="Arial"/>
+                          <a:latin typeface="Calibri"/>
                         </a:defRPr>
                       </a:pPr>
                       <a:r>
-                        <a:t>Aplikasi saling terintegrasi — bukan platform terpisah</a:t>
+                        <a:t>Aplikasi saling terintegrasi — bukan platform terpisah-pisah</a:t>
                       </a:r>
                     </a:p>
                   </a:txBody>
@@ -20059,11 +18432,11 @@
                 <a:solidFill>
                   <a:srgbClr val="64748B"/>
                 </a:solidFill>
-                <a:latin typeface="Arial"/>
+                <a:latin typeface="Calibri"/>
               </a:defRPr>
             </a:pPr>
             <a:r>
-              <a:t>Sumber: Perpres No. 95/2018, Perpres No. 132/2022, &amp; Pedoman SPBE Kemenpan-RB</a:t>
+              <a:t>Penerapan Sistem Pemerintahan Berbasis Elektronik (SPBE)</a:t>
             </a:r>
           </a:p>
         </p:txBody>
@@ -20099,7 +18472,7 @@
                 <a:solidFill>
                   <a:srgbClr val="64748B"/>
                 </a:solidFill>
-                <a:latin typeface="Arial"/>
+                <a:latin typeface="Calibri"/>
               </a:defRPr>
             </a:pPr>
             <a:r>
